--- a/PowerBI_Tutorial.pptx
+++ b/PowerBI_Tutorial.pptx
@@ -5,18 +5,23 @@
     <p:sldMasterId id="2147483696" r:id="rId4"/>
   </p:sldMasterIdLst>
   <p:notesMasterIdLst>
-    <p:notesMasterId r:id="rId11"/>
+    <p:notesMasterId r:id="rId16"/>
   </p:notesMasterIdLst>
   <p:handoutMasterIdLst>
-    <p:handoutMasterId r:id="rId12"/>
+    <p:handoutMasterId r:id="rId17"/>
   </p:handoutMasterIdLst>
   <p:sldIdLst>
     <p:sldId id="334" r:id="rId5"/>
     <p:sldId id="335" r:id="rId6"/>
     <p:sldId id="336" r:id="rId7"/>
-    <p:sldId id="337" r:id="rId8"/>
-    <p:sldId id="338" r:id="rId9"/>
-    <p:sldId id="339" r:id="rId10"/>
+    <p:sldId id="338" r:id="rId8"/>
+    <p:sldId id="339" r:id="rId9"/>
+    <p:sldId id="340" r:id="rId10"/>
+    <p:sldId id="341" r:id="rId11"/>
+    <p:sldId id="342" r:id="rId12"/>
+    <p:sldId id="343" r:id="rId13"/>
+    <p:sldId id="344" r:id="rId14"/>
+    <p:sldId id="337" r:id="rId15"/>
   </p:sldIdLst>
   <p:sldSz cx="12192000" cy="6858000"/>
   <p:notesSz cx="6858000" cy="9144000"/>
@@ -126,10 +131,26 @@
           </p14:sldIdLst>
         </p14:section>
         <p14:section name="Udemy Course Covers" id="{D7DED217-FC2A-4C9E-A35B-9204E76CE79F}">
+          <p14:sldIdLst/>
+        </p14:section>
+        <p14:section name="Part 0" id="{F2D02265-B16A-46D9-B982-DFBFE447973C}">
+          <p14:sldIdLst>
+            <p14:sldId id="338"/>
+            <p14:sldId id="339"/>
+          </p14:sldIdLst>
+        </p14:section>
+        <p14:section name="Part 1" id="{AAFDA16F-3CE7-4230-92BF-FD5C9C62BC75}">
+          <p14:sldIdLst>
+            <p14:sldId id="340"/>
+            <p14:sldId id="341"/>
+            <p14:sldId id="342"/>
+            <p14:sldId id="343"/>
+            <p14:sldId id="344"/>
+          </p14:sldIdLst>
+        </p14:section>
+        <p14:section name="add-on" id="{0C1F4F65-72A3-42DD-AC1F-D9167B17FD18}">
           <p14:sldIdLst>
             <p14:sldId id="337"/>
-            <p14:sldId id="338"/>
-            <p14:sldId id="339"/>
           </p14:sldIdLst>
         </p14:section>
       </p14:sectionLst>
@@ -166,6 +187,3212 @@
 </p188:authorLst>
 </file>
 
+<file path=ppt/diagrams/colors1.xml><?xml version="1.0" encoding="utf-8"?>
+<dgm:colorsDef xmlns:dgm="http://schemas.openxmlformats.org/drawingml/2006/diagram" xmlns:a="http://schemas.openxmlformats.org/drawingml/2006/main" uniqueId="urn:microsoft.com/office/officeart/2005/8/colors/colorful3">
+  <dgm:title val=""/>
+  <dgm:desc val=""/>
+  <dgm:catLst>
+    <dgm:cat type="colorful" pri="10300"/>
+  </dgm:catLst>
+  <dgm:styleLbl name="node0">
+    <dgm:fillClrLst meth="repeat">
+      <a:schemeClr val="accent2"/>
+    </dgm:fillClrLst>
+    <dgm:linClrLst meth="repeat">
+      <a:schemeClr val="lt1"/>
+    </dgm:linClrLst>
+    <dgm:effectClrLst/>
+    <dgm:txLinClrLst/>
+    <dgm:txFillClrLst/>
+    <dgm:txEffectClrLst/>
+  </dgm:styleLbl>
+  <dgm:styleLbl name="node1">
+    <dgm:fillClrLst>
+      <a:schemeClr val="accent3"/>
+      <a:schemeClr val="accent4"/>
+    </dgm:fillClrLst>
+    <dgm:linClrLst meth="repeat">
+      <a:schemeClr val="lt1"/>
+    </dgm:linClrLst>
+    <dgm:effectClrLst/>
+    <dgm:txLinClrLst/>
+    <dgm:txFillClrLst/>
+    <dgm:txEffectClrLst/>
+  </dgm:styleLbl>
+  <dgm:styleLbl name="alignNode1">
+    <dgm:fillClrLst>
+      <a:schemeClr val="accent3"/>
+      <a:schemeClr val="accent4"/>
+    </dgm:fillClrLst>
+    <dgm:linClrLst>
+      <a:schemeClr val="accent3"/>
+      <a:schemeClr val="accent4"/>
+    </dgm:linClrLst>
+    <dgm:effectClrLst/>
+    <dgm:txLinClrLst/>
+    <dgm:txFillClrLst/>
+    <dgm:txEffectClrLst/>
+  </dgm:styleLbl>
+  <dgm:styleLbl name="lnNode1">
+    <dgm:fillClrLst>
+      <a:schemeClr val="accent3"/>
+      <a:schemeClr val="accent4"/>
+    </dgm:fillClrLst>
+    <dgm:linClrLst meth="repeat">
+      <a:schemeClr val="lt1"/>
+    </dgm:linClrLst>
+    <dgm:effectClrLst/>
+    <dgm:txLinClrLst/>
+    <dgm:txFillClrLst/>
+    <dgm:txEffectClrLst/>
+  </dgm:styleLbl>
+  <dgm:styleLbl name="vennNode1">
+    <dgm:fillClrLst>
+      <a:schemeClr val="accent3">
+        <a:alpha val="50000"/>
+      </a:schemeClr>
+      <a:schemeClr val="accent4">
+        <a:alpha val="50000"/>
+      </a:schemeClr>
+    </dgm:fillClrLst>
+    <dgm:linClrLst meth="repeat">
+      <a:schemeClr val="lt1"/>
+    </dgm:linClrLst>
+    <dgm:effectClrLst/>
+    <dgm:txLinClrLst/>
+    <dgm:txFillClrLst/>
+    <dgm:txEffectClrLst/>
+  </dgm:styleLbl>
+  <dgm:styleLbl name="node2">
+    <dgm:fillClrLst>
+      <a:schemeClr val="accent4"/>
+    </dgm:fillClrLst>
+    <dgm:linClrLst meth="repeat">
+      <a:schemeClr val="lt1"/>
+    </dgm:linClrLst>
+    <dgm:effectClrLst/>
+    <dgm:txLinClrLst/>
+    <dgm:txFillClrLst/>
+    <dgm:txEffectClrLst/>
+  </dgm:styleLbl>
+  <dgm:styleLbl name="node3">
+    <dgm:fillClrLst>
+      <a:schemeClr val="accent5"/>
+    </dgm:fillClrLst>
+    <dgm:linClrLst meth="repeat">
+      <a:schemeClr val="lt1"/>
+    </dgm:linClrLst>
+    <dgm:effectClrLst/>
+    <dgm:txLinClrLst/>
+    <dgm:txFillClrLst/>
+    <dgm:txEffectClrLst/>
+  </dgm:styleLbl>
+  <dgm:styleLbl name="node4">
+    <dgm:fillClrLst>
+      <a:schemeClr val="accent6"/>
+    </dgm:fillClrLst>
+    <dgm:linClrLst meth="repeat">
+      <a:schemeClr val="lt1"/>
+    </dgm:linClrLst>
+    <dgm:effectClrLst/>
+    <dgm:txLinClrLst/>
+    <dgm:txFillClrLst/>
+    <dgm:txEffectClrLst/>
+  </dgm:styleLbl>
+  <dgm:styleLbl name="fgImgPlace1">
+    <dgm:fillClrLst>
+      <a:schemeClr val="accent3">
+        <a:tint val="50000"/>
+      </a:schemeClr>
+      <a:schemeClr val="accent4">
+        <a:tint val="50000"/>
+      </a:schemeClr>
+    </dgm:fillClrLst>
+    <dgm:linClrLst meth="repeat">
+      <a:schemeClr val="lt1"/>
+    </dgm:linClrLst>
+    <dgm:effectClrLst/>
+    <dgm:txLinClrLst/>
+    <dgm:txFillClrLst meth="repeat">
+      <a:schemeClr val="lt1"/>
+    </dgm:txFillClrLst>
+    <dgm:txEffectClrLst/>
+  </dgm:styleLbl>
+  <dgm:styleLbl name="alignImgPlace1">
+    <dgm:fillClrLst>
+      <a:schemeClr val="accent3">
+        <a:tint val="50000"/>
+      </a:schemeClr>
+      <a:schemeClr val="accent4">
+        <a:tint val="20000"/>
+      </a:schemeClr>
+    </dgm:fillClrLst>
+    <dgm:linClrLst meth="repeat">
+      <a:schemeClr val="lt1"/>
+    </dgm:linClrLst>
+    <dgm:effectClrLst/>
+    <dgm:txLinClrLst/>
+    <dgm:txFillClrLst meth="repeat">
+      <a:schemeClr val="lt1"/>
+    </dgm:txFillClrLst>
+    <dgm:txEffectClrLst/>
+  </dgm:styleLbl>
+  <dgm:styleLbl name="bgImgPlace1">
+    <dgm:fillClrLst>
+      <a:schemeClr val="accent3">
+        <a:tint val="50000"/>
+      </a:schemeClr>
+      <a:schemeClr val="accent4">
+        <a:tint val="20000"/>
+      </a:schemeClr>
+    </dgm:fillClrLst>
+    <dgm:linClrLst meth="repeat">
+      <a:schemeClr val="lt1"/>
+    </dgm:linClrLst>
+    <dgm:effectClrLst/>
+    <dgm:txLinClrLst/>
+    <dgm:txFillClrLst meth="repeat">
+      <a:schemeClr val="lt1"/>
+    </dgm:txFillClrLst>
+    <dgm:txEffectClrLst/>
+  </dgm:styleLbl>
+  <dgm:styleLbl name="sibTrans2D1">
+    <dgm:fillClrLst>
+      <a:schemeClr val="accent3"/>
+      <a:schemeClr val="accent4"/>
+    </dgm:fillClrLst>
+    <dgm:linClrLst meth="repeat">
+      <a:schemeClr val="lt1"/>
+    </dgm:linClrLst>
+    <dgm:effectClrLst/>
+    <dgm:txLinClrLst/>
+    <dgm:txFillClrLst/>
+    <dgm:txEffectClrLst/>
+  </dgm:styleLbl>
+  <dgm:styleLbl name="fgSibTrans2D1">
+    <dgm:fillClrLst>
+      <a:schemeClr val="accent3"/>
+      <a:schemeClr val="accent4"/>
+    </dgm:fillClrLst>
+    <dgm:linClrLst meth="repeat">
+      <a:schemeClr val="lt1"/>
+    </dgm:linClrLst>
+    <dgm:effectClrLst/>
+    <dgm:txLinClrLst/>
+    <dgm:txFillClrLst meth="repeat">
+      <a:schemeClr val="lt1"/>
+    </dgm:txFillClrLst>
+    <dgm:txEffectClrLst/>
+  </dgm:styleLbl>
+  <dgm:styleLbl name="bgSibTrans2D1">
+    <dgm:fillClrLst>
+      <a:schemeClr val="accent3"/>
+      <a:schemeClr val="accent4"/>
+    </dgm:fillClrLst>
+    <dgm:linClrLst meth="repeat">
+      <a:schemeClr val="lt1"/>
+    </dgm:linClrLst>
+    <dgm:effectClrLst/>
+    <dgm:txLinClrLst/>
+    <dgm:txFillClrLst meth="repeat">
+      <a:schemeClr val="lt1"/>
+    </dgm:txFillClrLst>
+    <dgm:txEffectClrLst/>
+  </dgm:styleLbl>
+  <dgm:styleLbl name="sibTrans1D1">
+    <dgm:fillClrLst/>
+    <dgm:linClrLst>
+      <a:schemeClr val="accent3"/>
+      <a:schemeClr val="accent4"/>
+    </dgm:linClrLst>
+    <dgm:effectClrLst/>
+    <dgm:txLinClrLst/>
+    <dgm:txFillClrLst meth="repeat">
+      <a:schemeClr val="tx1"/>
+    </dgm:txFillClrLst>
+    <dgm:txEffectClrLst/>
+  </dgm:styleLbl>
+  <dgm:styleLbl name="callout">
+    <dgm:fillClrLst meth="repeat">
+      <a:schemeClr val="accent3"/>
+    </dgm:fillClrLst>
+    <dgm:linClrLst meth="repeat">
+      <a:schemeClr val="accent3">
+        <a:tint val="50000"/>
+      </a:schemeClr>
+    </dgm:linClrLst>
+    <dgm:effectClrLst/>
+    <dgm:txLinClrLst/>
+    <dgm:txFillClrLst meth="repeat">
+      <a:schemeClr val="tx1"/>
+    </dgm:txFillClrLst>
+    <dgm:txEffectClrLst/>
+  </dgm:styleLbl>
+  <dgm:styleLbl name="asst0">
+    <dgm:fillClrLst meth="repeat">
+      <a:schemeClr val="accent3"/>
+    </dgm:fillClrLst>
+    <dgm:linClrLst meth="repeat">
+      <a:schemeClr val="lt1">
+        <a:shade val="80000"/>
+      </a:schemeClr>
+    </dgm:linClrLst>
+    <dgm:effectClrLst/>
+    <dgm:txLinClrLst/>
+    <dgm:txFillClrLst/>
+    <dgm:txEffectClrLst/>
+  </dgm:styleLbl>
+  <dgm:styleLbl name="asst1">
+    <dgm:fillClrLst meth="repeat">
+      <a:schemeClr val="accent4"/>
+    </dgm:fillClrLst>
+    <dgm:linClrLst meth="repeat">
+      <a:schemeClr val="lt1">
+        <a:shade val="80000"/>
+      </a:schemeClr>
+    </dgm:linClrLst>
+    <dgm:effectClrLst/>
+    <dgm:txLinClrLst/>
+    <dgm:txFillClrLst/>
+    <dgm:txEffectClrLst/>
+  </dgm:styleLbl>
+  <dgm:styleLbl name="asst2">
+    <dgm:fillClrLst>
+      <a:schemeClr val="accent5"/>
+    </dgm:fillClrLst>
+    <dgm:linClrLst meth="repeat">
+      <a:schemeClr val="lt1"/>
+    </dgm:linClrLst>
+    <dgm:effectClrLst/>
+    <dgm:txLinClrLst/>
+    <dgm:txFillClrLst/>
+    <dgm:txEffectClrLst/>
+  </dgm:styleLbl>
+  <dgm:styleLbl name="asst3">
+    <dgm:fillClrLst>
+      <a:schemeClr val="accent6"/>
+    </dgm:fillClrLst>
+    <dgm:linClrLst meth="repeat">
+      <a:schemeClr val="lt1"/>
+    </dgm:linClrLst>
+    <dgm:effectClrLst/>
+    <dgm:txLinClrLst/>
+    <dgm:txFillClrLst/>
+    <dgm:txEffectClrLst/>
+  </dgm:styleLbl>
+  <dgm:styleLbl name="asst4">
+    <dgm:fillClrLst>
+      <a:schemeClr val="accent1"/>
+    </dgm:fillClrLst>
+    <dgm:linClrLst meth="repeat">
+      <a:schemeClr val="lt1"/>
+    </dgm:linClrLst>
+    <dgm:effectClrLst/>
+    <dgm:txLinClrLst/>
+    <dgm:txFillClrLst/>
+    <dgm:txEffectClrLst/>
+  </dgm:styleLbl>
+  <dgm:styleLbl name="parChTrans2D1">
+    <dgm:fillClrLst meth="repeat">
+      <a:schemeClr val="accent2"/>
+    </dgm:fillClrLst>
+    <dgm:linClrLst meth="repeat">
+      <a:schemeClr val="lt1"/>
+    </dgm:linClrLst>
+    <dgm:effectClrLst/>
+    <dgm:txLinClrLst/>
+    <dgm:txFillClrLst meth="repeat">
+      <a:schemeClr val="lt1"/>
+    </dgm:txFillClrLst>
+    <dgm:txEffectClrLst/>
+  </dgm:styleLbl>
+  <dgm:styleLbl name="parChTrans2D2">
+    <dgm:fillClrLst meth="repeat">
+      <a:schemeClr val="accent3"/>
+    </dgm:fillClrLst>
+    <dgm:linClrLst meth="repeat">
+      <a:schemeClr val="lt1"/>
+    </dgm:linClrLst>
+    <dgm:effectClrLst/>
+    <dgm:txLinClrLst/>
+    <dgm:txFillClrLst/>
+    <dgm:txEffectClrLst/>
+  </dgm:styleLbl>
+  <dgm:styleLbl name="parChTrans2D3">
+    <dgm:fillClrLst meth="repeat">
+      <a:schemeClr val="accent4"/>
+    </dgm:fillClrLst>
+    <dgm:linClrLst meth="repeat">
+      <a:schemeClr val="lt1"/>
+    </dgm:linClrLst>
+    <dgm:effectClrLst/>
+    <dgm:txLinClrLst/>
+    <dgm:txFillClrLst/>
+    <dgm:txEffectClrLst/>
+  </dgm:styleLbl>
+  <dgm:styleLbl name="parChTrans2D4">
+    <dgm:fillClrLst meth="repeat">
+      <a:schemeClr val="accent5"/>
+    </dgm:fillClrLst>
+    <dgm:linClrLst meth="repeat">
+      <a:schemeClr val="lt1"/>
+    </dgm:linClrLst>
+    <dgm:effectClrLst/>
+    <dgm:txLinClrLst/>
+    <dgm:txFillClrLst meth="repeat">
+      <a:schemeClr val="lt1"/>
+    </dgm:txFillClrLst>
+    <dgm:txEffectClrLst/>
+  </dgm:styleLbl>
+  <dgm:styleLbl name="parChTrans1D1">
+    <dgm:fillClrLst meth="repeat">
+      <a:schemeClr val="accent3"/>
+    </dgm:fillClrLst>
+    <dgm:linClrLst meth="repeat">
+      <a:schemeClr val="accent3"/>
+    </dgm:linClrLst>
+    <dgm:effectClrLst/>
+    <dgm:txLinClrLst/>
+    <dgm:txFillClrLst meth="repeat">
+      <a:schemeClr val="tx1"/>
+    </dgm:txFillClrLst>
+    <dgm:txEffectClrLst/>
+  </dgm:styleLbl>
+  <dgm:styleLbl name="parChTrans1D2">
+    <dgm:fillClrLst meth="repeat">
+      <a:schemeClr val="accent2">
+        <a:tint val="90000"/>
+      </a:schemeClr>
+    </dgm:fillClrLst>
+    <dgm:linClrLst meth="repeat">
+      <a:schemeClr val="accent4"/>
+    </dgm:linClrLst>
+    <dgm:effectClrLst/>
+    <dgm:txLinClrLst/>
+    <dgm:txFillClrLst meth="repeat">
+      <a:schemeClr val="tx1"/>
+    </dgm:txFillClrLst>
+    <dgm:txEffectClrLst/>
+  </dgm:styleLbl>
+  <dgm:styleLbl name="parChTrans1D3">
+    <dgm:fillClrLst meth="repeat">
+      <a:schemeClr val="accent2">
+        <a:tint val="70000"/>
+      </a:schemeClr>
+    </dgm:fillClrLst>
+    <dgm:linClrLst meth="repeat">
+      <a:schemeClr val="accent5"/>
+    </dgm:linClrLst>
+    <dgm:effectClrLst/>
+    <dgm:txLinClrLst/>
+    <dgm:txFillClrLst meth="repeat">
+      <a:schemeClr val="tx1"/>
+    </dgm:txFillClrLst>
+    <dgm:txEffectClrLst/>
+  </dgm:styleLbl>
+  <dgm:styleLbl name="parChTrans1D4">
+    <dgm:fillClrLst meth="repeat">
+      <a:schemeClr val="accent6">
+        <a:tint val="50000"/>
+      </a:schemeClr>
+    </dgm:fillClrLst>
+    <dgm:linClrLst meth="repeat">
+      <a:schemeClr val="accent6"/>
+    </dgm:linClrLst>
+    <dgm:effectClrLst/>
+    <dgm:txLinClrLst/>
+    <dgm:txFillClrLst meth="repeat">
+      <a:schemeClr val="tx1"/>
+    </dgm:txFillClrLst>
+    <dgm:txEffectClrLst/>
+  </dgm:styleLbl>
+  <dgm:styleLbl name="fgAcc1">
+    <dgm:fillClrLst meth="repeat">
+      <a:schemeClr val="lt1">
+        <a:alpha val="90000"/>
+      </a:schemeClr>
+    </dgm:fillClrLst>
+    <dgm:linClrLst>
+      <a:schemeClr val="accent3"/>
+      <a:schemeClr val="accent4"/>
+    </dgm:linClrLst>
+    <dgm:effectClrLst/>
+    <dgm:txLinClrLst/>
+    <dgm:txFillClrLst meth="repeat">
+      <a:schemeClr val="dk1"/>
+    </dgm:txFillClrLst>
+    <dgm:txEffectClrLst/>
+  </dgm:styleLbl>
+  <dgm:styleLbl name="conFgAcc1">
+    <dgm:fillClrLst meth="repeat">
+      <a:schemeClr val="lt1">
+        <a:alpha val="90000"/>
+      </a:schemeClr>
+    </dgm:fillClrLst>
+    <dgm:linClrLst>
+      <a:schemeClr val="accent3"/>
+      <a:schemeClr val="accent4"/>
+    </dgm:linClrLst>
+    <dgm:effectClrLst/>
+    <dgm:txLinClrLst/>
+    <dgm:txFillClrLst meth="repeat">
+      <a:schemeClr val="dk1"/>
+    </dgm:txFillClrLst>
+    <dgm:txEffectClrLst/>
+  </dgm:styleLbl>
+  <dgm:styleLbl name="alignAcc1">
+    <dgm:fillClrLst meth="repeat">
+      <a:schemeClr val="lt1">
+        <a:alpha val="90000"/>
+      </a:schemeClr>
+    </dgm:fillClrLst>
+    <dgm:linClrLst>
+      <a:schemeClr val="accent3"/>
+      <a:schemeClr val="accent4"/>
+    </dgm:linClrLst>
+    <dgm:effectClrLst/>
+    <dgm:txLinClrLst/>
+    <dgm:txFillClrLst meth="repeat">
+      <a:schemeClr val="dk1"/>
+    </dgm:txFillClrLst>
+    <dgm:txEffectClrLst/>
+  </dgm:styleLbl>
+  <dgm:styleLbl name="trAlignAcc1">
+    <dgm:fillClrLst meth="repeat">
+      <a:schemeClr val="lt1">
+        <a:alpha val="40000"/>
+      </a:schemeClr>
+    </dgm:fillClrLst>
+    <dgm:linClrLst meth="repeat">
+      <a:schemeClr val="accent2"/>
+    </dgm:linClrLst>
+    <dgm:effectClrLst/>
+    <dgm:txLinClrLst/>
+    <dgm:txFillClrLst meth="repeat">
+      <a:schemeClr val="dk1"/>
+    </dgm:txFillClrLst>
+    <dgm:txEffectClrLst/>
+  </dgm:styleLbl>
+  <dgm:styleLbl name="bgAcc1">
+    <dgm:fillClrLst meth="repeat">
+      <a:schemeClr val="lt1">
+        <a:alpha val="90000"/>
+      </a:schemeClr>
+    </dgm:fillClrLst>
+    <dgm:linClrLst>
+      <a:schemeClr val="accent3"/>
+      <a:schemeClr val="accent4"/>
+    </dgm:linClrLst>
+    <dgm:effectClrLst/>
+    <dgm:txLinClrLst/>
+    <dgm:txFillClrLst meth="repeat">
+      <a:schemeClr val="dk1"/>
+    </dgm:txFillClrLst>
+    <dgm:txEffectClrLst/>
+  </dgm:styleLbl>
+  <dgm:styleLbl name="solidFgAcc1">
+    <dgm:fillClrLst meth="repeat">
+      <a:schemeClr val="lt1"/>
+    </dgm:fillClrLst>
+    <dgm:linClrLst>
+      <a:schemeClr val="accent3"/>
+      <a:schemeClr val="accent4"/>
+    </dgm:linClrLst>
+    <dgm:effectClrLst/>
+    <dgm:txLinClrLst/>
+    <dgm:txFillClrLst meth="repeat">
+      <a:schemeClr val="dk1"/>
+    </dgm:txFillClrLst>
+    <dgm:txEffectClrLst/>
+  </dgm:styleLbl>
+  <dgm:styleLbl name="solidAlignAcc1">
+    <dgm:fillClrLst meth="repeat">
+      <a:schemeClr val="lt1"/>
+    </dgm:fillClrLst>
+    <dgm:linClrLst>
+      <a:schemeClr val="accent3"/>
+      <a:schemeClr val="accent4"/>
+    </dgm:linClrLst>
+    <dgm:effectClrLst/>
+    <dgm:txLinClrLst/>
+    <dgm:txFillClrLst meth="repeat">
+      <a:schemeClr val="dk1"/>
+    </dgm:txFillClrLst>
+    <dgm:txEffectClrLst/>
+  </dgm:styleLbl>
+  <dgm:styleLbl name="solidBgAcc1">
+    <dgm:fillClrLst meth="repeat">
+      <a:schemeClr val="lt1"/>
+    </dgm:fillClrLst>
+    <dgm:linClrLst>
+      <a:schemeClr val="accent3"/>
+      <a:schemeClr val="accent4"/>
+    </dgm:linClrLst>
+    <dgm:effectClrLst/>
+    <dgm:txLinClrLst/>
+    <dgm:txFillClrLst meth="repeat">
+      <a:schemeClr val="dk1"/>
+    </dgm:txFillClrLst>
+    <dgm:txEffectClrLst/>
+  </dgm:styleLbl>
+  <dgm:styleLbl name="fgAccFollowNode1">
+    <dgm:fillClrLst>
+      <a:schemeClr val="accent3">
+        <a:tint val="40000"/>
+        <a:alpha val="90000"/>
+      </a:schemeClr>
+      <a:schemeClr val="accent4">
+        <a:tint val="40000"/>
+        <a:alpha val="90000"/>
+      </a:schemeClr>
+    </dgm:fillClrLst>
+    <dgm:linClrLst>
+      <a:schemeClr val="accent3">
+        <a:tint val="40000"/>
+        <a:alpha val="90000"/>
+      </a:schemeClr>
+      <a:schemeClr val="accent4">
+        <a:tint val="40000"/>
+        <a:alpha val="90000"/>
+      </a:schemeClr>
+    </dgm:linClrLst>
+    <dgm:effectClrLst/>
+    <dgm:txLinClrLst/>
+    <dgm:txFillClrLst meth="repeat">
+      <a:schemeClr val="dk1"/>
+    </dgm:txFillClrLst>
+    <dgm:txEffectClrLst/>
+  </dgm:styleLbl>
+  <dgm:styleLbl name="alignAccFollowNode1">
+    <dgm:fillClrLst>
+      <a:schemeClr val="accent3">
+        <a:tint val="40000"/>
+        <a:alpha val="90000"/>
+      </a:schemeClr>
+      <a:schemeClr val="accent4">
+        <a:tint val="40000"/>
+        <a:alpha val="90000"/>
+      </a:schemeClr>
+    </dgm:fillClrLst>
+    <dgm:linClrLst>
+      <a:schemeClr val="accent3">
+        <a:tint val="40000"/>
+        <a:alpha val="90000"/>
+      </a:schemeClr>
+      <a:schemeClr val="accent4">
+        <a:tint val="40000"/>
+        <a:alpha val="90000"/>
+      </a:schemeClr>
+    </dgm:linClrLst>
+    <dgm:effectClrLst/>
+    <dgm:txLinClrLst/>
+    <dgm:txFillClrLst meth="repeat">
+      <a:schemeClr val="dk1"/>
+    </dgm:txFillClrLst>
+    <dgm:txEffectClrLst/>
+  </dgm:styleLbl>
+  <dgm:styleLbl name="bgAccFollowNode1">
+    <dgm:fillClrLst>
+      <a:schemeClr val="accent3">
+        <a:tint val="40000"/>
+        <a:alpha val="90000"/>
+      </a:schemeClr>
+      <a:schemeClr val="accent4">
+        <a:tint val="40000"/>
+        <a:alpha val="90000"/>
+      </a:schemeClr>
+    </dgm:fillClrLst>
+    <dgm:linClrLst>
+      <a:schemeClr val="accent3">
+        <a:tint val="40000"/>
+        <a:alpha val="90000"/>
+      </a:schemeClr>
+      <a:schemeClr val="accent4">
+        <a:tint val="40000"/>
+        <a:alpha val="90000"/>
+      </a:schemeClr>
+    </dgm:linClrLst>
+    <dgm:effectClrLst/>
+    <dgm:txLinClrLst/>
+    <dgm:txFillClrLst meth="repeat">
+      <a:schemeClr val="dk1"/>
+    </dgm:txFillClrLst>
+    <dgm:txEffectClrLst/>
+  </dgm:styleLbl>
+  <dgm:styleLbl name="fgAcc0">
+    <dgm:fillClrLst meth="repeat">
+      <a:schemeClr val="lt1">
+        <a:alpha val="90000"/>
+      </a:schemeClr>
+    </dgm:fillClrLst>
+    <dgm:linClrLst>
+      <a:schemeClr val="accent2"/>
+    </dgm:linClrLst>
+    <dgm:effectClrLst/>
+    <dgm:txLinClrLst/>
+    <dgm:txFillClrLst meth="repeat">
+      <a:schemeClr val="dk1"/>
+    </dgm:txFillClrLst>
+    <dgm:txEffectClrLst/>
+  </dgm:styleLbl>
+  <dgm:styleLbl name="fgAcc2">
+    <dgm:fillClrLst meth="repeat">
+      <a:schemeClr val="lt1">
+        <a:alpha val="90000"/>
+      </a:schemeClr>
+    </dgm:fillClrLst>
+    <dgm:linClrLst>
+      <a:schemeClr val="accent4"/>
+    </dgm:linClrLst>
+    <dgm:effectClrLst/>
+    <dgm:txLinClrLst/>
+    <dgm:txFillClrLst meth="repeat">
+      <a:schemeClr val="dk1"/>
+    </dgm:txFillClrLst>
+    <dgm:txEffectClrLst/>
+  </dgm:styleLbl>
+  <dgm:styleLbl name="fgAcc3">
+    <dgm:fillClrLst meth="repeat">
+      <a:schemeClr val="lt1">
+        <a:alpha val="90000"/>
+      </a:schemeClr>
+    </dgm:fillClrLst>
+    <dgm:linClrLst>
+      <a:schemeClr val="accent5"/>
+    </dgm:linClrLst>
+    <dgm:effectClrLst/>
+    <dgm:txLinClrLst/>
+    <dgm:txFillClrLst meth="repeat">
+      <a:schemeClr val="dk1"/>
+    </dgm:txFillClrLst>
+    <dgm:txEffectClrLst/>
+  </dgm:styleLbl>
+  <dgm:styleLbl name="fgAcc4">
+    <dgm:fillClrLst meth="repeat">
+      <a:schemeClr val="lt1">
+        <a:alpha val="90000"/>
+      </a:schemeClr>
+    </dgm:fillClrLst>
+    <dgm:linClrLst>
+      <a:schemeClr val="accent6"/>
+    </dgm:linClrLst>
+    <dgm:effectClrLst/>
+    <dgm:txLinClrLst/>
+    <dgm:txFillClrLst meth="repeat">
+      <a:schemeClr val="dk1"/>
+    </dgm:txFillClrLst>
+    <dgm:txEffectClrLst/>
+  </dgm:styleLbl>
+  <dgm:styleLbl name="bgShp">
+    <dgm:fillClrLst meth="repeat">
+      <a:schemeClr val="accent3">
+        <a:tint val="40000"/>
+      </a:schemeClr>
+    </dgm:fillClrLst>
+    <dgm:linClrLst meth="repeat">
+      <a:schemeClr val="dk1"/>
+    </dgm:linClrLst>
+    <dgm:effectClrLst/>
+    <dgm:txLinClrLst/>
+    <dgm:txFillClrLst meth="repeat">
+      <a:schemeClr val="dk1"/>
+    </dgm:txFillClrLst>
+    <dgm:txEffectClrLst/>
+  </dgm:styleLbl>
+  <dgm:styleLbl name="dkBgShp">
+    <dgm:fillClrLst meth="repeat">
+      <a:schemeClr val="accent3">
+        <a:shade val="90000"/>
+      </a:schemeClr>
+    </dgm:fillClrLst>
+    <dgm:linClrLst meth="repeat">
+      <a:schemeClr val="dk1"/>
+    </dgm:linClrLst>
+    <dgm:effectClrLst/>
+    <dgm:txLinClrLst/>
+    <dgm:txFillClrLst meth="repeat">
+      <a:schemeClr val="lt1"/>
+    </dgm:txFillClrLst>
+    <dgm:txEffectClrLst/>
+  </dgm:styleLbl>
+  <dgm:styleLbl name="trBgShp">
+    <dgm:fillClrLst meth="repeat">
+      <a:schemeClr val="accent2">
+        <a:tint val="50000"/>
+        <a:alpha val="40000"/>
+      </a:schemeClr>
+    </dgm:fillClrLst>
+    <dgm:linClrLst meth="repeat">
+      <a:schemeClr val="accent3"/>
+    </dgm:linClrLst>
+    <dgm:effectClrLst/>
+    <dgm:txLinClrLst/>
+    <dgm:txFillClrLst meth="repeat">
+      <a:schemeClr val="lt1"/>
+    </dgm:txFillClrLst>
+    <dgm:txEffectClrLst/>
+  </dgm:styleLbl>
+  <dgm:styleLbl name="fgShp">
+    <dgm:fillClrLst meth="repeat">
+      <a:schemeClr val="accent3">
+        <a:tint val="40000"/>
+      </a:schemeClr>
+    </dgm:fillClrLst>
+    <dgm:linClrLst meth="repeat">
+      <a:schemeClr val="lt1"/>
+    </dgm:linClrLst>
+    <dgm:effectClrLst/>
+    <dgm:txLinClrLst/>
+    <dgm:txFillClrLst meth="repeat">
+      <a:schemeClr val="dk1"/>
+    </dgm:txFillClrLst>
+    <dgm:txEffectClrLst/>
+  </dgm:styleLbl>
+  <dgm:styleLbl name="revTx">
+    <dgm:fillClrLst meth="repeat">
+      <a:schemeClr val="lt1">
+        <a:alpha val="0"/>
+      </a:schemeClr>
+    </dgm:fillClrLst>
+    <dgm:linClrLst meth="repeat">
+      <a:schemeClr val="dk1">
+        <a:alpha val="0"/>
+      </a:schemeClr>
+    </dgm:linClrLst>
+    <dgm:effectClrLst/>
+    <dgm:txLinClrLst/>
+    <dgm:txFillClrLst meth="repeat">
+      <a:schemeClr val="tx1"/>
+    </dgm:txFillClrLst>
+    <dgm:txEffectClrLst/>
+  </dgm:styleLbl>
+</dgm:colorsDef>
+</file>
+
+<file path=ppt/diagrams/data1.xml><?xml version="1.0" encoding="utf-8"?>
+<dgm:dataModel xmlns:dgm="http://schemas.openxmlformats.org/drawingml/2006/diagram" xmlns:a="http://schemas.openxmlformats.org/drawingml/2006/main">
+  <dgm:ptLst>
+    <dgm:pt modelId="{EDA263C0-EE2F-4366-9134-696C45648023}" type="doc">
+      <dgm:prSet loTypeId="urn:microsoft.com/office/officeart/2005/8/layout/cycle2" loCatId="cycle" qsTypeId="urn:microsoft.com/office/officeart/2005/8/quickstyle/simple1" qsCatId="simple" csTypeId="urn:microsoft.com/office/officeart/2005/8/colors/colorful3" csCatId="colorful" phldr="1"/>
+      <dgm:spPr/>
+      <dgm:t>
+        <a:bodyPr/>
+        <a:lstStyle/>
+        <a:p>
+          <a:endParaRPr lang="en-US"/>
+        </a:p>
+      </dgm:t>
+    </dgm:pt>
+    <dgm:pt modelId="{1CF696E8-9051-46C9-9F86-6DCD75FBC9B7}">
+      <dgm:prSet phldrT="[Text]" phldr="0" custT="1"/>
+      <dgm:spPr/>
+      <dgm:t>
+        <a:bodyPr/>
+        <a:lstStyle/>
+        <a:p>
+          <a:r>
+            <a:rPr lang="en-US" sz="1200" b="1" dirty="0">
+              <a:solidFill>
+                <a:schemeClr val="bg1"/>
+              </a:solidFill>
+            </a:rPr>
+            <a:t>Prepare</a:t>
+          </a:r>
+        </a:p>
+      </dgm:t>
+    </dgm:pt>
+    <dgm:pt modelId="{E0F12A04-E419-463D-85CF-B233B5CC6044}" type="parTrans" cxnId="{CC84E1E7-CD46-4851-AB7A-2A2939B4EFB0}">
+      <dgm:prSet/>
+      <dgm:spPr/>
+      <dgm:t>
+        <a:bodyPr/>
+        <a:lstStyle/>
+        <a:p>
+          <a:endParaRPr lang="en-US" sz="2000" b="1">
+            <a:solidFill>
+              <a:schemeClr val="bg1"/>
+            </a:solidFill>
+          </a:endParaRPr>
+        </a:p>
+      </dgm:t>
+    </dgm:pt>
+    <dgm:pt modelId="{65D4780A-73B0-44D0-B038-4524459001FB}" type="sibTrans" cxnId="{CC84E1E7-CD46-4851-AB7A-2A2939B4EFB0}">
+      <dgm:prSet custT="1"/>
+      <dgm:spPr/>
+      <dgm:t>
+        <a:bodyPr/>
+        <a:lstStyle/>
+        <a:p>
+          <a:endParaRPr lang="en-US" sz="1000" b="1">
+            <a:solidFill>
+              <a:schemeClr val="bg1"/>
+            </a:solidFill>
+          </a:endParaRPr>
+        </a:p>
+      </dgm:t>
+    </dgm:pt>
+    <dgm:pt modelId="{3F398D3C-2B75-4F3F-8F24-536C53BBCDD1}">
+      <dgm:prSet phldrT="[Text]" phldr="0" custT="1"/>
+      <dgm:spPr/>
+      <dgm:t>
+        <a:bodyPr/>
+        <a:lstStyle/>
+        <a:p>
+          <a:r>
+            <a:rPr lang="en-US" sz="1200" b="1" dirty="0">
+              <a:solidFill>
+                <a:schemeClr val="bg1"/>
+              </a:solidFill>
+            </a:rPr>
+            <a:t>Model</a:t>
+          </a:r>
+        </a:p>
+      </dgm:t>
+    </dgm:pt>
+    <dgm:pt modelId="{E68CD0DC-BB2A-490C-B80E-316E761D165C}" type="parTrans" cxnId="{DCB42DCE-458A-4CF5-AED4-BA71C57140B9}">
+      <dgm:prSet/>
+      <dgm:spPr/>
+      <dgm:t>
+        <a:bodyPr/>
+        <a:lstStyle/>
+        <a:p>
+          <a:endParaRPr lang="en-US" sz="2000" b="1">
+            <a:solidFill>
+              <a:schemeClr val="bg1"/>
+            </a:solidFill>
+          </a:endParaRPr>
+        </a:p>
+      </dgm:t>
+    </dgm:pt>
+    <dgm:pt modelId="{06ECD0EC-0915-46EE-86FB-2B3DEDB40DED}" type="sibTrans" cxnId="{DCB42DCE-458A-4CF5-AED4-BA71C57140B9}">
+      <dgm:prSet custT="1"/>
+      <dgm:spPr/>
+      <dgm:t>
+        <a:bodyPr/>
+        <a:lstStyle/>
+        <a:p>
+          <a:endParaRPr lang="en-US" sz="1000" b="1">
+            <a:solidFill>
+              <a:schemeClr val="bg1"/>
+            </a:solidFill>
+          </a:endParaRPr>
+        </a:p>
+      </dgm:t>
+    </dgm:pt>
+    <dgm:pt modelId="{FF1F4054-6BB4-4B6A-8E4B-5D3AE4116095}">
+      <dgm:prSet phldrT="[Text]" phldr="0" custT="1"/>
+      <dgm:spPr/>
+      <dgm:t>
+        <a:bodyPr/>
+        <a:lstStyle/>
+        <a:p>
+          <a:r>
+            <a:rPr lang="en-US" sz="1200" b="1" dirty="0">
+              <a:solidFill>
+                <a:schemeClr val="bg1"/>
+              </a:solidFill>
+            </a:rPr>
+            <a:t>Visualize</a:t>
+          </a:r>
+        </a:p>
+      </dgm:t>
+    </dgm:pt>
+    <dgm:pt modelId="{7B2E9757-BDBD-4AAD-94ED-B719B09623F9}" type="parTrans" cxnId="{9DB545DA-6B0B-4E9A-8547-69BA0493B2ED}">
+      <dgm:prSet/>
+      <dgm:spPr/>
+      <dgm:t>
+        <a:bodyPr/>
+        <a:lstStyle/>
+        <a:p>
+          <a:endParaRPr lang="en-US" sz="2000" b="1">
+            <a:solidFill>
+              <a:schemeClr val="bg1"/>
+            </a:solidFill>
+          </a:endParaRPr>
+        </a:p>
+      </dgm:t>
+    </dgm:pt>
+    <dgm:pt modelId="{B79A86F2-E66C-4AEF-8CCD-DBF5AF3D01FB}" type="sibTrans" cxnId="{9DB545DA-6B0B-4E9A-8547-69BA0493B2ED}">
+      <dgm:prSet custT="1"/>
+      <dgm:spPr/>
+      <dgm:t>
+        <a:bodyPr/>
+        <a:lstStyle/>
+        <a:p>
+          <a:endParaRPr lang="en-US" sz="1000" b="1">
+            <a:solidFill>
+              <a:schemeClr val="bg1"/>
+            </a:solidFill>
+          </a:endParaRPr>
+        </a:p>
+      </dgm:t>
+    </dgm:pt>
+    <dgm:pt modelId="{71AB97B4-AAF4-4C99-87DF-20848B31FAF5}">
+      <dgm:prSet phldrT="[Text]" phldr="0" custT="1"/>
+      <dgm:spPr/>
+      <dgm:t>
+        <a:bodyPr/>
+        <a:lstStyle/>
+        <a:p>
+          <a:r>
+            <a:rPr lang="en-US" sz="1200" b="1" dirty="0">
+              <a:solidFill>
+                <a:schemeClr val="bg1"/>
+              </a:solidFill>
+            </a:rPr>
+            <a:t>Analyze</a:t>
+          </a:r>
+        </a:p>
+      </dgm:t>
+    </dgm:pt>
+    <dgm:pt modelId="{EFAC0E68-0879-4C5D-AB89-A3C13A1B3562}" type="parTrans" cxnId="{0C946404-E809-4081-932A-0020E2C0EE3D}">
+      <dgm:prSet/>
+      <dgm:spPr/>
+      <dgm:t>
+        <a:bodyPr/>
+        <a:lstStyle/>
+        <a:p>
+          <a:endParaRPr lang="en-US" sz="2000" b="1">
+            <a:solidFill>
+              <a:schemeClr val="bg1"/>
+            </a:solidFill>
+          </a:endParaRPr>
+        </a:p>
+      </dgm:t>
+    </dgm:pt>
+    <dgm:pt modelId="{8B17F99F-FCB8-4E0A-B6DD-2282DAA37D00}" type="sibTrans" cxnId="{0C946404-E809-4081-932A-0020E2C0EE3D}">
+      <dgm:prSet custT="1"/>
+      <dgm:spPr/>
+      <dgm:t>
+        <a:bodyPr/>
+        <a:lstStyle/>
+        <a:p>
+          <a:endParaRPr lang="en-US" sz="1000" b="1">
+            <a:solidFill>
+              <a:schemeClr val="bg1"/>
+            </a:solidFill>
+          </a:endParaRPr>
+        </a:p>
+      </dgm:t>
+    </dgm:pt>
+    <dgm:pt modelId="{38855099-1905-4F79-8CCD-31204D1AB960}">
+      <dgm:prSet phldrT="[Text]" phldr="0" custT="1"/>
+      <dgm:spPr/>
+      <dgm:t>
+        <a:bodyPr/>
+        <a:lstStyle/>
+        <a:p>
+          <a:r>
+            <a:rPr lang="en-US" sz="1200" b="1" dirty="0">
+              <a:solidFill>
+                <a:schemeClr val="bg1"/>
+              </a:solidFill>
+            </a:rPr>
+            <a:t>Manage</a:t>
+          </a:r>
+        </a:p>
+      </dgm:t>
+    </dgm:pt>
+    <dgm:pt modelId="{0309E77D-20CA-4C7B-BB61-8A693A6CA862}" type="parTrans" cxnId="{FAAF2FE9-44FC-4D34-9060-049C4D2F88DC}">
+      <dgm:prSet/>
+      <dgm:spPr/>
+      <dgm:t>
+        <a:bodyPr/>
+        <a:lstStyle/>
+        <a:p>
+          <a:endParaRPr lang="en-US" sz="2000" b="1">
+            <a:solidFill>
+              <a:schemeClr val="bg1"/>
+            </a:solidFill>
+          </a:endParaRPr>
+        </a:p>
+      </dgm:t>
+    </dgm:pt>
+    <dgm:pt modelId="{1BE69C16-BF18-4576-B0C8-17093FDA8914}" type="sibTrans" cxnId="{FAAF2FE9-44FC-4D34-9060-049C4D2F88DC}">
+      <dgm:prSet custT="1"/>
+      <dgm:spPr/>
+      <dgm:t>
+        <a:bodyPr/>
+        <a:lstStyle/>
+        <a:p>
+          <a:endParaRPr lang="en-US" sz="1000" b="1">
+            <a:solidFill>
+              <a:schemeClr val="bg1"/>
+            </a:solidFill>
+          </a:endParaRPr>
+        </a:p>
+      </dgm:t>
+    </dgm:pt>
+    <dgm:pt modelId="{FC679087-3FB4-4E5B-BC6B-C1319E9C726B}" type="pres">
+      <dgm:prSet presAssocID="{EDA263C0-EE2F-4366-9134-696C45648023}" presName="cycle" presStyleCnt="0">
+        <dgm:presLayoutVars>
+          <dgm:dir/>
+          <dgm:resizeHandles val="exact"/>
+        </dgm:presLayoutVars>
+      </dgm:prSet>
+      <dgm:spPr/>
+    </dgm:pt>
+    <dgm:pt modelId="{1D75FA47-7B0C-4CDF-8CA9-BF907DEF78FD}" type="pres">
+      <dgm:prSet presAssocID="{1CF696E8-9051-46C9-9F86-6DCD75FBC9B7}" presName="node" presStyleLbl="node1" presStyleIdx="0" presStyleCnt="5" custScaleX="116633">
+        <dgm:presLayoutVars>
+          <dgm:bulletEnabled val="1"/>
+        </dgm:presLayoutVars>
+      </dgm:prSet>
+      <dgm:spPr/>
+    </dgm:pt>
+    <dgm:pt modelId="{BEA5F634-EF32-45E1-B7B5-668F5BAF88A2}" type="pres">
+      <dgm:prSet presAssocID="{65D4780A-73B0-44D0-B038-4524459001FB}" presName="sibTrans" presStyleLbl="sibTrans2D1" presStyleIdx="0" presStyleCnt="5"/>
+      <dgm:spPr/>
+    </dgm:pt>
+    <dgm:pt modelId="{EAA376BF-2DF1-48E5-BA57-B69989683ABE}" type="pres">
+      <dgm:prSet presAssocID="{65D4780A-73B0-44D0-B038-4524459001FB}" presName="connectorText" presStyleLbl="sibTrans2D1" presStyleIdx="0" presStyleCnt="5"/>
+      <dgm:spPr/>
+    </dgm:pt>
+    <dgm:pt modelId="{DB55DD81-05F5-4974-9AE1-7CE87221E798}" type="pres">
+      <dgm:prSet presAssocID="{3F398D3C-2B75-4F3F-8F24-536C53BBCDD1}" presName="node" presStyleLbl="node1" presStyleIdx="1" presStyleCnt="5" custScaleX="116633">
+        <dgm:presLayoutVars>
+          <dgm:bulletEnabled val="1"/>
+        </dgm:presLayoutVars>
+      </dgm:prSet>
+      <dgm:spPr/>
+    </dgm:pt>
+    <dgm:pt modelId="{B1E1ACD3-6EA3-4063-80C9-DF89B2BB530E}" type="pres">
+      <dgm:prSet presAssocID="{06ECD0EC-0915-46EE-86FB-2B3DEDB40DED}" presName="sibTrans" presStyleLbl="sibTrans2D1" presStyleIdx="1" presStyleCnt="5"/>
+      <dgm:spPr/>
+    </dgm:pt>
+    <dgm:pt modelId="{DAE5BAA0-1560-45C2-A35A-D27DC9B249F6}" type="pres">
+      <dgm:prSet presAssocID="{06ECD0EC-0915-46EE-86FB-2B3DEDB40DED}" presName="connectorText" presStyleLbl="sibTrans2D1" presStyleIdx="1" presStyleCnt="5"/>
+      <dgm:spPr/>
+    </dgm:pt>
+    <dgm:pt modelId="{5C353729-11E0-4381-ADFB-B7C642AB34E5}" type="pres">
+      <dgm:prSet presAssocID="{FF1F4054-6BB4-4B6A-8E4B-5D3AE4116095}" presName="node" presStyleLbl="node1" presStyleIdx="2" presStyleCnt="5" custScaleX="116633">
+        <dgm:presLayoutVars>
+          <dgm:bulletEnabled val="1"/>
+        </dgm:presLayoutVars>
+      </dgm:prSet>
+      <dgm:spPr/>
+    </dgm:pt>
+    <dgm:pt modelId="{D5C2AB2F-7F49-4E35-9F81-4F0745EC9C50}" type="pres">
+      <dgm:prSet presAssocID="{B79A86F2-E66C-4AEF-8CCD-DBF5AF3D01FB}" presName="sibTrans" presStyleLbl="sibTrans2D1" presStyleIdx="2" presStyleCnt="5"/>
+      <dgm:spPr/>
+    </dgm:pt>
+    <dgm:pt modelId="{9E6E5E77-8B31-4F9E-AD7E-603A79DD2C86}" type="pres">
+      <dgm:prSet presAssocID="{B79A86F2-E66C-4AEF-8CCD-DBF5AF3D01FB}" presName="connectorText" presStyleLbl="sibTrans2D1" presStyleIdx="2" presStyleCnt="5"/>
+      <dgm:spPr/>
+    </dgm:pt>
+    <dgm:pt modelId="{AFFFF243-A2A0-4417-8B14-5F75DD2AC77F}" type="pres">
+      <dgm:prSet presAssocID="{71AB97B4-AAF4-4C99-87DF-20848B31FAF5}" presName="node" presStyleLbl="node1" presStyleIdx="3" presStyleCnt="5" custScaleX="116633">
+        <dgm:presLayoutVars>
+          <dgm:bulletEnabled val="1"/>
+        </dgm:presLayoutVars>
+      </dgm:prSet>
+      <dgm:spPr/>
+    </dgm:pt>
+    <dgm:pt modelId="{C5AE1C9D-722A-43BE-8CC8-B5AE73CCB3BE}" type="pres">
+      <dgm:prSet presAssocID="{8B17F99F-FCB8-4E0A-B6DD-2282DAA37D00}" presName="sibTrans" presStyleLbl="sibTrans2D1" presStyleIdx="3" presStyleCnt="5"/>
+      <dgm:spPr/>
+    </dgm:pt>
+    <dgm:pt modelId="{C36D9C46-12A0-4BA1-B670-421BD1ACF129}" type="pres">
+      <dgm:prSet presAssocID="{8B17F99F-FCB8-4E0A-B6DD-2282DAA37D00}" presName="connectorText" presStyleLbl="sibTrans2D1" presStyleIdx="3" presStyleCnt="5"/>
+      <dgm:spPr/>
+    </dgm:pt>
+    <dgm:pt modelId="{DEDBA954-66BD-488A-8493-643BFEFDF428}" type="pres">
+      <dgm:prSet presAssocID="{38855099-1905-4F79-8CCD-31204D1AB960}" presName="node" presStyleLbl="node1" presStyleIdx="4" presStyleCnt="5" custScaleX="116633">
+        <dgm:presLayoutVars>
+          <dgm:bulletEnabled val="1"/>
+        </dgm:presLayoutVars>
+      </dgm:prSet>
+      <dgm:spPr/>
+    </dgm:pt>
+    <dgm:pt modelId="{EA4C88B1-DA36-4455-A223-63557ED22F22}" type="pres">
+      <dgm:prSet presAssocID="{1BE69C16-BF18-4576-B0C8-17093FDA8914}" presName="sibTrans" presStyleLbl="sibTrans2D1" presStyleIdx="4" presStyleCnt="5"/>
+      <dgm:spPr/>
+    </dgm:pt>
+    <dgm:pt modelId="{37E736F6-84A5-4986-95AE-AE1D41CFF4CE}" type="pres">
+      <dgm:prSet presAssocID="{1BE69C16-BF18-4576-B0C8-17093FDA8914}" presName="connectorText" presStyleLbl="sibTrans2D1" presStyleIdx="4" presStyleCnt="5"/>
+      <dgm:spPr/>
+    </dgm:pt>
+  </dgm:ptLst>
+  <dgm:cxnLst>
+    <dgm:cxn modelId="{AA344300-8558-44CE-B368-8C2E28849CC4}" type="presOf" srcId="{1BE69C16-BF18-4576-B0C8-17093FDA8914}" destId="{EA4C88B1-DA36-4455-A223-63557ED22F22}" srcOrd="0" destOrd="0" presId="urn:microsoft.com/office/officeart/2005/8/layout/cycle2"/>
+    <dgm:cxn modelId="{0C946404-E809-4081-932A-0020E2C0EE3D}" srcId="{EDA263C0-EE2F-4366-9134-696C45648023}" destId="{71AB97B4-AAF4-4C99-87DF-20848B31FAF5}" srcOrd="3" destOrd="0" parTransId="{EFAC0E68-0879-4C5D-AB89-A3C13A1B3562}" sibTransId="{8B17F99F-FCB8-4E0A-B6DD-2282DAA37D00}"/>
+    <dgm:cxn modelId="{7CBB7536-1DC6-4C67-BD1D-F032BDA2A99F}" type="presOf" srcId="{06ECD0EC-0915-46EE-86FB-2B3DEDB40DED}" destId="{DAE5BAA0-1560-45C2-A35A-D27DC9B249F6}" srcOrd="1" destOrd="0" presId="urn:microsoft.com/office/officeart/2005/8/layout/cycle2"/>
+    <dgm:cxn modelId="{7F592A67-1A12-4888-B3B5-D190BCB37151}" type="presOf" srcId="{06ECD0EC-0915-46EE-86FB-2B3DEDB40DED}" destId="{B1E1ACD3-6EA3-4063-80C9-DF89B2BB530E}" srcOrd="0" destOrd="0" presId="urn:microsoft.com/office/officeart/2005/8/layout/cycle2"/>
+    <dgm:cxn modelId="{F616D24C-9CBC-4549-AA19-2AD78C6224BE}" type="presOf" srcId="{71AB97B4-AAF4-4C99-87DF-20848B31FAF5}" destId="{AFFFF243-A2A0-4417-8B14-5F75DD2AC77F}" srcOrd="0" destOrd="0" presId="urn:microsoft.com/office/officeart/2005/8/layout/cycle2"/>
+    <dgm:cxn modelId="{1779F974-BA9F-49FE-A3CC-9382D36E838B}" type="presOf" srcId="{8B17F99F-FCB8-4E0A-B6DD-2282DAA37D00}" destId="{C36D9C46-12A0-4BA1-B670-421BD1ACF129}" srcOrd="1" destOrd="0" presId="urn:microsoft.com/office/officeart/2005/8/layout/cycle2"/>
+    <dgm:cxn modelId="{5237E377-2C5F-4BA1-B3C7-A20804D8A7F8}" type="presOf" srcId="{EDA263C0-EE2F-4366-9134-696C45648023}" destId="{FC679087-3FB4-4E5B-BC6B-C1319E9C726B}" srcOrd="0" destOrd="0" presId="urn:microsoft.com/office/officeart/2005/8/layout/cycle2"/>
+    <dgm:cxn modelId="{2FE6267A-1C6D-4139-A5E1-4D61B4CD6EDD}" type="presOf" srcId="{8B17F99F-FCB8-4E0A-B6DD-2282DAA37D00}" destId="{C5AE1C9D-722A-43BE-8CC8-B5AE73CCB3BE}" srcOrd="0" destOrd="0" presId="urn:microsoft.com/office/officeart/2005/8/layout/cycle2"/>
+    <dgm:cxn modelId="{CE64D18B-FF8D-4FCE-B713-7E70261BF67F}" type="presOf" srcId="{38855099-1905-4F79-8CCD-31204D1AB960}" destId="{DEDBA954-66BD-488A-8493-643BFEFDF428}" srcOrd="0" destOrd="0" presId="urn:microsoft.com/office/officeart/2005/8/layout/cycle2"/>
+    <dgm:cxn modelId="{48B85D8D-2E94-4FCA-9AF6-E99DEA55857D}" type="presOf" srcId="{3F398D3C-2B75-4F3F-8F24-536C53BBCDD1}" destId="{DB55DD81-05F5-4974-9AE1-7CE87221E798}" srcOrd="0" destOrd="0" presId="urn:microsoft.com/office/officeart/2005/8/layout/cycle2"/>
+    <dgm:cxn modelId="{F462E091-4CD2-47FA-A917-5662106C3EE7}" type="presOf" srcId="{1BE69C16-BF18-4576-B0C8-17093FDA8914}" destId="{37E736F6-84A5-4986-95AE-AE1D41CFF4CE}" srcOrd="1" destOrd="0" presId="urn:microsoft.com/office/officeart/2005/8/layout/cycle2"/>
+    <dgm:cxn modelId="{867ADC9C-54CA-43BE-BABC-EBB74918E927}" type="presOf" srcId="{1CF696E8-9051-46C9-9F86-6DCD75FBC9B7}" destId="{1D75FA47-7B0C-4CDF-8CA9-BF907DEF78FD}" srcOrd="0" destOrd="0" presId="urn:microsoft.com/office/officeart/2005/8/layout/cycle2"/>
+    <dgm:cxn modelId="{A9EBB7AE-6A6F-4687-944A-FFD1B0B2BB9E}" type="presOf" srcId="{65D4780A-73B0-44D0-B038-4524459001FB}" destId="{EAA376BF-2DF1-48E5-BA57-B69989683ABE}" srcOrd="1" destOrd="0" presId="urn:microsoft.com/office/officeart/2005/8/layout/cycle2"/>
+    <dgm:cxn modelId="{0B3B78B3-F911-429C-86F5-B65A633F2D87}" type="presOf" srcId="{B79A86F2-E66C-4AEF-8CCD-DBF5AF3D01FB}" destId="{9E6E5E77-8B31-4F9E-AD7E-603A79DD2C86}" srcOrd="1" destOrd="0" presId="urn:microsoft.com/office/officeart/2005/8/layout/cycle2"/>
+    <dgm:cxn modelId="{DAAE87BF-0454-4870-8BFD-434338D4F71B}" type="presOf" srcId="{65D4780A-73B0-44D0-B038-4524459001FB}" destId="{BEA5F634-EF32-45E1-B7B5-668F5BAF88A2}" srcOrd="0" destOrd="0" presId="urn:microsoft.com/office/officeart/2005/8/layout/cycle2"/>
+    <dgm:cxn modelId="{DCB42DCE-458A-4CF5-AED4-BA71C57140B9}" srcId="{EDA263C0-EE2F-4366-9134-696C45648023}" destId="{3F398D3C-2B75-4F3F-8F24-536C53BBCDD1}" srcOrd="1" destOrd="0" parTransId="{E68CD0DC-BB2A-490C-B80E-316E761D165C}" sibTransId="{06ECD0EC-0915-46EE-86FB-2B3DEDB40DED}"/>
+    <dgm:cxn modelId="{CABE5CD7-FCEA-48ED-BAF6-0AB3CC5A5F53}" type="presOf" srcId="{B79A86F2-E66C-4AEF-8CCD-DBF5AF3D01FB}" destId="{D5C2AB2F-7F49-4E35-9F81-4F0745EC9C50}" srcOrd="0" destOrd="0" presId="urn:microsoft.com/office/officeart/2005/8/layout/cycle2"/>
+    <dgm:cxn modelId="{9DB545DA-6B0B-4E9A-8547-69BA0493B2ED}" srcId="{EDA263C0-EE2F-4366-9134-696C45648023}" destId="{FF1F4054-6BB4-4B6A-8E4B-5D3AE4116095}" srcOrd="2" destOrd="0" parTransId="{7B2E9757-BDBD-4AAD-94ED-B719B09623F9}" sibTransId="{B79A86F2-E66C-4AEF-8CCD-DBF5AF3D01FB}"/>
+    <dgm:cxn modelId="{6C9EA9DD-FDB7-4E56-8883-A0FDA43D6D06}" type="presOf" srcId="{FF1F4054-6BB4-4B6A-8E4B-5D3AE4116095}" destId="{5C353729-11E0-4381-ADFB-B7C642AB34E5}" srcOrd="0" destOrd="0" presId="urn:microsoft.com/office/officeart/2005/8/layout/cycle2"/>
+    <dgm:cxn modelId="{CC84E1E7-CD46-4851-AB7A-2A2939B4EFB0}" srcId="{EDA263C0-EE2F-4366-9134-696C45648023}" destId="{1CF696E8-9051-46C9-9F86-6DCD75FBC9B7}" srcOrd="0" destOrd="0" parTransId="{E0F12A04-E419-463D-85CF-B233B5CC6044}" sibTransId="{65D4780A-73B0-44D0-B038-4524459001FB}"/>
+    <dgm:cxn modelId="{FAAF2FE9-44FC-4D34-9060-049C4D2F88DC}" srcId="{EDA263C0-EE2F-4366-9134-696C45648023}" destId="{38855099-1905-4F79-8CCD-31204D1AB960}" srcOrd="4" destOrd="0" parTransId="{0309E77D-20CA-4C7B-BB61-8A693A6CA862}" sibTransId="{1BE69C16-BF18-4576-B0C8-17093FDA8914}"/>
+    <dgm:cxn modelId="{B4875C8F-1E47-4724-8080-15BA1039553C}" type="presParOf" srcId="{FC679087-3FB4-4E5B-BC6B-C1319E9C726B}" destId="{1D75FA47-7B0C-4CDF-8CA9-BF907DEF78FD}" srcOrd="0" destOrd="0" presId="urn:microsoft.com/office/officeart/2005/8/layout/cycle2"/>
+    <dgm:cxn modelId="{B904A61E-2638-4A86-986C-458712CC04D2}" type="presParOf" srcId="{FC679087-3FB4-4E5B-BC6B-C1319E9C726B}" destId="{BEA5F634-EF32-45E1-B7B5-668F5BAF88A2}" srcOrd="1" destOrd="0" presId="urn:microsoft.com/office/officeart/2005/8/layout/cycle2"/>
+    <dgm:cxn modelId="{19A09CF9-3A31-48EF-A86B-00724B3C4D08}" type="presParOf" srcId="{BEA5F634-EF32-45E1-B7B5-668F5BAF88A2}" destId="{EAA376BF-2DF1-48E5-BA57-B69989683ABE}" srcOrd="0" destOrd="0" presId="urn:microsoft.com/office/officeart/2005/8/layout/cycle2"/>
+    <dgm:cxn modelId="{0EBDF987-7405-4F5A-9CA7-55332D3642F5}" type="presParOf" srcId="{FC679087-3FB4-4E5B-BC6B-C1319E9C726B}" destId="{DB55DD81-05F5-4974-9AE1-7CE87221E798}" srcOrd="2" destOrd="0" presId="urn:microsoft.com/office/officeart/2005/8/layout/cycle2"/>
+    <dgm:cxn modelId="{474AF73E-EFE3-460A-BE2B-36DE9DE508A0}" type="presParOf" srcId="{FC679087-3FB4-4E5B-BC6B-C1319E9C726B}" destId="{B1E1ACD3-6EA3-4063-80C9-DF89B2BB530E}" srcOrd="3" destOrd="0" presId="urn:microsoft.com/office/officeart/2005/8/layout/cycle2"/>
+    <dgm:cxn modelId="{85FA08B0-2F8A-43E0-B30A-71C8717D55A7}" type="presParOf" srcId="{B1E1ACD3-6EA3-4063-80C9-DF89B2BB530E}" destId="{DAE5BAA0-1560-45C2-A35A-D27DC9B249F6}" srcOrd="0" destOrd="0" presId="urn:microsoft.com/office/officeart/2005/8/layout/cycle2"/>
+    <dgm:cxn modelId="{FD0AF3D0-9C24-427B-A1CC-B59F83A4ED5D}" type="presParOf" srcId="{FC679087-3FB4-4E5B-BC6B-C1319E9C726B}" destId="{5C353729-11E0-4381-ADFB-B7C642AB34E5}" srcOrd="4" destOrd="0" presId="urn:microsoft.com/office/officeart/2005/8/layout/cycle2"/>
+    <dgm:cxn modelId="{9E32FF9C-7F05-4CEB-BB9C-B21513C6373F}" type="presParOf" srcId="{FC679087-3FB4-4E5B-BC6B-C1319E9C726B}" destId="{D5C2AB2F-7F49-4E35-9F81-4F0745EC9C50}" srcOrd="5" destOrd="0" presId="urn:microsoft.com/office/officeart/2005/8/layout/cycle2"/>
+    <dgm:cxn modelId="{D43A87C0-12C0-432E-8E87-D78D7C98E01B}" type="presParOf" srcId="{D5C2AB2F-7F49-4E35-9F81-4F0745EC9C50}" destId="{9E6E5E77-8B31-4F9E-AD7E-603A79DD2C86}" srcOrd="0" destOrd="0" presId="urn:microsoft.com/office/officeart/2005/8/layout/cycle2"/>
+    <dgm:cxn modelId="{7E6AEC29-D6D8-4223-8B5C-FE26D5DB895E}" type="presParOf" srcId="{FC679087-3FB4-4E5B-BC6B-C1319E9C726B}" destId="{AFFFF243-A2A0-4417-8B14-5F75DD2AC77F}" srcOrd="6" destOrd="0" presId="urn:microsoft.com/office/officeart/2005/8/layout/cycle2"/>
+    <dgm:cxn modelId="{689C261D-5F16-4AC4-A1BA-E299008198C3}" type="presParOf" srcId="{FC679087-3FB4-4E5B-BC6B-C1319E9C726B}" destId="{C5AE1C9D-722A-43BE-8CC8-B5AE73CCB3BE}" srcOrd="7" destOrd="0" presId="urn:microsoft.com/office/officeart/2005/8/layout/cycle2"/>
+    <dgm:cxn modelId="{64131C4A-464E-404E-9A80-77F49A29EA51}" type="presParOf" srcId="{C5AE1C9D-722A-43BE-8CC8-B5AE73CCB3BE}" destId="{C36D9C46-12A0-4BA1-B670-421BD1ACF129}" srcOrd="0" destOrd="0" presId="urn:microsoft.com/office/officeart/2005/8/layout/cycle2"/>
+    <dgm:cxn modelId="{906030E7-7C01-4C38-B2F0-10E122318BEC}" type="presParOf" srcId="{FC679087-3FB4-4E5B-BC6B-C1319E9C726B}" destId="{DEDBA954-66BD-488A-8493-643BFEFDF428}" srcOrd="8" destOrd="0" presId="urn:microsoft.com/office/officeart/2005/8/layout/cycle2"/>
+    <dgm:cxn modelId="{8C3F1920-2599-406C-88CC-8B6524BEF440}" type="presParOf" srcId="{FC679087-3FB4-4E5B-BC6B-C1319E9C726B}" destId="{EA4C88B1-DA36-4455-A223-63557ED22F22}" srcOrd="9" destOrd="0" presId="urn:microsoft.com/office/officeart/2005/8/layout/cycle2"/>
+    <dgm:cxn modelId="{F9E8323F-1AB7-4BB6-B8A7-BC986739E534}" type="presParOf" srcId="{EA4C88B1-DA36-4455-A223-63557ED22F22}" destId="{37E736F6-84A5-4986-95AE-AE1D41CFF4CE}" srcOrd="0" destOrd="0" presId="urn:microsoft.com/office/officeart/2005/8/layout/cycle2"/>
+  </dgm:cxnLst>
+  <dgm:bg/>
+  <dgm:whole/>
+  <dgm:extLst>
+    <a:ext uri="http://schemas.microsoft.com/office/drawing/2008/diagram">
+      <dsp:dataModelExt xmlns:dsp="http://schemas.microsoft.com/office/drawing/2008/diagram" relId="rId10" minVer="http://schemas.openxmlformats.org/drawingml/2006/diagram"/>
+    </a:ext>
+  </dgm:extLst>
+</dgm:dataModel>
+</file>
+
+<file path=ppt/diagrams/drawing1.xml><?xml version="1.0" encoding="utf-8"?>
+<dsp:drawing xmlns:dgm="http://schemas.openxmlformats.org/drawingml/2006/diagram" xmlns:dsp="http://schemas.microsoft.com/office/drawing/2008/diagram" xmlns:a="http://schemas.openxmlformats.org/drawingml/2006/main">
+  <dsp:spTree>
+    <dsp:nvGrpSpPr>
+      <dsp:cNvPr id="0" name=""/>
+      <dsp:cNvGrpSpPr/>
+    </dsp:nvGrpSpPr>
+    <dsp:grpSpPr/>
+    <dsp:sp modelId="{1D75FA47-7B0C-4CDF-8CA9-BF907DEF78FD}">
+      <dsp:nvSpPr>
+        <dsp:cNvPr id="0" name=""/>
+        <dsp:cNvSpPr/>
+      </dsp:nvSpPr>
+      <dsp:spPr>
+        <a:xfrm>
+          <a:off x="1969835" y="434"/>
+          <a:ext cx="1035611" cy="887922"/>
+        </a:xfrm>
+        <a:prstGeom prst="ellipse">
+          <a:avLst/>
+        </a:prstGeom>
+        <a:solidFill>
+          <a:schemeClr val="accent3">
+            <a:hueOff val="0"/>
+            <a:satOff val="0"/>
+            <a:lumOff val="0"/>
+            <a:alphaOff val="0"/>
+          </a:schemeClr>
+        </a:solidFill>
+        <a:ln w="12700" cap="flat" cmpd="sng" algn="ctr">
+          <a:solidFill>
+            <a:schemeClr val="lt1">
+              <a:hueOff val="0"/>
+              <a:satOff val="0"/>
+              <a:lumOff val="0"/>
+              <a:alphaOff val="0"/>
+            </a:schemeClr>
+          </a:solidFill>
+          <a:prstDash val="solid"/>
+          <a:miter lim="800000"/>
+        </a:ln>
+        <a:effectLst/>
+      </dsp:spPr>
+      <dsp:style>
+        <a:lnRef idx="2">
+          <a:scrgbClr r="0" g="0" b="0"/>
+        </a:lnRef>
+        <a:fillRef idx="1">
+          <a:scrgbClr r="0" g="0" b="0"/>
+        </a:fillRef>
+        <a:effectRef idx="0">
+          <a:scrgbClr r="0" g="0" b="0"/>
+        </a:effectRef>
+        <a:fontRef idx="minor">
+          <a:schemeClr val="lt1"/>
+        </a:fontRef>
+      </dsp:style>
+      <dsp:txBody>
+        <a:bodyPr spcFirstLastPara="0" vert="horz" wrap="square" lIns="15240" tIns="15240" rIns="15240" bIns="15240" numCol="1" spcCol="1270" anchor="ctr" anchorCtr="0">
+          <a:noAutofit/>
+        </a:bodyPr>
+        <a:lstStyle/>
+        <a:p>
+          <a:pPr marL="0" lvl="0" indent="0" algn="ctr" defTabSz="533400">
+            <a:lnSpc>
+              <a:spcPct val="90000"/>
+            </a:lnSpc>
+            <a:spcBef>
+              <a:spcPct val="0"/>
+            </a:spcBef>
+            <a:spcAft>
+              <a:spcPct val="35000"/>
+            </a:spcAft>
+            <a:buNone/>
+          </a:pPr>
+          <a:r>
+            <a:rPr lang="en-US" sz="1200" b="1" kern="1200" dirty="0">
+              <a:solidFill>
+                <a:schemeClr val="bg1"/>
+              </a:solidFill>
+            </a:rPr>
+            <a:t>Prepare</a:t>
+          </a:r>
+        </a:p>
+      </dsp:txBody>
+      <dsp:txXfrm>
+        <a:off x="2121497" y="130467"/>
+        <a:ext cx="732287" cy="627856"/>
+      </dsp:txXfrm>
+    </dsp:sp>
+    <dsp:sp modelId="{BEA5F634-EF32-45E1-B7B5-668F5BAF88A2}">
+      <dsp:nvSpPr>
+        <dsp:cNvPr id="0" name=""/>
+        <dsp:cNvSpPr/>
+      </dsp:nvSpPr>
+      <dsp:spPr>
+        <a:xfrm rot="2160000">
+          <a:off x="2928311" y="683689"/>
+          <a:ext cx="189845" cy="299673"/>
+        </a:xfrm>
+        <a:prstGeom prst="rightArrow">
+          <a:avLst>
+            <a:gd name="adj1" fmla="val 60000"/>
+            <a:gd name="adj2" fmla="val 50000"/>
+          </a:avLst>
+        </a:prstGeom>
+        <a:solidFill>
+          <a:schemeClr val="accent3">
+            <a:hueOff val="0"/>
+            <a:satOff val="0"/>
+            <a:lumOff val="0"/>
+            <a:alphaOff val="0"/>
+          </a:schemeClr>
+        </a:solidFill>
+        <a:ln>
+          <a:noFill/>
+        </a:ln>
+        <a:effectLst/>
+      </dsp:spPr>
+      <dsp:style>
+        <a:lnRef idx="0">
+          <a:scrgbClr r="0" g="0" b="0"/>
+        </a:lnRef>
+        <a:fillRef idx="1">
+          <a:scrgbClr r="0" g="0" b="0"/>
+        </a:fillRef>
+        <a:effectRef idx="0">
+          <a:scrgbClr r="0" g="0" b="0"/>
+        </a:effectRef>
+        <a:fontRef idx="minor">
+          <a:schemeClr val="lt1"/>
+        </a:fontRef>
+      </dsp:style>
+      <dsp:txBody>
+        <a:bodyPr spcFirstLastPara="0" vert="horz" wrap="square" lIns="0" tIns="0" rIns="0" bIns="0" numCol="1" spcCol="1270" anchor="ctr" anchorCtr="0">
+          <a:noAutofit/>
+        </a:bodyPr>
+        <a:lstStyle/>
+        <a:p>
+          <a:pPr marL="0" lvl="0" indent="0" algn="ctr" defTabSz="444500">
+            <a:lnSpc>
+              <a:spcPct val="90000"/>
+            </a:lnSpc>
+            <a:spcBef>
+              <a:spcPct val="0"/>
+            </a:spcBef>
+            <a:spcAft>
+              <a:spcPct val="35000"/>
+            </a:spcAft>
+            <a:buNone/>
+          </a:pPr>
+          <a:endParaRPr lang="en-US" sz="1000" b="1" kern="1200">
+            <a:solidFill>
+              <a:schemeClr val="bg1"/>
+            </a:solidFill>
+          </a:endParaRPr>
+        </a:p>
+      </dsp:txBody>
+      <dsp:txXfrm>
+        <a:off x="2933750" y="726886"/>
+        <a:ext cx="132892" cy="179803"/>
+      </dsp:txXfrm>
+    </dsp:sp>
+    <dsp:sp modelId="{DB55DD81-05F5-4974-9AE1-7CE87221E798}">
+      <dsp:nvSpPr>
+        <dsp:cNvPr id="0" name=""/>
+        <dsp:cNvSpPr/>
+      </dsp:nvSpPr>
+      <dsp:spPr>
+        <a:xfrm>
+          <a:off x="3049715" y="785012"/>
+          <a:ext cx="1035611" cy="887922"/>
+        </a:xfrm>
+        <a:prstGeom prst="ellipse">
+          <a:avLst/>
+        </a:prstGeom>
+        <a:solidFill>
+          <a:schemeClr val="accent3">
+            <a:hueOff val="-4581898"/>
+            <a:satOff val="0"/>
+            <a:lumOff val="-4755"/>
+            <a:alphaOff val="0"/>
+          </a:schemeClr>
+        </a:solidFill>
+        <a:ln w="12700" cap="flat" cmpd="sng" algn="ctr">
+          <a:solidFill>
+            <a:schemeClr val="lt1">
+              <a:hueOff val="0"/>
+              <a:satOff val="0"/>
+              <a:lumOff val="0"/>
+              <a:alphaOff val="0"/>
+            </a:schemeClr>
+          </a:solidFill>
+          <a:prstDash val="solid"/>
+          <a:miter lim="800000"/>
+        </a:ln>
+        <a:effectLst/>
+      </dsp:spPr>
+      <dsp:style>
+        <a:lnRef idx="2">
+          <a:scrgbClr r="0" g="0" b="0"/>
+        </a:lnRef>
+        <a:fillRef idx="1">
+          <a:scrgbClr r="0" g="0" b="0"/>
+        </a:fillRef>
+        <a:effectRef idx="0">
+          <a:scrgbClr r="0" g="0" b="0"/>
+        </a:effectRef>
+        <a:fontRef idx="minor">
+          <a:schemeClr val="lt1"/>
+        </a:fontRef>
+      </dsp:style>
+      <dsp:txBody>
+        <a:bodyPr spcFirstLastPara="0" vert="horz" wrap="square" lIns="15240" tIns="15240" rIns="15240" bIns="15240" numCol="1" spcCol="1270" anchor="ctr" anchorCtr="0">
+          <a:noAutofit/>
+        </a:bodyPr>
+        <a:lstStyle/>
+        <a:p>
+          <a:pPr marL="0" lvl="0" indent="0" algn="ctr" defTabSz="533400">
+            <a:lnSpc>
+              <a:spcPct val="90000"/>
+            </a:lnSpc>
+            <a:spcBef>
+              <a:spcPct val="0"/>
+            </a:spcBef>
+            <a:spcAft>
+              <a:spcPct val="35000"/>
+            </a:spcAft>
+            <a:buNone/>
+          </a:pPr>
+          <a:r>
+            <a:rPr lang="en-US" sz="1200" b="1" kern="1200" dirty="0">
+              <a:solidFill>
+                <a:schemeClr val="bg1"/>
+              </a:solidFill>
+            </a:rPr>
+            <a:t>Model</a:t>
+          </a:r>
+        </a:p>
+      </dsp:txBody>
+      <dsp:txXfrm>
+        <a:off x="3201377" y="915045"/>
+        <a:ext cx="732287" cy="627856"/>
+      </dsp:txXfrm>
+    </dsp:sp>
+    <dsp:sp modelId="{B1E1ACD3-6EA3-4063-80C9-DF89B2BB530E}">
+      <dsp:nvSpPr>
+        <dsp:cNvPr id="0" name=""/>
+        <dsp:cNvSpPr/>
+      </dsp:nvSpPr>
+      <dsp:spPr>
+        <a:xfrm rot="6480000">
+          <a:off x="3247910" y="1707661"/>
+          <a:ext cx="230779" cy="299673"/>
+        </a:xfrm>
+        <a:prstGeom prst="rightArrow">
+          <a:avLst>
+            <a:gd name="adj1" fmla="val 60000"/>
+            <a:gd name="adj2" fmla="val 50000"/>
+          </a:avLst>
+        </a:prstGeom>
+        <a:solidFill>
+          <a:schemeClr val="accent3">
+            <a:hueOff val="-4581898"/>
+            <a:satOff val="0"/>
+            <a:lumOff val="-4755"/>
+            <a:alphaOff val="0"/>
+          </a:schemeClr>
+        </a:solidFill>
+        <a:ln>
+          <a:noFill/>
+        </a:ln>
+        <a:effectLst/>
+      </dsp:spPr>
+      <dsp:style>
+        <a:lnRef idx="0">
+          <a:scrgbClr r="0" g="0" b="0"/>
+        </a:lnRef>
+        <a:fillRef idx="1">
+          <a:scrgbClr r="0" g="0" b="0"/>
+        </a:fillRef>
+        <a:effectRef idx="0">
+          <a:scrgbClr r="0" g="0" b="0"/>
+        </a:effectRef>
+        <a:fontRef idx="minor">
+          <a:schemeClr val="lt1"/>
+        </a:fontRef>
+      </dsp:style>
+      <dsp:txBody>
+        <a:bodyPr spcFirstLastPara="0" vert="horz" wrap="square" lIns="0" tIns="0" rIns="0" bIns="0" numCol="1" spcCol="1270" anchor="ctr" anchorCtr="0">
+          <a:noAutofit/>
+        </a:bodyPr>
+        <a:lstStyle/>
+        <a:p>
+          <a:pPr marL="0" lvl="0" indent="0" algn="ctr" defTabSz="444500">
+            <a:lnSpc>
+              <a:spcPct val="90000"/>
+            </a:lnSpc>
+            <a:spcBef>
+              <a:spcPct val="0"/>
+            </a:spcBef>
+            <a:spcAft>
+              <a:spcPct val="35000"/>
+            </a:spcAft>
+            <a:buNone/>
+          </a:pPr>
+          <a:endParaRPr lang="en-US" sz="1000" b="1" kern="1200">
+            <a:solidFill>
+              <a:schemeClr val="bg1"/>
+            </a:solidFill>
+          </a:endParaRPr>
+        </a:p>
+      </dsp:txBody>
+      <dsp:txXfrm rot="10800000">
+        <a:off x="3293224" y="1734673"/>
+        <a:ext cx="161545" cy="179803"/>
+      </dsp:txXfrm>
+    </dsp:sp>
+    <dsp:sp modelId="{5C353729-11E0-4381-ADFB-B7C642AB34E5}">
+      <dsp:nvSpPr>
+        <dsp:cNvPr id="0" name=""/>
+        <dsp:cNvSpPr/>
+      </dsp:nvSpPr>
+      <dsp:spPr>
+        <a:xfrm>
+          <a:off x="2637237" y="2054486"/>
+          <a:ext cx="1035611" cy="887922"/>
+        </a:xfrm>
+        <a:prstGeom prst="ellipse">
+          <a:avLst/>
+        </a:prstGeom>
+        <a:solidFill>
+          <a:schemeClr val="accent3">
+            <a:hueOff val="-9163796"/>
+            <a:satOff val="0"/>
+            <a:lumOff val="-9509"/>
+            <a:alphaOff val="0"/>
+          </a:schemeClr>
+        </a:solidFill>
+        <a:ln w="12700" cap="flat" cmpd="sng" algn="ctr">
+          <a:solidFill>
+            <a:schemeClr val="lt1">
+              <a:hueOff val="0"/>
+              <a:satOff val="0"/>
+              <a:lumOff val="0"/>
+              <a:alphaOff val="0"/>
+            </a:schemeClr>
+          </a:solidFill>
+          <a:prstDash val="solid"/>
+          <a:miter lim="800000"/>
+        </a:ln>
+        <a:effectLst/>
+      </dsp:spPr>
+      <dsp:style>
+        <a:lnRef idx="2">
+          <a:scrgbClr r="0" g="0" b="0"/>
+        </a:lnRef>
+        <a:fillRef idx="1">
+          <a:scrgbClr r="0" g="0" b="0"/>
+        </a:fillRef>
+        <a:effectRef idx="0">
+          <a:scrgbClr r="0" g="0" b="0"/>
+        </a:effectRef>
+        <a:fontRef idx="minor">
+          <a:schemeClr val="lt1"/>
+        </a:fontRef>
+      </dsp:style>
+      <dsp:txBody>
+        <a:bodyPr spcFirstLastPara="0" vert="horz" wrap="square" lIns="15240" tIns="15240" rIns="15240" bIns="15240" numCol="1" spcCol="1270" anchor="ctr" anchorCtr="0">
+          <a:noAutofit/>
+        </a:bodyPr>
+        <a:lstStyle/>
+        <a:p>
+          <a:pPr marL="0" lvl="0" indent="0" algn="ctr" defTabSz="533400">
+            <a:lnSpc>
+              <a:spcPct val="90000"/>
+            </a:lnSpc>
+            <a:spcBef>
+              <a:spcPct val="0"/>
+            </a:spcBef>
+            <a:spcAft>
+              <a:spcPct val="35000"/>
+            </a:spcAft>
+            <a:buNone/>
+          </a:pPr>
+          <a:r>
+            <a:rPr lang="en-US" sz="1200" b="1" kern="1200" dirty="0">
+              <a:solidFill>
+                <a:schemeClr val="bg1"/>
+              </a:solidFill>
+            </a:rPr>
+            <a:t>Visualize</a:t>
+          </a:r>
+        </a:p>
+      </dsp:txBody>
+      <dsp:txXfrm>
+        <a:off x="2788899" y="2184519"/>
+        <a:ext cx="732287" cy="627856"/>
+      </dsp:txXfrm>
+    </dsp:sp>
+    <dsp:sp modelId="{D5C2AB2F-7F49-4E35-9F81-4F0745EC9C50}">
+      <dsp:nvSpPr>
+        <dsp:cNvPr id="0" name=""/>
+        <dsp:cNvSpPr/>
+      </dsp:nvSpPr>
+      <dsp:spPr>
+        <a:xfrm rot="10800000">
+          <a:off x="2412843" y="2348610"/>
+          <a:ext cx="158572" cy="299673"/>
+        </a:xfrm>
+        <a:prstGeom prst="rightArrow">
+          <a:avLst>
+            <a:gd name="adj1" fmla="val 60000"/>
+            <a:gd name="adj2" fmla="val 50000"/>
+          </a:avLst>
+        </a:prstGeom>
+        <a:solidFill>
+          <a:schemeClr val="accent3">
+            <a:hueOff val="-9163796"/>
+            <a:satOff val="0"/>
+            <a:lumOff val="-9509"/>
+            <a:alphaOff val="0"/>
+          </a:schemeClr>
+        </a:solidFill>
+        <a:ln>
+          <a:noFill/>
+        </a:ln>
+        <a:effectLst/>
+      </dsp:spPr>
+      <dsp:style>
+        <a:lnRef idx="0">
+          <a:scrgbClr r="0" g="0" b="0"/>
+        </a:lnRef>
+        <a:fillRef idx="1">
+          <a:scrgbClr r="0" g="0" b="0"/>
+        </a:fillRef>
+        <a:effectRef idx="0">
+          <a:scrgbClr r="0" g="0" b="0"/>
+        </a:effectRef>
+        <a:fontRef idx="minor">
+          <a:schemeClr val="lt1"/>
+        </a:fontRef>
+      </dsp:style>
+      <dsp:txBody>
+        <a:bodyPr spcFirstLastPara="0" vert="horz" wrap="square" lIns="0" tIns="0" rIns="0" bIns="0" numCol="1" spcCol="1270" anchor="ctr" anchorCtr="0">
+          <a:noAutofit/>
+        </a:bodyPr>
+        <a:lstStyle/>
+        <a:p>
+          <a:pPr marL="0" lvl="0" indent="0" algn="ctr" defTabSz="444500">
+            <a:lnSpc>
+              <a:spcPct val="90000"/>
+            </a:lnSpc>
+            <a:spcBef>
+              <a:spcPct val="0"/>
+            </a:spcBef>
+            <a:spcAft>
+              <a:spcPct val="35000"/>
+            </a:spcAft>
+            <a:buNone/>
+          </a:pPr>
+          <a:endParaRPr lang="en-US" sz="1000" b="1" kern="1200">
+            <a:solidFill>
+              <a:schemeClr val="bg1"/>
+            </a:solidFill>
+          </a:endParaRPr>
+        </a:p>
+      </dsp:txBody>
+      <dsp:txXfrm rot="10800000">
+        <a:off x="2460415" y="2408545"/>
+        <a:ext cx="111000" cy="179803"/>
+      </dsp:txXfrm>
+    </dsp:sp>
+    <dsp:sp modelId="{AFFFF243-A2A0-4417-8B14-5F75DD2AC77F}">
+      <dsp:nvSpPr>
+        <dsp:cNvPr id="0" name=""/>
+        <dsp:cNvSpPr/>
+      </dsp:nvSpPr>
+      <dsp:spPr>
+        <a:xfrm>
+          <a:off x="1302434" y="2054486"/>
+          <a:ext cx="1035611" cy="887922"/>
+        </a:xfrm>
+        <a:prstGeom prst="ellipse">
+          <a:avLst/>
+        </a:prstGeom>
+        <a:solidFill>
+          <a:schemeClr val="accent3">
+            <a:hueOff val="-13745695"/>
+            <a:satOff val="0"/>
+            <a:lumOff val="-14264"/>
+            <a:alphaOff val="0"/>
+          </a:schemeClr>
+        </a:solidFill>
+        <a:ln w="12700" cap="flat" cmpd="sng" algn="ctr">
+          <a:solidFill>
+            <a:schemeClr val="lt1">
+              <a:hueOff val="0"/>
+              <a:satOff val="0"/>
+              <a:lumOff val="0"/>
+              <a:alphaOff val="0"/>
+            </a:schemeClr>
+          </a:solidFill>
+          <a:prstDash val="solid"/>
+          <a:miter lim="800000"/>
+        </a:ln>
+        <a:effectLst/>
+      </dsp:spPr>
+      <dsp:style>
+        <a:lnRef idx="2">
+          <a:scrgbClr r="0" g="0" b="0"/>
+        </a:lnRef>
+        <a:fillRef idx="1">
+          <a:scrgbClr r="0" g="0" b="0"/>
+        </a:fillRef>
+        <a:effectRef idx="0">
+          <a:scrgbClr r="0" g="0" b="0"/>
+        </a:effectRef>
+        <a:fontRef idx="minor">
+          <a:schemeClr val="lt1"/>
+        </a:fontRef>
+      </dsp:style>
+      <dsp:txBody>
+        <a:bodyPr spcFirstLastPara="0" vert="horz" wrap="square" lIns="15240" tIns="15240" rIns="15240" bIns="15240" numCol="1" spcCol="1270" anchor="ctr" anchorCtr="0">
+          <a:noAutofit/>
+        </a:bodyPr>
+        <a:lstStyle/>
+        <a:p>
+          <a:pPr marL="0" lvl="0" indent="0" algn="ctr" defTabSz="533400">
+            <a:lnSpc>
+              <a:spcPct val="90000"/>
+            </a:lnSpc>
+            <a:spcBef>
+              <a:spcPct val="0"/>
+            </a:spcBef>
+            <a:spcAft>
+              <a:spcPct val="35000"/>
+            </a:spcAft>
+            <a:buNone/>
+          </a:pPr>
+          <a:r>
+            <a:rPr lang="en-US" sz="1200" b="1" kern="1200" dirty="0">
+              <a:solidFill>
+                <a:schemeClr val="bg1"/>
+              </a:solidFill>
+            </a:rPr>
+            <a:t>Analyze</a:t>
+          </a:r>
+        </a:p>
+      </dsp:txBody>
+      <dsp:txXfrm>
+        <a:off x="1454096" y="2184519"/>
+        <a:ext cx="732287" cy="627856"/>
+      </dsp:txXfrm>
+    </dsp:sp>
+    <dsp:sp modelId="{C5AE1C9D-722A-43BE-8CC8-B5AE73CCB3BE}">
+      <dsp:nvSpPr>
+        <dsp:cNvPr id="0" name=""/>
+        <dsp:cNvSpPr/>
+      </dsp:nvSpPr>
+      <dsp:spPr>
+        <a:xfrm rot="15120000">
+          <a:off x="1500629" y="1720085"/>
+          <a:ext cx="230779" cy="299673"/>
+        </a:xfrm>
+        <a:prstGeom prst="rightArrow">
+          <a:avLst>
+            <a:gd name="adj1" fmla="val 60000"/>
+            <a:gd name="adj2" fmla="val 50000"/>
+          </a:avLst>
+        </a:prstGeom>
+        <a:solidFill>
+          <a:schemeClr val="accent3">
+            <a:hueOff val="-13745695"/>
+            <a:satOff val="0"/>
+            <a:lumOff val="-14264"/>
+            <a:alphaOff val="0"/>
+          </a:schemeClr>
+        </a:solidFill>
+        <a:ln>
+          <a:noFill/>
+        </a:ln>
+        <a:effectLst/>
+      </dsp:spPr>
+      <dsp:style>
+        <a:lnRef idx="0">
+          <a:scrgbClr r="0" g="0" b="0"/>
+        </a:lnRef>
+        <a:fillRef idx="1">
+          <a:scrgbClr r="0" g="0" b="0"/>
+        </a:fillRef>
+        <a:effectRef idx="0">
+          <a:scrgbClr r="0" g="0" b="0"/>
+        </a:effectRef>
+        <a:fontRef idx="minor">
+          <a:schemeClr val="lt1"/>
+        </a:fontRef>
+      </dsp:style>
+      <dsp:txBody>
+        <a:bodyPr spcFirstLastPara="0" vert="horz" wrap="square" lIns="0" tIns="0" rIns="0" bIns="0" numCol="1" spcCol="1270" anchor="ctr" anchorCtr="0">
+          <a:noAutofit/>
+        </a:bodyPr>
+        <a:lstStyle/>
+        <a:p>
+          <a:pPr marL="0" lvl="0" indent="0" algn="ctr" defTabSz="444500">
+            <a:lnSpc>
+              <a:spcPct val="90000"/>
+            </a:lnSpc>
+            <a:spcBef>
+              <a:spcPct val="0"/>
+            </a:spcBef>
+            <a:spcAft>
+              <a:spcPct val="35000"/>
+            </a:spcAft>
+            <a:buNone/>
+          </a:pPr>
+          <a:endParaRPr lang="en-US" sz="1000" b="1" kern="1200">
+            <a:solidFill>
+              <a:schemeClr val="bg1"/>
+            </a:solidFill>
+          </a:endParaRPr>
+        </a:p>
+      </dsp:txBody>
+      <dsp:txXfrm rot="10800000">
+        <a:off x="1545943" y="1812943"/>
+        <a:ext cx="161545" cy="179803"/>
+      </dsp:txXfrm>
+    </dsp:sp>
+    <dsp:sp modelId="{DEDBA954-66BD-488A-8493-643BFEFDF428}">
+      <dsp:nvSpPr>
+        <dsp:cNvPr id="0" name=""/>
+        <dsp:cNvSpPr/>
+      </dsp:nvSpPr>
+      <dsp:spPr>
+        <a:xfrm>
+          <a:off x="889956" y="785012"/>
+          <a:ext cx="1035611" cy="887922"/>
+        </a:xfrm>
+        <a:prstGeom prst="ellipse">
+          <a:avLst/>
+        </a:prstGeom>
+        <a:solidFill>
+          <a:schemeClr val="accent3">
+            <a:hueOff val="-18327592"/>
+            <a:satOff val="0"/>
+            <a:lumOff val="-19018"/>
+            <a:alphaOff val="0"/>
+          </a:schemeClr>
+        </a:solidFill>
+        <a:ln w="12700" cap="flat" cmpd="sng" algn="ctr">
+          <a:solidFill>
+            <a:schemeClr val="lt1">
+              <a:hueOff val="0"/>
+              <a:satOff val="0"/>
+              <a:lumOff val="0"/>
+              <a:alphaOff val="0"/>
+            </a:schemeClr>
+          </a:solidFill>
+          <a:prstDash val="solid"/>
+          <a:miter lim="800000"/>
+        </a:ln>
+        <a:effectLst/>
+      </dsp:spPr>
+      <dsp:style>
+        <a:lnRef idx="2">
+          <a:scrgbClr r="0" g="0" b="0"/>
+        </a:lnRef>
+        <a:fillRef idx="1">
+          <a:scrgbClr r="0" g="0" b="0"/>
+        </a:fillRef>
+        <a:effectRef idx="0">
+          <a:scrgbClr r="0" g="0" b="0"/>
+        </a:effectRef>
+        <a:fontRef idx="minor">
+          <a:schemeClr val="lt1"/>
+        </a:fontRef>
+      </dsp:style>
+      <dsp:txBody>
+        <a:bodyPr spcFirstLastPara="0" vert="horz" wrap="square" lIns="15240" tIns="15240" rIns="15240" bIns="15240" numCol="1" spcCol="1270" anchor="ctr" anchorCtr="0">
+          <a:noAutofit/>
+        </a:bodyPr>
+        <a:lstStyle/>
+        <a:p>
+          <a:pPr marL="0" lvl="0" indent="0" algn="ctr" defTabSz="533400">
+            <a:lnSpc>
+              <a:spcPct val="90000"/>
+            </a:lnSpc>
+            <a:spcBef>
+              <a:spcPct val="0"/>
+            </a:spcBef>
+            <a:spcAft>
+              <a:spcPct val="35000"/>
+            </a:spcAft>
+            <a:buNone/>
+          </a:pPr>
+          <a:r>
+            <a:rPr lang="en-US" sz="1200" b="1" kern="1200" dirty="0">
+              <a:solidFill>
+                <a:schemeClr val="bg1"/>
+              </a:solidFill>
+            </a:rPr>
+            <a:t>Manage</a:t>
+          </a:r>
+        </a:p>
+      </dsp:txBody>
+      <dsp:txXfrm>
+        <a:off x="1041618" y="915045"/>
+        <a:ext cx="732287" cy="627856"/>
+      </dsp:txXfrm>
+    </dsp:sp>
+    <dsp:sp modelId="{EA4C88B1-DA36-4455-A223-63557ED22F22}">
+      <dsp:nvSpPr>
+        <dsp:cNvPr id="0" name=""/>
+        <dsp:cNvSpPr/>
+      </dsp:nvSpPr>
+      <dsp:spPr>
+        <a:xfrm rot="19440000">
+          <a:off x="1848432" y="690005"/>
+          <a:ext cx="189845" cy="299673"/>
+        </a:xfrm>
+        <a:prstGeom prst="rightArrow">
+          <a:avLst>
+            <a:gd name="adj1" fmla="val 60000"/>
+            <a:gd name="adj2" fmla="val 50000"/>
+          </a:avLst>
+        </a:prstGeom>
+        <a:solidFill>
+          <a:schemeClr val="accent3">
+            <a:hueOff val="-18327592"/>
+            <a:satOff val="0"/>
+            <a:lumOff val="-19018"/>
+            <a:alphaOff val="0"/>
+          </a:schemeClr>
+        </a:solidFill>
+        <a:ln>
+          <a:noFill/>
+        </a:ln>
+        <a:effectLst/>
+      </dsp:spPr>
+      <dsp:style>
+        <a:lnRef idx="0">
+          <a:scrgbClr r="0" g="0" b="0"/>
+        </a:lnRef>
+        <a:fillRef idx="1">
+          <a:scrgbClr r="0" g="0" b="0"/>
+        </a:fillRef>
+        <a:effectRef idx="0">
+          <a:scrgbClr r="0" g="0" b="0"/>
+        </a:effectRef>
+        <a:fontRef idx="minor">
+          <a:schemeClr val="lt1"/>
+        </a:fontRef>
+      </dsp:style>
+      <dsp:txBody>
+        <a:bodyPr spcFirstLastPara="0" vert="horz" wrap="square" lIns="0" tIns="0" rIns="0" bIns="0" numCol="1" spcCol="1270" anchor="ctr" anchorCtr="0">
+          <a:noAutofit/>
+        </a:bodyPr>
+        <a:lstStyle/>
+        <a:p>
+          <a:pPr marL="0" lvl="0" indent="0" algn="ctr" defTabSz="444500">
+            <a:lnSpc>
+              <a:spcPct val="90000"/>
+            </a:lnSpc>
+            <a:spcBef>
+              <a:spcPct val="0"/>
+            </a:spcBef>
+            <a:spcAft>
+              <a:spcPct val="35000"/>
+            </a:spcAft>
+            <a:buNone/>
+          </a:pPr>
+          <a:endParaRPr lang="en-US" sz="1000" b="1" kern="1200">
+            <a:solidFill>
+              <a:schemeClr val="bg1"/>
+            </a:solidFill>
+          </a:endParaRPr>
+        </a:p>
+      </dsp:txBody>
+      <dsp:txXfrm>
+        <a:off x="1853871" y="766678"/>
+        <a:ext cx="132892" cy="179803"/>
+      </dsp:txXfrm>
+    </dsp:sp>
+  </dsp:spTree>
+</dsp:drawing>
+</file>
+
+<file path=ppt/diagrams/layout1.xml><?xml version="1.0" encoding="utf-8"?>
+<dgm:layoutDef xmlns:dgm="http://schemas.openxmlformats.org/drawingml/2006/diagram" xmlns:a="http://schemas.openxmlformats.org/drawingml/2006/main" uniqueId="urn:microsoft.com/office/officeart/2005/8/layout/cycle2">
+  <dgm:title val=""/>
+  <dgm:desc val=""/>
+  <dgm:catLst>
+    <dgm:cat type="cycle" pri="1000"/>
+    <dgm:cat type="convert" pri="10000"/>
+  </dgm:catLst>
+  <dgm:sampData>
+    <dgm:dataModel>
+      <dgm:ptLst>
+        <dgm:pt modelId="0" type="doc"/>
+        <dgm:pt modelId="1">
+          <dgm:prSet phldr="1"/>
+        </dgm:pt>
+        <dgm:pt modelId="2">
+          <dgm:prSet phldr="1"/>
+        </dgm:pt>
+        <dgm:pt modelId="3">
+          <dgm:prSet phldr="1"/>
+        </dgm:pt>
+        <dgm:pt modelId="4">
+          <dgm:prSet phldr="1"/>
+        </dgm:pt>
+        <dgm:pt modelId="5">
+          <dgm:prSet phldr="1"/>
+        </dgm:pt>
+      </dgm:ptLst>
+      <dgm:cxnLst>
+        <dgm:cxn modelId="6" srcId="0" destId="1" srcOrd="0" destOrd="0"/>
+        <dgm:cxn modelId="7" srcId="0" destId="2" srcOrd="1" destOrd="0"/>
+        <dgm:cxn modelId="8" srcId="0" destId="3" srcOrd="2" destOrd="0"/>
+        <dgm:cxn modelId="9" srcId="0" destId="4" srcOrd="3" destOrd="0"/>
+        <dgm:cxn modelId="10" srcId="0" destId="5" srcOrd="4" destOrd="0"/>
+      </dgm:cxnLst>
+      <dgm:bg/>
+      <dgm:whole/>
+    </dgm:dataModel>
+  </dgm:sampData>
+  <dgm:styleData>
+    <dgm:dataModel>
+      <dgm:ptLst>
+        <dgm:pt modelId="0" type="doc"/>
+        <dgm:pt modelId="1"/>
+        <dgm:pt modelId="2"/>
+        <dgm:pt modelId="3"/>
+      </dgm:ptLst>
+      <dgm:cxnLst>
+        <dgm:cxn modelId="4" srcId="0" destId="1" srcOrd="0" destOrd="0"/>
+        <dgm:cxn modelId="5" srcId="0" destId="2" srcOrd="1" destOrd="0"/>
+        <dgm:cxn modelId="6" srcId="0" destId="3" srcOrd="2" destOrd="0"/>
+      </dgm:cxnLst>
+      <dgm:bg/>
+      <dgm:whole/>
+    </dgm:dataModel>
+  </dgm:styleData>
+  <dgm:clrData>
+    <dgm:dataModel>
+      <dgm:ptLst>
+        <dgm:pt modelId="0" type="doc"/>
+        <dgm:pt modelId="1"/>
+        <dgm:pt modelId="2"/>
+        <dgm:pt modelId="3"/>
+        <dgm:pt modelId="4"/>
+        <dgm:pt modelId="5"/>
+        <dgm:pt modelId="6"/>
+      </dgm:ptLst>
+      <dgm:cxnLst>
+        <dgm:cxn modelId="7" srcId="0" destId="1" srcOrd="0" destOrd="0"/>
+        <dgm:cxn modelId="8" srcId="0" destId="2" srcOrd="1" destOrd="0"/>
+        <dgm:cxn modelId="9" srcId="0" destId="3" srcOrd="2" destOrd="0"/>
+        <dgm:cxn modelId="10" srcId="0" destId="4" srcOrd="3" destOrd="0"/>
+        <dgm:cxn modelId="11" srcId="0" destId="5" srcOrd="4" destOrd="0"/>
+        <dgm:cxn modelId="12" srcId="0" destId="6" srcOrd="5" destOrd="0"/>
+      </dgm:cxnLst>
+      <dgm:bg/>
+      <dgm:whole/>
+    </dgm:dataModel>
+  </dgm:clrData>
+  <dgm:layoutNode name="cycle">
+    <dgm:varLst>
+      <dgm:dir/>
+      <dgm:resizeHandles val="exact"/>
+    </dgm:varLst>
+    <dgm:choose name="Name0">
+      <dgm:if name="Name1" func="var" arg="dir" op="equ" val="norm">
+        <dgm:choose name="Name2">
+          <dgm:if name="Name3" axis="ch" ptType="node" func="cnt" op="gt" val="2">
+            <dgm:alg type="cycle">
+              <dgm:param type="stAng" val="0"/>
+              <dgm:param type="spanAng" val="360"/>
+            </dgm:alg>
+          </dgm:if>
+          <dgm:else name="Name4">
+            <dgm:alg type="cycle">
+              <dgm:param type="stAng" val="-90"/>
+              <dgm:param type="spanAng" val="360"/>
+            </dgm:alg>
+          </dgm:else>
+        </dgm:choose>
+      </dgm:if>
+      <dgm:else name="Name5">
+        <dgm:choose name="Name6">
+          <dgm:if name="Name7" axis="ch" ptType="node" func="cnt" op="gt" val="2">
+            <dgm:alg type="cycle">
+              <dgm:param type="stAng" val="0"/>
+              <dgm:param type="spanAng" val="-360"/>
+            </dgm:alg>
+          </dgm:if>
+          <dgm:else name="Name8">
+            <dgm:alg type="cycle">
+              <dgm:param type="stAng" val="90"/>
+              <dgm:param type="spanAng" val="-360"/>
+            </dgm:alg>
+          </dgm:else>
+        </dgm:choose>
+      </dgm:else>
+    </dgm:choose>
+    <dgm:shape xmlns:r="http://schemas.openxmlformats.org/officeDocument/2006/relationships" r:blip="">
+      <dgm:adjLst/>
+    </dgm:shape>
+    <dgm:presOf/>
+    <dgm:constrLst>
+      <dgm:constr type="w" for="ch" ptType="node" refType="w"/>
+      <dgm:constr type="w" for="ch" ptType="sibTrans" refType="w" refFor="ch" refPtType="node" op="equ" fact="0.25"/>
+      <dgm:constr type="sibSp" refType="w" refFor="ch" refPtType="node" fact="0.5"/>
+      <dgm:constr type="primFontSz" for="ch" ptType="node" op="equ" val="65"/>
+      <dgm:constr type="primFontSz" for="des" forName="connectorText" op="equ" val="55"/>
+      <dgm:constr type="primFontSz" for="des" forName="connectorText" refType="primFontSz" refFor="ch" refPtType="node" op="lte" fact="0.8"/>
+    </dgm:constrLst>
+    <dgm:ruleLst/>
+    <dgm:forEach name="nodesForEach" axis="ch" ptType="node">
+      <dgm:layoutNode name="node">
+        <dgm:varLst>
+          <dgm:bulletEnabled val="1"/>
+        </dgm:varLst>
+        <dgm:alg type="tx">
+          <dgm:param type="txAnchorVertCh" val="mid"/>
+        </dgm:alg>
+        <dgm:shape xmlns:r="http://schemas.openxmlformats.org/officeDocument/2006/relationships" type="ellipse" r:blip="">
+          <dgm:adjLst/>
+        </dgm:shape>
+        <dgm:presOf axis="desOrSelf" ptType="node"/>
+        <dgm:constrLst>
+          <dgm:constr type="h" refType="w"/>
+          <dgm:constr type="lMarg" refType="primFontSz" fact="0.1"/>
+          <dgm:constr type="rMarg" refType="primFontSz" fact="0.1"/>
+          <dgm:constr type="tMarg" refType="primFontSz" fact="0.1"/>
+          <dgm:constr type="bMarg" refType="primFontSz" fact="0.1"/>
+        </dgm:constrLst>
+        <dgm:ruleLst>
+          <dgm:rule type="primFontSz" val="5" fact="NaN" max="NaN"/>
+        </dgm:ruleLst>
+      </dgm:layoutNode>
+      <dgm:choose name="Name9">
+        <dgm:if name="Name10" axis="par ch" ptType="doc node" func="cnt" op="gt" val="1">
+          <dgm:forEach name="sibTransForEach" axis="followSib" ptType="sibTrans" hideLastTrans="0" cnt="1">
+            <dgm:layoutNode name="sibTrans">
+              <dgm:choose name="Name11">
+                <dgm:if name="Name12" axis="par ch" ptType="doc node" func="cnt" op="lt" val="3">
+                  <dgm:alg type="conn">
+                    <dgm:param type="begPts" val="radial"/>
+                    <dgm:param type="endPts" val="radial"/>
+                  </dgm:alg>
+                </dgm:if>
+                <dgm:else name="Name13">
+                  <dgm:alg type="conn">
+                    <dgm:param type="begPts" val="auto"/>
+                    <dgm:param type="endPts" val="auto"/>
+                  </dgm:alg>
+                </dgm:else>
+              </dgm:choose>
+              <dgm:shape xmlns:r="http://schemas.openxmlformats.org/officeDocument/2006/relationships" type="conn" r:blip="">
+                <dgm:adjLst/>
+              </dgm:shape>
+              <dgm:presOf axis="self"/>
+              <dgm:constrLst>
+                <dgm:constr type="h" refType="w" fact="1.35"/>
+                <dgm:constr type="connDist"/>
+                <dgm:constr type="w" for="ch" refType="connDist" fact="0.45"/>
+                <dgm:constr type="h" for="ch" refType="h"/>
+              </dgm:constrLst>
+              <dgm:ruleLst/>
+              <dgm:layoutNode name="connectorText">
+                <dgm:alg type="tx">
+                  <dgm:param type="autoTxRot" val="grav"/>
+                </dgm:alg>
+                <dgm:shape xmlns:r="http://schemas.openxmlformats.org/officeDocument/2006/relationships" type="conn" r:blip="" hideGeom="1">
+                  <dgm:adjLst/>
+                </dgm:shape>
+                <dgm:presOf axis="self"/>
+                <dgm:constrLst>
+                  <dgm:constr type="lMarg"/>
+                  <dgm:constr type="rMarg"/>
+                  <dgm:constr type="tMarg"/>
+                  <dgm:constr type="bMarg"/>
+                </dgm:constrLst>
+                <dgm:ruleLst>
+                  <dgm:rule type="primFontSz" val="5" fact="NaN" max="NaN"/>
+                </dgm:ruleLst>
+              </dgm:layoutNode>
+            </dgm:layoutNode>
+          </dgm:forEach>
+        </dgm:if>
+        <dgm:else name="Name14"/>
+      </dgm:choose>
+    </dgm:forEach>
+  </dgm:layoutNode>
+</dgm:layoutDef>
+</file>
+
+<file path=ppt/diagrams/quickStyle1.xml><?xml version="1.0" encoding="utf-8"?>
+<dgm:styleDef xmlns:dgm="http://schemas.openxmlformats.org/drawingml/2006/diagram" xmlns:a="http://schemas.openxmlformats.org/drawingml/2006/main" uniqueId="urn:microsoft.com/office/officeart/2005/8/quickstyle/simple1">
+  <dgm:title val=""/>
+  <dgm:desc val=""/>
+  <dgm:catLst>
+    <dgm:cat type="simple" pri="10100"/>
+  </dgm:catLst>
+  <dgm:scene3d>
+    <a:camera prst="orthographicFront"/>
+    <a:lightRig rig="threePt" dir="t"/>
+  </dgm:scene3d>
+  <dgm:styleLbl name="node0">
+    <dgm:scene3d>
+      <a:camera prst="orthographicFront"/>
+      <a:lightRig rig="threePt" dir="t"/>
+    </dgm:scene3d>
+    <dgm:sp3d/>
+    <dgm:txPr/>
+    <dgm:style>
+      <a:lnRef idx="2">
+        <a:scrgbClr r="0" g="0" b="0"/>
+      </a:lnRef>
+      <a:fillRef idx="1">
+        <a:scrgbClr r="0" g="0" b="0"/>
+      </a:fillRef>
+      <a:effectRef idx="0">
+        <a:scrgbClr r="0" g="0" b="0"/>
+      </a:effectRef>
+      <a:fontRef idx="minor">
+        <a:schemeClr val="lt1"/>
+      </a:fontRef>
+    </dgm:style>
+  </dgm:styleLbl>
+  <dgm:styleLbl name="lnNode1">
+    <dgm:scene3d>
+      <a:camera prst="orthographicFront"/>
+      <a:lightRig rig="threePt" dir="t"/>
+    </dgm:scene3d>
+    <dgm:sp3d/>
+    <dgm:txPr/>
+    <dgm:style>
+      <a:lnRef idx="2">
+        <a:scrgbClr r="0" g="0" b="0"/>
+      </a:lnRef>
+      <a:fillRef idx="1">
+        <a:scrgbClr r="0" g="0" b="0"/>
+      </a:fillRef>
+      <a:effectRef idx="0">
+        <a:scrgbClr r="0" g="0" b="0"/>
+      </a:effectRef>
+      <a:fontRef idx="minor">
+        <a:schemeClr val="lt1"/>
+      </a:fontRef>
+    </dgm:style>
+  </dgm:styleLbl>
+  <dgm:styleLbl name="vennNode1">
+    <dgm:scene3d>
+      <a:camera prst="orthographicFront"/>
+      <a:lightRig rig="threePt" dir="t"/>
+    </dgm:scene3d>
+    <dgm:sp3d/>
+    <dgm:txPr/>
+    <dgm:style>
+      <a:lnRef idx="2">
+        <a:scrgbClr r="0" g="0" b="0"/>
+      </a:lnRef>
+      <a:fillRef idx="1">
+        <a:scrgbClr r="0" g="0" b="0"/>
+      </a:fillRef>
+      <a:effectRef idx="0">
+        <a:scrgbClr r="0" g="0" b="0"/>
+      </a:effectRef>
+      <a:fontRef idx="minor">
+        <a:schemeClr val="tx1"/>
+      </a:fontRef>
+    </dgm:style>
+  </dgm:styleLbl>
+  <dgm:styleLbl name="alignNode1">
+    <dgm:scene3d>
+      <a:camera prst="orthographicFront"/>
+      <a:lightRig rig="threePt" dir="t"/>
+    </dgm:scene3d>
+    <dgm:sp3d/>
+    <dgm:txPr/>
+    <dgm:style>
+      <a:lnRef idx="2">
+        <a:scrgbClr r="0" g="0" b="0"/>
+      </a:lnRef>
+      <a:fillRef idx="1">
+        <a:scrgbClr r="0" g="0" b="0"/>
+      </a:fillRef>
+      <a:effectRef idx="0">
+        <a:scrgbClr r="0" g="0" b="0"/>
+      </a:effectRef>
+      <a:fontRef idx="minor">
+        <a:schemeClr val="lt1"/>
+      </a:fontRef>
+    </dgm:style>
+  </dgm:styleLbl>
+  <dgm:styleLbl name="node1">
+    <dgm:scene3d>
+      <a:camera prst="orthographicFront"/>
+      <a:lightRig rig="threePt" dir="t"/>
+    </dgm:scene3d>
+    <dgm:sp3d/>
+    <dgm:txPr/>
+    <dgm:style>
+      <a:lnRef idx="2">
+        <a:scrgbClr r="0" g="0" b="0"/>
+      </a:lnRef>
+      <a:fillRef idx="1">
+        <a:scrgbClr r="0" g="0" b="0"/>
+      </a:fillRef>
+      <a:effectRef idx="0">
+        <a:scrgbClr r="0" g="0" b="0"/>
+      </a:effectRef>
+      <a:fontRef idx="minor">
+        <a:schemeClr val="lt1"/>
+      </a:fontRef>
+    </dgm:style>
+  </dgm:styleLbl>
+  <dgm:styleLbl name="node2">
+    <dgm:scene3d>
+      <a:camera prst="orthographicFront"/>
+      <a:lightRig rig="threePt" dir="t"/>
+    </dgm:scene3d>
+    <dgm:sp3d/>
+    <dgm:txPr/>
+    <dgm:style>
+      <a:lnRef idx="2">
+        <a:scrgbClr r="0" g="0" b="0"/>
+      </a:lnRef>
+      <a:fillRef idx="1">
+        <a:scrgbClr r="0" g="0" b="0"/>
+      </a:fillRef>
+      <a:effectRef idx="0">
+        <a:scrgbClr r="0" g="0" b="0"/>
+      </a:effectRef>
+      <a:fontRef idx="minor">
+        <a:schemeClr val="lt1"/>
+      </a:fontRef>
+    </dgm:style>
+  </dgm:styleLbl>
+  <dgm:styleLbl name="node3">
+    <dgm:scene3d>
+      <a:camera prst="orthographicFront"/>
+      <a:lightRig rig="threePt" dir="t"/>
+    </dgm:scene3d>
+    <dgm:sp3d/>
+    <dgm:txPr/>
+    <dgm:style>
+      <a:lnRef idx="2">
+        <a:scrgbClr r="0" g="0" b="0"/>
+      </a:lnRef>
+      <a:fillRef idx="1">
+        <a:scrgbClr r="0" g="0" b="0"/>
+      </a:fillRef>
+      <a:effectRef idx="0">
+        <a:scrgbClr r="0" g="0" b="0"/>
+      </a:effectRef>
+      <a:fontRef idx="minor">
+        <a:schemeClr val="lt1"/>
+      </a:fontRef>
+    </dgm:style>
+  </dgm:styleLbl>
+  <dgm:styleLbl name="node4">
+    <dgm:scene3d>
+      <a:camera prst="orthographicFront"/>
+      <a:lightRig rig="threePt" dir="t"/>
+    </dgm:scene3d>
+    <dgm:sp3d/>
+    <dgm:txPr/>
+    <dgm:style>
+      <a:lnRef idx="2">
+        <a:scrgbClr r="0" g="0" b="0"/>
+      </a:lnRef>
+      <a:fillRef idx="1">
+        <a:scrgbClr r="0" g="0" b="0"/>
+      </a:fillRef>
+      <a:effectRef idx="0">
+        <a:scrgbClr r="0" g="0" b="0"/>
+      </a:effectRef>
+      <a:fontRef idx="minor">
+        <a:schemeClr val="lt1"/>
+      </a:fontRef>
+    </dgm:style>
+  </dgm:styleLbl>
+  <dgm:styleLbl name="fgImgPlace1">
+    <dgm:scene3d>
+      <a:camera prst="orthographicFront"/>
+      <a:lightRig rig="threePt" dir="t"/>
+    </dgm:scene3d>
+    <dgm:sp3d/>
+    <dgm:txPr/>
+    <dgm:style>
+      <a:lnRef idx="2">
+        <a:scrgbClr r="0" g="0" b="0"/>
+      </a:lnRef>
+      <a:fillRef idx="1">
+        <a:scrgbClr r="0" g="0" b="0"/>
+      </a:fillRef>
+      <a:effectRef idx="0">
+        <a:scrgbClr r="0" g="0" b="0"/>
+      </a:effectRef>
+      <a:fontRef idx="minor"/>
+    </dgm:style>
+  </dgm:styleLbl>
+  <dgm:styleLbl name="alignImgPlace1">
+    <dgm:scene3d>
+      <a:camera prst="orthographicFront"/>
+      <a:lightRig rig="threePt" dir="t"/>
+    </dgm:scene3d>
+    <dgm:sp3d/>
+    <dgm:txPr/>
+    <dgm:style>
+      <a:lnRef idx="2">
+        <a:scrgbClr r="0" g="0" b="0"/>
+      </a:lnRef>
+      <a:fillRef idx="1">
+        <a:scrgbClr r="0" g="0" b="0"/>
+      </a:fillRef>
+      <a:effectRef idx="0">
+        <a:scrgbClr r="0" g="0" b="0"/>
+      </a:effectRef>
+      <a:fontRef idx="minor"/>
+    </dgm:style>
+  </dgm:styleLbl>
+  <dgm:styleLbl name="bgImgPlace1">
+    <dgm:scene3d>
+      <a:camera prst="orthographicFront"/>
+      <a:lightRig rig="threePt" dir="t"/>
+    </dgm:scene3d>
+    <dgm:sp3d/>
+    <dgm:txPr/>
+    <dgm:style>
+      <a:lnRef idx="2">
+        <a:scrgbClr r="0" g="0" b="0"/>
+      </a:lnRef>
+      <a:fillRef idx="1">
+        <a:scrgbClr r="0" g="0" b="0"/>
+      </a:fillRef>
+      <a:effectRef idx="0">
+        <a:scrgbClr r="0" g="0" b="0"/>
+      </a:effectRef>
+      <a:fontRef idx="minor"/>
+    </dgm:style>
+  </dgm:styleLbl>
+  <dgm:styleLbl name="sibTrans2D1">
+    <dgm:scene3d>
+      <a:camera prst="orthographicFront"/>
+      <a:lightRig rig="threePt" dir="t"/>
+    </dgm:scene3d>
+    <dgm:sp3d/>
+    <dgm:txPr/>
+    <dgm:style>
+      <a:lnRef idx="0">
+        <a:scrgbClr r="0" g="0" b="0"/>
+      </a:lnRef>
+      <a:fillRef idx="1">
+        <a:scrgbClr r="0" g="0" b="0"/>
+      </a:fillRef>
+      <a:effectRef idx="0">
+        <a:scrgbClr r="0" g="0" b="0"/>
+      </a:effectRef>
+      <a:fontRef idx="minor">
+        <a:schemeClr val="lt1"/>
+      </a:fontRef>
+    </dgm:style>
+  </dgm:styleLbl>
+  <dgm:styleLbl name="fgSibTrans2D1">
+    <dgm:scene3d>
+      <a:camera prst="orthographicFront"/>
+      <a:lightRig rig="threePt" dir="t"/>
+    </dgm:scene3d>
+    <dgm:sp3d/>
+    <dgm:txPr/>
+    <dgm:style>
+      <a:lnRef idx="0">
+        <a:scrgbClr r="0" g="0" b="0"/>
+      </a:lnRef>
+      <a:fillRef idx="1">
+        <a:scrgbClr r="0" g="0" b="0"/>
+      </a:fillRef>
+      <a:effectRef idx="0">
+        <a:scrgbClr r="0" g="0" b="0"/>
+      </a:effectRef>
+      <a:fontRef idx="minor">
+        <a:schemeClr val="lt1"/>
+      </a:fontRef>
+    </dgm:style>
+  </dgm:styleLbl>
+  <dgm:styleLbl name="bgSibTrans2D1">
+    <dgm:scene3d>
+      <a:camera prst="orthographicFront"/>
+      <a:lightRig rig="threePt" dir="t"/>
+    </dgm:scene3d>
+    <dgm:sp3d/>
+    <dgm:txPr/>
+    <dgm:style>
+      <a:lnRef idx="0">
+        <a:scrgbClr r="0" g="0" b="0"/>
+      </a:lnRef>
+      <a:fillRef idx="1">
+        <a:scrgbClr r="0" g="0" b="0"/>
+      </a:fillRef>
+      <a:effectRef idx="0">
+        <a:scrgbClr r="0" g="0" b="0"/>
+      </a:effectRef>
+      <a:fontRef idx="minor">
+        <a:schemeClr val="lt1"/>
+      </a:fontRef>
+    </dgm:style>
+  </dgm:styleLbl>
+  <dgm:styleLbl name="sibTrans1D1">
+    <dgm:scene3d>
+      <a:camera prst="orthographicFront"/>
+      <a:lightRig rig="threePt" dir="t"/>
+    </dgm:scene3d>
+    <dgm:sp3d/>
+    <dgm:txPr/>
+    <dgm:style>
+      <a:lnRef idx="1">
+        <a:scrgbClr r="0" g="0" b="0"/>
+      </a:lnRef>
+      <a:fillRef idx="0">
+        <a:scrgbClr r="0" g="0" b="0"/>
+      </a:fillRef>
+      <a:effectRef idx="0">
+        <a:scrgbClr r="0" g="0" b="0"/>
+      </a:effectRef>
+      <a:fontRef idx="minor"/>
+    </dgm:style>
+  </dgm:styleLbl>
+  <dgm:styleLbl name="callout">
+    <dgm:scene3d>
+      <a:camera prst="orthographicFront"/>
+      <a:lightRig rig="threePt" dir="t"/>
+    </dgm:scene3d>
+    <dgm:sp3d/>
+    <dgm:txPr/>
+    <dgm:style>
+      <a:lnRef idx="2">
+        <a:scrgbClr r="0" g="0" b="0"/>
+      </a:lnRef>
+      <a:fillRef idx="1">
+        <a:scrgbClr r="0" g="0" b="0"/>
+      </a:fillRef>
+      <a:effectRef idx="0">
+        <a:scrgbClr r="0" g="0" b="0"/>
+      </a:effectRef>
+      <a:fontRef idx="minor"/>
+    </dgm:style>
+  </dgm:styleLbl>
+  <dgm:styleLbl name="asst0">
+    <dgm:scene3d>
+      <a:camera prst="orthographicFront"/>
+      <a:lightRig rig="threePt" dir="t"/>
+    </dgm:scene3d>
+    <dgm:sp3d/>
+    <dgm:txPr/>
+    <dgm:style>
+      <a:lnRef idx="2">
+        <a:scrgbClr r="0" g="0" b="0"/>
+      </a:lnRef>
+      <a:fillRef idx="1">
+        <a:scrgbClr r="0" g="0" b="0"/>
+      </a:fillRef>
+      <a:effectRef idx="0">
+        <a:scrgbClr r="0" g="0" b="0"/>
+      </a:effectRef>
+      <a:fontRef idx="minor">
+        <a:schemeClr val="lt1"/>
+      </a:fontRef>
+    </dgm:style>
+  </dgm:styleLbl>
+  <dgm:styleLbl name="asst1">
+    <dgm:scene3d>
+      <a:camera prst="orthographicFront"/>
+      <a:lightRig rig="threePt" dir="t"/>
+    </dgm:scene3d>
+    <dgm:sp3d/>
+    <dgm:txPr/>
+    <dgm:style>
+      <a:lnRef idx="2">
+        <a:scrgbClr r="0" g="0" b="0"/>
+      </a:lnRef>
+      <a:fillRef idx="1">
+        <a:scrgbClr r="0" g="0" b="0"/>
+      </a:fillRef>
+      <a:effectRef idx="0">
+        <a:scrgbClr r="0" g="0" b="0"/>
+      </a:effectRef>
+      <a:fontRef idx="minor">
+        <a:schemeClr val="lt1"/>
+      </a:fontRef>
+    </dgm:style>
+  </dgm:styleLbl>
+  <dgm:styleLbl name="asst2">
+    <dgm:scene3d>
+      <a:camera prst="orthographicFront"/>
+      <a:lightRig rig="threePt" dir="t"/>
+    </dgm:scene3d>
+    <dgm:sp3d/>
+    <dgm:txPr/>
+    <dgm:style>
+      <a:lnRef idx="2">
+        <a:scrgbClr r="0" g="0" b="0"/>
+      </a:lnRef>
+      <a:fillRef idx="1">
+        <a:scrgbClr r="0" g="0" b="0"/>
+      </a:fillRef>
+      <a:effectRef idx="0">
+        <a:scrgbClr r="0" g="0" b="0"/>
+      </a:effectRef>
+      <a:fontRef idx="minor">
+        <a:schemeClr val="lt1"/>
+      </a:fontRef>
+    </dgm:style>
+  </dgm:styleLbl>
+  <dgm:styleLbl name="asst3">
+    <dgm:scene3d>
+      <a:camera prst="orthographicFront"/>
+      <a:lightRig rig="threePt" dir="t"/>
+    </dgm:scene3d>
+    <dgm:sp3d/>
+    <dgm:txPr/>
+    <dgm:style>
+      <a:lnRef idx="2">
+        <a:scrgbClr r="0" g="0" b="0"/>
+      </a:lnRef>
+      <a:fillRef idx="1">
+        <a:scrgbClr r="0" g="0" b="0"/>
+      </a:fillRef>
+      <a:effectRef idx="0">
+        <a:scrgbClr r="0" g="0" b="0"/>
+      </a:effectRef>
+      <a:fontRef idx="minor">
+        <a:schemeClr val="lt1"/>
+      </a:fontRef>
+    </dgm:style>
+  </dgm:styleLbl>
+  <dgm:styleLbl name="asst4">
+    <dgm:scene3d>
+      <a:camera prst="orthographicFront"/>
+      <a:lightRig rig="threePt" dir="t"/>
+    </dgm:scene3d>
+    <dgm:sp3d/>
+    <dgm:txPr/>
+    <dgm:style>
+      <a:lnRef idx="2">
+        <a:scrgbClr r="0" g="0" b="0"/>
+      </a:lnRef>
+      <a:fillRef idx="1">
+        <a:scrgbClr r="0" g="0" b="0"/>
+      </a:fillRef>
+      <a:effectRef idx="0">
+        <a:scrgbClr r="0" g="0" b="0"/>
+      </a:effectRef>
+      <a:fontRef idx="minor">
+        <a:schemeClr val="lt1"/>
+      </a:fontRef>
+    </dgm:style>
+  </dgm:styleLbl>
+  <dgm:styleLbl name="parChTrans2D1">
+    <dgm:scene3d>
+      <a:camera prst="orthographicFront"/>
+      <a:lightRig rig="threePt" dir="t"/>
+    </dgm:scene3d>
+    <dgm:sp3d/>
+    <dgm:txPr/>
+    <dgm:style>
+      <a:lnRef idx="2">
+        <a:scrgbClr r="0" g="0" b="0"/>
+      </a:lnRef>
+      <a:fillRef idx="1">
+        <a:scrgbClr r="0" g="0" b="0"/>
+      </a:fillRef>
+      <a:effectRef idx="0">
+        <a:scrgbClr r="0" g="0" b="0"/>
+      </a:effectRef>
+      <a:fontRef idx="minor">
+        <a:schemeClr val="lt1"/>
+      </a:fontRef>
+    </dgm:style>
+  </dgm:styleLbl>
+  <dgm:styleLbl name="parChTrans2D2">
+    <dgm:scene3d>
+      <a:camera prst="orthographicFront"/>
+      <a:lightRig rig="threePt" dir="t"/>
+    </dgm:scene3d>
+    <dgm:sp3d/>
+    <dgm:txPr/>
+    <dgm:style>
+      <a:lnRef idx="2">
+        <a:scrgbClr r="0" g="0" b="0"/>
+      </a:lnRef>
+      <a:fillRef idx="1">
+        <a:scrgbClr r="0" g="0" b="0"/>
+      </a:fillRef>
+      <a:effectRef idx="0">
+        <a:scrgbClr r="0" g="0" b="0"/>
+      </a:effectRef>
+      <a:fontRef idx="minor">
+        <a:schemeClr val="lt1"/>
+      </a:fontRef>
+    </dgm:style>
+  </dgm:styleLbl>
+  <dgm:styleLbl name="parChTrans2D3">
+    <dgm:scene3d>
+      <a:camera prst="orthographicFront"/>
+      <a:lightRig rig="threePt" dir="t"/>
+    </dgm:scene3d>
+    <dgm:sp3d/>
+    <dgm:txPr/>
+    <dgm:style>
+      <a:lnRef idx="2">
+        <a:scrgbClr r="0" g="0" b="0"/>
+      </a:lnRef>
+      <a:fillRef idx="1">
+        <a:scrgbClr r="0" g="0" b="0"/>
+      </a:fillRef>
+      <a:effectRef idx="0">
+        <a:scrgbClr r="0" g="0" b="0"/>
+      </a:effectRef>
+      <a:fontRef idx="minor">
+        <a:schemeClr val="lt1"/>
+      </a:fontRef>
+    </dgm:style>
+  </dgm:styleLbl>
+  <dgm:styleLbl name="parChTrans2D4">
+    <dgm:scene3d>
+      <a:camera prst="orthographicFront"/>
+      <a:lightRig rig="threePt" dir="t"/>
+    </dgm:scene3d>
+    <dgm:sp3d/>
+    <dgm:txPr/>
+    <dgm:style>
+      <a:lnRef idx="2">
+        <a:scrgbClr r="0" g="0" b="0"/>
+      </a:lnRef>
+      <a:fillRef idx="1">
+        <a:scrgbClr r="0" g="0" b="0"/>
+      </a:fillRef>
+      <a:effectRef idx="0">
+        <a:scrgbClr r="0" g="0" b="0"/>
+      </a:effectRef>
+      <a:fontRef idx="minor">
+        <a:schemeClr val="lt1"/>
+      </a:fontRef>
+    </dgm:style>
+  </dgm:styleLbl>
+  <dgm:styleLbl name="parChTrans1D1">
+    <dgm:scene3d>
+      <a:camera prst="orthographicFront"/>
+      <a:lightRig rig="threePt" dir="t"/>
+    </dgm:scene3d>
+    <dgm:sp3d/>
+    <dgm:txPr/>
+    <dgm:style>
+      <a:lnRef idx="2">
+        <a:scrgbClr r="0" g="0" b="0"/>
+      </a:lnRef>
+      <a:fillRef idx="0">
+        <a:scrgbClr r="0" g="0" b="0"/>
+      </a:fillRef>
+      <a:effectRef idx="0">
+        <a:scrgbClr r="0" g="0" b="0"/>
+      </a:effectRef>
+      <a:fontRef idx="minor"/>
+    </dgm:style>
+  </dgm:styleLbl>
+  <dgm:styleLbl name="parChTrans1D2">
+    <dgm:scene3d>
+      <a:camera prst="orthographicFront"/>
+      <a:lightRig rig="threePt" dir="t"/>
+    </dgm:scene3d>
+    <dgm:sp3d/>
+    <dgm:txPr/>
+    <dgm:style>
+      <a:lnRef idx="2">
+        <a:scrgbClr r="0" g="0" b="0"/>
+      </a:lnRef>
+      <a:fillRef idx="0">
+        <a:scrgbClr r="0" g="0" b="0"/>
+      </a:fillRef>
+      <a:effectRef idx="0">
+        <a:scrgbClr r="0" g="0" b="0"/>
+      </a:effectRef>
+      <a:fontRef idx="minor"/>
+    </dgm:style>
+  </dgm:styleLbl>
+  <dgm:styleLbl name="parChTrans1D3">
+    <dgm:scene3d>
+      <a:camera prst="orthographicFront"/>
+      <a:lightRig rig="threePt" dir="t"/>
+    </dgm:scene3d>
+    <dgm:sp3d/>
+    <dgm:txPr/>
+    <dgm:style>
+      <a:lnRef idx="2">
+        <a:scrgbClr r="0" g="0" b="0"/>
+      </a:lnRef>
+      <a:fillRef idx="0">
+        <a:scrgbClr r="0" g="0" b="0"/>
+      </a:fillRef>
+      <a:effectRef idx="0">
+        <a:scrgbClr r="0" g="0" b="0"/>
+      </a:effectRef>
+      <a:fontRef idx="minor"/>
+    </dgm:style>
+  </dgm:styleLbl>
+  <dgm:styleLbl name="parChTrans1D4">
+    <dgm:scene3d>
+      <a:camera prst="orthographicFront"/>
+      <a:lightRig rig="threePt" dir="t"/>
+    </dgm:scene3d>
+    <dgm:sp3d/>
+    <dgm:txPr/>
+    <dgm:style>
+      <a:lnRef idx="2">
+        <a:scrgbClr r="0" g="0" b="0"/>
+      </a:lnRef>
+      <a:fillRef idx="0">
+        <a:scrgbClr r="0" g="0" b="0"/>
+      </a:fillRef>
+      <a:effectRef idx="0">
+        <a:scrgbClr r="0" g="0" b="0"/>
+      </a:effectRef>
+      <a:fontRef idx="minor"/>
+    </dgm:style>
+  </dgm:styleLbl>
+  <dgm:styleLbl name="fgAcc1">
+    <dgm:scene3d>
+      <a:camera prst="orthographicFront"/>
+      <a:lightRig rig="threePt" dir="t"/>
+    </dgm:scene3d>
+    <dgm:sp3d/>
+    <dgm:txPr/>
+    <dgm:style>
+      <a:lnRef idx="2">
+        <a:scrgbClr r="0" g="0" b="0"/>
+      </a:lnRef>
+      <a:fillRef idx="1">
+        <a:scrgbClr r="0" g="0" b="0"/>
+      </a:fillRef>
+      <a:effectRef idx="0">
+        <a:scrgbClr r="0" g="0" b="0"/>
+      </a:effectRef>
+      <a:fontRef idx="minor"/>
+    </dgm:style>
+  </dgm:styleLbl>
+  <dgm:styleLbl name="conFgAcc1">
+    <dgm:scene3d>
+      <a:camera prst="orthographicFront"/>
+      <a:lightRig rig="threePt" dir="t"/>
+    </dgm:scene3d>
+    <dgm:sp3d/>
+    <dgm:txPr/>
+    <dgm:style>
+      <a:lnRef idx="2">
+        <a:scrgbClr r="0" g="0" b="0"/>
+      </a:lnRef>
+      <a:fillRef idx="1">
+        <a:scrgbClr r="0" g="0" b="0"/>
+      </a:fillRef>
+      <a:effectRef idx="0">
+        <a:scrgbClr r="0" g="0" b="0"/>
+      </a:effectRef>
+      <a:fontRef idx="minor"/>
+    </dgm:style>
+  </dgm:styleLbl>
+  <dgm:styleLbl name="alignAcc1">
+    <dgm:scene3d>
+      <a:camera prst="orthographicFront"/>
+      <a:lightRig rig="threePt" dir="t"/>
+    </dgm:scene3d>
+    <dgm:sp3d/>
+    <dgm:txPr/>
+    <dgm:style>
+      <a:lnRef idx="2">
+        <a:scrgbClr r="0" g="0" b="0"/>
+      </a:lnRef>
+      <a:fillRef idx="1">
+        <a:scrgbClr r="0" g="0" b="0"/>
+      </a:fillRef>
+      <a:effectRef idx="0">
+        <a:scrgbClr r="0" g="0" b="0"/>
+      </a:effectRef>
+      <a:fontRef idx="minor"/>
+    </dgm:style>
+  </dgm:styleLbl>
+  <dgm:styleLbl name="trAlignAcc1">
+    <dgm:scene3d>
+      <a:camera prst="orthographicFront"/>
+      <a:lightRig rig="threePt" dir="t"/>
+    </dgm:scene3d>
+    <dgm:sp3d/>
+    <dgm:txPr/>
+    <dgm:style>
+      <a:lnRef idx="1">
+        <a:scrgbClr r="0" g="0" b="0"/>
+      </a:lnRef>
+      <a:fillRef idx="1">
+        <a:scrgbClr r="0" g="0" b="0"/>
+      </a:fillRef>
+      <a:effectRef idx="0">
+        <a:scrgbClr r="0" g="0" b="0"/>
+      </a:effectRef>
+      <a:fontRef idx="minor"/>
+    </dgm:style>
+  </dgm:styleLbl>
+  <dgm:styleLbl name="bgAcc1">
+    <dgm:scene3d>
+      <a:camera prst="orthographicFront"/>
+      <a:lightRig rig="threePt" dir="t"/>
+    </dgm:scene3d>
+    <dgm:sp3d/>
+    <dgm:txPr/>
+    <dgm:style>
+      <a:lnRef idx="2">
+        <a:scrgbClr r="0" g="0" b="0"/>
+      </a:lnRef>
+      <a:fillRef idx="1">
+        <a:scrgbClr r="0" g="0" b="0"/>
+      </a:fillRef>
+      <a:effectRef idx="0">
+        <a:scrgbClr r="0" g="0" b="0"/>
+      </a:effectRef>
+      <a:fontRef idx="minor"/>
+    </dgm:style>
+  </dgm:styleLbl>
+  <dgm:styleLbl name="solidFgAcc1">
+    <dgm:scene3d>
+      <a:camera prst="orthographicFront"/>
+      <a:lightRig rig="threePt" dir="t"/>
+    </dgm:scene3d>
+    <dgm:sp3d/>
+    <dgm:txPr/>
+    <dgm:style>
+      <a:lnRef idx="2">
+        <a:scrgbClr r="0" g="0" b="0"/>
+      </a:lnRef>
+      <a:fillRef idx="1">
+        <a:scrgbClr r="0" g="0" b="0"/>
+      </a:fillRef>
+      <a:effectRef idx="0">
+        <a:scrgbClr r="0" g="0" b="0"/>
+      </a:effectRef>
+      <a:fontRef idx="minor"/>
+    </dgm:style>
+  </dgm:styleLbl>
+  <dgm:styleLbl name="solidAlignAcc1">
+    <dgm:scene3d>
+      <a:camera prst="orthographicFront"/>
+      <a:lightRig rig="threePt" dir="t"/>
+    </dgm:scene3d>
+    <dgm:sp3d/>
+    <dgm:txPr/>
+    <dgm:style>
+      <a:lnRef idx="2">
+        <a:scrgbClr r="0" g="0" b="0"/>
+      </a:lnRef>
+      <a:fillRef idx="1">
+        <a:scrgbClr r="0" g="0" b="0"/>
+      </a:fillRef>
+      <a:effectRef idx="0">
+        <a:scrgbClr r="0" g="0" b="0"/>
+      </a:effectRef>
+      <a:fontRef idx="minor"/>
+    </dgm:style>
+  </dgm:styleLbl>
+  <dgm:styleLbl name="solidBgAcc1">
+    <dgm:scene3d>
+      <a:camera prst="orthographicFront"/>
+      <a:lightRig rig="threePt" dir="t"/>
+    </dgm:scene3d>
+    <dgm:sp3d/>
+    <dgm:txPr/>
+    <dgm:style>
+      <a:lnRef idx="2">
+        <a:scrgbClr r="0" g="0" b="0"/>
+      </a:lnRef>
+      <a:fillRef idx="1">
+        <a:scrgbClr r="0" g="0" b="0"/>
+      </a:fillRef>
+      <a:effectRef idx="0">
+        <a:scrgbClr r="0" g="0" b="0"/>
+      </a:effectRef>
+      <a:fontRef idx="minor"/>
+    </dgm:style>
+  </dgm:styleLbl>
+  <dgm:styleLbl name="fgAccFollowNode1">
+    <dgm:scene3d>
+      <a:camera prst="orthographicFront"/>
+      <a:lightRig rig="threePt" dir="t"/>
+    </dgm:scene3d>
+    <dgm:sp3d/>
+    <dgm:txPr/>
+    <dgm:style>
+      <a:lnRef idx="2">
+        <a:scrgbClr r="0" g="0" b="0"/>
+      </a:lnRef>
+      <a:fillRef idx="1">
+        <a:scrgbClr r="0" g="0" b="0"/>
+      </a:fillRef>
+      <a:effectRef idx="0">
+        <a:scrgbClr r="0" g="0" b="0"/>
+      </a:effectRef>
+      <a:fontRef idx="minor"/>
+    </dgm:style>
+  </dgm:styleLbl>
+  <dgm:styleLbl name="alignAccFollowNode1">
+    <dgm:scene3d>
+      <a:camera prst="orthographicFront"/>
+      <a:lightRig rig="threePt" dir="t"/>
+    </dgm:scene3d>
+    <dgm:sp3d/>
+    <dgm:txPr/>
+    <dgm:style>
+      <a:lnRef idx="2">
+        <a:scrgbClr r="0" g="0" b="0"/>
+      </a:lnRef>
+      <a:fillRef idx="1">
+        <a:scrgbClr r="0" g="0" b="0"/>
+      </a:fillRef>
+      <a:effectRef idx="0">
+        <a:scrgbClr r="0" g="0" b="0"/>
+      </a:effectRef>
+      <a:fontRef idx="minor"/>
+    </dgm:style>
+  </dgm:styleLbl>
+  <dgm:styleLbl name="bgAccFollowNode1">
+    <dgm:scene3d>
+      <a:camera prst="orthographicFront"/>
+      <a:lightRig rig="threePt" dir="t"/>
+    </dgm:scene3d>
+    <dgm:sp3d/>
+    <dgm:txPr/>
+    <dgm:style>
+      <a:lnRef idx="2">
+        <a:scrgbClr r="0" g="0" b="0"/>
+      </a:lnRef>
+      <a:fillRef idx="1">
+        <a:scrgbClr r="0" g="0" b="0"/>
+      </a:fillRef>
+      <a:effectRef idx="0">
+        <a:scrgbClr r="0" g="0" b="0"/>
+      </a:effectRef>
+      <a:fontRef idx="minor"/>
+    </dgm:style>
+  </dgm:styleLbl>
+  <dgm:styleLbl name="fgAcc0">
+    <dgm:scene3d>
+      <a:camera prst="orthographicFront"/>
+      <a:lightRig rig="threePt" dir="t"/>
+    </dgm:scene3d>
+    <dgm:sp3d/>
+    <dgm:txPr/>
+    <dgm:style>
+      <a:lnRef idx="2">
+        <a:scrgbClr r="0" g="0" b="0"/>
+      </a:lnRef>
+      <a:fillRef idx="1">
+        <a:scrgbClr r="0" g="0" b="0"/>
+      </a:fillRef>
+      <a:effectRef idx="0">
+        <a:scrgbClr r="0" g="0" b="0"/>
+      </a:effectRef>
+      <a:fontRef idx="minor"/>
+    </dgm:style>
+  </dgm:styleLbl>
+  <dgm:styleLbl name="fgAcc2">
+    <dgm:scene3d>
+      <a:camera prst="orthographicFront"/>
+      <a:lightRig rig="threePt" dir="t"/>
+    </dgm:scene3d>
+    <dgm:sp3d/>
+    <dgm:txPr/>
+    <dgm:style>
+      <a:lnRef idx="2">
+        <a:scrgbClr r="0" g="0" b="0"/>
+      </a:lnRef>
+      <a:fillRef idx="1">
+        <a:scrgbClr r="0" g="0" b="0"/>
+      </a:fillRef>
+      <a:effectRef idx="0">
+        <a:scrgbClr r="0" g="0" b="0"/>
+      </a:effectRef>
+      <a:fontRef idx="minor"/>
+    </dgm:style>
+  </dgm:styleLbl>
+  <dgm:styleLbl name="fgAcc3">
+    <dgm:scene3d>
+      <a:camera prst="orthographicFront"/>
+      <a:lightRig rig="threePt" dir="t"/>
+    </dgm:scene3d>
+    <dgm:sp3d/>
+    <dgm:txPr/>
+    <dgm:style>
+      <a:lnRef idx="2">
+        <a:scrgbClr r="0" g="0" b="0"/>
+      </a:lnRef>
+      <a:fillRef idx="1">
+        <a:scrgbClr r="0" g="0" b="0"/>
+      </a:fillRef>
+      <a:effectRef idx="0">
+        <a:scrgbClr r="0" g="0" b="0"/>
+      </a:effectRef>
+      <a:fontRef idx="minor"/>
+    </dgm:style>
+  </dgm:styleLbl>
+  <dgm:styleLbl name="fgAcc4">
+    <dgm:scene3d>
+      <a:camera prst="orthographicFront"/>
+      <a:lightRig rig="threePt" dir="t"/>
+    </dgm:scene3d>
+    <dgm:sp3d/>
+    <dgm:txPr/>
+    <dgm:style>
+      <a:lnRef idx="2">
+        <a:scrgbClr r="0" g="0" b="0"/>
+      </a:lnRef>
+      <a:fillRef idx="1">
+        <a:scrgbClr r="0" g="0" b="0"/>
+      </a:fillRef>
+      <a:effectRef idx="0">
+        <a:scrgbClr r="0" g="0" b="0"/>
+      </a:effectRef>
+      <a:fontRef idx="minor"/>
+    </dgm:style>
+  </dgm:styleLbl>
+  <dgm:styleLbl name="bgShp">
+    <dgm:scene3d>
+      <a:camera prst="orthographicFront"/>
+      <a:lightRig rig="threePt" dir="t"/>
+    </dgm:scene3d>
+    <dgm:sp3d/>
+    <dgm:txPr/>
+    <dgm:style>
+      <a:lnRef idx="0">
+        <a:scrgbClr r="0" g="0" b="0"/>
+      </a:lnRef>
+      <a:fillRef idx="1">
+        <a:scrgbClr r="0" g="0" b="0"/>
+      </a:fillRef>
+      <a:effectRef idx="0">
+        <a:scrgbClr r="0" g="0" b="0"/>
+      </a:effectRef>
+      <a:fontRef idx="minor"/>
+    </dgm:style>
+  </dgm:styleLbl>
+  <dgm:styleLbl name="dkBgShp">
+    <dgm:scene3d>
+      <a:camera prst="orthographicFront"/>
+      <a:lightRig rig="threePt" dir="t"/>
+    </dgm:scene3d>
+    <dgm:sp3d/>
+    <dgm:txPr/>
+    <dgm:style>
+      <a:lnRef idx="0">
+        <a:scrgbClr r="0" g="0" b="0"/>
+      </a:lnRef>
+      <a:fillRef idx="1">
+        <a:scrgbClr r="0" g="0" b="0"/>
+      </a:fillRef>
+      <a:effectRef idx="0">
+        <a:scrgbClr r="0" g="0" b="0"/>
+      </a:effectRef>
+      <a:fontRef idx="minor"/>
+    </dgm:style>
+  </dgm:styleLbl>
+  <dgm:styleLbl name="trBgShp">
+    <dgm:scene3d>
+      <a:camera prst="orthographicFront"/>
+      <a:lightRig rig="threePt" dir="t"/>
+    </dgm:scene3d>
+    <dgm:sp3d/>
+    <dgm:txPr/>
+    <dgm:style>
+      <a:lnRef idx="0">
+        <a:scrgbClr r="0" g="0" b="0"/>
+      </a:lnRef>
+      <a:fillRef idx="1">
+        <a:scrgbClr r="0" g="0" b="0"/>
+      </a:fillRef>
+      <a:effectRef idx="0">
+        <a:scrgbClr r="0" g="0" b="0"/>
+      </a:effectRef>
+      <a:fontRef idx="minor"/>
+    </dgm:style>
+  </dgm:styleLbl>
+  <dgm:styleLbl name="fgShp">
+    <dgm:scene3d>
+      <a:camera prst="orthographicFront"/>
+      <a:lightRig rig="threePt" dir="t"/>
+    </dgm:scene3d>
+    <dgm:sp3d/>
+    <dgm:txPr/>
+    <dgm:style>
+      <a:lnRef idx="2">
+        <a:scrgbClr r="0" g="0" b="0"/>
+      </a:lnRef>
+      <a:fillRef idx="1">
+        <a:scrgbClr r="0" g="0" b="0"/>
+      </a:fillRef>
+      <a:effectRef idx="0">
+        <a:scrgbClr r="0" g="0" b="0"/>
+      </a:effectRef>
+      <a:fontRef idx="minor"/>
+    </dgm:style>
+  </dgm:styleLbl>
+  <dgm:styleLbl name="revTx">
+    <dgm:scene3d>
+      <a:camera prst="orthographicFront"/>
+      <a:lightRig rig="threePt" dir="t"/>
+    </dgm:scene3d>
+    <dgm:sp3d/>
+    <dgm:txPr/>
+    <dgm:style>
+      <a:lnRef idx="0">
+        <a:scrgbClr r="0" g="0" b="0"/>
+      </a:lnRef>
+      <a:fillRef idx="0">
+        <a:scrgbClr r="0" g="0" b="0"/>
+      </a:fillRef>
+      <a:effectRef idx="0">
+        <a:scrgbClr r="0" g="0" b="0"/>
+      </a:effectRef>
+      <a:fontRef idx="minor"/>
+    </dgm:style>
+  </dgm:styleLbl>
+</dgm:styleDef>
+</file>
+
 <file path=ppt/handoutMasters/handoutMaster1.xml><?xml version="1.0" encoding="utf-8"?>
 <p:handoutMaster xmlns:a="http://schemas.openxmlformats.org/drawingml/2006/main" xmlns:r="http://schemas.openxmlformats.org/officeDocument/2006/relationships" xmlns:p="http://schemas.openxmlformats.org/presentationml/2006/main">
   <p:cSld>
@@ -260,7 +3487,7 @@
           <a:p>
             <a:fld id="{A3888634-FBA9-41D6-8B35-EE3A7D816B7C}" type="datetimeFigureOut">
               <a:rPr lang="en-US" smtClean="0"/>
-              <a:t>9/22/2024</a:t>
+              <a:t>1/10/2026</a:t>
             </a:fld>
             <a:endParaRPr lang="en-US" dirty="0"/>
           </a:p>
@@ -437,7 +3664,7 @@
           <a:p>
             <a:fld id="{5EA28068-AFBD-4979-B752-9EB6F90B1386}" type="datetimeFigureOut">
               <a:rPr lang="en-US" smtClean="0"/>
-              <a:t>9/22/2024</a:t>
+              <a:t>1/10/2026</a:t>
             </a:fld>
             <a:endParaRPr lang="en-US" dirty="0"/>
           </a:p>
@@ -10770,6 +13997,529 @@
 </p:sld>
 </file>
 
+<file path=ppt/slides/slide10.xml><?xml version="1.0" encoding="utf-8"?>
+<p:sld xmlns:a="http://schemas.openxmlformats.org/drawingml/2006/main" xmlns:r="http://schemas.openxmlformats.org/officeDocument/2006/relationships" xmlns:p="http://schemas.openxmlformats.org/presentationml/2006/main">
+  <p:cSld>
+    <p:spTree>
+      <p:nvGrpSpPr>
+        <p:cNvPr id="1" name="">
+          <a:extLst>
+            <a:ext uri="{FF2B5EF4-FFF2-40B4-BE49-F238E27FC236}">
+              <a16:creationId xmlns:a16="http://schemas.microsoft.com/office/drawing/2014/main" id="{28885BE5-C6E1-80E1-1840-7651AFCEAD3F}"/>
+            </a:ext>
+          </a:extLst>
+        </p:cNvPr>
+        <p:cNvGrpSpPr/>
+        <p:nvPr/>
+      </p:nvGrpSpPr>
+      <p:grpSpPr>
+        <a:xfrm>
+          <a:off x="0" y="0"/>
+          <a:ext cx="0" cy="0"/>
+          <a:chOff x="0" y="0"/>
+          <a:chExt cx="0" cy="0"/>
+        </a:xfrm>
+      </p:grpSpPr>
+      <p:sp>
+        <p:nvSpPr>
+          <p:cNvPr id="2" name="Title 1">
+            <a:extLst>
+              <a:ext uri="{FF2B5EF4-FFF2-40B4-BE49-F238E27FC236}">
+                <a16:creationId xmlns:a16="http://schemas.microsoft.com/office/drawing/2014/main" id="{D033C8BC-37E5-C2DA-5FEE-CE8CE02373C7}"/>
+              </a:ext>
+            </a:extLst>
+          </p:cNvPr>
+          <p:cNvSpPr>
+            <a:spLocks noGrp="1"/>
+          </p:cNvSpPr>
+          <p:nvPr>
+            <p:ph type="title"/>
+          </p:nvPr>
+        </p:nvSpPr>
+        <p:spPr>
+          <a:xfrm>
+            <a:off x="1409826" y="131063"/>
+            <a:ext cx="6772881" cy="793260"/>
+          </a:xfrm>
+        </p:spPr>
+        <p:txBody>
+          <a:bodyPr anchor="ctr"/>
+          <a:lstStyle/>
+          <a:p>
+            <a:pPr algn="l"/>
+            <a:r>
+              <a:rPr lang="en-US" dirty="0"/>
+              <a:t>Power BI Tutorial</a:t>
+            </a:r>
+          </a:p>
+        </p:txBody>
+      </p:sp>
+      <p:sp>
+        <p:nvSpPr>
+          <p:cNvPr id="4" name="Text Placeholder 3">
+            <a:extLst>
+              <a:ext uri="{FF2B5EF4-FFF2-40B4-BE49-F238E27FC236}">
+                <a16:creationId xmlns:a16="http://schemas.microsoft.com/office/drawing/2014/main" id="{CDAD3B90-20D5-FD55-DF02-FA591F6BCA45}"/>
+              </a:ext>
+            </a:extLst>
+          </p:cNvPr>
+          <p:cNvSpPr>
+            <a:spLocks noGrp="1"/>
+          </p:cNvSpPr>
+          <p:nvPr>
+            <p:ph type="body" sz="quarter" idx="13"/>
+          </p:nvPr>
+        </p:nvSpPr>
+        <p:spPr>
+          <a:xfrm>
+            <a:off x="2079149" y="915490"/>
+            <a:ext cx="8033702" cy="1097280"/>
+          </a:xfrm>
+        </p:spPr>
+        <p:txBody>
+          <a:bodyPr anchor="ctr">
+            <a:normAutofit lnSpcReduction="10000"/>
+          </a:bodyPr>
+          <a:lstStyle/>
+          <a:p>
+            <a:pPr algn="l"/>
+            <a:r>
+              <a:rPr lang="en-US" sz="3600" dirty="0"/>
+              <a:t>Part 1. Put Your BI Thinking Caps On</a:t>
+            </a:r>
+          </a:p>
+          <a:p>
+            <a:pPr algn="l"/>
+            <a:r>
+              <a:rPr lang="en-US" altLang="zh-CN" sz="3600" dirty="0"/>
+              <a:t>Chapter 02: Who, How, </a:t>
+            </a:r>
+            <a:r>
+              <a:rPr lang="en-US" altLang="zh-CN" sz="3600" dirty="0">
+                <a:highlight>
+                  <a:srgbClr val="C0C0C0"/>
+                </a:highlight>
+              </a:rPr>
+              <a:t>What</a:t>
+            </a:r>
+            <a:r>
+              <a:rPr lang="en-US" altLang="zh-CN" sz="3600" dirty="0"/>
+              <a:t> (3)</a:t>
+            </a:r>
+            <a:endParaRPr lang="en-US" sz="3600" dirty="0"/>
+          </a:p>
+        </p:txBody>
+      </p:sp>
+      <p:sp>
+        <p:nvSpPr>
+          <p:cNvPr id="5" name="TextBox 4">
+            <a:extLst>
+              <a:ext uri="{FF2B5EF4-FFF2-40B4-BE49-F238E27FC236}">
+                <a16:creationId xmlns:a16="http://schemas.microsoft.com/office/drawing/2014/main" id="{809285CC-0C2B-2E38-DA0C-15A255656866}"/>
+              </a:ext>
+            </a:extLst>
+          </p:cNvPr>
+          <p:cNvSpPr txBox="1"/>
+          <p:nvPr/>
+        </p:nvSpPr>
+        <p:spPr>
+          <a:xfrm>
+            <a:off x="9487400" y="11040"/>
+            <a:ext cx="2704600" cy="1200329"/>
+          </a:xfrm>
+          <a:prstGeom prst="rect">
+            <a:avLst/>
+          </a:prstGeom>
+          <a:noFill/>
+        </p:spPr>
+        <p:txBody>
+          <a:bodyPr wrap="square" rtlCol="0" anchor="ctr">
+            <a:spAutoFit/>
+          </a:bodyPr>
+          <a:lstStyle/>
+          <a:p>
+            <a:pPr algn="ctr"/>
+            <a:r>
+              <a:rPr lang="en-US" sz="7200" b="1" dirty="0">
+                <a:ln w="9525">
+                  <a:solidFill>
+                    <a:schemeClr val="bg1"/>
+                  </a:solidFill>
+                  <a:prstDash val="solid"/>
+                </a:ln>
+                <a:solidFill>
+                  <a:schemeClr val="accent3">
+                    <a:lumMod val="20000"/>
+                    <a:lumOff val="80000"/>
+                  </a:schemeClr>
+                </a:solidFill>
+                <a:effectLst>
+                  <a:outerShdw blurRad="12700" dist="38100" dir="2700000" algn="tl" rotWithShape="0">
+                    <a:schemeClr val="bg1">
+                      <a:lumMod val="50000"/>
+                    </a:schemeClr>
+                  </a:outerShdw>
+                </a:effectLst>
+                <a:latin typeface="Goudy Stout" panose="0202090407030B020401" pitchFamily="18" charset="0"/>
+              </a:rPr>
+              <a:t>006</a:t>
+            </a:r>
+          </a:p>
+        </p:txBody>
+      </p:sp>
+      <p:pic>
+        <p:nvPicPr>
+          <p:cNvPr id="8" name="Picture 7">
+            <a:extLst>
+              <a:ext uri="{FF2B5EF4-FFF2-40B4-BE49-F238E27FC236}">
+                <a16:creationId xmlns:a16="http://schemas.microsoft.com/office/drawing/2014/main" id="{F14114AB-622A-E02D-B241-D7122E603201}"/>
+              </a:ext>
+            </a:extLst>
+          </p:cNvPr>
+          <p:cNvPicPr>
+            <a:picLocks noChangeAspect="1"/>
+          </p:cNvPicPr>
+          <p:nvPr/>
+        </p:nvPicPr>
+        <p:blipFill>
+          <a:blip r:embed="rId2"/>
+          <a:stretch>
+            <a:fillRect/>
+          </a:stretch>
+        </p:blipFill>
+        <p:spPr>
+          <a:xfrm>
+            <a:off x="23412" y="30114"/>
+            <a:ext cx="1386414" cy="1380564"/>
+          </a:xfrm>
+          <a:prstGeom prst="rect">
+            <a:avLst/>
+          </a:prstGeom>
+          <a:ln>
+            <a:noFill/>
+          </a:ln>
+          <a:effectLst>
+            <a:softEdge rad="112500"/>
+          </a:effectLst>
+        </p:spPr>
+      </p:pic>
+      <p:sp>
+        <p:nvSpPr>
+          <p:cNvPr id="12" name="TextBox 11">
+            <a:extLst>
+              <a:ext uri="{FF2B5EF4-FFF2-40B4-BE49-F238E27FC236}">
+                <a16:creationId xmlns:a16="http://schemas.microsoft.com/office/drawing/2014/main" id="{6A86CA5C-C6A1-2E30-3AF9-2227AC3FFB18}"/>
+              </a:ext>
+            </a:extLst>
+          </p:cNvPr>
+          <p:cNvSpPr txBox="1"/>
+          <p:nvPr/>
+        </p:nvSpPr>
+        <p:spPr>
+          <a:xfrm>
+            <a:off x="23412" y="6458554"/>
+            <a:ext cx="7163844" cy="369332"/>
+          </a:xfrm>
+          <a:prstGeom prst="rect">
+            <a:avLst/>
+          </a:prstGeom>
+          <a:noFill/>
+        </p:spPr>
+        <p:txBody>
+          <a:bodyPr wrap="square">
+            <a:spAutoFit/>
+          </a:bodyPr>
+          <a:lstStyle/>
+          <a:p>
+            <a:r>
+              <a:rPr lang="en-US" b="1" dirty="0"/>
+              <a:t>Repository: </a:t>
+            </a:r>
+            <a:r>
+              <a:rPr lang="en-US" b="1" dirty="0">
+                <a:hlinkClick r:id="rId3"/>
+              </a:rPr>
+              <a:t>https://github.com/yasenstar/PowerBI_Tutorial</a:t>
+            </a:r>
+            <a:endParaRPr lang="en-US" b="1" dirty="0"/>
+          </a:p>
+        </p:txBody>
+      </p:sp>
+      <p:pic>
+        <p:nvPicPr>
+          <p:cNvPr id="13" name="Picture 12">
+            <a:extLst>
+              <a:ext uri="{FF2B5EF4-FFF2-40B4-BE49-F238E27FC236}">
+                <a16:creationId xmlns:a16="http://schemas.microsoft.com/office/drawing/2014/main" id="{FC479CFC-CD7F-F961-BE9D-CEBF78CD53F8}"/>
+              </a:ext>
+            </a:extLst>
+          </p:cNvPr>
+          <p:cNvPicPr>
+            <a:picLocks noChangeAspect="1"/>
+          </p:cNvPicPr>
+          <p:nvPr/>
+        </p:nvPicPr>
+        <p:blipFill>
+          <a:blip r:embed="rId4"/>
+          <a:stretch>
+            <a:fillRect/>
+          </a:stretch>
+        </p:blipFill>
+        <p:spPr>
+          <a:xfrm>
+            <a:off x="97030" y="1487212"/>
+            <a:ext cx="1850713" cy="2315544"/>
+          </a:xfrm>
+          <a:prstGeom prst="rect">
+            <a:avLst/>
+          </a:prstGeom>
+          <a:ln>
+            <a:noFill/>
+          </a:ln>
+          <a:effectLst>
+            <a:outerShdw blurRad="190500" algn="tl" rotWithShape="0">
+              <a:srgbClr val="000000">
+                <a:alpha val="70000"/>
+              </a:srgbClr>
+            </a:outerShdw>
+          </a:effectLst>
+        </p:spPr>
+      </p:pic>
+      <p:pic>
+        <p:nvPicPr>
+          <p:cNvPr id="6" name="Picture 5">
+            <a:extLst>
+              <a:ext uri="{FF2B5EF4-FFF2-40B4-BE49-F238E27FC236}">
+                <a16:creationId xmlns:a16="http://schemas.microsoft.com/office/drawing/2014/main" id="{8A4F1174-C58F-B5C2-6405-78E3EBB1AE77}"/>
+              </a:ext>
+            </a:extLst>
+          </p:cNvPr>
+          <p:cNvPicPr>
+            <a:picLocks noChangeAspect="1"/>
+          </p:cNvPicPr>
+          <p:nvPr/>
+        </p:nvPicPr>
+        <p:blipFill>
+          <a:blip r:embed="rId5"/>
+          <a:stretch>
+            <a:fillRect/>
+          </a:stretch>
+        </p:blipFill>
+        <p:spPr>
+          <a:xfrm>
+            <a:off x="1297339" y="1464130"/>
+            <a:ext cx="8674434" cy="4916513"/>
+          </a:xfrm>
+          <a:prstGeom prst="roundRect">
+            <a:avLst>
+              <a:gd name="adj" fmla="val 16667"/>
+            </a:avLst>
+          </a:prstGeom>
+          <a:ln>
+            <a:noFill/>
+          </a:ln>
+          <a:effectLst>
+            <a:outerShdw blurRad="152400" dist="12000" dir="900000" sy="98000" kx="110000" ky="200000" algn="tl" rotWithShape="0">
+              <a:srgbClr val="000000">
+                <a:alpha val="30000"/>
+              </a:srgbClr>
+            </a:outerShdw>
+          </a:effectLst>
+          <a:scene3d>
+            <a:camera prst="perspectiveRelaxed">
+              <a:rot lat="19800000" lon="1200000" rev="20820000"/>
+            </a:camera>
+            <a:lightRig rig="threePt" dir="t"/>
+          </a:scene3d>
+          <a:sp3d contourW="6350" prstMaterial="matte">
+            <a:bevelT w="101600" h="101600"/>
+            <a:contourClr>
+              <a:srgbClr val="969696"/>
+            </a:contourClr>
+          </a:sp3d>
+        </p:spPr>
+      </p:pic>
+      <p:pic>
+        <p:nvPicPr>
+          <p:cNvPr id="7" name="Picture 6">
+            <a:extLst>
+              <a:ext uri="{FF2B5EF4-FFF2-40B4-BE49-F238E27FC236}">
+                <a16:creationId xmlns:a16="http://schemas.microsoft.com/office/drawing/2014/main" id="{10DDF6DC-6F83-6B23-EAEA-801EFFD24796}"/>
+              </a:ext>
+            </a:extLst>
+          </p:cNvPr>
+          <p:cNvPicPr>
+            <a:picLocks noChangeAspect="1"/>
+          </p:cNvPicPr>
+          <p:nvPr/>
+        </p:nvPicPr>
+        <p:blipFill>
+          <a:blip r:embed="rId6"/>
+          <a:stretch>
+            <a:fillRect/>
+          </a:stretch>
+        </p:blipFill>
+        <p:spPr>
+          <a:xfrm>
+            <a:off x="6730198" y="4008925"/>
+            <a:ext cx="4354896" cy="2449629"/>
+          </a:xfrm>
+          <a:prstGeom prst="rect">
+            <a:avLst/>
+          </a:prstGeom>
+          <a:ln>
+            <a:noFill/>
+          </a:ln>
+          <a:effectLst>
+            <a:softEdge rad="112500"/>
+          </a:effectLst>
+        </p:spPr>
+      </p:pic>
+    </p:spTree>
+    <p:extLst>
+      <p:ext uri="{BB962C8B-B14F-4D97-AF65-F5344CB8AC3E}">
+        <p14:creationId xmlns:p14="http://schemas.microsoft.com/office/powerpoint/2010/main" val="2169936009"/>
+      </p:ext>
+    </p:extLst>
+  </p:cSld>
+  <p:clrMapOvr>
+    <a:masterClrMapping/>
+  </p:clrMapOvr>
+</p:sld>
+</file>
+
+<file path=ppt/slides/slide11.xml><?xml version="1.0" encoding="utf-8"?>
+<p:sld xmlns:a="http://schemas.openxmlformats.org/drawingml/2006/main" xmlns:r="http://schemas.openxmlformats.org/officeDocument/2006/relationships" xmlns:p="http://schemas.openxmlformats.org/presentationml/2006/main">
+  <p:cSld>
+    <p:spTree>
+      <p:nvGrpSpPr>
+        <p:cNvPr id="1" name=""/>
+        <p:cNvGrpSpPr/>
+        <p:nvPr/>
+      </p:nvGrpSpPr>
+      <p:grpSpPr>
+        <a:xfrm>
+          <a:off x="0" y="0"/>
+          <a:ext cx="0" cy="0"/>
+          <a:chOff x="0" y="0"/>
+          <a:chExt cx="0" cy="0"/>
+        </a:xfrm>
+      </p:grpSpPr>
+      <p:pic>
+        <p:nvPicPr>
+          <p:cNvPr id="6" name="Picture 5">
+            <a:extLst>
+              <a:ext uri="{FF2B5EF4-FFF2-40B4-BE49-F238E27FC236}">
+                <a16:creationId xmlns:a16="http://schemas.microsoft.com/office/drawing/2014/main" id="{50CAFD73-E11B-F840-4A9D-3301CE4C505C}"/>
+              </a:ext>
+            </a:extLst>
+          </p:cNvPr>
+          <p:cNvPicPr>
+            <a:picLocks noChangeAspect="1"/>
+          </p:cNvPicPr>
+          <p:nvPr/>
+        </p:nvPicPr>
+        <p:blipFill>
+          <a:blip r:embed="rId2"/>
+          <a:stretch>
+            <a:fillRect/>
+          </a:stretch>
+        </p:blipFill>
+        <p:spPr>
+          <a:xfrm>
+            <a:off x="909054" y="1083990"/>
+            <a:ext cx="5874734" cy="5037883"/>
+          </a:xfrm>
+          <a:prstGeom prst="rect">
+            <a:avLst/>
+          </a:prstGeom>
+        </p:spPr>
+      </p:pic>
+      <p:pic>
+        <p:nvPicPr>
+          <p:cNvPr id="9" name="Picture 8">
+            <a:extLst>
+              <a:ext uri="{FF2B5EF4-FFF2-40B4-BE49-F238E27FC236}">
+                <a16:creationId xmlns:a16="http://schemas.microsoft.com/office/drawing/2014/main" id="{64D03C02-7C5F-FCD6-ED16-BEA0FE6D88BF}"/>
+              </a:ext>
+            </a:extLst>
+          </p:cNvPr>
+          <p:cNvPicPr>
+            <a:picLocks noChangeAspect="1"/>
+          </p:cNvPicPr>
+          <p:nvPr/>
+        </p:nvPicPr>
+        <p:blipFill>
+          <a:blip r:embed="rId3"/>
+          <a:stretch>
+            <a:fillRect/>
+          </a:stretch>
+        </p:blipFill>
+        <p:spPr>
+          <a:xfrm>
+            <a:off x="6606172" y="3500232"/>
+            <a:ext cx="4676775" cy="2990850"/>
+          </a:xfrm>
+          <a:prstGeom prst="rect">
+            <a:avLst/>
+          </a:prstGeom>
+          <a:ln>
+            <a:noFill/>
+          </a:ln>
+          <a:effectLst>
+            <a:softEdge rad="112500"/>
+          </a:effectLst>
+        </p:spPr>
+      </p:pic>
+      <p:pic>
+        <p:nvPicPr>
+          <p:cNvPr id="7" name="Picture 6">
+            <a:extLst>
+              <a:ext uri="{FF2B5EF4-FFF2-40B4-BE49-F238E27FC236}">
+                <a16:creationId xmlns:a16="http://schemas.microsoft.com/office/drawing/2014/main" id="{A5950B14-03FB-D0FA-3FF2-604DCE06159E}"/>
+              </a:ext>
+            </a:extLst>
+          </p:cNvPr>
+          <p:cNvPicPr>
+            <a:picLocks noChangeAspect="1"/>
+          </p:cNvPicPr>
+          <p:nvPr/>
+        </p:nvPicPr>
+        <p:blipFill>
+          <a:blip r:embed="rId4"/>
+          <a:stretch>
+            <a:fillRect/>
+          </a:stretch>
+        </p:blipFill>
+        <p:spPr>
+          <a:xfrm>
+            <a:off x="5750502" y="537883"/>
+            <a:ext cx="3334065" cy="3319997"/>
+          </a:xfrm>
+          <a:prstGeom prst="rect">
+            <a:avLst/>
+          </a:prstGeom>
+          <a:ln>
+            <a:noFill/>
+          </a:ln>
+          <a:effectLst>
+            <a:softEdge rad="112500"/>
+          </a:effectLst>
+        </p:spPr>
+      </p:pic>
+    </p:spTree>
+    <p:extLst>
+      <p:ext uri="{BB962C8B-B14F-4D97-AF65-F5344CB8AC3E}">
+        <p14:creationId xmlns:p14="http://schemas.microsoft.com/office/powerpoint/2010/main" val="1676600699"/>
+      </p:ext>
+    </p:extLst>
+  </p:cSld>
+  <p:clrMapOvr>
+    <a:masterClrMapping/>
+  </p:clrMapOvr>
+</p:sld>
+</file>
+
 <file path=ppt/slides/slide2.xml><?xml version="1.0" encoding="utf-8"?>
 <p:sld xmlns:a="http://schemas.openxmlformats.org/drawingml/2006/main" xmlns:r="http://schemas.openxmlformats.org/officeDocument/2006/relationships" xmlns:p="http://schemas.openxmlformats.org/presentationml/2006/main">
   <p:cSld>
@@ -10891,138 +14641,6 @@
 </file>
 
 <file path=ppt/slides/slide4.xml><?xml version="1.0" encoding="utf-8"?>
-<p:sld xmlns:a="http://schemas.openxmlformats.org/drawingml/2006/main" xmlns:r="http://schemas.openxmlformats.org/officeDocument/2006/relationships" xmlns:p="http://schemas.openxmlformats.org/presentationml/2006/main">
-  <p:cSld>
-    <p:spTree>
-      <p:nvGrpSpPr>
-        <p:cNvPr id="1" name=""/>
-        <p:cNvGrpSpPr/>
-        <p:nvPr/>
-      </p:nvGrpSpPr>
-      <p:grpSpPr>
-        <a:xfrm>
-          <a:off x="0" y="0"/>
-          <a:ext cx="0" cy="0"/>
-          <a:chOff x="0" y="0"/>
-          <a:chExt cx="0" cy="0"/>
-        </a:xfrm>
-      </p:grpSpPr>
-      <p:pic>
-        <p:nvPicPr>
-          <p:cNvPr id="6" name="Picture 5">
-            <a:extLst>
-              <a:ext uri="{FF2B5EF4-FFF2-40B4-BE49-F238E27FC236}">
-                <a16:creationId xmlns:a16="http://schemas.microsoft.com/office/drawing/2014/main" id="{50CAFD73-E11B-F840-4A9D-3301CE4C505C}"/>
-              </a:ext>
-            </a:extLst>
-          </p:cNvPr>
-          <p:cNvPicPr>
-            <a:picLocks noChangeAspect="1"/>
-          </p:cNvPicPr>
-          <p:nvPr/>
-        </p:nvPicPr>
-        <p:blipFill>
-          <a:blip r:embed="rId2"/>
-          <a:stretch>
-            <a:fillRect/>
-          </a:stretch>
-        </p:blipFill>
-        <p:spPr>
-          <a:xfrm>
-            <a:off x="909054" y="1083990"/>
-            <a:ext cx="5874734" cy="5037883"/>
-          </a:xfrm>
-          <a:prstGeom prst="rect">
-            <a:avLst/>
-          </a:prstGeom>
-        </p:spPr>
-      </p:pic>
-      <p:pic>
-        <p:nvPicPr>
-          <p:cNvPr id="9" name="Picture 8">
-            <a:extLst>
-              <a:ext uri="{FF2B5EF4-FFF2-40B4-BE49-F238E27FC236}">
-                <a16:creationId xmlns:a16="http://schemas.microsoft.com/office/drawing/2014/main" id="{64D03C02-7C5F-FCD6-ED16-BEA0FE6D88BF}"/>
-              </a:ext>
-            </a:extLst>
-          </p:cNvPr>
-          <p:cNvPicPr>
-            <a:picLocks noChangeAspect="1"/>
-          </p:cNvPicPr>
-          <p:nvPr/>
-        </p:nvPicPr>
-        <p:blipFill>
-          <a:blip r:embed="rId3"/>
-          <a:stretch>
-            <a:fillRect/>
-          </a:stretch>
-        </p:blipFill>
-        <p:spPr>
-          <a:xfrm>
-            <a:off x="6606172" y="3500232"/>
-            <a:ext cx="4676775" cy="2990850"/>
-          </a:xfrm>
-          <a:prstGeom prst="rect">
-            <a:avLst/>
-          </a:prstGeom>
-          <a:ln>
-            <a:noFill/>
-          </a:ln>
-          <a:effectLst>
-            <a:softEdge rad="112500"/>
-          </a:effectLst>
-        </p:spPr>
-      </p:pic>
-      <p:pic>
-        <p:nvPicPr>
-          <p:cNvPr id="7" name="Picture 6">
-            <a:extLst>
-              <a:ext uri="{FF2B5EF4-FFF2-40B4-BE49-F238E27FC236}">
-                <a16:creationId xmlns:a16="http://schemas.microsoft.com/office/drawing/2014/main" id="{A5950B14-03FB-D0FA-3FF2-604DCE06159E}"/>
-              </a:ext>
-            </a:extLst>
-          </p:cNvPr>
-          <p:cNvPicPr>
-            <a:picLocks noChangeAspect="1"/>
-          </p:cNvPicPr>
-          <p:nvPr/>
-        </p:nvPicPr>
-        <p:blipFill>
-          <a:blip r:embed="rId4"/>
-          <a:stretch>
-            <a:fillRect/>
-          </a:stretch>
-        </p:blipFill>
-        <p:spPr>
-          <a:xfrm>
-            <a:off x="5750502" y="537883"/>
-            <a:ext cx="3334065" cy="3319997"/>
-          </a:xfrm>
-          <a:prstGeom prst="rect">
-            <a:avLst/>
-          </a:prstGeom>
-          <a:ln>
-            <a:noFill/>
-          </a:ln>
-          <a:effectLst>
-            <a:softEdge rad="112500"/>
-          </a:effectLst>
-        </p:spPr>
-      </p:pic>
-    </p:spTree>
-    <p:extLst>
-      <p:ext uri="{BB962C8B-B14F-4D97-AF65-F5344CB8AC3E}">
-        <p14:creationId xmlns:p14="http://schemas.microsoft.com/office/powerpoint/2010/main" val="1676600699"/>
-      </p:ext>
-    </p:extLst>
-  </p:cSld>
-  <p:clrMapOvr>
-    <a:masterClrMapping/>
-  </p:clrMapOvr>
-</p:sld>
-</file>
-
-<file path=ppt/slides/slide5.xml><?xml version="1.0" encoding="utf-8"?>
 <p:sld xmlns:a="http://schemas.openxmlformats.org/drawingml/2006/main" xmlns:r="http://schemas.openxmlformats.org/officeDocument/2006/relationships" xmlns:p="http://schemas.openxmlformats.org/presentationml/2006/main">
   <p:cSld>
     <p:spTree>
@@ -11538,7 +15156,7 @@
 </p:sld>
 </file>
 
-<file path=ppt/slides/slide6.xml><?xml version="1.0" encoding="utf-8"?>
+<file path=ppt/slides/slide5.xml><?xml version="1.0" encoding="utf-8"?>
 <p:sld xmlns:a="http://schemas.openxmlformats.org/drawingml/2006/main" xmlns:r="http://schemas.openxmlformats.org/officeDocument/2006/relationships" xmlns:p="http://schemas.openxmlformats.org/presentationml/2006/main">
   <p:cSld>
     <p:spTree>
@@ -11844,6 +15462,1598 @@
     <p:extLst>
       <p:ext uri="{BB962C8B-B14F-4D97-AF65-F5344CB8AC3E}">
         <p14:creationId xmlns:p14="http://schemas.microsoft.com/office/powerpoint/2010/main" val="4014418906"/>
+      </p:ext>
+    </p:extLst>
+  </p:cSld>
+  <p:clrMapOvr>
+    <a:masterClrMapping/>
+  </p:clrMapOvr>
+</p:sld>
+</file>
+
+<file path=ppt/slides/slide6.xml><?xml version="1.0" encoding="utf-8"?>
+<p:sld xmlns:a="http://schemas.openxmlformats.org/drawingml/2006/main" xmlns:r="http://schemas.openxmlformats.org/officeDocument/2006/relationships" xmlns:p="http://schemas.openxmlformats.org/presentationml/2006/main">
+  <p:cSld>
+    <p:spTree>
+      <p:nvGrpSpPr>
+        <p:cNvPr id="1" name="">
+          <a:extLst>
+            <a:ext uri="{FF2B5EF4-FFF2-40B4-BE49-F238E27FC236}">
+              <a16:creationId xmlns:a16="http://schemas.microsoft.com/office/drawing/2014/main" id="{1D57CF44-B427-7833-B551-2D6F82E7D39E}"/>
+            </a:ext>
+          </a:extLst>
+        </p:cNvPr>
+        <p:cNvGrpSpPr/>
+        <p:nvPr/>
+      </p:nvGrpSpPr>
+      <p:grpSpPr>
+        <a:xfrm>
+          <a:off x="0" y="0"/>
+          <a:ext cx="0" cy="0"/>
+          <a:chOff x="0" y="0"/>
+          <a:chExt cx="0" cy="0"/>
+        </a:xfrm>
+      </p:grpSpPr>
+      <p:sp>
+        <p:nvSpPr>
+          <p:cNvPr id="2" name="Title 1">
+            <a:extLst>
+              <a:ext uri="{FF2B5EF4-FFF2-40B4-BE49-F238E27FC236}">
+                <a16:creationId xmlns:a16="http://schemas.microsoft.com/office/drawing/2014/main" id="{BC82D6E7-B6EA-6F3D-B116-DBCDCE8F2672}"/>
+              </a:ext>
+            </a:extLst>
+          </p:cNvPr>
+          <p:cNvSpPr>
+            <a:spLocks noGrp="1"/>
+          </p:cNvSpPr>
+          <p:nvPr>
+            <p:ph type="title"/>
+          </p:nvPr>
+        </p:nvSpPr>
+        <p:spPr>
+          <a:xfrm>
+            <a:off x="1409826" y="131063"/>
+            <a:ext cx="6772881" cy="793260"/>
+          </a:xfrm>
+        </p:spPr>
+        <p:txBody>
+          <a:bodyPr anchor="ctr"/>
+          <a:lstStyle/>
+          <a:p>
+            <a:pPr algn="l"/>
+            <a:r>
+              <a:rPr lang="en-US" dirty="0"/>
+              <a:t>Power BI Tutorial</a:t>
+            </a:r>
+          </a:p>
+        </p:txBody>
+      </p:sp>
+      <p:sp>
+        <p:nvSpPr>
+          <p:cNvPr id="4" name="Text Placeholder 3">
+            <a:extLst>
+              <a:ext uri="{FF2B5EF4-FFF2-40B4-BE49-F238E27FC236}">
+                <a16:creationId xmlns:a16="http://schemas.microsoft.com/office/drawing/2014/main" id="{4424918D-3377-AD41-5BAC-7F4E1B004D8C}"/>
+              </a:ext>
+            </a:extLst>
+          </p:cNvPr>
+          <p:cNvSpPr>
+            <a:spLocks noGrp="1"/>
+          </p:cNvSpPr>
+          <p:nvPr>
+            <p:ph type="body" sz="quarter" idx="13"/>
+          </p:nvPr>
+        </p:nvSpPr>
+        <p:spPr>
+          <a:xfrm>
+            <a:off x="2079149" y="915490"/>
+            <a:ext cx="8033702" cy="1097280"/>
+          </a:xfrm>
+        </p:spPr>
+        <p:txBody>
+          <a:bodyPr anchor="ctr">
+            <a:normAutofit lnSpcReduction="10000"/>
+          </a:bodyPr>
+          <a:lstStyle/>
+          <a:p>
+            <a:pPr algn="l"/>
+            <a:r>
+              <a:rPr lang="en-US" sz="3600" dirty="0"/>
+              <a:t>Part 1. Put Your BI Thinking Caps On</a:t>
+            </a:r>
+          </a:p>
+          <a:p>
+            <a:pPr algn="l"/>
+            <a:r>
+              <a:rPr lang="en-US" altLang="zh-CN" sz="3600" dirty="0"/>
+              <a:t>Chapter 01: Data Analytics Terms (1)</a:t>
+            </a:r>
+            <a:endParaRPr lang="en-US" sz="3600" dirty="0"/>
+          </a:p>
+        </p:txBody>
+      </p:sp>
+      <p:sp>
+        <p:nvSpPr>
+          <p:cNvPr id="5" name="TextBox 4">
+            <a:extLst>
+              <a:ext uri="{FF2B5EF4-FFF2-40B4-BE49-F238E27FC236}">
+                <a16:creationId xmlns:a16="http://schemas.microsoft.com/office/drawing/2014/main" id="{914E7043-16D7-B6A9-593F-FB52B84B693E}"/>
+              </a:ext>
+            </a:extLst>
+          </p:cNvPr>
+          <p:cNvSpPr txBox="1"/>
+          <p:nvPr/>
+        </p:nvSpPr>
+        <p:spPr>
+          <a:xfrm>
+            <a:off x="9487400" y="11040"/>
+            <a:ext cx="2704600" cy="1200329"/>
+          </a:xfrm>
+          <a:prstGeom prst="rect">
+            <a:avLst/>
+          </a:prstGeom>
+          <a:noFill/>
+        </p:spPr>
+        <p:txBody>
+          <a:bodyPr wrap="square" rtlCol="0" anchor="ctr">
+            <a:spAutoFit/>
+          </a:bodyPr>
+          <a:lstStyle/>
+          <a:p>
+            <a:pPr algn="ctr"/>
+            <a:r>
+              <a:rPr lang="en-US" sz="7200" b="1" dirty="0">
+                <a:ln w="9525">
+                  <a:solidFill>
+                    <a:schemeClr val="bg1"/>
+                  </a:solidFill>
+                  <a:prstDash val="solid"/>
+                </a:ln>
+                <a:solidFill>
+                  <a:schemeClr val="accent3">
+                    <a:lumMod val="20000"/>
+                    <a:lumOff val="80000"/>
+                  </a:schemeClr>
+                </a:solidFill>
+                <a:effectLst>
+                  <a:outerShdw blurRad="12700" dist="38100" dir="2700000" algn="tl" rotWithShape="0">
+                    <a:schemeClr val="bg1">
+                      <a:lumMod val="50000"/>
+                    </a:schemeClr>
+                  </a:outerShdw>
+                </a:effectLst>
+                <a:latin typeface="Goudy Stout" panose="0202090407030B020401" pitchFamily="18" charset="0"/>
+              </a:rPr>
+              <a:t>002</a:t>
+            </a:r>
+          </a:p>
+        </p:txBody>
+      </p:sp>
+      <p:pic>
+        <p:nvPicPr>
+          <p:cNvPr id="8" name="Picture 7">
+            <a:extLst>
+              <a:ext uri="{FF2B5EF4-FFF2-40B4-BE49-F238E27FC236}">
+                <a16:creationId xmlns:a16="http://schemas.microsoft.com/office/drawing/2014/main" id="{64445852-B18F-5191-80C7-BD285ED03985}"/>
+              </a:ext>
+            </a:extLst>
+          </p:cNvPr>
+          <p:cNvPicPr>
+            <a:picLocks noChangeAspect="1"/>
+          </p:cNvPicPr>
+          <p:nvPr/>
+        </p:nvPicPr>
+        <p:blipFill>
+          <a:blip r:embed="rId2"/>
+          <a:stretch>
+            <a:fillRect/>
+          </a:stretch>
+        </p:blipFill>
+        <p:spPr>
+          <a:xfrm>
+            <a:off x="23412" y="30114"/>
+            <a:ext cx="1386414" cy="1380564"/>
+          </a:xfrm>
+          <a:prstGeom prst="rect">
+            <a:avLst/>
+          </a:prstGeom>
+          <a:ln>
+            <a:noFill/>
+          </a:ln>
+          <a:effectLst>
+            <a:softEdge rad="112500"/>
+          </a:effectLst>
+        </p:spPr>
+      </p:pic>
+      <p:sp>
+        <p:nvSpPr>
+          <p:cNvPr id="12" name="TextBox 11">
+            <a:extLst>
+              <a:ext uri="{FF2B5EF4-FFF2-40B4-BE49-F238E27FC236}">
+                <a16:creationId xmlns:a16="http://schemas.microsoft.com/office/drawing/2014/main" id="{2B685EAB-B4B0-B90A-9EB3-04FC6728C797}"/>
+              </a:ext>
+            </a:extLst>
+          </p:cNvPr>
+          <p:cNvSpPr txBox="1"/>
+          <p:nvPr/>
+        </p:nvSpPr>
+        <p:spPr>
+          <a:xfrm>
+            <a:off x="23412" y="6458554"/>
+            <a:ext cx="7163844" cy="369332"/>
+          </a:xfrm>
+          <a:prstGeom prst="rect">
+            <a:avLst/>
+          </a:prstGeom>
+          <a:noFill/>
+        </p:spPr>
+        <p:txBody>
+          <a:bodyPr wrap="square">
+            <a:spAutoFit/>
+          </a:bodyPr>
+          <a:lstStyle/>
+          <a:p>
+            <a:r>
+              <a:rPr lang="en-US" b="1" dirty="0"/>
+              <a:t>Repository: </a:t>
+            </a:r>
+            <a:r>
+              <a:rPr lang="en-US" b="1" dirty="0">
+                <a:hlinkClick r:id="rId3"/>
+              </a:rPr>
+              <a:t>https://github.com/yasenstar/PowerBI_Tutorial</a:t>
+            </a:r>
+            <a:endParaRPr lang="en-US" b="1" dirty="0"/>
+          </a:p>
+        </p:txBody>
+      </p:sp>
+      <p:pic>
+        <p:nvPicPr>
+          <p:cNvPr id="13" name="Picture 12">
+            <a:extLst>
+              <a:ext uri="{FF2B5EF4-FFF2-40B4-BE49-F238E27FC236}">
+                <a16:creationId xmlns:a16="http://schemas.microsoft.com/office/drawing/2014/main" id="{89E43224-3CCB-6E34-A2D7-0474D9EB412A}"/>
+              </a:ext>
+            </a:extLst>
+          </p:cNvPr>
+          <p:cNvPicPr>
+            <a:picLocks noChangeAspect="1"/>
+          </p:cNvPicPr>
+          <p:nvPr/>
+        </p:nvPicPr>
+        <p:blipFill>
+          <a:blip r:embed="rId4"/>
+          <a:stretch>
+            <a:fillRect/>
+          </a:stretch>
+        </p:blipFill>
+        <p:spPr>
+          <a:xfrm>
+            <a:off x="97030" y="1487212"/>
+            <a:ext cx="1850713" cy="2315544"/>
+          </a:xfrm>
+          <a:prstGeom prst="rect">
+            <a:avLst/>
+          </a:prstGeom>
+          <a:ln>
+            <a:noFill/>
+          </a:ln>
+          <a:effectLst>
+            <a:outerShdw blurRad="190500" algn="tl" rotWithShape="0">
+              <a:srgbClr val="000000">
+                <a:alpha val="70000"/>
+              </a:srgbClr>
+            </a:outerShdw>
+          </a:effectLst>
+        </p:spPr>
+      </p:pic>
+      <p:pic>
+        <p:nvPicPr>
+          <p:cNvPr id="7" name="Picture 6">
+            <a:extLst>
+              <a:ext uri="{FF2B5EF4-FFF2-40B4-BE49-F238E27FC236}">
+                <a16:creationId xmlns:a16="http://schemas.microsoft.com/office/drawing/2014/main" id="{43796D11-92FE-A898-1E41-DD144B8E61AF}"/>
+              </a:ext>
+            </a:extLst>
+          </p:cNvPr>
+          <p:cNvPicPr>
+            <a:picLocks noChangeAspect="1"/>
+          </p:cNvPicPr>
+          <p:nvPr/>
+        </p:nvPicPr>
+        <p:blipFill>
+          <a:blip r:embed="rId5"/>
+          <a:stretch>
+            <a:fillRect/>
+          </a:stretch>
+        </p:blipFill>
+        <p:spPr>
+          <a:xfrm>
+            <a:off x="1191121" y="1780865"/>
+            <a:ext cx="7210292" cy="4114800"/>
+          </a:xfrm>
+          <a:prstGeom prst="roundRect">
+            <a:avLst>
+              <a:gd name="adj" fmla="val 16667"/>
+            </a:avLst>
+          </a:prstGeom>
+          <a:ln>
+            <a:noFill/>
+          </a:ln>
+          <a:effectLst>
+            <a:outerShdw blurRad="152400" dist="12000" dir="900000" sy="98000" kx="110000" ky="200000" algn="tl" rotWithShape="0">
+              <a:srgbClr val="000000">
+                <a:alpha val="30000"/>
+              </a:srgbClr>
+            </a:outerShdw>
+          </a:effectLst>
+          <a:scene3d>
+            <a:camera prst="perspectiveRelaxed">
+              <a:rot lat="19800000" lon="1200000" rev="20820000"/>
+            </a:camera>
+            <a:lightRig rig="threePt" dir="t"/>
+          </a:scene3d>
+          <a:sp3d contourW="6350" prstMaterial="matte">
+            <a:bevelT w="101600" h="101600"/>
+            <a:contourClr>
+              <a:srgbClr val="969696"/>
+            </a:contourClr>
+          </a:sp3d>
+        </p:spPr>
+      </p:pic>
+      <p:pic>
+        <p:nvPicPr>
+          <p:cNvPr id="9" name="Picture 8">
+            <a:extLst>
+              <a:ext uri="{FF2B5EF4-FFF2-40B4-BE49-F238E27FC236}">
+                <a16:creationId xmlns:a16="http://schemas.microsoft.com/office/drawing/2014/main" id="{684A61AC-3AC3-9B00-81D3-5F00BBD5D310}"/>
+              </a:ext>
+            </a:extLst>
+          </p:cNvPr>
+          <p:cNvPicPr>
+            <a:picLocks noChangeAspect="1"/>
+          </p:cNvPicPr>
+          <p:nvPr/>
+        </p:nvPicPr>
+        <p:blipFill>
+          <a:blip r:embed="rId6"/>
+          <a:stretch>
+            <a:fillRect/>
+          </a:stretch>
+        </p:blipFill>
+        <p:spPr>
+          <a:xfrm>
+            <a:off x="5893897" y="3532472"/>
+            <a:ext cx="5223281" cy="2952005"/>
+          </a:xfrm>
+          <a:prstGeom prst="rect">
+            <a:avLst/>
+          </a:prstGeom>
+          <a:ln>
+            <a:noFill/>
+          </a:ln>
+          <a:effectLst>
+            <a:softEdge rad="112500"/>
+          </a:effectLst>
+        </p:spPr>
+      </p:pic>
+    </p:spTree>
+    <p:extLst>
+      <p:ext uri="{BB962C8B-B14F-4D97-AF65-F5344CB8AC3E}">
+        <p14:creationId xmlns:p14="http://schemas.microsoft.com/office/powerpoint/2010/main" val="4285272886"/>
+      </p:ext>
+    </p:extLst>
+  </p:cSld>
+  <p:clrMapOvr>
+    <a:masterClrMapping/>
+  </p:clrMapOvr>
+</p:sld>
+</file>
+
+<file path=ppt/slides/slide7.xml><?xml version="1.0" encoding="utf-8"?>
+<p:sld xmlns:a="http://schemas.openxmlformats.org/drawingml/2006/main" xmlns:r="http://schemas.openxmlformats.org/officeDocument/2006/relationships" xmlns:p="http://schemas.openxmlformats.org/presentationml/2006/main">
+  <p:cSld>
+    <p:spTree>
+      <p:nvGrpSpPr>
+        <p:cNvPr id="1" name="">
+          <a:extLst>
+            <a:ext uri="{FF2B5EF4-FFF2-40B4-BE49-F238E27FC236}">
+              <a16:creationId xmlns:a16="http://schemas.microsoft.com/office/drawing/2014/main" id="{21657797-79B6-D16C-F254-C3005553C484}"/>
+            </a:ext>
+          </a:extLst>
+        </p:cNvPr>
+        <p:cNvGrpSpPr/>
+        <p:nvPr/>
+      </p:nvGrpSpPr>
+      <p:grpSpPr>
+        <a:xfrm>
+          <a:off x="0" y="0"/>
+          <a:ext cx="0" cy="0"/>
+          <a:chOff x="0" y="0"/>
+          <a:chExt cx="0" cy="0"/>
+        </a:xfrm>
+      </p:grpSpPr>
+      <p:sp>
+        <p:nvSpPr>
+          <p:cNvPr id="2" name="Title 1">
+            <a:extLst>
+              <a:ext uri="{FF2B5EF4-FFF2-40B4-BE49-F238E27FC236}">
+                <a16:creationId xmlns:a16="http://schemas.microsoft.com/office/drawing/2014/main" id="{6C05B2C3-8BA4-7B7E-2083-8ACA1AFE796C}"/>
+              </a:ext>
+            </a:extLst>
+          </p:cNvPr>
+          <p:cNvSpPr>
+            <a:spLocks noGrp="1"/>
+          </p:cNvSpPr>
+          <p:nvPr>
+            <p:ph type="title"/>
+          </p:nvPr>
+        </p:nvSpPr>
+        <p:spPr>
+          <a:xfrm>
+            <a:off x="1409826" y="131063"/>
+            <a:ext cx="6772881" cy="793260"/>
+          </a:xfrm>
+        </p:spPr>
+        <p:txBody>
+          <a:bodyPr anchor="ctr"/>
+          <a:lstStyle/>
+          <a:p>
+            <a:pPr algn="l"/>
+            <a:r>
+              <a:rPr lang="en-US" dirty="0"/>
+              <a:t>Power BI Tutorial</a:t>
+            </a:r>
+          </a:p>
+        </p:txBody>
+      </p:sp>
+      <p:sp>
+        <p:nvSpPr>
+          <p:cNvPr id="4" name="Text Placeholder 3">
+            <a:extLst>
+              <a:ext uri="{FF2B5EF4-FFF2-40B4-BE49-F238E27FC236}">
+                <a16:creationId xmlns:a16="http://schemas.microsoft.com/office/drawing/2014/main" id="{03CC253B-DCEC-4DD0-A59C-74F92A5311C1}"/>
+              </a:ext>
+            </a:extLst>
+          </p:cNvPr>
+          <p:cNvSpPr>
+            <a:spLocks noGrp="1"/>
+          </p:cNvSpPr>
+          <p:nvPr>
+            <p:ph type="body" sz="quarter" idx="13"/>
+          </p:nvPr>
+        </p:nvSpPr>
+        <p:spPr>
+          <a:xfrm>
+            <a:off x="2079149" y="915490"/>
+            <a:ext cx="8033702" cy="1097280"/>
+          </a:xfrm>
+        </p:spPr>
+        <p:txBody>
+          <a:bodyPr anchor="ctr">
+            <a:normAutofit lnSpcReduction="10000"/>
+          </a:bodyPr>
+          <a:lstStyle/>
+          <a:p>
+            <a:pPr algn="l"/>
+            <a:r>
+              <a:rPr lang="en-US" sz="3600" dirty="0"/>
+              <a:t>Part 1. Put Your BI Thinking Caps On</a:t>
+            </a:r>
+          </a:p>
+          <a:p>
+            <a:pPr algn="l"/>
+            <a:r>
+              <a:rPr lang="en-US" altLang="zh-CN" sz="3600" dirty="0"/>
+              <a:t>Chapter 01: Data Analytics Terms (2)</a:t>
+            </a:r>
+            <a:endParaRPr lang="en-US" sz="3600" dirty="0"/>
+          </a:p>
+        </p:txBody>
+      </p:sp>
+      <p:sp>
+        <p:nvSpPr>
+          <p:cNvPr id="5" name="TextBox 4">
+            <a:extLst>
+              <a:ext uri="{FF2B5EF4-FFF2-40B4-BE49-F238E27FC236}">
+                <a16:creationId xmlns:a16="http://schemas.microsoft.com/office/drawing/2014/main" id="{3D4576D9-7105-2A82-F412-4B7F3788670C}"/>
+              </a:ext>
+            </a:extLst>
+          </p:cNvPr>
+          <p:cNvSpPr txBox="1"/>
+          <p:nvPr/>
+        </p:nvSpPr>
+        <p:spPr>
+          <a:xfrm>
+            <a:off x="9487400" y="11040"/>
+            <a:ext cx="2704600" cy="1200329"/>
+          </a:xfrm>
+          <a:prstGeom prst="rect">
+            <a:avLst/>
+          </a:prstGeom>
+          <a:noFill/>
+        </p:spPr>
+        <p:txBody>
+          <a:bodyPr wrap="square" rtlCol="0" anchor="ctr">
+            <a:spAutoFit/>
+          </a:bodyPr>
+          <a:lstStyle/>
+          <a:p>
+            <a:pPr algn="ctr"/>
+            <a:r>
+              <a:rPr lang="en-US" sz="7200" b="1" dirty="0">
+                <a:ln w="9525">
+                  <a:solidFill>
+                    <a:schemeClr val="bg1"/>
+                  </a:solidFill>
+                  <a:prstDash val="solid"/>
+                </a:ln>
+                <a:solidFill>
+                  <a:schemeClr val="accent3">
+                    <a:lumMod val="20000"/>
+                    <a:lumOff val="80000"/>
+                  </a:schemeClr>
+                </a:solidFill>
+                <a:effectLst>
+                  <a:outerShdw blurRad="12700" dist="38100" dir="2700000" algn="tl" rotWithShape="0">
+                    <a:schemeClr val="bg1">
+                      <a:lumMod val="50000"/>
+                    </a:schemeClr>
+                  </a:outerShdw>
+                </a:effectLst>
+                <a:latin typeface="Goudy Stout" panose="0202090407030B020401" pitchFamily="18" charset="0"/>
+              </a:rPr>
+              <a:t>003</a:t>
+            </a:r>
+          </a:p>
+        </p:txBody>
+      </p:sp>
+      <p:pic>
+        <p:nvPicPr>
+          <p:cNvPr id="8" name="Picture 7">
+            <a:extLst>
+              <a:ext uri="{FF2B5EF4-FFF2-40B4-BE49-F238E27FC236}">
+                <a16:creationId xmlns:a16="http://schemas.microsoft.com/office/drawing/2014/main" id="{BF2BE13B-7012-430F-0B23-58DC373F1A64}"/>
+              </a:ext>
+            </a:extLst>
+          </p:cNvPr>
+          <p:cNvPicPr>
+            <a:picLocks noChangeAspect="1"/>
+          </p:cNvPicPr>
+          <p:nvPr/>
+        </p:nvPicPr>
+        <p:blipFill>
+          <a:blip r:embed="rId2"/>
+          <a:stretch>
+            <a:fillRect/>
+          </a:stretch>
+        </p:blipFill>
+        <p:spPr>
+          <a:xfrm>
+            <a:off x="23412" y="30114"/>
+            <a:ext cx="1386414" cy="1380564"/>
+          </a:xfrm>
+          <a:prstGeom prst="rect">
+            <a:avLst/>
+          </a:prstGeom>
+          <a:ln>
+            <a:noFill/>
+          </a:ln>
+          <a:effectLst>
+            <a:softEdge rad="112500"/>
+          </a:effectLst>
+        </p:spPr>
+      </p:pic>
+      <p:sp>
+        <p:nvSpPr>
+          <p:cNvPr id="12" name="TextBox 11">
+            <a:extLst>
+              <a:ext uri="{FF2B5EF4-FFF2-40B4-BE49-F238E27FC236}">
+                <a16:creationId xmlns:a16="http://schemas.microsoft.com/office/drawing/2014/main" id="{8309EBB9-813F-833D-3841-71FE7DF5E29E}"/>
+              </a:ext>
+            </a:extLst>
+          </p:cNvPr>
+          <p:cNvSpPr txBox="1"/>
+          <p:nvPr/>
+        </p:nvSpPr>
+        <p:spPr>
+          <a:xfrm>
+            <a:off x="23412" y="6458554"/>
+            <a:ext cx="7163844" cy="369332"/>
+          </a:xfrm>
+          <a:prstGeom prst="rect">
+            <a:avLst/>
+          </a:prstGeom>
+          <a:noFill/>
+        </p:spPr>
+        <p:txBody>
+          <a:bodyPr wrap="square">
+            <a:spAutoFit/>
+          </a:bodyPr>
+          <a:lstStyle/>
+          <a:p>
+            <a:r>
+              <a:rPr lang="en-US" b="1" dirty="0"/>
+              <a:t>Repository: </a:t>
+            </a:r>
+            <a:r>
+              <a:rPr lang="en-US" b="1" dirty="0">
+                <a:hlinkClick r:id="rId3"/>
+              </a:rPr>
+              <a:t>https://github.com/yasenstar/PowerBI_Tutorial</a:t>
+            </a:r>
+            <a:endParaRPr lang="en-US" b="1" dirty="0"/>
+          </a:p>
+        </p:txBody>
+      </p:sp>
+      <p:pic>
+        <p:nvPicPr>
+          <p:cNvPr id="13" name="Picture 12">
+            <a:extLst>
+              <a:ext uri="{FF2B5EF4-FFF2-40B4-BE49-F238E27FC236}">
+                <a16:creationId xmlns:a16="http://schemas.microsoft.com/office/drawing/2014/main" id="{4C86886E-29F1-EA44-260E-3F5BD4508C19}"/>
+              </a:ext>
+            </a:extLst>
+          </p:cNvPr>
+          <p:cNvPicPr>
+            <a:picLocks noChangeAspect="1"/>
+          </p:cNvPicPr>
+          <p:nvPr/>
+        </p:nvPicPr>
+        <p:blipFill>
+          <a:blip r:embed="rId4"/>
+          <a:stretch>
+            <a:fillRect/>
+          </a:stretch>
+        </p:blipFill>
+        <p:spPr>
+          <a:xfrm>
+            <a:off x="97030" y="1487212"/>
+            <a:ext cx="1850713" cy="2315544"/>
+          </a:xfrm>
+          <a:prstGeom prst="rect">
+            <a:avLst/>
+          </a:prstGeom>
+          <a:ln>
+            <a:noFill/>
+          </a:ln>
+          <a:effectLst>
+            <a:outerShdw blurRad="190500" algn="tl" rotWithShape="0">
+              <a:srgbClr val="000000">
+                <a:alpha val="70000"/>
+              </a:srgbClr>
+            </a:outerShdw>
+          </a:effectLst>
+        </p:spPr>
+      </p:pic>
+      <p:pic>
+        <p:nvPicPr>
+          <p:cNvPr id="6" name="Picture 5">
+            <a:extLst>
+              <a:ext uri="{FF2B5EF4-FFF2-40B4-BE49-F238E27FC236}">
+                <a16:creationId xmlns:a16="http://schemas.microsoft.com/office/drawing/2014/main" id="{A4569937-F6DC-4D58-A317-3FFCAE08A072}"/>
+              </a:ext>
+            </a:extLst>
+          </p:cNvPr>
+          <p:cNvPicPr>
+            <a:picLocks noChangeAspect="1"/>
+          </p:cNvPicPr>
+          <p:nvPr/>
+        </p:nvPicPr>
+        <p:blipFill>
+          <a:blip r:embed="rId5"/>
+          <a:stretch>
+            <a:fillRect/>
+          </a:stretch>
+        </p:blipFill>
+        <p:spPr>
+          <a:xfrm>
+            <a:off x="1246265" y="1549405"/>
+            <a:ext cx="8241135" cy="4720208"/>
+          </a:xfrm>
+          <a:prstGeom prst="roundRect">
+            <a:avLst>
+              <a:gd name="adj" fmla="val 16667"/>
+            </a:avLst>
+          </a:prstGeom>
+          <a:ln>
+            <a:noFill/>
+          </a:ln>
+          <a:effectLst>
+            <a:outerShdw blurRad="152400" dist="12000" dir="900000" sy="98000" kx="110000" ky="200000" algn="tl" rotWithShape="0">
+              <a:srgbClr val="000000">
+                <a:alpha val="30000"/>
+              </a:srgbClr>
+            </a:outerShdw>
+          </a:effectLst>
+          <a:scene3d>
+            <a:camera prst="perspectiveRelaxed">
+              <a:rot lat="19800000" lon="1200000" rev="20820000"/>
+            </a:camera>
+            <a:lightRig rig="threePt" dir="t"/>
+          </a:scene3d>
+          <a:sp3d contourW="6350" prstMaterial="matte">
+            <a:bevelT w="101600" h="101600"/>
+            <a:contourClr>
+              <a:srgbClr val="969696"/>
+            </a:contourClr>
+          </a:sp3d>
+        </p:spPr>
+      </p:pic>
+      <p:pic>
+        <p:nvPicPr>
+          <p:cNvPr id="2050" name="Picture 2" descr="What is Power BI | Introduction to Power BI | Power BI Tutorial | Edureka">
+            <a:extLst>
+              <a:ext uri="{FF2B5EF4-FFF2-40B4-BE49-F238E27FC236}">
+                <a16:creationId xmlns:a16="http://schemas.microsoft.com/office/drawing/2014/main" id="{E019B0A7-31DC-CE42-4459-58CA8D1CAA7B}"/>
+              </a:ext>
+            </a:extLst>
+          </p:cNvPr>
+          <p:cNvPicPr>
+            <a:picLocks noChangeAspect="1" noChangeArrowheads="1"/>
+          </p:cNvPicPr>
+          <p:nvPr/>
+        </p:nvPicPr>
+        <p:blipFill>
+          <a:blip r:embed="rId6">
+            <a:extLst>
+              <a:ext uri="{28A0092B-C50C-407E-A947-70E740481C1C}">
+                <a14:useLocalDpi xmlns:a14="http://schemas.microsoft.com/office/drawing/2010/main" val="0"/>
+              </a:ext>
+            </a:extLst>
+          </a:blip>
+          <a:srcRect/>
+          <a:stretch>
+            <a:fillRect/>
+          </a:stretch>
+        </p:blipFill>
+        <p:spPr bwMode="auto">
+          <a:xfrm>
+            <a:off x="5631175" y="3570489"/>
+            <a:ext cx="5103064" cy="2955442"/>
+          </a:xfrm>
+          <a:prstGeom prst="rect">
+            <a:avLst/>
+          </a:prstGeom>
+          <a:ln>
+            <a:noFill/>
+          </a:ln>
+          <a:effectLst>
+            <a:softEdge rad="112500"/>
+          </a:effectLst>
+          <a:extLst>
+            <a:ext uri="{909E8E84-426E-40DD-AFC4-6F175D3DCCD1}">
+              <a14:hiddenFill xmlns:a14="http://schemas.microsoft.com/office/drawing/2010/main">
+                <a:solidFill>
+                  <a:srgbClr val="FFFFFF"/>
+                </a:solidFill>
+              </a14:hiddenFill>
+            </a:ext>
+          </a:extLst>
+        </p:spPr>
+      </p:pic>
+    </p:spTree>
+    <p:extLst>
+      <p:ext uri="{BB962C8B-B14F-4D97-AF65-F5344CB8AC3E}">
+        <p14:creationId xmlns:p14="http://schemas.microsoft.com/office/powerpoint/2010/main" val="447476967"/>
+      </p:ext>
+    </p:extLst>
+  </p:cSld>
+  <p:clrMapOvr>
+    <a:masterClrMapping/>
+  </p:clrMapOvr>
+</p:sld>
+</file>
+
+<file path=ppt/slides/slide8.xml><?xml version="1.0" encoding="utf-8"?>
+<p:sld xmlns:a="http://schemas.openxmlformats.org/drawingml/2006/main" xmlns:r="http://schemas.openxmlformats.org/officeDocument/2006/relationships" xmlns:p="http://schemas.openxmlformats.org/presentationml/2006/main">
+  <p:cSld>
+    <p:spTree>
+      <p:nvGrpSpPr>
+        <p:cNvPr id="1" name="">
+          <a:extLst>
+            <a:ext uri="{FF2B5EF4-FFF2-40B4-BE49-F238E27FC236}">
+              <a16:creationId xmlns:a16="http://schemas.microsoft.com/office/drawing/2014/main" id="{7E0FA103-A7D1-6F55-7D2A-8A2172784560}"/>
+            </a:ext>
+          </a:extLst>
+        </p:cNvPr>
+        <p:cNvGrpSpPr/>
+        <p:nvPr/>
+      </p:nvGrpSpPr>
+      <p:grpSpPr>
+        <a:xfrm>
+          <a:off x="0" y="0"/>
+          <a:ext cx="0" cy="0"/>
+          <a:chOff x="0" y="0"/>
+          <a:chExt cx="0" cy="0"/>
+        </a:xfrm>
+      </p:grpSpPr>
+      <p:sp>
+        <p:nvSpPr>
+          <p:cNvPr id="2" name="Title 1">
+            <a:extLst>
+              <a:ext uri="{FF2B5EF4-FFF2-40B4-BE49-F238E27FC236}">
+                <a16:creationId xmlns:a16="http://schemas.microsoft.com/office/drawing/2014/main" id="{32EC1F40-8317-12F2-8937-CB7F42516928}"/>
+              </a:ext>
+            </a:extLst>
+          </p:cNvPr>
+          <p:cNvSpPr>
+            <a:spLocks noGrp="1"/>
+          </p:cNvSpPr>
+          <p:nvPr>
+            <p:ph type="title"/>
+          </p:nvPr>
+        </p:nvSpPr>
+        <p:spPr>
+          <a:xfrm>
+            <a:off x="1409826" y="131063"/>
+            <a:ext cx="6772881" cy="793260"/>
+          </a:xfrm>
+        </p:spPr>
+        <p:txBody>
+          <a:bodyPr anchor="ctr"/>
+          <a:lstStyle/>
+          <a:p>
+            <a:pPr algn="l"/>
+            <a:r>
+              <a:rPr lang="en-US" dirty="0"/>
+              <a:t>Power BI Tutorial</a:t>
+            </a:r>
+          </a:p>
+        </p:txBody>
+      </p:sp>
+      <p:sp>
+        <p:nvSpPr>
+          <p:cNvPr id="4" name="Text Placeholder 3">
+            <a:extLst>
+              <a:ext uri="{FF2B5EF4-FFF2-40B4-BE49-F238E27FC236}">
+                <a16:creationId xmlns:a16="http://schemas.microsoft.com/office/drawing/2014/main" id="{D4005F7E-1FFB-77E3-B4D5-1BE827902E13}"/>
+              </a:ext>
+            </a:extLst>
+          </p:cNvPr>
+          <p:cNvSpPr>
+            <a:spLocks noGrp="1"/>
+          </p:cNvSpPr>
+          <p:nvPr>
+            <p:ph type="body" sz="quarter" idx="13"/>
+          </p:nvPr>
+        </p:nvSpPr>
+        <p:spPr>
+          <a:xfrm>
+            <a:off x="2079149" y="915490"/>
+            <a:ext cx="8033702" cy="1097280"/>
+          </a:xfrm>
+        </p:spPr>
+        <p:txBody>
+          <a:bodyPr anchor="ctr">
+            <a:normAutofit lnSpcReduction="10000"/>
+          </a:bodyPr>
+          <a:lstStyle/>
+          <a:p>
+            <a:pPr algn="l"/>
+            <a:r>
+              <a:rPr lang="en-US" sz="3600" dirty="0"/>
+              <a:t>Part 1. Put Your BI Thinking Caps On</a:t>
+            </a:r>
+          </a:p>
+          <a:p>
+            <a:pPr algn="l"/>
+            <a:r>
+              <a:rPr lang="en-US" altLang="zh-CN" sz="3600" dirty="0"/>
+              <a:t>Chapter 02: </a:t>
+            </a:r>
+            <a:r>
+              <a:rPr lang="en-US" altLang="zh-CN" sz="3600" dirty="0">
+                <a:highlight>
+                  <a:srgbClr val="C0C0C0"/>
+                </a:highlight>
+              </a:rPr>
+              <a:t>Who</a:t>
+            </a:r>
+            <a:r>
+              <a:rPr lang="en-US" altLang="zh-CN" sz="3600" dirty="0"/>
+              <a:t>, How, What (1)</a:t>
+            </a:r>
+            <a:endParaRPr lang="en-US" sz="3600" dirty="0"/>
+          </a:p>
+        </p:txBody>
+      </p:sp>
+      <p:sp>
+        <p:nvSpPr>
+          <p:cNvPr id="5" name="TextBox 4">
+            <a:extLst>
+              <a:ext uri="{FF2B5EF4-FFF2-40B4-BE49-F238E27FC236}">
+                <a16:creationId xmlns:a16="http://schemas.microsoft.com/office/drawing/2014/main" id="{973A57AB-136B-9547-F553-5FA486DE712D}"/>
+              </a:ext>
+            </a:extLst>
+          </p:cNvPr>
+          <p:cNvSpPr txBox="1"/>
+          <p:nvPr/>
+        </p:nvSpPr>
+        <p:spPr>
+          <a:xfrm>
+            <a:off x="9487400" y="11040"/>
+            <a:ext cx="2704600" cy="1200329"/>
+          </a:xfrm>
+          <a:prstGeom prst="rect">
+            <a:avLst/>
+          </a:prstGeom>
+          <a:noFill/>
+        </p:spPr>
+        <p:txBody>
+          <a:bodyPr wrap="square" rtlCol="0" anchor="ctr">
+            <a:spAutoFit/>
+          </a:bodyPr>
+          <a:lstStyle/>
+          <a:p>
+            <a:pPr algn="ctr"/>
+            <a:r>
+              <a:rPr lang="en-US" sz="7200" b="1" dirty="0">
+                <a:ln w="9525">
+                  <a:solidFill>
+                    <a:schemeClr val="bg1"/>
+                  </a:solidFill>
+                  <a:prstDash val="solid"/>
+                </a:ln>
+                <a:solidFill>
+                  <a:schemeClr val="accent3">
+                    <a:lumMod val="20000"/>
+                    <a:lumOff val="80000"/>
+                  </a:schemeClr>
+                </a:solidFill>
+                <a:effectLst>
+                  <a:outerShdw blurRad="12700" dist="38100" dir="2700000" algn="tl" rotWithShape="0">
+                    <a:schemeClr val="bg1">
+                      <a:lumMod val="50000"/>
+                    </a:schemeClr>
+                  </a:outerShdw>
+                </a:effectLst>
+                <a:latin typeface="Goudy Stout" panose="0202090407030B020401" pitchFamily="18" charset="0"/>
+              </a:rPr>
+              <a:t>004</a:t>
+            </a:r>
+          </a:p>
+        </p:txBody>
+      </p:sp>
+      <p:pic>
+        <p:nvPicPr>
+          <p:cNvPr id="8" name="Picture 7">
+            <a:extLst>
+              <a:ext uri="{FF2B5EF4-FFF2-40B4-BE49-F238E27FC236}">
+                <a16:creationId xmlns:a16="http://schemas.microsoft.com/office/drawing/2014/main" id="{5E5266CE-384B-5A78-7936-665C1B4BD611}"/>
+              </a:ext>
+            </a:extLst>
+          </p:cNvPr>
+          <p:cNvPicPr>
+            <a:picLocks noChangeAspect="1"/>
+          </p:cNvPicPr>
+          <p:nvPr/>
+        </p:nvPicPr>
+        <p:blipFill>
+          <a:blip r:embed="rId2"/>
+          <a:stretch>
+            <a:fillRect/>
+          </a:stretch>
+        </p:blipFill>
+        <p:spPr>
+          <a:xfrm>
+            <a:off x="23412" y="30114"/>
+            <a:ext cx="1386414" cy="1380564"/>
+          </a:xfrm>
+          <a:prstGeom prst="rect">
+            <a:avLst/>
+          </a:prstGeom>
+          <a:ln>
+            <a:noFill/>
+          </a:ln>
+          <a:effectLst>
+            <a:softEdge rad="112500"/>
+          </a:effectLst>
+        </p:spPr>
+      </p:pic>
+      <p:sp>
+        <p:nvSpPr>
+          <p:cNvPr id="12" name="TextBox 11">
+            <a:extLst>
+              <a:ext uri="{FF2B5EF4-FFF2-40B4-BE49-F238E27FC236}">
+                <a16:creationId xmlns:a16="http://schemas.microsoft.com/office/drawing/2014/main" id="{384EA724-A0D8-E17F-C8CD-201C9E98EE70}"/>
+              </a:ext>
+            </a:extLst>
+          </p:cNvPr>
+          <p:cNvSpPr txBox="1"/>
+          <p:nvPr/>
+        </p:nvSpPr>
+        <p:spPr>
+          <a:xfrm>
+            <a:off x="23412" y="6458554"/>
+            <a:ext cx="7163844" cy="369332"/>
+          </a:xfrm>
+          <a:prstGeom prst="rect">
+            <a:avLst/>
+          </a:prstGeom>
+          <a:noFill/>
+        </p:spPr>
+        <p:txBody>
+          <a:bodyPr wrap="square">
+            <a:spAutoFit/>
+          </a:bodyPr>
+          <a:lstStyle/>
+          <a:p>
+            <a:r>
+              <a:rPr lang="en-US" b="1" dirty="0"/>
+              <a:t>Repository: </a:t>
+            </a:r>
+            <a:r>
+              <a:rPr lang="en-US" b="1" dirty="0">
+                <a:hlinkClick r:id="rId3"/>
+              </a:rPr>
+              <a:t>https://github.com/yasenstar/PowerBI_Tutorial</a:t>
+            </a:r>
+            <a:endParaRPr lang="en-US" b="1" dirty="0"/>
+          </a:p>
+        </p:txBody>
+      </p:sp>
+      <p:pic>
+        <p:nvPicPr>
+          <p:cNvPr id="13" name="Picture 12">
+            <a:extLst>
+              <a:ext uri="{FF2B5EF4-FFF2-40B4-BE49-F238E27FC236}">
+                <a16:creationId xmlns:a16="http://schemas.microsoft.com/office/drawing/2014/main" id="{2541B033-E107-AEA4-4319-E63535C5306D}"/>
+              </a:ext>
+            </a:extLst>
+          </p:cNvPr>
+          <p:cNvPicPr>
+            <a:picLocks noChangeAspect="1"/>
+          </p:cNvPicPr>
+          <p:nvPr/>
+        </p:nvPicPr>
+        <p:blipFill>
+          <a:blip r:embed="rId4"/>
+          <a:stretch>
+            <a:fillRect/>
+          </a:stretch>
+        </p:blipFill>
+        <p:spPr>
+          <a:xfrm>
+            <a:off x="97030" y="1487212"/>
+            <a:ext cx="1850713" cy="2315544"/>
+          </a:xfrm>
+          <a:prstGeom prst="rect">
+            <a:avLst/>
+          </a:prstGeom>
+          <a:ln>
+            <a:noFill/>
+          </a:ln>
+          <a:effectLst>
+            <a:outerShdw blurRad="190500" algn="tl" rotWithShape="0">
+              <a:srgbClr val="000000">
+                <a:alpha val="70000"/>
+              </a:srgbClr>
+            </a:outerShdw>
+          </a:effectLst>
+        </p:spPr>
+      </p:pic>
+      <p:pic>
+        <p:nvPicPr>
+          <p:cNvPr id="7" name="Picture 6">
+            <a:extLst>
+              <a:ext uri="{FF2B5EF4-FFF2-40B4-BE49-F238E27FC236}">
+                <a16:creationId xmlns:a16="http://schemas.microsoft.com/office/drawing/2014/main" id="{F9F9CA7B-42DB-6FF0-3A97-6C6347FE5530}"/>
+              </a:ext>
+            </a:extLst>
+          </p:cNvPr>
+          <p:cNvPicPr>
+            <a:picLocks noChangeAspect="1"/>
+          </p:cNvPicPr>
+          <p:nvPr/>
+        </p:nvPicPr>
+        <p:blipFill>
+          <a:blip r:embed="rId5"/>
+          <a:stretch>
+            <a:fillRect/>
+          </a:stretch>
+        </p:blipFill>
+        <p:spPr>
+          <a:xfrm>
+            <a:off x="1152068" y="1487212"/>
+            <a:ext cx="8646449" cy="4884391"/>
+          </a:xfrm>
+          <a:prstGeom prst="roundRect">
+            <a:avLst>
+              <a:gd name="adj" fmla="val 16667"/>
+            </a:avLst>
+          </a:prstGeom>
+          <a:ln>
+            <a:noFill/>
+          </a:ln>
+          <a:effectLst>
+            <a:outerShdw blurRad="152400" dist="12000" dir="900000" sy="98000" kx="110000" ky="200000" algn="tl" rotWithShape="0">
+              <a:srgbClr val="000000">
+                <a:alpha val="30000"/>
+              </a:srgbClr>
+            </a:outerShdw>
+          </a:effectLst>
+          <a:scene3d>
+            <a:camera prst="perspectiveRelaxed">
+              <a:rot lat="19800000" lon="1200000" rev="20820000"/>
+            </a:camera>
+            <a:lightRig rig="threePt" dir="t"/>
+          </a:scene3d>
+          <a:sp3d contourW="6350" prstMaterial="matte">
+            <a:bevelT w="101600" h="101600"/>
+            <a:contourClr>
+              <a:srgbClr val="969696"/>
+            </a:contourClr>
+          </a:sp3d>
+        </p:spPr>
+      </p:pic>
+      <p:pic>
+        <p:nvPicPr>
+          <p:cNvPr id="10" name="Picture 9">
+            <a:extLst>
+              <a:ext uri="{FF2B5EF4-FFF2-40B4-BE49-F238E27FC236}">
+                <a16:creationId xmlns:a16="http://schemas.microsoft.com/office/drawing/2014/main" id="{0C2BDD9C-B18F-C9D6-9E5B-83F014C9024D}"/>
+              </a:ext>
+            </a:extLst>
+          </p:cNvPr>
+          <p:cNvPicPr>
+            <a:picLocks noChangeAspect="1"/>
+          </p:cNvPicPr>
+          <p:nvPr/>
+        </p:nvPicPr>
+        <p:blipFill>
+          <a:blip r:embed="rId6"/>
+          <a:stretch>
+            <a:fillRect/>
+          </a:stretch>
+        </p:blipFill>
+        <p:spPr>
+          <a:xfrm>
+            <a:off x="6074768" y="4215819"/>
+            <a:ext cx="1599462" cy="1466173"/>
+          </a:xfrm>
+          <a:prstGeom prst="rect">
+            <a:avLst/>
+          </a:prstGeom>
+          <a:ln>
+            <a:noFill/>
+          </a:ln>
+          <a:effectLst>
+            <a:softEdge rad="112500"/>
+          </a:effectLst>
+        </p:spPr>
+      </p:pic>
+      <p:sp>
+        <p:nvSpPr>
+          <p:cNvPr id="11" name="TextBox 10">
+            <a:extLst>
+              <a:ext uri="{FF2B5EF4-FFF2-40B4-BE49-F238E27FC236}">
+                <a16:creationId xmlns:a16="http://schemas.microsoft.com/office/drawing/2014/main" id="{6877782E-761B-00F8-6B6F-7ADBA019C0EF}"/>
+              </a:ext>
+            </a:extLst>
+          </p:cNvPr>
+          <p:cNvSpPr txBox="1"/>
+          <p:nvPr/>
+        </p:nvSpPr>
+        <p:spPr>
+          <a:xfrm>
+            <a:off x="7706727" y="4447458"/>
+            <a:ext cx="1780673" cy="923330"/>
+          </a:xfrm>
+          <a:prstGeom prst="rect">
+            <a:avLst/>
+          </a:prstGeom>
+          <a:noFill/>
+        </p:spPr>
+        <p:txBody>
+          <a:bodyPr wrap="square" rtlCol="0">
+            <a:spAutoFit/>
+          </a:bodyPr>
+          <a:lstStyle/>
+          <a:p>
+            <a:r>
+              <a:rPr lang="en-US" altLang="zh-CN" b="1" dirty="0">
+                <a:solidFill>
+                  <a:schemeClr val="accent6"/>
+                </a:solidFill>
+              </a:rPr>
+              <a:t>DATA RELATED ROLE</a:t>
+            </a:r>
+            <a:endParaRPr lang="en-US" b="1" dirty="0">
+              <a:solidFill>
+                <a:schemeClr val="accent6"/>
+              </a:solidFill>
+            </a:endParaRPr>
+          </a:p>
+        </p:txBody>
+      </p:sp>
+    </p:spTree>
+    <p:extLst>
+      <p:ext uri="{BB962C8B-B14F-4D97-AF65-F5344CB8AC3E}">
+        <p14:creationId xmlns:p14="http://schemas.microsoft.com/office/powerpoint/2010/main" val="4174540355"/>
+      </p:ext>
+    </p:extLst>
+  </p:cSld>
+  <p:clrMapOvr>
+    <a:masterClrMapping/>
+  </p:clrMapOvr>
+</p:sld>
+</file>
+
+<file path=ppt/slides/slide9.xml><?xml version="1.0" encoding="utf-8"?>
+<p:sld xmlns:a="http://schemas.openxmlformats.org/drawingml/2006/main" xmlns:r="http://schemas.openxmlformats.org/officeDocument/2006/relationships" xmlns:p="http://schemas.openxmlformats.org/presentationml/2006/main">
+  <p:cSld>
+    <p:spTree>
+      <p:nvGrpSpPr>
+        <p:cNvPr id="1" name="">
+          <a:extLst>
+            <a:ext uri="{FF2B5EF4-FFF2-40B4-BE49-F238E27FC236}">
+              <a16:creationId xmlns:a16="http://schemas.microsoft.com/office/drawing/2014/main" id="{BED5A348-0092-2C16-BC22-177351402DF8}"/>
+            </a:ext>
+          </a:extLst>
+        </p:cNvPr>
+        <p:cNvGrpSpPr/>
+        <p:nvPr/>
+      </p:nvGrpSpPr>
+      <p:grpSpPr>
+        <a:xfrm>
+          <a:off x="0" y="0"/>
+          <a:ext cx="0" cy="0"/>
+          <a:chOff x="0" y="0"/>
+          <a:chExt cx="0" cy="0"/>
+        </a:xfrm>
+      </p:grpSpPr>
+      <p:sp>
+        <p:nvSpPr>
+          <p:cNvPr id="2" name="Title 1">
+            <a:extLst>
+              <a:ext uri="{FF2B5EF4-FFF2-40B4-BE49-F238E27FC236}">
+                <a16:creationId xmlns:a16="http://schemas.microsoft.com/office/drawing/2014/main" id="{1AB3DCED-872B-03B9-6944-86230EAA62E2}"/>
+              </a:ext>
+            </a:extLst>
+          </p:cNvPr>
+          <p:cNvSpPr>
+            <a:spLocks noGrp="1"/>
+          </p:cNvSpPr>
+          <p:nvPr>
+            <p:ph type="title"/>
+          </p:nvPr>
+        </p:nvSpPr>
+        <p:spPr>
+          <a:xfrm>
+            <a:off x="1409826" y="131063"/>
+            <a:ext cx="6772881" cy="793260"/>
+          </a:xfrm>
+        </p:spPr>
+        <p:txBody>
+          <a:bodyPr anchor="ctr"/>
+          <a:lstStyle/>
+          <a:p>
+            <a:pPr algn="l"/>
+            <a:r>
+              <a:rPr lang="en-US" dirty="0"/>
+              <a:t>Power BI Tutorial</a:t>
+            </a:r>
+          </a:p>
+        </p:txBody>
+      </p:sp>
+      <p:sp>
+        <p:nvSpPr>
+          <p:cNvPr id="4" name="Text Placeholder 3">
+            <a:extLst>
+              <a:ext uri="{FF2B5EF4-FFF2-40B4-BE49-F238E27FC236}">
+                <a16:creationId xmlns:a16="http://schemas.microsoft.com/office/drawing/2014/main" id="{1E07BA64-24FD-FA13-5DCA-9CFB1489E5FD}"/>
+              </a:ext>
+            </a:extLst>
+          </p:cNvPr>
+          <p:cNvSpPr>
+            <a:spLocks noGrp="1"/>
+          </p:cNvSpPr>
+          <p:nvPr>
+            <p:ph type="body" sz="quarter" idx="13"/>
+          </p:nvPr>
+        </p:nvSpPr>
+        <p:spPr>
+          <a:xfrm>
+            <a:off x="2079149" y="915490"/>
+            <a:ext cx="8033702" cy="1097280"/>
+          </a:xfrm>
+        </p:spPr>
+        <p:txBody>
+          <a:bodyPr anchor="ctr">
+            <a:normAutofit lnSpcReduction="10000"/>
+          </a:bodyPr>
+          <a:lstStyle/>
+          <a:p>
+            <a:pPr algn="l"/>
+            <a:r>
+              <a:rPr lang="en-US" sz="3600" dirty="0"/>
+              <a:t>Part 1. Put Your BI Thinking Caps On</a:t>
+            </a:r>
+          </a:p>
+          <a:p>
+            <a:pPr algn="l"/>
+            <a:r>
+              <a:rPr lang="en-US" altLang="zh-CN" sz="3600" dirty="0"/>
+              <a:t>Chapter 02: Who, </a:t>
+            </a:r>
+            <a:r>
+              <a:rPr lang="en-US" altLang="zh-CN" sz="3600" dirty="0">
+                <a:highlight>
+                  <a:srgbClr val="C0C0C0"/>
+                </a:highlight>
+              </a:rPr>
+              <a:t>How</a:t>
+            </a:r>
+            <a:r>
+              <a:rPr lang="en-US" altLang="zh-CN" sz="3600" dirty="0"/>
+              <a:t>, What (2)</a:t>
+            </a:r>
+            <a:endParaRPr lang="en-US" sz="3600" dirty="0"/>
+          </a:p>
+        </p:txBody>
+      </p:sp>
+      <p:sp>
+        <p:nvSpPr>
+          <p:cNvPr id="5" name="TextBox 4">
+            <a:extLst>
+              <a:ext uri="{FF2B5EF4-FFF2-40B4-BE49-F238E27FC236}">
+                <a16:creationId xmlns:a16="http://schemas.microsoft.com/office/drawing/2014/main" id="{EEA56DB2-E386-479B-5BA1-21A94BF76543}"/>
+              </a:ext>
+            </a:extLst>
+          </p:cNvPr>
+          <p:cNvSpPr txBox="1"/>
+          <p:nvPr/>
+        </p:nvSpPr>
+        <p:spPr>
+          <a:xfrm>
+            <a:off x="9487400" y="11040"/>
+            <a:ext cx="2704600" cy="1200329"/>
+          </a:xfrm>
+          <a:prstGeom prst="rect">
+            <a:avLst/>
+          </a:prstGeom>
+          <a:noFill/>
+        </p:spPr>
+        <p:txBody>
+          <a:bodyPr wrap="square" rtlCol="0" anchor="ctr">
+            <a:spAutoFit/>
+          </a:bodyPr>
+          <a:lstStyle/>
+          <a:p>
+            <a:pPr algn="ctr"/>
+            <a:r>
+              <a:rPr lang="en-US" sz="7200" b="1" dirty="0">
+                <a:ln w="9525">
+                  <a:solidFill>
+                    <a:schemeClr val="bg1"/>
+                  </a:solidFill>
+                  <a:prstDash val="solid"/>
+                </a:ln>
+                <a:solidFill>
+                  <a:schemeClr val="accent3">
+                    <a:lumMod val="20000"/>
+                    <a:lumOff val="80000"/>
+                  </a:schemeClr>
+                </a:solidFill>
+                <a:effectLst>
+                  <a:outerShdw blurRad="12700" dist="38100" dir="2700000" algn="tl" rotWithShape="0">
+                    <a:schemeClr val="bg1">
+                      <a:lumMod val="50000"/>
+                    </a:schemeClr>
+                  </a:outerShdw>
+                </a:effectLst>
+                <a:latin typeface="Goudy Stout" panose="0202090407030B020401" pitchFamily="18" charset="0"/>
+              </a:rPr>
+              <a:t>005</a:t>
+            </a:r>
+          </a:p>
+        </p:txBody>
+      </p:sp>
+      <p:pic>
+        <p:nvPicPr>
+          <p:cNvPr id="8" name="Picture 7">
+            <a:extLst>
+              <a:ext uri="{FF2B5EF4-FFF2-40B4-BE49-F238E27FC236}">
+                <a16:creationId xmlns:a16="http://schemas.microsoft.com/office/drawing/2014/main" id="{2244CDCA-1A7C-7A4C-E8AC-0C64FA8D8641}"/>
+              </a:ext>
+            </a:extLst>
+          </p:cNvPr>
+          <p:cNvPicPr>
+            <a:picLocks noChangeAspect="1"/>
+          </p:cNvPicPr>
+          <p:nvPr/>
+        </p:nvPicPr>
+        <p:blipFill>
+          <a:blip r:embed="rId2"/>
+          <a:stretch>
+            <a:fillRect/>
+          </a:stretch>
+        </p:blipFill>
+        <p:spPr>
+          <a:xfrm>
+            <a:off x="23412" y="30114"/>
+            <a:ext cx="1386414" cy="1380564"/>
+          </a:xfrm>
+          <a:prstGeom prst="rect">
+            <a:avLst/>
+          </a:prstGeom>
+          <a:ln>
+            <a:noFill/>
+          </a:ln>
+          <a:effectLst>
+            <a:softEdge rad="112500"/>
+          </a:effectLst>
+        </p:spPr>
+      </p:pic>
+      <p:sp>
+        <p:nvSpPr>
+          <p:cNvPr id="12" name="TextBox 11">
+            <a:extLst>
+              <a:ext uri="{FF2B5EF4-FFF2-40B4-BE49-F238E27FC236}">
+                <a16:creationId xmlns:a16="http://schemas.microsoft.com/office/drawing/2014/main" id="{606DB1A9-C3A9-A240-B331-D899475B8E5C}"/>
+              </a:ext>
+            </a:extLst>
+          </p:cNvPr>
+          <p:cNvSpPr txBox="1"/>
+          <p:nvPr/>
+        </p:nvSpPr>
+        <p:spPr>
+          <a:xfrm>
+            <a:off x="23412" y="6458554"/>
+            <a:ext cx="7163844" cy="369332"/>
+          </a:xfrm>
+          <a:prstGeom prst="rect">
+            <a:avLst/>
+          </a:prstGeom>
+          <a:noFill/>
+        </p:spPr>
+        <p:txBody>
+          <a:bodyPr wrap="square">
+            <a:spAutoFit/>
+          </a:bodyPr>
+          <a:lstStyle/>
+          <a:p>
+            <a:r>
+              <a:rPr lang="en-US" b="1" dirty="0"/>
+              <a:t>Repository: </a:t>
+            </a:r>
+            <a:r>
+              <a:rPr lang="en-US" b="1" dirty="0">
+                <a:hlinkClick r:id="rId3"/>
+              </a:rPr>
+              <a:t>https://github.com/yasenstar/PowerBI_Tutorial</a:t>
+            </a:r>
+            <a:endParaRPr lang="en-US" b="1" dirty="0"/>
+          </a:p>
+        </p:txBody>
+      </p:sp>
+      <p:pic>
+        <p:nvPicPr>
+          <p:cNvPr id="13" name="Picture 12">
+            <a:extLst>
+              <a:ext uri="{FF2B5EF4-FFF2-40B4-BE49-F238E27FC236}">
+                <a16:creationId xmlns:a16="http://schemas.microsoft.com/office/drawing/2014/main" id="{5D49F22E-224F-8551-8A1B-838B69AA596C}"/>
+              </a:ext>
+            </a:extLst>
+          </p:cNvPr>
+          <p:cNvPicPr>
+            <a:picLocks noChangeAspect="1"/>
+          </p:cNvPicPr>
+          <p:nvPr/>
+        </p:nvPicPr>
+        <p:blipFill>
+          <a:blip r:embed="rId4"/>
+          <a:stretch>
+            <a:fillRect/>
+          </a:stretch>
+        </p:blipFill>
+        <p:spPr>
+          <a:xfrm>
+            <a:off x="97030" y="1487212"/>
+            <a:ext cx="1850713" cy="2315544"/>
+          </a:xfrm>
+          <a:prstGeom prst="rect">
+            <a:avLst/>
+          </a:prstGeom>
+          <a:ln>
+            <a:noFill/>
+          </a:ln>
+          <a:effectLst>
+            <a:outerShdw blurRad="190500" algn="tl" rotWithShape="0">
+              <a:srgbClr val="000000">
+                <a:alpha val="70000"/>
+              </a:srgbClr>
+            </a:outerShdw>
+          </a:effectLst>
+        </p:spPr>
+      </p:pic>
+      <p:pic>
+        <p:nvPicPr>
+          <p:cNvPr id="6" name="Picture 5">
+            <a:extLst>
+              <a:ext uri="{FF2B5EF4-FFF2-40B4-BE49-F238E27FC236}">
+                <a16:creationId xmlns:a16="http://schemas.microsoft.com/office/drawing/2014/main" id="{90B6DDB9-A5FF-F591-6F81-B5D273CDC135}"/>
+              </a:ext>
+            </a:extLst>
+          </p:cNvPr>
+          <p:cNvPicPr>
+            <a:picLocks noChangeAspect="1"/>
+          </p:cNvPicPr>
+          <p:nvPr/>
+        </p:nvPicPr>
+        <p:blipFill>
+          <a:blip r:embed="rId5"/>
+          <a:stretch>
+            <a:fillRect/>
+          </a:stretch>
+        </p:blipFill>
+        <p:spPr>
+          <a:xfrm>
+            <a:off x="1058071" y="1554789"/>
+            <a:ext cx="8508747" cy="4847390"/>
+          </a:xfrm>
+          <a:prstGeom prst="roundRect">
+            <a:avLst>
+              <a:gd name="adj" fmla="val 16667"/>
+            </a:avLst>
+          </a:prstGeom>
+          <a:ln>
+            <a:noFill/>
+          </a:ln>
+          <a:effectLst>
+            <a:outerShdw blurRad="152400" dist="12000" dir="900000" sy="98000" kx="110000" ky="200000" algn="tl" rotWithShape="0">
+              <a:srgbClr val="000000">
+                <a:alpha val="30000"/>
+              </a:srgbClr>
+            </a:outerShdw>
+          </a:effectLst>
+          <a:scene3d>
+            <a:camera prst="perspectiveRelaxed">
+              <a:rot lat="19800000" lon="1200000" rev="20820000"/>
+            </a:camera>
+            <a:lightRig rig="threePt" dir="t"/>
+          </a:scene3d>
+          <a:sp3d contourW="6350" prstMaterial="matte">
+            <a:bevelT w="101600" h="101600"/>
+            <a:contourClr>
+              <a:srgbClr val="969696"/>
+            </a:contourClr>
+          </a:sp3d>
+        </p:spPr>
+      </p:pic>
+      <p:graphicFrame>
+        <p:nvGraphicFramePr>
+          <p:cNvPr id="9" name="Diagram 8">
+            <a:extLst>
+              <a:ext uri="{FF2B5EF4-FFF2-40B4-BE49-F238E27FC236}">
+                <a16:creationId xmlns:a16="http://schemas.microsoft.com/office/drawing/2014/main" id="{F4476974-B50F-CE54-8409-096AFA9D518F}"/>
+              </a:ext>
+            </a:extLst>
+          </p:cNvPr>
+          <p:cNvGraphicFramePr/>
+          <p:nvPr>
+            <p:extLst>
+              <p:ext uri="{D42A27DB-BD31-4B8C-83A1-F6EECF244321}">
+                <p14:modId xmlns:p14="http://schemas.microsoft.com/office/powerpoint/2010/main" val="3606375859"/>
+              </p:ext>
+            </p:extLst>
+          </p:nvPr>
+        </p:nvGraphicFramePr>
+        <p:xfrm>
+          <a:off x="5891639" y="3775246"/>
+          <a:ext cx="4975283" cy="2942843"/>
+        </p:xfrm>
+        <a:graphic>
+          <a:graphicData uri="http://schemas.openxmlformats.org/drawingml/2006/diagram">
+            <dgm:relIds xmlns:dgm="http://schemas.openxmlformats.org/drawingml/2006/diagram" xmlns:r="http://schemas.openxmlformats.org/officeDocument/2006/relationships" r:dm="rId6" r:lo="rId7" r:qs="rId8" r:cs="rId9"/>
+          </a:graphicData>
+        </a:graphic>
+      </p:graphicFrame>
+    </p:spTree>
+    <p:extLst>
+      <p:ext uri="{BB962C8B-B14F-4D97-AF65-F5344CB8AC3E}">
+        <p14:creationId xmlns:p14="http://schemas.microsoft.com/office/powerpoint/2010/main" val="645386679"/>
       </p:ext>
     </p:extLst>
   </p:cSld>
@@ -12645,6 +17855,15 @@
 </file>
 
 <file path=customXml/item1.xml><?xml version="1.0" encoding="utf-8"?>
+<?mso-contentType ?>
+<FormTemplates xmlns="http://schemas.microsoft.com/sharepoint/v3/contenttype/forms">
+  <Display>DocumentLibraryForm</Display>
+  <Edit>DocumentLibraryForm</Edit>
+  <New>DocumentLibraryForm</New>
+</FormTemplates>
+</file>
+
+<file path=customXml/item2.xml><?xml version="1.0" encoding="utf-8"?>
 <p:properties xmlns:p="http://schemas.microsoft.com/office/2006/metadata/properties" xmlns:xsi="http://www.w3.org/2001/XMLSchema-instance" xmlns:pc="http://schemas.microsoft.com/office/infopath/2007/PartnerControls">
   <documentManagement>
     <_ip_UnifiedCompliancePolicyUIAction xmlns="http://schemas.microsoft.com/sharepoint/v3" xsi:nil="true"/>
@@ -12662,15 +17881,6 @@
     <MediaServiceKeyPoints xmlns="71af3243-3dd4-4a8d-8c0d-dd76da1f02a5" xsi:nil="true"/>
   </documentManagement>
 </p:properties>
-</file>
-
-<file path=customXml/item2.xml><?xml version="1.0" encoding="utf-8"?>
-<?mso-contentType ?>
-<FormTemplates xmlns="http://schemas.microsoft.com/sharepoint/v3/contenttype/forms">
-  <Display>DocumentLibraryForm</Display>
-  <Edit>DocumentLibraryForm</Edit>
-  <New>DocumentLibraryForm</New>
-</FormTemplates>
 </file>
 
 <file path=customXml/item3.xml><?xml version="1.0" encoding="utf-8"?>
@@ -12986,6 +18196,14 @@
 </file>
 
 <file path=customXml/itemProps1.xml><?xml version="1.0" encoding="utf-8"?>
+<ds:datastoreItem xmlns:ds="http://schemas.openxmlformats.org/officeDocument/2006/customXml" ds:itemID="{FABD9919-8F5A-4B99-83E1-E90FE1DCF2E1}">
+  <ds:schemaRefs>
+    <ds:schemaRef ds:uri="http://schemas.microsoft.com/sharepoint/v3/contenttype/forms"/>
+  </ds:schemaRefs>
+</ds:datastoreItem>
+</file>
+
+<file path=customXml/itemProps2.xml><?xml version="1.0" encoding="utf-8"?>
 <ds:datastoreItem xmlns:ds="http://schemas.openxmlformats.org/officeDocument/2006/customXml" ds:itemID="{80E87F72-70BF-43BC-A0D4-53665DC12672}">
   <ds:schemaRefs>
     <ds:schemaRef ds:uri="http://schemas.microsoft.com/office/2006/metadata/properties"/>
@@ -12993,14 +18211,6 @@
     <ds:schemaRef ds:uri="http://schemas.microsoft.com/sharepoint/v3"/>
     <ds:schemaRef ds:uri="71af3243-3dd4-4a8d-8c0d-dd76da1f02a5"/>
     <ds:schemaRef ds:uri="230e9df3-be65-4c73-a93b-d1236ebd677e"/>
-  </ds:schemaRefs>
-</ds:datastoreItem>
-</file>
-
-<file path=customXml/itemProps2.xml><?xml version="1.0" encoding="utf-8"?>
-<ds:datastoreItem xmlns:ds="http://schemas.openxmlformats.org/officeDocument/2006/customXml" ds:itemID="{FABD9919-8F5A-4B99-83E1-E90FE1DCF2E1}">
-  <ds:schemaRefs>
-    <ds:schemaRef ds:uri="http://schemas.microsoft.com/sharepoint/v3/contenttype/forms"/>
   </ds:schemaRefs>
 </ds:datastoreItem>
 </file>

--- a/PowerBI_Tutorial.pptx
+++ b/PowerBI_Tutorial.pptx
@@ -5,10 +5,10 @@
     <p:sldMasterId id="2147483696" r:id="rId4"/>
   </p:sldMasterIdLst>
   <p:notesMasterIdLst>
-    <p:notesMasterId r:id="rId16"/>
+    <p:notesMasterId r:id="rId17"/>
   </p:notesMasterIdLst>
   <p:handoutMasterIdLst>
-    <p:handoutMasterId r:id="rId17"/>
+    <p:handoutMasterId r:id="rId18"/>
   </p:handoutMasterIdLst>
   <p:sldIdLst>
     <p:sldId id="334" r:id="rId5"/>
@@ -21,7 +21,8 @@
     <p:sldId id="342" r:id="rId12"/>
     <p:sldId id="343" r:id="rId13"/>
     <p:sldId id="344" r:id="rId14"/>
-    <p:sldId id="337" r:id="rId15"/>
+    <p:sldId id="345" r:id="rId15"/>
+    <p:sldId id="337" r:id="rId16"/>
   </p:sldIdLst>
   <p:sldSz cx="12192000" cy="6858000"/>
   <p:notesSz cx="6858000" cy="9144000"/>
@@ -146,6 +147,7 @@
             <p14:sldId id="342"/>
             <p14:sldId id="343"/>
             <p14:sldId id="344"/>
+            <p14:sldId id="345"/>
           </p14:sldIdLst>
         </p14:section>
         <p14:section name="add-on" id="{0C1F4F65-72A3-42DD-AC1F-D9167B17FD18}">
@@ -14393,6 +14395,385 @@
   <p:cSld>
     <p:spTree>
       <p:nvGrpSpPr>
+        <p:cNvPr id="1" name="">
+          <a:extLst>
+            <a:ext uri="{FF2B5EF4-FFF2-40B4-BE49-F238E27FC236}">
+              <a16:creationId xmlns:a16="http://schemas.microsoft.com/office/drawing/2014/main" id="{C71D5B29-956F-C6A3-2D75-E204E75396E4}"/>
+            </a:ext>
+          </a:extLst>
+        </p:cNvPr>
+        <p:cNvGrpSpPr/>
+        <p:nvPr/>
+      </p:nvGrpSpPr>
+      <p:grpSpPr>
+        <a:xfrm>
+          <a:off x="0" y="0"/>
+          <a:ext cx="0" cy="0"/>
+          <a:chOff x="0" y="0"/>
+          <a:chExt cx="0" cy="0"/>
+        </a:xfrm>
+      </p:grpSpPr>
+      <p:sp>
+        <p:nvSpPr>
+          <p:cNvPr id="2" name="Title 1">
+            <a:extLst>
+              <a:ext uri="{FF2B5EF4-FFF2-40B4-BE49-F238E27FC236}">
+                <a16:creationId xmlns:a16="http://schemas.microsoft.com/office/drawing/2014/main" id="{50086B1E-4BB4-C889-B3F4-3654F2375474}"/>
+              </a:ext>
+            </a:extLst>
+          </p:cNvPr>
+          <p:cNvSpPr>
+            <a:spLocks noGrp="1"/>
+          </p:cNvSpPr>
+          <p:nvPr>
+            <p:ph type="title"/>
+          </p:nvPr>
+        </p:nvSpPr>
+        <p:spPr>
+          <a:xfrm>
+            <a:off x="1409826" y="131063"/>
+            <a:ext cx="6772881" cy="793260"/>
+          </a:xfrm>
+        </p:spPr>
+        <p:txBody>
+          <a:bodyPr anchor="ctr"/>
+          <a:lstStyle/>
+          <a:p>
+            <a:pPr algn="l"/>
+            <a:r>
+              <a:rPr lang="en-US" dirty="0"/>
+              <a:t>Power BI Tutorial</a:t>
+            </a:r>
+          </a:p>
+        </p:txBody>
+      </p:sp>
+      <p:sp>
+        <p:nvSpPr>
+          <p:cNvPr id="4" name="Text Placeholder 3">
+            <a:extLst>
+              <a:ext uri="{FF2B5EF4-FFF2-40B4-BE49-F238E27FC236}">
+                <a16:creationId xmlns:a16="http://schemas.microsoft.com/office/drawing/2014/main" id="{EBFC1875-E7B0-6173-2849-D060CE4E66A7}"/>
+              </a:ext>
+            </a:extLst>
+          </p:cNvPr>
+          <p:cNvSpPr>
+            <a:spLocks noGrp="1"/>
+          </p:cNvSpPr>
+          <p:nvPr>
+            <p:ph type="body" sz="quarter" idx="13"/>
+          </p:nvPr>
+        </p:nvSpPr>
+        <p:spPr>
+          <a:xfrm>
+            <a:off x="2079149" y="915490"/>
+            <a:ext cx="8033702" cy="1097280"/>
+          </a:xfrm>
+        </p:spPr>
+        <p:txBody>
+          <a:bodyPr anchor="ctr">
+            <a:normAutofit lnSpcReduction="10000"/>
+          </a:bodyPr>
+          <a:lstStyle/>
+          <a:p>
+            <a:pPr algn="l"/>
+            <a:r>
+              <a:rPr lang="en-US" sz="3600" dirty="0"/>
+              <a:t>Part 1. Put Your BI Thinking Caps On</a:t>
+            </a:r>
+          </a:p>
+          <a:p>
+            <a:pPr algn="l"/>
+            <a:r>
+              <a:rPr lang="en-US" altLang="zh-CN" sz="3600" dirty="0"/>
+              <a:t>Chapter 03: Choose Power BI</a:t>
+            </a:r>
+            <a:endParaRPr lang="en-US" sz="3600" dirty="0"/>
+          </a:p>
+        </p:txBody>
+      </p:sp>
+      <p:sp>
+        <p:nvSpPr>
+          <p:cNvPr id="5" name="TextBox 4">
+            <a:extLst>
+              <a:ext uri="{FF2B5EF4-FFF2-40B4-BE49-F238E27FC236}">
+                <a16:creationId xmlns:a16="http://schemas.microsoft.com/office/drawing/2014/main" id="{DD0D2D57-78CE-E41D-8670-AFEA6C983838}"/>
+              </a:ext>
+            </a:extLst>
+          </p:cNvPr>
+          <p:cNvSpPr txBox="1"/>
+          <p:nvPr/>
+        </p:nvSpPr>
+        <p:spPr>
+          <a:xfrm>
+            <a:off x="9487400" y="11040"/>
+            <a:ext cx="2704600" cy="1200329"/>
+          </a:xfrm>
+          <a:prstGeom prst="rect">
+            <a:avLst/>
+          </a:prstGeom>
+          <a:noFill/>
+        </p:spPr>
+        <p:txBody>
+          <a:bodyPr wrap="square" rtlCol="0" anchor="ctr">
+            <a:spAutoFit/>
+          </a:bodyPr>
+          <a:lstStyle/>
+          <a:p>
+            <a:pPr algn="ctr"/>
+            <a:r>
+              <a:rPr lang="en-US" sz="7200" b="1" dirty="0">
+                <a:ln w="9525">
+                  <a:solidFill>
+                    <a:schemeClr val="bg1"/>
+                  </a:solidFill>
+                  <a:prstDash val="solid"/>
+                </a:ln>
+                <a:solidFill>
+                  <a:schemeClr val="accent3">
+                    <a:lumMod val="20000"/>
+                    <a:lumOff val="80000"/>
+                  </a:schemeClr>
+                </a:solidFill>
+                <a:effectLst>
+                  <a:outerShdw blurRad="12700" dist="38100" dir="2700000" algn="tl" rotWithShape="0">
+                    <a:schemeClr val="bg1">
+                      <a:lumMod val="50000"/>
+                    </a:schemeClr>
+                  </a:outerShdw>
+                </a:effectLst>
+                <a:latin typeface="Goudy Stout" panose="0202090407030B020401" pitchFamily="18" charset="0"/>
+              </a:rPr>
+              <a:t>007</a:t>
+            </a:r>
+          </a:p>
+        </p:txBody>
+      </p:sp>
+      <p:pic>
+        <p:nvPicPr>
+          <p:cNvPr id="8" name="Picture 7">
+            <a:extLst>
+              <a:ext uri="{FF2B5EF4-FFF2-40B4-BE49-F238E27FC236}">
+                <a16:creationId xmlns:a16="http://schemas.microsoft.com/office/drawing/2014/main" id="{450691CF-E421-E2A7-5CE4-1E120DAD9F48}"/>
+              </a:ext>
+            </a:extLst>
+          </p:cNvPr>
+          <p:cNvPicPr>
+            <a:picLocks noChangeAspect="1"/>
+          </p:cNvPicPr>
+          <p:nvPr/>
+        </p:nvPicPr>
+        <p:blipFill>
+          <a:blip r:embed="rId2"/>
+          <a:stretch>
+            <a:fillRect/>
+          </a:stretch>
+        </p:blipFill>
+        <p:spPr>
+          <a:xfrm>
+            <a:off x="23412" y="30114"/>
+            <a:ext cx="1386414" cy="1380564"/>
+          </a:xfrm>
+          <a:prstGeom prst="rect">
+            <a:avLst/>
+          </a:prstGeom>
+          <a:ln>
+            <a:noFill/>
+          </a:ln>
+          <a:effectLst>
+            <a:softEdge rad="112500"/>
+          </a:effectLst>
+        </p:spPr>
+      </p:pic>
+      <p:sp>
+        <p:nvSpPr>
+          <p:cNvPr id="12" name="TextBox 11">
+            <a:extLst>
+              <a:ext uri="{FF2B5EF4-FFF2-40B4-BE49-F238E27FC236}">
+                <a16:creationId xmlns:a16="http://schemas.microsoft.com/office/drawing/2014/main" id="{290A1AE3-54FA-88CB-D395-4032622246AE}"/>
+              </a:ext>
+            </a:extLst>
+          </p:cNvPr>
+          <p:cNvSpPr txBox="1"/>
+          <p:nvPr/>
+        </p:nvSpPr>
+        <p:spPr>
+          <a:xfrm>
+            <a:off x="23412" y="6458554"/>
+            <a:ext cx="7163844" cy="369332"/>
+          </a:xfrm>
+          <a:prstGeom prst="rect">
+            <a:avLst/>
+          </a:prstGeom>
+          <a:noFill/>
+        </p:spPr>
+        <p:txBody>
+          <a:bodyPr wrap="square">
+            <a:spAutoFit/>
+          </a:bodyPr>
+          <a:lstStyle/>
+          <a:p>
+            <a:r>
+              <a:rPr lang="en-US" b="1" dirty="0"/>
+              <a:t>Repository: </a:t>
+            </a:r>
+            <a:r>
+              <a:rPr lang="en-US" b="1" dirty="0">
+                <a:hlinkClick r:id="rId3"/>
+              </a:rPr>
+              <a:t>https://github.com/yasenstar/PowerBI_Tutorial</a:t>
+            </a:r>
+            <a:endParaRPr lang="en-US" b="1" dirty="0"/>
+          </a:p>
+        </p:txBody>
+      </p:sp>
+      <p:pic>
+        <p:nvPicPr>
+          <p:cNvPr id="13" name="Picture 12">
+            <a:extLst>
+              <a:ext uri="{FF2B5EF4-FFF2-40B4-BE49-F238E27FC236}">
+                <a16:creationId xmlns:a16="http://schemas.microsoft.com/office/drawing/2014/main" id="{E92A8EF4-197A-9125-9026-74C24B81F1AD}"/>
+              </a:ext>
+            </a:extLst>
+          </p:cNvPr>
+          <p:cNvPicPr>
+            <a:picLocks noChangeAspect="1"/>
+          </p:cNvPicPr>
+          <p:nvPr/>
+        </p:nvPicPr>
+        <p:blipFill>
+          <a:blip r:embed="rId4"/>
+          <a:stretch>
+            <a:fillRect/>
+          </a:stretch>
+        </p:blipFill>
+        <p:spPr>
+          <a:xfrm>
+            <a:off x="97030" y="1487212"/>
+            <a:ext cx="1850713" cy="2315544"/>
+          </a:xfrm>
+          <a:prstGeom prst="rect">
+            <a:avLst/>
+          </a:prstGeom>
+          <a:ln>
+            <a:noFill/>
+          </a:ln>
+          <a:effectLst>
+            <a:outerShdw blurRad="190500" algn="tl" rotWithShape="0">
+              <a:srgbClr val="000000">
+                <a:alpha val="70000"/>
+              </a:srgbClr>
+            </a:outerShdw>
+          </a:effectLst>
+        </p:spPr>
+      </p:pic>
+      <p:pic>
+        <p:nvPicPr>
+          <p:cNvPr id="9" name="Picture 8">
+            <a:extLst>
+              <a:ext uri="{FF2B5EF4-FFF2-40B4-BE49-F238E27FC236}">
+                <a16:creationId xmlns:a16="http://schemas.microsoft.com/office/drawing/2014/main" id="{67B3AC2B-CCE4-79AA-4260-6107B27F3DA1}"/>
+              </a:ext>
+            </a:extLst>
+          </p:cNvPr>
+          <p:cNvPicPr>
+            <a:picLocks noChangeAspect="1"/>
+          </p:cNvPicPr>
+          <p:nvPr/>
+        </p:nvPicPr>
+        <p:blipFill>
+          <a:blip r:embed="rId5"/>
+          <a:stretch>
+            <a:fillRect/>
+          </a:stretch>
+        </p:blipFill>
+        <p:spPr>
+          <a:xfrm>
+            <a:off x="1049738" y="1346012"/>
+            <a:ext cx="7915991" cy="5054789"/>
+          </a:xfrm>
+          <a:prstGeom prst="roundRect">
+            <a:avLst>
+              <a:gd name="adj" fmla="val 16667"/>
+            </a:avLst>
+          </a:prstGeom>
+          <a:ln>
+            <a:noFill/>
+          </a:ln>
+          <a:effectLst>
+            <a:outerShdw blurRad="152400" dist="12000" dir="900000" sy="98000" kx="110000" ky="200000" algn="tl" rotWithShape="0">
+              <a:srgbClr val="000000">
+                <a:alpha val="30000"/>
+              </a:srgbClr>
+            </a:outerShdw>
+          </a:effectLst>
+          <a:scene3d>
+            <a:camera prst="perspectiveRelaxed">
+              <a:rot lat="19800000" lon="1200000" rev="20820000"/>
+            </a:camera>
+            <a:lightRig rig="threePt" dir="t"/>
+          </a:scene3d>
+          <a:sp3d contourW="6350" prstMaterial="matte">
+            <a:bevelT w="101600" h="101600"/>
+            <a:contourClr>
+              <a:srgbClr val="969696"/>
+            </a:contourClr>
+          </a:sp3d>
+        </p:spPr>
+      </p:pic>
+      <p:pic>
+        <p:nvPicPr>
+          <p:cNvPr id="11" name="Picture 10">
+            <a:extLst>
+              <a:ext uri="{FF2B5EF4-FFF2-40B4-BE49-F238E27FC236}">
+                <a16:creationId xmlns:a16="http://schemas.microsoft.com/office/drawing/2014/main" id="{AFA4E665-4CC8-AD27-1E62-92BAB7BD0EFD}"/>
+              </a:ext>
+            </a:extLst>
+          </p:cNvPr>
+          <p:cNvPicPr>
+            <a:picLocks noChangeAspect="1"/>
+          </p:cNvPicPr>
+          <p:nvPr/>
+        </p:nvPicPr>
+        <p:blipFill>
+          <a:blip r:embed="rId6"/>
+          <a:stretch>
+            <a:fillRect/>
+          </a:stretch>
+        </p:blipFill>
+        <p:spPr>
+          <a:xfrm>
+            <a:off x="5715367" y="4247059"/>
+            <a:ext cx="4343382" cy="2080912"/>
+          </a:xfrm>
+          <a:prstGeom prst="rect">
+            <a:avLst/>
+          </a:prstGeom>
+          <a:ln>
+            <a:noFill/>
+          </a:ln>
+          <a:effectLst>
+            <a:softEdge rad="112500"/>
+          </a:effectLst>
+        </p:spPr>
+      </p:pic>
+    </p:spTree>
+    <p:extLst>
+      <p:ext uri="{BB962C8B-B14F-4D97-AF65-F5344CB8AC3E}">
+        <p14:creationId xmlns:p14="http://schemas.microsoft.com/office/powerpoint/2010/main" val="1322043513"/>
+      </p:ext>
+    </p:extLst>
+  </p:cSld>
+  <p:clrMapOvr>
+    <a:masterClrMapping/>
+  </p:clrMapOvr>
+</p:sld>
+</file>
+
+<file path=ppt/slides/slide12.xml><?xml version="1.0" encoding="utf-8"?>
+<p:sld xmlns:a="http://schemas.openxmlformats.org/drawingml/2006/main" xmlns:r="http://schemas.openxmlformats.org/officeDocument/2006/relationships" xmlns:p="http://schemas.openxmlformats.org/presentationml/2006/main">
+  <p:cSld>
+    <p:spTree>
+      <p:nvGrpSpPr>
         <p:cNvPr id="1" name=""/>
         <p:cNvGrpSpPr/>
         <p:nvPr/>

--- a/PowerBI_Tutorial.pptx
+++ b/PowerBI_Tutorial.pptx
@@ -5,10 +5,10 @@
     <p:sldMasterId id="2147483696" r:id="rId4"/>
   </p:sldMasterIdLst>
   <p:notesMasterIdLst>
-    <p:notesMasterId r:id="rId17"/>
+    <p:notesMasterId r:id="rId23"/>
   </p:notesMasterIdLst>
   <p:handoutMasterIdLst>
-    <p:handoutMasterId r:id="rId18"/>
+    <p:handoutMasterId r:id="rId24"/>
   </p:handoutMasterIdLst>
   <p:sldIdLst>
     <p:sldId id="334" r:id="rId5"/>
@@ -22,7 +22,13 @@
     <p:sldId id="343" r:id="rId13"/>
     <p:sldId id="344" r:id="rId14"/>
     <p:sldId id="345" r:id="rId15"/>
-    <p:sldId id="337" r:id="rId16"/>
+    <p:sldId id="346" r:id="rId16"/>
+    <p:sldId id="347" r:id="rId17"/>
+    <p:sldId id="348" r:id="rId18"/>
+    <p:sldId id="349" r:id="rId19"/>
+    <p:sldId id="350" r:id="rId20"/>
+    <p:sldId id="351" r:id="rId21"/>
+    <p:sldId id="337" r:id="rId22"/>
   </p:sldIdLst>
   <p:sldSz cx="12192000" cy="6858000"/>
   <p:notesSz cx="6858000" cy="9144000"/>
@@ -148,6 +154,16 @@
             <p14:sldId id="343"/>
             <p14:sldId id="344"/>
             <p14:sldId id="345"/>
+            <p14:sldId id="346"/>
+            <p14:sldId id="347"/>
+            <p14:sldId id="348"/>
+            <p14:sldId id="349"/>
+            <p14:sldId id="350"/>
+          </p14:sldIdLst>
+        </p14:section>
+        <p14:section name="Part 2" id="{E27492D7-0C95-4240-AF4E-EFA0A79A40B1}">
+          <p14:sldIdLst>
+            <p14:sldId id="351"/>
           </p14:sldIdLst>
         </p14:section>
         <p14:section name="add-on" id="{0C1F4F65-72A3-42DD-AC1F-D9167B17FD18}">
@@ -190,6 +206,788 @@
 </file>
 
 <file path=ppt/diagrams/colors1.xml><?xml version="1.0" encoding="utf-8"?>
+<dgm:colorsDef xmlns:dgm="http://schemas.openxmlformats.org/drawingml/2006/diagram" xmlns:a="http://schemas.openxmlformats.org/drawingml/2006/main" uniqueId="urn:microsoft.com/office/officeart/2005/8/colors/colorful3">
+  <dgm:title val=""/>
+  <dgm:desc val=""/>
+  <dgm:catLst>
+    <dgm:cat type="colorful" pri="10300"/>
+  </dgm:catLst>
+  <dgm:styleLbl name="node0">
+    <dgm:fillClrLst meth="repeat">
+      <a:schemeClr val="accent2"/>
+    </dgm:fillClrLst>
+    <dgm:linClrLst meth="repeat">
+      <a:schemeClr val="lt1"/>
+    </dgm:linClrLst>
+    <dgm:effectClrLst/>
+    <dgm:txLinClrLst/>
+    <dgm:txFillClrLst/>
+    <dgm:txEffectClrLst/>
+  </dgm:styleLbl>
+  <dgm:styleLbl name="node1">
+    <dgm:fillClrLst>
+      <a:schemeClr val="accent3"/>
+      <a:schemeClr val="accent4"/>
+    </dgm:fillClrLst>
+    <dgm:linClrLst meth="repeat">
+      <a:schemeClr val="lt1"/>
+    </dgm:linClrLst>
+    <dgm:effectClrLst/>
+    <dgm:txLinClrLst/>
+    <dgm:txFillClrLst/>
+    <dgm:txEffectClrLst/>
+  </dgm:styleLbl>
+  <dgm:styleLbl name="alignNode1">
+    <dgm:fillClrLst>
+      <a:schemeClr val="accent3"/>
+      <a:schemeClr val="accent4"/>
+    </dgm:fillClrLst>
+    <dgm:linClrLst>
+      <a:schemeClr val="accent3"/>
+      <a:schemeClr val="accent4"/>
+    </dgm:linClrLst>
+    <dgm:effectClrLst/>
+    <dgm:txLinClrLst/>
+    <dgm:txFillClrLst/>
+    <dgm:txEffectClrLst/>
+  </dgm:styleLbl>
+  <dgm:styleLbl name="lnNode1">
+    <dgm:fillClrLst>
+      <a:schemeClr val="accent3"/>
+      <a:schemeClr val="accent4"/>
+    </dgm:fillClrLst>
+    <dgm:linClrLst meth="repeat">
+      <a:schemeClr val="lt1"/>
+    </dgm:linClrLst>
+    <dgm:effectClrLst/>
+    <dgm:txLinClrLst/>
+    <dgm:txFillClrLst/>
+    <dgm:txEffectClrLst/>
+  </dgm:styleLbl>
+  <dgm:styleLbl name="vennNode1">
+    <dgm:fillClrLst>
+      <a:schemeClr val="accent3">
+        <a:alpha val="50000"/>
+      </a:schemeClr>
+      <a:schemeClr val="accent4">
+        <a:alpha val="50000"/>
+      </a:schemeClr>
+    </dgm:fillClrLst>
+    <dgm:linClrLst meth="repeat">
+      <a:schemeClr val="lt1"/>
+    </dgm:linClrLst>
+    <dgm:effectClrLst/>
+    <dgm:txLinClrLst/>
+    <dgm:txFillClrLst/>
+    <dgm:txEffectClrLst/>
+  </dgm:styleLbl>
+  <dgm:styleLbl name="node2">
+    <dgm:fillClrLst>
+      <a:schemeClr val="accent4"/>
+    </dgm:fillClrLst>
+    <dgm:linClrLst meth="repeat">
+      <a:schemeClr val="lt1"/>
+    </dgm:linClrLst>
+    <dgm:effectClrLst/>
+    <dgm:txLinClrLst/>
+    <dgm:txFillClrLst/>
+    <dgm:txEffectClrLst/>
+  </dgm:styleLbl>
+  <dgm:styleLbl name="node3">
+    <dgm:fillClrLst>
+      <a:schemeClr val="accent5"/>
+    </dgm:fillClrLst>
+    <dgm:linClrLst meth="repeat">
+      <a:schemeClr val="lt1"/>
+    </dgm:linClrLst>
+    <dgm:effectClrLst/>
+    <dgm:txLinClrLst/>
+    <dgm:txFillClrLst/>
+    <dgm:txEffectClrLst/>
+  </dgm:styleLbl>
+  <dgm:styleLbl name="node4">
+    <dgm:fillClrLst>
+      <a:schemeClr val="accent6"/>
+    </dgm:fillClrLst>
+    <dgm:linClrLst meth="repeat">
+      <a:schemeClr val="lt1"/>
+    </dgm:linClrLst>
+    <dgm:effectClrLst/>
+    <dgm:txLinClrLst/>
+    <dgm:txFillClrLst/>
+    <dgm:txEffectClrLst/>
+  </dgm:styleLbl>
+  <dgm:styleLbl name="fgImgPlace1">
+    <dgm:fillClrLst>
+      <a:schemeClr val="accent3">
+        <a:tint val="50000"/>
+      </a:schemeClr>
+      <a:schemeClr val="accent4">
+        <a:tint val="50000"/>
+      </a:schemeClr>
+    </dgm:fillClrLst>
+    <dgm:linClrLst meth="repeat">
+      <a:schemeClr val="lt1"/>
+    </dgm:linClrLst>
+    <dgm:effectClrLst/>
+    <dgm:txLinClrLst/>
+    <dgm:txFillClrLst meth="repeat">
+      <a:schemeClr val="lt1"/>
+    </dgm:txFillClrLst>
+    <dgm:txEffectClrLst/>
+  </dgm:styleLbl>
+  <dgm:styleLbl name="alignImgPlace1">
+    <dgm:fillClrLst>
+      <a:schemeClr val="accent3">
+        <a:tint val="50000"/>
+      </a:schemeClr>
+      <a:schemeClr val="accent4">
+        <a:tint val="20000"/>
+      </a:schemeClr>
+    </dgm:fillClrLst>
+    <dgm:linClrLst meth="repeat">
+      <a:schemeClr val="lt1"/>
+    </dgm:linClrLst>
+    <dgm:effectClrLst/>
+    <dgm:txLinClrLst/>
+    <dgm:txFillClrLst meth="repeat">
+      <a:schemeClr val="lt1"/>
+    </dgm:txFillClrLst>
+    <dgm:txEffectClrLst/>
+  </dgm:styleLbl>
+  <dgm:styleLbl name="bgImgPlace1">
+    <dgm:fillClrLst>
+      <a:schemeClr val="accent3">
+        <a:tint val="50000"/>
+      </a:schemeClr>
+      <a:schemeClr val="accent4">
+        <a:tint val="20000"/>
+      </a:schemeClr>
+    </dgm:fillClrLst>
+    <dgm:linClrLst meth="repeat">
+      <a:schemeClr val="lt1"/>
+    </dgm:linClrLst>
+    <dgm:effectClrLst/>
+    <dgm:txLinClrLst/>
+    <dgm:txFillClrLst meth="repeat">
+      <a:schemeClr val="lt1"/>
+    </dgm:txFillClrLst>
+    <dgm:txEffectClrLst/>
+  </dgm:styleLbl>
+  <dgm:styleLbl name="sibTrans2D1">
+    <dgm:fillClrLst>
+      <a:schemeClr val="accent3"/>
+      <a:schemeClr val="accent4"/>
+    </dgm:fillClrLst>
+    <dgm:linClrLst meth="repeat">
+      <a:schemeClr val="lt1"/>
+    </dgm:linClrLst>
+    <dgm:effectClrLst/>
+    <dgm:txLinClrLst/>
+    <dgm:txFillClrLst/>
+    <dgm:txEffectClrLst/>
+  </dgm:styleLbl>
+  <dgm:styleLbl name="fgSibTrans2D1">
+    <dgm:fillClrLst>
+      <a:schemeClr val="accent3"/>
+      <a:schemeClr val="accent4"/>
+    </dgm:fillClrLst>
+    <dgm:linClrLst meth="repeat">
+      <a:schemeClr val="lt1"/>
+    </dgm:linClrLst>
+    <dgm:effectClrLst/>
+    <dgm:txLinClrLst/>
+    <dgm:txFillClrLst meth="repeat">
+      <a:schemeClr val="lt1"/>
+    </dgm:txFillClrLst>
+    <dgm:txEffectClrLst/>
+  </dgm:styleLbl>
+  <dgm:styleLbl name="bgSibTrans2D1">
+    <dgm:fillClrLst>
+      <a:schemeClr val="accent3"/>
+      <a:schemeClr val="accent4"/>
+    </dgm:fillClrLst>
+    <dgm:linClrLst meth="repeat">
+      <a:schemeClr val="lt1"/>
+    </dgm:linClrLst>
+    <dgm:effectClrLst/>
+    <dgm:txLinClrLst/>
+    <dgm:txFillClrLst meth="repeat">
+      <a:schemeClr val="lt1"/>
+    </dgm:txFillClrLst>
+    <dgm:txEffectClrLst/>
+  </dgm:styleLbl>
+  <dgm:styleLbl name="sibTrans1D1">
+    <dgm:fillClrLst/>
+    <dgm:linClrLst>
+      <a:schemeClr val="accent3"/>
+      <a:schemeClr val="accent4"/>
+    </dgm:linClrLst>
+    <dgm:effectClrLst/>
+    <dgm:txLinClrLst/>
+    <dgm:txFillClrLst meth="repeat">
+      <a:schemeClr val="tx1"/>
+    </dgm:txFillClrLst>
+    <dgm:txEffectClrLst/>
+  </dgm:styleLbl>
+  <dgm:styleLbl name="callout">
+    <dgm:fillClrLst meth="repeat">
+      <a:schemeClr val="accent3"/>
+    </dgm:fillClrLst>
+    <dgm:linClrLst meth="repeat">
+      <a:schemeClr val="accent3">
+        <a:tint val="50000"/>
+      </a:schemeClr>
+    </dgm:linClrLst>
+    <dgm:effectClrLst/>
+    <dgm:txLinClrLst/>
+    <dgm:txFillClrLst meth="repeat">
+      <a:schemeClr val="tx1"/>
+    </dgm:txFillClrLst>
+    <dgm:txEffectClrLst/>
+  </dgm:styleLbl>
+  <dgm:styleLbl name="asst0">
+    <dgm:fillClrLst meth="repeat">
+      <a:schemeClr val="accent3"/>
+    </dgm:fillClrLst>
+    <dgm:linClrLst meth="repeat">
+      <a:schemeClr val="lt1">
+        <a:shade val="80000"/>
+      </a:schemeClr>
+    </dgm:linClrLst>
+    <dgm:effectClrLst/>
+    <dgm:txLinClrLst/>
+    <dgm:txFillClrLst/>
+    <dgm:txEffectClrLst/>
+  </dgm:styleLbl>
+  <dgm:styleLbl name="asst1">
+    <dgm:fillClrLst meth="repeat">
+      <a:schemeClr val="accent4"/>
+    </dgm:fillClrLst>
+    <dgm:linClrLst meth="repeat">
+      <a:schemeClr val="lt1">
+        <a:shade val="80000"/>
+      </a:schemeClr>
+    </dgm:linClrLst>
+    <dgm:effectClrLst/>
+    <dgm:txLinClrLst/>
+    <dgm:txFillClrLst/>
+    <dgm:txEffectClrLst/>
+  </dgm:styleLbl>
+  <dgm:styleLbl name="asst2">
+    <dgm:fillClrLst>
+      <a:schemeClr val="accent5"/>
+    </dgm:fillClrLst>
+    <dgm:linClrLst meth="repeat">
+      <a:schemeClr val="lt1"/>
+    </dgm:linClrLst>
+    <dgm:effectClrLst/>
+    <dgm:txLinClrLst/>
+    <dgm:txFillClrLst/>
+    <dgm:txEffectClrLst/>
+  </dgm:styleLbl>
+  <dgm:styleLbl name="asst3">
+    <dgm:fillClrLst>
+      <a:schemeClr val="accent6"/>
+    </dgm:fillClrLst>
+    <dgm:linClrLst meth="repeat">
+      <a:schemeClr val="lt1"/>
+    </dgm:linClrLst>
+    <dgm:effectClrLst/>
+    <dgm:txLinClrLst/>
+    <dgm:txFillClrLst/>
+    <dgm:txEffectClrLst/>
+  </dgm:styleLbl>
+  <dgm:styleLbl name="asst4">
+    <dgm:fillClrLst>
+      <a:schemeClr val="accent1"/>
+    </dgm:fillClrLst>
+    <dgm:linClrLst meth="repeat">
+      <a:schemeClr val="lt1"/>
+    </dgm:linClrLst>
+    <dgm:effectClrLst/>
+    <dgm:txLinClrLst/>
+    <dgm:txFillClrLst/>
+    <dgm:txEffectClrLst/>
+  </dgm:styleLbl>
+  <dgm:styleLbl name="parChTrans2D1">
+    <dgm:fillClrLst meth="repeat">
+      <a:schemeClr val="accent2"/>
+    </dgm:fillClrLst>
+    <dgm:linClrLst meth="repeat">
+      <a:schemeClr val="lt1"/>
+    </dgm:linClrLst>
+    <dgm:effectClrLst/>
+    <dgm:txLinClrLst/>
+    <dgm:txFillClrLst meth="repeat">
+      <a:schemeClr val="lt1"/>
+    </dgm:txFillClrLst>
+    <dgm:txEffectClrLst/>
+  </dgm:styleLbl>
+  <dgm:styleLbl name="parChTrans2D2">
+    <dgm:fillClrLst meth="repeat">
+      <a:schemeClr val="accent3"/>
+    </dgm:fillClrLst>
+    <dgm:linClrLst meth="repeat">
+      <a:schemeClr val="lt1"/>
+    </dgm:linClrLst>
+    <dgm:effectClrLst/>
+    <dgm:txLinClrLst/>
+    <dgm:txFillClrLst/>
+    <dgm:txEffectClrLst/>
+  </dgm:styleLbl>
+  <dgm:styleLbl name="parChTrans2D3">
+    <dgm:fillClrLst meth="repeat">
+      <a:schemeClr val="accent4"/>
+    </dgm:fillClrLst>
+    <dgm:linClrLst meth="repeat">
+      <a:schemeClr val="lt1"/>
+    </dgm:linClrLst>
+    <dgm:effectClrLst/>
+    <dgm:txLinClrLst/>
+    <dgm:txFillClrLst/>
+    <dgm:txEffectClrLst/>
+  </dgm:styleLbl>
+  <dgm:styleLbl name="parChTrans2D4">
+    <dgm:fillClrLst meth="repeat">
+      <a:schemeClr val="accent5"/>
+    </dgm:fillClrLst>
+    <dgm:linClrLst meth="repeat">
+      <a:schemeClr val="lt1"/>
+    </dgm:linClrLst>
+    <dgm:effectClrLst/>
+    <dgm:txLinClrLst/>
+    <dgm:txFillClrLst meth="repeat">
+      <a:schemeClr val="lt1"/>
+    </dgm:txFillClrLst>
+    <dgm:txEffectClrLst/>
+  </dgm:styleLbl>
+  <dgm:styleLbl name="parChTrans1D1">
+    <dgm:fillClrLst meth="repeat">
+      <a:schemeClr val="accent3"/>
+    </dgm:fillClrLst>
+    <dgm:linClrLst meth="repeat">
+      <a:schemeClr val="accent3"/>
+    </dgm:linClrLst>
+    <dgm:effectClrLst/>
+    <dgm:txLinClrLst/>
+    <dgm:txFillClrLst meth="repeat">
+      <a:schemeClr val="tx1"/>
+    </dgm:txFillClrLst>
+    <dgm:txEffectClrLst/>
+  </dgm:styleLbl>
+  <dgm:styleLbl name="parChTrans1D2">
+    <dgm:fillClrLst meth="repeat">
+      <a:schemeClr val="accent2">
+        <a:tint val="90000"/>
+      </a:schemeClr>
+    </dgm:fillClrLst>
+    <dgm:linClrLst meth="repeat">
+      <a:schemeClr val="accent4"/>
+    </dgm:linClrLst>
+    <dgm:effectClrLst/>
+    <dgm:txLinClrLst/>
+    <dgm:txFillClrLst meth="repeat">
+      <a:schemeClr val="tx1"/>
+    </dgm:txFillClrLst>
+    <dgm:txEffectClrLst/>
+  </dgm:styleLbl>
+  <dgm:styleLbl name="parChTrans1D3">
+    <dgm:fillClrLst meth="repeat">
+      <a:schemeClr val="accent2">
+        <a:tint val="70000"/>
+      </a:schemeClr>
+    </dgm:fillClrLst>
+    <dgm:linClrLst meth="repeat">
+      <a:schemeClr val="accent5"/>
+    </dgm:linClrLst>
+    <dgm:effectClrLst/>
+    <dgm:txLinClrLst/>
+    <dgm:txFillClrLst meth="repeat">
+      <a:schemeClr val="tx1"/>
+    </dgm:txFillClrLst>
+    <dgm:txEffectClrLst/>
+  </dgm:styleLbl>
+  <dgm:styleLbl name="parChTrans1D4">
+    <dgm:fillClrLst meth="repeat">
+      <a:schemeClr val="accent6">
+        <a:tint val="50000"/>
+      </a:schemeClr>
+    </dgm:fillClrLst>
+    <dgm:linClrLst meth="repeat">
+      <a:schemeClr val="accent6"/>
+    </dgm:linClrLst>
+    <dgm:effectClrLst/>
+    <dgm:txLinClrLst/>
+    <dgm:txFillClrLst meth="repeat">
+      <a:schemeClr val="tx1"/>
+    </dgm:txFillClrLst>
+    <dgm:txEffectClrLst/>
+  </dgm:styleLbl>
+  <dgm:styleLbl name="fgAcc1">
+    <dgm:fillClrLst meth="repeat">
+      <a:schemeClr val="lt1">
+        <a:alpha val="90000"/>
+      </a:schemeClr>
+    </dgm:fillClrLst>
+    <dgm:linClrLst>
+      <a:schemeClr val="accent3"/>
+      <a:schemeClr val="accent4"/>
+    </dgm:linClrLst>
+    <dgm:effectClrLst/>
+    <dgm:txLinClrLst/>
+    <dgm:txFillClrLst meth="repeat">
+      <a:schemeClr val="dk1"/>
+    </dgm:txFillClrLst>
+    <dgm:txEffectClrLst/>
+  </dgm:styleLbl>
+  <dgm:styleLbl name="conFgAcc1">
+    <dgm:fillClrLst meth="repeat">
+      <a:schemeClr val="lt1">
+        <a:alpha val="90000"/>
+      </a:schemeClr>
+    </dgm:fillClrLst>
+    <dgm:linClrLst>
+      <a:schemeClr val="accent3"/>
+      <a:schemeClr val="accent4"/>
+    </dgm:linClrLst>
+    <dgm:effectClrLst/>
+    <dgm:txLinClrLst/>
+    <dgm:txFillClrLst meth="repeat">
+      <a:schemeClr val="dk1"/>
+    </dgm:txFillClrLst>
+    <dgm:txEffectClrLst/>
+  </dgm:styleLbl>
+  <dgm:styleLbl name="alignAcc1">
+    <dgm:fillClrLst meth="repeat">
+      <a:schemeClr val="lt1">
+        <a:alpha val="90000"/>
+      </a:schemeClr>
+    </dgm:fillClrLst>
+    <dgm:linClrLst>
+      <a:schemeClr val="accent3"/>
+      <a:schemeClr val="accent4"/>
+    </dgm:linClrLst>
+    <dgm:effectClrLst/>
+    <dgm:txLinClrLst/>
+    <dgm:txFillClrLst meth="repeat">
+      <a:schemeClr val="dk1"/>
+    </dgm:txFillClrLst>
+    <dgm:txEffectClrLst/>
+  </dgm:styleLbl>
+  <dgm:styleLbl name="trAlignAcc1">
+    <dgm:fillClrLst meth="repeat">
+      <a:schemeClr val="lt1">
+        <a:alpha val="40000"/>
+      </a:schemeClr>
+    </dgm:fillClrLst>
+    <dgm:linClrLst meth="repeat">
+      <a:schemeClr val="accent2"/>
+    </dgm:linClrLst>
+    <dgm:effectClrLst/>
+    <dgm:txLinClrLst/>
+    <dgm:txFillClrLst meth="repeat">
+      <a:schemeClr val="dk1"/>
+    </dgm:txFillClrLst>
+    <dgm:txEffectClrLst/>
+  </dgm:styleLbl>
+  <dgm:styleLbl name="bgAcc1">
+    <dgm:fillClrLst meth="repeat">
+      <a:schemeClr val="lt1">
+        <a:alpha val="90000"/>
+      </a:schemeClr>
+    </dgm:fillClrLst>
+    <dgm:linClrLst>
+      <a:schemeClr val="accent3"/>
+      <a:schemeClr val="accent4"/>
+    </dgm:linClrLst>
+    <dgm:effectClrLst/>
+    <dgm:txLinClrLst/>
+    <dgm:txFillClrLst meth="repeat">
+      <a:schemeClr val="dk1"/>
+    </dgm:txFillClrLst>
+    <dgm:txEffectClrLst/>
+  </dgm:styleLbl>
+  <dgm:styleLbl name="solidFgAcc1">
+    <dgm:fillClrLst meth="repeat">
+      <a:schemeClr val="lt1"/>
+    </dgm:fillClrLst>
+    <dgm:linClrLst>
+      <a:schemeClr val="accent3"/>
+      <a:schemeClr val="accent4"/>
+    </dgm:linClrLst>
+    <dgm:effectClrLst/>
+    <dgm:txLinClrLst/>
+    <dgm:txFillClrLst meth="repeat">
+      <a:schemeClr val="dk1"/>
+    </dgm:txFillClrLst>
+    <dgm:txEffectClrLst/>
+  </dgm:styleLbl>
+  <dgm:styleLbl name="solidAlignAcc1">
+    <dgm:fillClrLst meth="repeat">
+      <a:schemeClr val="lt1"/>
+    </dgm:fillClrLst>
+    <dgm:linClrLst>
+      <a:schemeClr val="accent3"/>
+      <a:schemeClr val="accent4"/>
+    </dgm:linClrLst>
+    <dgm:effectClrLst/>
+    <dgm:txLinClrLst/>
+    <dgm:txFillClrLst meth="repeat">
+      <a:schemeClr val="dk1"/>
+    </dgm:txFillClrLst>
+    <dgm:txEffectClrLst/>
+  </dgm:styleLbl>
+  <dgm:styleLbl name="solidBgAcc1">
+    <dgm:fillClrLst meth="repeat">
+      <a:schemeClr val="lt1"/>
+    </dgm:fillClrLst>
+    <dgm:linClrLst>
+      <a:schemeClr val="accent3"/>
+      <a:schemeClr val="accent4"/>
+    </dgm:linClrLst>
+    <dgm:effectClrLst/>
+    <dgm:txLinClrLst/>
+    <dgm:txFillClrLst meth="repeat">
+      <a:schemeClr val="dk1"/>
+    </dgm:txFillClrLst>
+    <dgm:txEffectClrLst/>
+  </dgm:styleLbl>
+  <dgm:styleLbl name="fgAccFollowNode1">
+    <dgm:fillClrLst>
+      <a:schemeClr val="accent3">
+        <a:tint val="40000"/>
+        <a:alpha val="90000"/>
+      </a:schemeClr>
+      <a:schemeClr val="accent4">
+        <a:tint val="40000"/>
+        <a:alpha val="90000"/>
+      </a:schemeClr>
+    </dgm:fillClrLst>
+    <dgm:linClrLst>
+      <a:schemeClr val="accent3">
+        <a:tint val="40000"/>
+        <a:alpha val="90000"/>
+      </a:schemeClr>
+      <a:schemeClr val="accent4">
+        <a:tint val="40000"/>
+        <a:alpha val="90000"/>
+      </a:schemeClr>
+    </dgm:linClrLst>
+    <dgm:effectClrLst/>
+    <dgm:txLinClrLst/>
+    <dgm:txFillClrLst meth="repeat">
+      <a:schemeClr val="dk1"/>
+    </dgm:txFillClrLst>
+    <dgm:txEffectClrLst/>
+  </dgm:styleLbl>
+  <dgm:styleLbl name="alignAccFollowNode1">
+    <dgm:fillClrLst>
+      <a:schemeClr val="accent3">
+        <a:tint val="40000"/>
+        <a:alpha val="90000"/>
+      </a:schemeClr>
+      <a:schemeClr val="accent4">
+        <a:tint val="40000"/>
+        <a:alpha val="90000"/>
+      </a:schemeClr>
+    </dgm:fillClrLst>
+    <dgm:linClrLst>
+      <a:schemeClr val="accent3">
+        <a:tint val="40000"/>
+        <a:alpha val="90000"/>
+      </a:schemeClr>
+      <a:schemeClr val="accent4">
+        <a:tint val="40000"/>
+        <a:alpha val="90000"/>
+      </a:schemeClr>
+    </dgm:linClrLst>
+    <dgm:effectClrLst/>
+    <dgm:txLinClrLst/>
+    <dgm:txFillClrLst meth="repeat">
+      <a:schemeClr val="dk1"/>
+    </dgm:txFillClrLst>
+    <dgm:txEffectClrLst/>
+  </dgm:styleLbl>
+  <dgm:styleLbl name="bgAccFollowNode1">
+    <dgm:fillClrLst>
+      <a:schemeClr val="accent3">
+        <a:tint val="40000"/>
+        <a:alpha val="90000"/>
+      </a:schemeClr>
+      <a:schemeClr val="accent4">
+        <a:tint val="40000"/>
+        <a:alpha val="90000"/>
+      </a:schemeClr>
+    </dgm:fillClrLst>
+    <dgm:linClrLst>
+      <a:schemeClr val="accent3">
+        <a:tint val="40000"/>
+        <a:alpha val="90000"/>
+      </a:schemeClr>
+      <a:schemeClr val="accent4">
+        <a:tint val="40000"/>
+        <a:alpha val="90000"/>
+      </a:schemeClr>
+    </dgm:linClrLst>
+    <dgm:effectClrLst/>
+    <dgm:txLinClrLst/>
+    <dgm:txFillClrLst meth="repeat">
+      <a:schemeClr val="dk1"/>
+    </dgm:txFillClrLst>
+    <dgm:txEffectClrLst/>
+  </dgm:styleLbl>
+  <dgm:styleLbl name="fgAcc0">
+    <dgm:fillClrLst meth="repeat">
+      <a:schemeClr val="lt1">
+        <a:alpha val="90000"/>
+      </a:schemeClr>
+    </dgm:fillClrLst>
+    <dgm:linClrLst>
+      <a:schemeClr val="accent2"/>
+    </dgm:linClrLst>
+    <dgm:effectClrLst/>
+    <dgm:txLinClrLst/>
+    <dgm:txFillClrLst meth="repeat">
+      <a:schemeClr val="dk1"/>
+    </dgm:txFillClrLst>
+    <dgm:txEffectClrLst/>
+  </dgm:styleLbl>
+  <dgm:styleLbl name="fgAcc2">
+    <dgm:fillClrLst meth="repeat">
+      <a:schemeClr val="lt1">
+        <a:alpha val="90000"/>
+      </a:schemeClr>
+    </dgm:fillClrLst>
+    <dgm:linClrLst>
+      <a:schemeClr val="accent4"/>
+    </dgm:linClrLst>
+    <dgm:effectClrLst/>
+    <dgm:txLinClrLst/>
+    <dgm:txFillClrLst meth="repeat">
+      <a:schemeClr val="dk1"/>
+    </dgm:txFillClrLst>
+    <dgm:txEffectClrLst/>
+  </dgm:styleLbl>
+  <dgm:styleLbl name="fgAcc3">
+    <dgm:fillClrLst meth="repeat">
+      <a:schemeClr val="lt1">
+        <a:alpha val="90000"/>
+      </a:schemeClr>
+    </dgm:fillClrLst>
+    <dgm:linClrLst>
+      <a:schemeClr val="accent5"/>
+    </dgm:linClrLst>
+    <dgm:effectClrLst/>
+    <dgm:txLinClrLst/>
+    <dgm:txFillClrLst meth="repeat">
+      <a:schemeClr val="dk1"/>
+    </dgm:txFillClrLst>
+    <dgm:txEffectClrLst/>
+  </dgm:styleLbl>
+  <dgm:styleLbl name="fgAcc4">
+    <dgm:fillClrLst meth="repeat">
+      <a:schemeClr val="lt1">
+        <a:alpha val="90000"/>
+      </a:schemeClr>
+    </dgm:fillClrLst>
+    <dgm:linClrLst>
+      <a:schemeClr val="accent6"/>
+    </dgm:linClrLst>
+    <dgm:effectClrLst/>
+    <dgm:txLinClrLst/>
+    <dgm:txFillClrLst meth="repeat">
+      <a:schemeClr val="dk1"/>
+    </dgm:txFillClrLst>
+    <dgm:txEffectClrLst/>
+  </dgm:styleLbl>
+  <dgm:styleLbl name="bgShp">
+    <dgm:fillClrLst meth="repeat">
+      <a:schemeClr val="accent3">
+        <a:tint val="40000"/>
+      </a:schemeClr>
+    </dgm:fillClrLst>
+    <dgm:linClrLst meth="repeat">
+      <a:schemeClr val="dk1"/>
+    </dgm:linClrLst>
+    <dgm:effectClrLst/>
+    <dgm:txLinClrLst/>
+    <dgm:txFillClrLst meth="repeat">
+      <a:schemeClr val="dk1"/>
+    </dgm:txFillClrLst>
+    <dgm:txEffectClrLst/>
+  </dgm:styleLbl>
+  <dgm:styleLbl name="dkBgShp">
+    <dgm:fillClrLst meth="repeat">
+      <a:schemeClr val="accent3">
+        <a:shade val="90000"/>
+      </a:schemeClr>
+    </dgm:fillClrLst>
+    <dgm:linClrLst meth="repeat">
+      <a:schemeClr val="dk1"/>
+    </dgm:linClrLst>
+    <dgm:effectClrLst/>
+    <dgm:txLinClrLst/>
+    <dgm:txFillClrLst meth="repeat">
+      <a:schemeClr val="lt1"/>
+    </dgm:txFillClrLst>
+    <dgm:txEffectClrLst/>
+  </dgm:styleLbl>
+  <dgm:styleLbl name="trBgShp">
+    <dgm:fillClrLst meth="repeat">
+      <a:schemeClr val="accent2">
+        <a:tint val="50000"/>
+        <a:alpha val="40000"/>
+      </a:schemeClr>
+    </dgm:fillClrLst>
+    <dgm:linClrLst meth="repeat">
+      <a:schemeClr val="accent3"/>
+    </dgm:linClrLst>
+    <dgm:effectClrLst/>
+    <dgm:txLinClrLst/>
+    <dgm:txFillClrLst meth="repeat">
+      <a:schemeClr val="lt1"/>
+    </dgm:txFillClrLst>
+    <dgm:txEffectClrLst/>
+  </dgm:styleLbl>
+  <dgm:styleLbl name="fgShp">
+    <dgm:fillClrLst meth="repeat">
+      <a:schemeClr val="accent3">
+        <a:tint val="40000"/>
+      </a:schemeClr>
+    </dgm:fillClrLst>
+    <dgm:linClrLst meth="repeat">
+      <a:schemeClr val="lt1"/>
+    </dgm:linClrLst>
+    <dgm:effectClrLst/>
+    <dgm:txLinClrLst/>
+    <dgm:txFillClrLst meth="repeat">
+      <a:schemeClr val="dk1"/>
+    </dgm:txFillClrLst>
+    <dgm:txEffectClrLst/>
+  </dgm:styleLbl>
+  <dgm:styleLbl name="revTx">
+    <dgm:fillClrLst meth="repeat">
+      <a:schemeClr val="lt1">
+        <a:alpha val="0"/>
+      </a:schemeClr>
+    </dgm:fillClrLst>
+    <dgm:linClrLst meth="repeat">
+      <a:schemeClr val="dk1">
+        <a:alpha val="0"/>
+      </a:schemeClr>
+    </dgm:linClrLst>
+    <dgm:effectClrLst/>
+    <dgm:txLinClrLst/>
+    <dgm:txFillClrLst meth="repeat">
+      <a:schemeClr val="tx1"/>
+    </dgm:txFillClrLst>
+    <dgm:txEffectClrLst/>
+  </dgm:styleLbl>
+</dgm:colorsDef>
+</file>
+
+<file path=ppt/diagrams/colors2.xml><?xml version="1.0" encoding="utf-8"?>
 <dgm:colorsDef xmlns:dgm="http://schemas.openxmlformats.org/drawingml/2006/diagram" xmlns:a="http://schemas.openxmlformats.org/drawingml/2006/main" uniqueId="urn:microsoft.com/office/officeart/2005/8/colors/colorful3">
   <dgm:title val=""/>
   <dgm:desc val=""/>
@@ -1363,6 +2161,210 @@
 </dgm:dataModel>
 </file>
 
+<file path=ppt/diagrams/data2.xml><?xml version="1.0" encoding="utf-8"?>
+<dgm:dataModel xmlns:dgm="http://schemas.openxmlformats.org/drawingml/2006/diagram" xmlns:a="http://schemas.openxmlformats.org/drawingml/2006/main">
+  <dgm:ptLst>
+    <dgm:pt modelId="{F4FB5CB6-EBA4-4AF1-A964-208491D6806E}" type="doc">
+      <dgm:prSet loTypeId="urn:microsoft.com/office/officeart/2005/8/layout/arrow2" loCatId="process" qsTypeId="urn:microsoft.com/office/officeart/2005/8/quickstyle/simple1" qsCatId="simple" csTypeId="urn:microsoft.com/office/officeart/2005/8/colors/colorful3" csCatId="colorful" phldr="1"/>
+      <dgm:spPr/>
+      <dgm:t>
+        <a:bodyPr/>
+        <a:lstStyle/>
+        <a:p>
+          <a:endParaRPr lang="en-US"/>
+        </a:p>
+      </dgm:t>
+    </dgm:pt>
+    <dgm:pt modelId="{4453F969-DB7C-42A1-A9B7-5CDDBEE80790}">
+      <dgm:prSet phldrT="[Text]" phldr="0" custT="1"/>
+      <dgm:spPr/>
+      <dgm:t>
+        <a:bodyPr/>
+        <a:lstStyle/>
+        <a:p>
+          <a:r>
+            <a:rPr lang="en-US" sz="1600" b="1" dirty="0"/>
+            <a:t>Free</a:t>
+          </a:r>
+        </a:p>
+      </dgm:t>
+    </dgm:pt>
+    <dgm:pt modelId="{C9651CC2-EF3B-4ADC-B10E-B7638A92425D}" type="parTrans" cxnId="{BE04B17A-0FBF-484B-AB3E-FC24EAECDAFD}">
+      <dgm:prSet/>
+      <dgm:spPr/>
+      <dgm:t>
+        <a:bodyPr/>
+        <a:lstStyle/>
+        <a:p>
+          <a:endParaRPr lang="en-US" sz="1100" b="1"/>
+        </a:p>
+      </dgm:t>
+    </dgm:pt>
+    <dgm:pt modelId="{5F96572A-1699-4C2B-A560-8AAADF283337}" type="sibTrans" cxnId="{BE04B17A-0FBF-484B-AB3E-FC24EAECDAFD}">
+      <dgm:prSet/>
+      <dgm:spPr/>
+      <dgm:t>
+        <a:bodyPr/>
+        <a:lstStyle/>
+        <a:p>
+          <a:endParaRPr lang="en-US" sz="1100" b="1"/>
+        </a:p>
+      </dgm:t>
+    </dgm:pt>
+    <dgm:pt modelId="{B8654CC6-31F7-4237-8325-A8A19EF32201}">
+      <dgm:prSet phldrT="[Text]" phldr="0" custT="1"/>
+      <dgm:spPr/>
+      <dgm:t>
+        <a:bodyPr/>
+        <a:lstStyle/>
+        <a:p>
+          <a:r>
+            <a:rPr lang="en-US" sz="1600" b="1" dirty="0"/>
+            <a:t>Pro</a:t>
+          </a:r>
+        </a:p>
+      </dgm:t>
+    </dgm:pt>
+    <dgm:pt modelId="{044B88DB-C102-402F-891C-52FFE6C3F6C7}" type="parTrans" cxnId="{8CA35E5D-24DE-494A-B195-978CE800E4F7}">
+      <dgm:prSet/>
+      <dgm:spPr/>
+      <dgm:t>
+        <a:bodyPr/>
+        <a:lstStyle/>
+        <a:p>
+          <a:endParaRPr lang="en-US" sz="1100" b="1"/>
+        </a:p>
+      </dgm:t>
+    </dgm:pt>
+    <dgm:pt modelId="{5304F5C7-CC13-4D51-BB9C-6A86D4B7170A}" type="sibTrans" cxnId="{8CA35E5D-24DE-494A-B195-978CE800E4F7}">
+      <dgm:prSet/>
+      <dgm:spPr/>
+      <dgm:t>
+        <a:bodyPr/>
+        <a:lstStyle/>
+        <a:p>
+          <a:endParaRPr lang="en-US" sz="1100" b="1"/>
+        </a:p>
+      </dgm:t>
+    </dgm:pt>
+    <dgm:pt modelId="{95C16B97-3FDF-4D78-BBB9-9392F9429434}">
+      <dgm:prSet phldrT="[Text]" phldr="0" custT="1"/>
+      <dgm:spPr/>
+      <dgm:t>
+        <a:bodyPr/>
+        <a:lstStyle/>
+        <a:p>
+          <a:r>
+            <a:rPr lang="en-US" sz="1600" b="1" dirty="0"/>
+            <a:t>Premium</a:t>
+          </a:r>
+        </a:p>
+      </dgm:t>
+    </dgm:pt>
+    <dgm:pt modelId="{3DCAABB3-5844-4C8E-847E-EEB28604B3F9}" type="parTrans" cxnId="{1F55B217-52FD-4921-A177-CAD723C61861}">
+      <dgm:prSet/>
+      <dgm:spPr/>
+      <dgm:t>
+        <a:bodyPr/>
+        <a:lstStyle/>
+        <a:p>
+          <a:endParaRPr lang="en-US" sz="1100" b="1"/>
+        </a:p>
+      </dgm:t>
+    </dgm:pt>
+    <dgm:pt modelId="{116C690C-068B-4737-8BB1-DAFCFA81FDAA}" type="sibTrans" cxnId="{1F55B217-52FD-4921-A177-CAD723C61861}">
+      <dgm:prSet/>
+      <dgm:spPr/>
+      <dgm:t>
+        <a:bodyPr/>
+        <a:lstStyle/>
+        <a:p>
+          <a:endParaRPr lang="en-US" sz="1100" b="1"/>
+        </a:p>
+      </dgm:t>
+    </dgm:pt>
+    <dgm:pt modelId="{6C480503-7833-48B0-8DEE-C46E6579CC2A}" type="pres">
+      <dgm:prSet presAssocID="{F4FB5CB6-EBA4-4AF1-A964-208491D6806E}" presName="arrowDiagram" presStyleCnt="0">
+        <dgm:presLayoutVars>
+          <dgm:chMax val="5"/>
+          <dgm:dir/>
+          <dgm:resizeHandles val="exact"/>
+        </dgm:presLayoutVars>
+      </dgm:prSet>
+      <dgm:spPr/>
+    </dgm:pt>
+    <dgm:pt modelId="{EA865C5B-9432-468E-BBB8-18C45EB854B4}" type="pres">
+      <dgm:prSet presAssocID="{F4FB5CB6-EBA4-4AF1-A964-208491D6806E}" presName="arrow" presStyleLbl="bgShp" presStyleIdx="0" presStyleCnt="1"/>
+      <dgm:spPr/>
+    </dgm:pt>
+    <dgm:pt modelId="{06F70A69-E1F3-4B6D-A823-802909EFCECD}" type="pres">
+      <dgm:prSet presAssocID="{F4FB5CB6-EBA4-4AF1-A964-208491D6806E}" presName="arrowDiagram3" presStyleCnt="0"/>
+      <dgm:spPr/>
+    </dgm:pt>
+    <dgm:pt modelId="{AA7CDE4C-EDF5-4E42-88E3-4F00C32F34B2}" type="pres">
+      <dgm:prSet presAssocID="{4453F969-DB7C-42A1-A9B7-5CDDBEE80790}" presName="bullet3a" presStyleLbl="node1" presStyleIdx="0" presStyleCnt="3"/>
+      <dgm:spPr/>
+    </dgm:pt>
+    <dgm:pt modelId="{F4DC4BC9-3993-44B4-A218-45EB80965B4E}" type="pres">
+      <dgm:prSet presAssocID="{4453F969-DB7C-42A1-A9B7-5CDDBEE80790}" presName="textBox3a" presStyleLbl="revTx" presStyleIdx="0" presStyleCnt="3">
+        <dgm:presLayoutVars>
+          <dgm:bulletEnabled val="1"/>
+        </dgm:presLayoutVars>
+      </dgm:prSet>
+      <dgm:spPr/>
+    </dgm:pt>
+    <dgm:pt modelId="{2D0ED859-4626-4542-B178-7F2BF790D6C5}" type="pres">
+      <dgm:prSet presAssocID="{B8654CC6-31F7-4237-8325-A8A19EF32201}" presName="bullet3b" presStyleLbl="node1" presStyleIdx="1" presStyleCnt="3"/>
+      <dgm:spPr/>
+    </dgm:pt>
+    <dgm:pt modelId="{BC94C53E-B99E-489C-8C74-82E91EFF3C14}" type="pres">
+      <dgm:prSet presAssocID="{B8654CC6-31F7-4237-8325-A8A19EF32201}" presName="textBox3b" presStyleLbl="revTx" presStyleIdx="1" presStyleCnt="3">
+        <dgm:presLayoutVars>
+          <dgm:bulletEnabled val="1"/>
+        </dgm:presLayoutVars>
+      </dgm:prSet>
+      <dgm:spPr/>
+    </dgm:pt>
+    <dgm:pt modelId="{06F1FD10-71FE-4E66-A978-71CC4303AC27}" type="pres">
+      <dgm:prSet presAssocID="{95C16B97-3FDF-4D78-BBB9-9392F9429434}" presName="bullet3c" presStyleLbl="node1" presStyleIdx="2" presStyleCnt="3"/>
+      <dgm:spPr/>
+    </dgm:pt>
+    <dgm:pt modelId="{3DE64514-EDE5-401D-8BF4-FB43E21FF4E0}" type="pres">
+      <dgm:prSet presAssocID="{95C16B97-3FDF-4D78-BBB9-9392F9429434}" presName="textBox3c" presStyleLbl="revTx" presStyleIdx="2" presStyleCnt="3">
+        <dgm:presLayoutVars>
+          <dgm:bulletEnabled val="1"/>
+        </dgm:presLayoutVars>
+      </dgm:prSet>
+      <dgm:spPr/>
+    </dgm:pt>
+  </dgm:ptLst>
+  <dgm:cxnLst>
+    <dgm:cxn modelId="{1F55B217-52FD-4921-A177-CAD723C61861}" srcId="{F4FB5CB6-EBA4-4AF1-A964-208491D6806E}" destId="{95C16B97-3FDF-4D78-BBB9-9392F9429434}" srcOrd="2" destOrd="0" parTransId="{3DCAABB3-5844-4C8E-847E-EEB28604B3F9}" sibTransId="{116C690C-068B-4737-8BB1-DAFCFA81FDAA}"/>
+    <dgm:cxn modelId="{8CA35E5D-24DE-494A-B195-978CE800E4F7}" srcId="{F4FB5CB6-EBA4-4AF1-A964-208491D6806E}" destId="{B8654CC6-31F7-4237-8325-A8A19EF32201}" srcOrd="1" destOrd="0" parTransId="{044B88DB-C102-402F-891C-52FFE6C3F6C7}" sibTransId="{5304F5C7-CC13-4D51-BB9C-6A86D4B7170A}"/>
+    <dgm:cxn modelId="{B86B3241-784F-4292-8531-EDF31F38CAFF}" type="presOf" srcId="{4453F969-DB7C-42A1-A9B7-5CDDBEE80790}" destId="{F4DC4BC9-3993-44B4-A218-45EB80965B4E}" srcOrd="0" destOrd="0" presId="urn:microsoft.com/office/officeart/2005/8/layout/arrow2"/>
+    <dgm:cxn modelId="{BE04B17A-0FBF-484B-AB3E-FC24EAECDAFD}" srcId="{F4FB5CB6-EBA4-4AF1-A964-208491D6806E}" destId="{4453F969-DB7C-42A1-A9B7-5CDDBEE80790}" srcOrd="0" destOrd="0" parTransId="{C9651CC2-EF3B-4ADC-B10E-B7638A92425D}" sibTransId="{5F96572A-1699-4C2B-A560-8AAADF283337}"/>
+    <dgm:cxn modelId="{79EFFB7A-9FC8-4393-8F49-DB418EB433CB}" type="presOf" srcId="{95C16B97-3FDF-4D78-BBB9-9392F9429434}" destId="{3DE64514-EDE5-401D-8BF4-FB43E21FF4E0}" srcOrd="0" destOrd="0" presId="urn:microsoft.com/office/officeart/2005/8/layout/arrow2"/>
+    <dgm:cxn modelId="{822CAEB0-EB59-48B9-A8ED-E30246F688C8}" type="presOf" srcId="{F4FB5CB6-EBA4-4AF1-A964-208491D6806E}" destId="{6C480503-7833-48B0-8DEE-C46E6579CC2A}" srcOrd="0" destOrd="0" presId="urn:microsoft.com/office/officeart/2005/8/layout/arrow2"/>
+    <dgm:cxn modelId="{4F4B18C4-FDAD-4835-A1FB-BC9E801827F6}" type="presOf" srcId="{B8654CC6-31F7-4237-8325-A8A19EF32201}" destId="{BC94C53E-B99E-489C-8C74-82E91EFF3C14}" srcOrd="0" destOrd="0" presId="urn:microsoft.com/office/officeart/2005/8/layout/arrow2"/>
+    <dgm:cxn modelId="{B348141B-3429-4F1C-A206-A06829F07884}" type="presParOf" srcId="{6C480503-7833-48B0-8DEE-C46E6579CC2A}" destId="{EA865C5B-9432-468E-BBB8-18C45EB854B4}" srcOrd="0" destOrd="0" presId="urn:microsoft.com/office/officeart/2005/8/layout/arrow2"/>
+    <dgm:cxn modelId="{2FEB21D7-CD0C-4371-8778-45463DE22D9C}" type="presParOf" srcId="{6C480503-7833-48B0-8DEE-C46E6579CC2A}" destId="{06F70A69-E1F3-4B6D-A823-802909EFCECD}" srcOrd="1" destOrd="0" presId="urn:microsoft.com/office/officeart/2005/8/layout/arrow2"/>
+    <dgm:cxn modelId="{7C00515F-675C-4652-96B1-C2418EC5C77D}" type="presParOf" srcId="{06F70A69-E1F3-4B6D-A823-802909EFCECD}" destId="{AA7CDE4C-EDF5-4E42-88E3-4F00C32F34B2}" srcOrd="0" destOrd="0" presId="urn:microsoft.com/office/officeart/2005/8/layout/arrow2"/>
+    <dgm:cxn modelId="{FF210C30-A950-49D2-8202-E4E9C2B52514}" type="presParOf" srcId="{06F70A69-E1F3-4B6D-A823-802909EFCECD}" destId="{F4DC4BC9-3993-44B4-A218-45EB80965B4E}" srcOrd="1" destOrd="0" presId="urn:microsoft.com/office/officeart/2005/8/layout/arrow2"/>
+    <dgm:cxn modelId="{4C28BCC3-864C-4B34-971D-FB16746B6659}" type="presParOf" srcId="{06F70A69-E1F3-4B6D-A823-802909EFCECD}" destId="{2D0ED859-4626-4542-B178-7F2BF790D6C5}" srcOrd="2" destOrd="0" presId="urn:microsoft.com/office/officeart/2005/8/layout/arrow2"/>
+    <dgm:cxn modelId="{80924CD1-B415-4B18-8CD8-83080AFFEFCF}" type="presParOf" srcId="{06F70A69-E1F3-4B6D-A823-802909EFCECD}" destId="{BC94C53E-B99E-489C-8C74-82E91EFF3C14}" srcOrd="3" destOrd="0" presId="urn:microsoft.com/office/officeart/2005/8/layout/arrow2"/>
+    <dgm:cxn modelId="{CCDF623D-50D6-49FA-A45F-39C45D8BF655}" type="presParOf" srcId="{06F70A69-E1F3-4B6D-A823-802909EFCECD}" destId="{06F1FD10-71FE-4E66-A978-71CC4303AC27}" srcOrd="4" destOrd="0" presId="urn:microsoft.com/office/officeart/2005/8/layout/arrow2"/>
+    <dgm:cxn modelId="{38590C7A-B11C-4B88-B0B9-FCE12220F7AB}" type="presParOf" srcId="{06F70A69-E1F3-4B6D-A823-802909EFCECD}" destId="{3DE64514-EDE5-401D-8BF4-FB43E21FF4E0}" srcOrd="5" destOrd="0" presId="urn:microsoft.com/office/officeart/2005/8/layout/arrow2"/>
+  </dgm:cxnLst>
+  <dgm:bg/>
+  <dgm:whole/>
+  <dgm:extLst>
+    <a:ext uri="http://schemas.microsoft.com/office/drawing/2008/diagram">
+      <dsp:dataModelExt xmlns:dsp="http://schemas.microsoft.com/office/drawing/2008/diagram" relId="rId11" minVer="http://schemas.openxmlformats.org/drawingml/2006/diagram"/>
+    </a:ext>
+  </dgm:extLst>
+</dgm:dataModel>
+</file>
+
 <file path=ppt/diagrams/drawing1.xml><?xml version="1.0" encoding="utf-8"?>
 <dsp:drawing xmlns:dgm="http://schemas.openxmlformats.org/drawingml/2006/diagram" xmlns:dsp="http://schemas.microsoft.com/office/drawing/2008/diagram" xmlns:a="http://schemas.openxmlformats.org/drawingml/2006/main">
   <dsp:spTree>
@@ -2150,6 +3152,391 @@
 </dsp:drawing>
 </file>
 
+<file path=ppt/diagrams/drawing2.xml><?xml version="1.0" encoding="utf-8"?>
+<dsp:drawing xmlns:dgm="http://schemas.openxmlformats.org/drawingml/2006/diagram" xmlns:dsp="http://schemas.microsoft.com/office/drawing/2008/diagram" xmlns:a="http://schemas.openxmlformats.org/drawingml/2006/main">
+  <dsp:spTree>
+    <dsp:nvGrpSpPr>
+      <dsp:cNvPr id="0" name=""/>
+      <dsp:cNvGrpSpPr/>
+    </dsp:nvGrpSpPr>
+    <dsp:grpSpPr/>
+    <dsp:sp modelId="{EA865C5B-9432-468E-BBB8-18C45EB854B4}">
+      <dsp:nvSpPr>
+        <dsp:cNvPr id="0" name=""/>
+        <dsp:cNvSpPr/>
+      </dsp:nvSpPr>
+      <dsp:spPr>
+        <a:xfrm>
+          <a:off x="866266" y="0"/>
+          <a:ext cx="4293336" cy="2683334"/>
+        </a:xfrm>
+        <a:prstGeom prst="swooshArrow">
+          <a:avLst>
+            <a:gd name="adj1" fmla="val 25000"/>
+            <a:gd name="adj2" fmla="val 25000"/>
+          </a:avLst>
+        </a:prstGeom>
+        <a:solidFill>
+          <a:schemeClr val="accent3">
+            <a:tint val="40000"/>
+            <a:hueOff val="0"/>
+            <a:satOff val="0"/>
+            <a:lumOff val="0"/>
+            <a:alphaOff val="0"/>
+          </a:schemeClr>
+        </a:solidFill>
+        <a:ln>
+          <a:noFill/>
+        </a:ln>
+        <a:effectLst/>
+      </dsp:spPr>
+      <dsp:style>
+        <a:lnRef idx="0">
+          <a:scrgbClr r="0" g="0" b="0"/>
+        </a:lnRef>
+        <a:fillRef idx="1">
+          <a:scrgbClr r="0" g="0" b="0"/>
+        </a:fillRef>
+        <a:effectRef idx="0">
+          <a:scrgbClr r="0" g="0" b="0"/>
+        </a:effectRef>
+        <a:fontRef idx="minor"/>
+      </dsp:style>
+    </dsp:sp>
+    <dsp:sp modelId="{AA7CDE4C-EDF5-4E42-88E3-4F00C32F34B2}">
+      <dsp:nvSpPr>
+        <dsp:cNvPr id="0" name=""/>
+        <dsp:cNvSpPr/>
+      </dsp:nvSpPr>
+      <dsp:spPr>
+        <a:xfrm>
+          <a:off x="1411520" y="1852037"/>
+          <a:ext cx="111626" cy="111626"/>
+        </a:xfrm>
+        <a:prstGeom prst="ellipse">
+          <a:avLst/>
+        </a:prstGeom>
+        <a:solidFill>
+          <a:schemeClr val="accent3">
+            <a:hueOff val="0"/>
+            <a:satOff val="0"/>
+            <a:lumOff val="0"/>
+            <a:alphaOff val="0"/>
+          </a:schemeClr>
+        </a:solidFill>
+        <a:ln w="12700" cap="flat" cmpd="sng" algn="ctr">
+          <a:solidFill>
+            <a:schemeClr val="lt1">
+              <a:hueOff val="0"/>
+              <a:satOff val="0"/>
+              <a:lumOff val="0"/>
+              <a:alphaOff val="0"/>
+            </a:schemeClr>
+          </a:solidFill>
+          <a:prstDash val="solid"/>
+          <a:miter lim="800000"/>
+        </a:ln>
+        <a:effectLst/>
+      </dsp:spPr>
+      <dsp:style>
+        <a:lnRef idx="2">
+          <a:scrgbClr r="0" g="0" b="0"/>
+        </a:lnRef>
+        <a:fillRef idx="1">
+          <a:scrgbClr r="0" g="0" b="0"/>
+        </a:fillRef>
+        <a:effectRef idx="0">
+          <a:scrgbClr r="0" g="0" b="0"/>
+        </a:effectRef>
+        <a:fontRef idx="minor">
+          <a:schemeClr val="lt1"/>
+        </a:fontRef>
+      </dsp:style>
+    </dsp:sp>
+    <dsp:sp modelId="{F4DC4BC9-3993-44B4-A218-45EB80965B4E}">
+      <dsp:nvSpPr>
+        <dsp:cNvPr id="0" name=""/>
+        <dsp:cNvSpPr/>
+      </dsp:nvSpPr>
+      <dsp:spPr>
+        <a:xfrm>
+          <a:off x="1467333" y="1907851"/>
+          <a:ext cx="1000347" cy="775483"/>
+        </a:xfrm>
+        <a:prstGeom prst="rect">
+          <a:avLst/>
+        </a:prstGeom>
+        <a:noFill/>
+        <a:ln>
+          <a:noFill/>
+        </a:ln>
+        <a:effectLst/>
+      </dsp:spPr>
+      <dsp:style>
+        <a:lnRef idx="0">
+          <a:scrgbClr r="0" g="0" b="0"/>
+        </a:lnRef>
+        <a:fillRef idx="0">
+          <a:scrgbClr r="0" g="0" b="0"/>
+        </a:fillRef>
+        <a:effectRef idx="0">
+          <a:scrgbClr r="0" g="0" b="0"/>
+        </a:effectRef>
+        <a:fontRef idx="minor"/>
+      </dsp:style>
+      <dsp:txBody>
+        <a:bodyPr spcFirstLastPara="0" vert="horz" wrap="square" lIns="59149" tIns="0" rIns="0" bIns="0" numCol="1" spcCol="1270" anchor="t" anchorCtr="0">
+          <a:noAutofit/>
+        </a:bodyPr>
+        <a:lstStyle/>
+        <a:p>
+          <a:pPr marL="0" lvl="0" indent="0" algn="l" defTabSz="711200">
+            <a:lnSpc>
+              <a:spcPct val="90000"/>
+            </a:lnSpc>
+            <a:spcBef>
+              <a:spcPct val="0"/>
+            </a:spcBef>
+            <a:spcAft>
+              <a:spcPct val="35000"/>
+            </a:spcAft>
+            <a:buNone/>
+          </a:pPr>
+          <a:r>
+            <a:rPr lang="en-US" sz="1600" b="1" kern="1200" dirty="0"/>
+            <a:t>Free</a:t>
+          </a:r>
+        </a:p>
+      </dsp:txBody>
+      <dsp:txXfrm>
+        <a:off x="1467333" y="1907851"/>
+        <a:ext cx="1000347" cy="775483"/>
+      </dsp:txXfrm>
+    </dsp:sp>
+    <dsp:sp modelId="{2D0ED859-4626-4542-B178-7F2BF790D6C5}">
+      <dsp:nvSpPr>
+        <dsp:cNvPr id="0" name=""/>
+        <dsp:cNvSpPr/>
+      </dsp:nvSpPr>
+      <dsp:spPr>
+        <a:xfrm>
+          <a:off x="2396840" y="1122707"/>
+          <a:ext cx="201786" cy="201786"/>
+        </a:xfrm>
+        <a:prstGeom prst="ellipse">
+          <a:avLst/>
+        </a:prstGeom>
+        <a:solidFill>
+          <a:schemeClr val="accent3">
+            <a:hueOff val="-9163796"/>
+            <a:satOff val="0"/>
+            <a:lumOff val="-9509"/>
+            <a:alphaOff val="0"/>
+          </a:schemeClr>
+        </a:solidFill>
+        <a:ln w="12700" cap="flat" cmpd="sng" algn="ctr">
+          <a:solidFill>
+            <a:schemeClr val="lt1">
+              <a:hueOff val="0"/>
+              <a:satOff val="0"/>
+              <a:lumOff val="0"/>
+              <a:alphaOff val="0"/>
+            </a:schemeClr>
+          </a:solidFill>
+          <a:prstDash val="solid"/>
+          <a:miter lim="800000"/>
+        </a:ln>
+        <a:effectLst/>
+      </dsp:spPr>
+      <dsp:style>
+        <a:lnRef idx="2">
+          <a:scrgbClr r="0" g="0" b="0"/>
+        </a:lnRef>
+        <a:fillRef idx="1">
+          <a:scrgbClr r="0" g="0" b="0"/>
+        </a:fillRef>
+        <a:effectRef idx="0">
+          <a:scrgbClr r="0" g="0" b="0"/>
+        </a:effectRef>
+        <a:fontRef idx="minor">
+          <a:schemeClr val="lt1"/>
+        </a:fontRef>
+      </dsp:style>
+    </dsp:sp>
+    <dsp:sp modelId="{BC94C53E-B99E-489C-8C74-82E91EFF3C14}">
+      <dsp:nvSpPr>
+        <dsp:cNvPr id="0" name=""/>
+        <dsp:cNvSpPr/>
+      </dsp:nvSpPr>
+      <dsp:spPr>
+        <a:xfrm>
+          <a:off x="2497734" y="1223600"/>
+          <a:ext cx="1030400" cy="1459734"/>
+        </a:xfrm>
+        <a:prstGeom prst="rect">
+          <a:avLst/>
+        </a:prstGeom>
+        <a:noFill/>
+        <a:ln>
+          <a:noFill/>
+        </a:ln>
+        <a:effectLst/>
+      </dsp:spPr>
+      <dsp:style>
+        <a:lnRef idx="0">
+          <a:scrgbClr r="0" g="0" b="0"/>
+        </a:lnRef>
+        <a:fillRef idx="0">
+          <a:scrgbClr r="0" g="0" b="0"/>
+        </a:fillRef>
+        <a:effectRef idx="0">
+          <a:scrgbClr r="0" g="0" b="0"/>
+        </a:effectRef>
+        <a:fontRef idx="minor"/>
+      </dsp:style>
+      <dsp:txBody>
+        <a:bodyPr spcFirstLastPara="0" vert="horz" wrap="square" lIns="106923" tIns="0" rIns="0" bIns="0" numCol="1" spcCol="1270" anchor="t" anchorCtr="0">
+          <a:noAutofit/>
+        </a:bodyPr>
+        <a:lstStyle/>
+        <a:p>
+          <a:pPr marL="0" lvl="0" indent="0" algn="l" defTabSz="711200">
+            <a:lnSpc>
+              <a:spcPct val="90000"/>
+            </a:lnSpc>
+            <a:spcBef>
+              <a:spcPct val="0"/>
+            </a:spcBef>
+            <a:spcAft>
+              <a:spcPct val="35000"/>
+            </a:spcAft>
+            <a:buNone/>
+          </a:pPr>
+          <a:r>
+            <a:rPr lang="en-US" sz="1600" b="1" kern="1200" dirty="0"/>
+            <a:t>Pro</a:t>
+          </a:r>
+        </a:p>
+      </dsp:txBody>
+      <dsp:txXfrm>
+        <a:off x="2497734" y="1223600"/>
+        <a:ext cx="1030400" cy="1459734"/>
+      </dsp:txXfrm>
+    </dsp:sp>
+    <dsp:sp modelId="{06F1FD10-71FE-4E66-A978-71CC4303AC27}">
+      <dsp:nvSpPr>
+        <dsp:cNvPr id="0" name=""/>
+        <dsp:cNvSpPr/>
+      </dsp:nvSpPr>
+      <dsp:spPr>
+        <a:xfrm>
+          <a:off x="3581801" y="678883"/>
+          <a:ext cx="279066" cy="279066"/>
+        </a:xfrm>
+        <a:prstGeom prst="ellipse">
+          <a:avLst/>
+        </a:prstGeom>
+        <a:solidFill>
+          <a:schemeClr val="accent3">
+            <a:hueOff val="-18327592"/>
+            <a:satOff val="0"/>
+            <a:lumOff val="-19018"/>
+            <a:alphaOff val="0"/>
+          </a:schemeClr>
+        </a:solidFill>
+        <a:ln w="12700" cap="flat" cmpd="sng" algn="ctr">
+          <a:solidFill>
+            <a:schemeClr val="lt1">
+              <a:hueOff val="0"/>
+              <a:satOff val="0"/>
+              <a:lumOff val="0"/>
+              <a:alphaOff val="0"/>
+            </a:schemeClr>
+          </a:solidFill>
+          <a:prstDash val="solid"/>
+          <a:miter lim="800000"/>
+        </a:ln>
+        <a:effectLst/>
+      </dsp:spPr>
+      <dsp:style>
+        <a:lnRef idx="2">
+          <a:scrgbClr r="0" g="0" b="0"/>
+        </a:lnRef>
+        <a:fillRef idx="1">
+          <a:scrgbClr r="0" g="0" b="0"/>
+        </a:fillRef>
+        <a:effectRef idx="0">
+          <a:scrgbClr r="0" g="0" b="0"/>
+        </a:effectRef>
+        <a:fontRef idx="minor">
+          <a:schemeClr val="lt1"/>
+        </a:fontRef>
+      </dsp:style>
+    </dsp:sp>
+    <dsp:sp modelId="{3DE64514-EDE5-401D-8BF4-FB43E21FF4E0}">
+      <dsp:nvSpPr>
+        <dsp:cNvPr id="0" name=""/>
+        <dsp:cNvSpPr/>
+      </dsp:nvSpPr>
+      <dsp:spPr>
+        <a:xfrm>
+          <a:off x="3721334" y="818417"/>
+          <a:ext cx="1030400" cy="1864917"/>
+        </a:xfrm>
+        <a:prstGeom prst="rect">
+          <a:avLst/>
+        </a:prstGeom>
+        <a:noFill/>
+        <a:ln>
+          <a:noFill/>
+        </a:ln>
+        <a:effectLst/>
+      </dsp:spPr>
+      <dsp:style>
+        <a:lnRef idx="0">
+          <a:scrgbClr r="0" g="0" b="0"/>
+        </a:lnRef>
+        <a:fillRef idx="0">
+          <a:scrgbClr r="0" g="0" b="0"/>
+        </a:fillRef>
+        <a:effectRef idx="0">
+          <a:scrgbClr r="0" g="0" b="0"/>
+        </a:effectRef>
+        <a:fontRef idx="minor"/>
+      </dsp:style>
+      <dsp:txBody>
+        <a:bodyPr spcFirstLastPara="0" vert="horz" wrap="square" lIns="147872" tIns="0" rIns="0" bIns="0" numCol="1" spcCol="1270" anchor="t" anchorCtr="0">
+          <a:noAutofit/>
+        </a:bodyPr>
+        <a:lstStyle/>
+        <a:p>
+          <a:pPr marL="0" lvl="0" indent="0" algn="l" defTabSz="711200">
+            <a:lnSpc>
+              <a:spcPct val="90000"/>
+            </a:lnSpc>
+            <a:spcBef>
+              <a:spcPct val="0"/>
+            </a:spcBef>
+            <a:spcAft>
+              <a:spcPct val="35000"/>
+            </a:spcAft>
+            <a:buNone/>
+          </a:pPr>
+          <a:r>
+            <a:rPr lang="en-US" sz="1600" b="1" kern="1200" dirty="0"/>
+            <a:t>Premium</a:t>
+          </a:r>
+        </a:p>
+      </dsp:txBody>
+      <dsp:txXfrm>
+        <a:off x="3721334" y="818417"/>
+        <a:ext cx="1030400" cy="1864917"/>
+      </dsp:txXfrm>
+    </dsp:sp>
+  </dsp:spTree>
+</dsp:drawing>
+</file>
+
 <file path=ppt/diagrams/layout1.xml><?xml version="1.0" encoding="utf-8"?>
 <dgm:layoutDef xmlns:dgm="http://schemas.openxmlformats.org/drawingml/2006/diagram" xmlns:a="http://schemas.openxmlformats.org/drawingml/2006/main" uniqueId="urn:microsoft.com/office/officeart/2005/8/layout/cycle2">
   <dgm:title val=""/>
@@ -2361,7 +3748,2686 @@
 </dgm:layoutDef>
 </file>
 
+<file path=ppt/diagrams/layout2.xml><?xml version="1.0" encoding="utf-8"?>
+<dgm:layoutDef xmlns:dgm="http://schemas.openxmlformats.org/drawingml/2006/diagram" xmlns:a="http://schemas.openxmlformats.org/drawingml/2006/main" uniqueId="urn:microsoft.com/office/officeart/2005/8/layout/arrow2">
+  <dgm:title val=""/>
+  <dgm:desc val=""/>
+  <dgm:catLst>
+    <dgm:cat type="process" pri="23000"/>
+  </dgm:catLst>
+  <dgm:sampData useDef="1">
+    <dgm:dataModel>
+      <dgm:ptLst/>
+      <dgm:bg/>
+      <dgm:whole/>
+    </dgm:dataModel>
+  </dgm:sampData>
+  <dgm:styleData>
+    <dgm:dataModel>
+      <dgm:ptLst>
+        <dgm:pt modelId="0" type="doc"/>
+        <dgm:pt modelId="1"/>
+        <dgm:pt modelId="2"/>
+      </dgm:ptLst>
+      <dgm:cxnLst>
+        <dgm:cxn modelId="3" srcId="0" destId="1" srcOrd="0" destOrd="0"/>
+        <dgm:cxn modelId="4" srcId="0" destId="2" srcOrd="1" destOrd="0"/>
+      </dgm:cxnLst>
+      <dgm:bg/>
+      <dgm:whole/>
+    </dgm:dataModel>
+  </dgm:styleData>
+  <dgm:clrData>
+    <dgm:dataModel>
+      <dgm:ptLst>
+        <dgm:pt modelId="0" type="doc"/>
+        <dgm:pt modelId="1"/>
+        <dgm:pt modelId="2"/>
+        <dgm:pt modelId="3"/>
+        <dgm:pt modelId="4"/>
+      </dgm:ptLst>
+      <dgm:cxnLst>
+        <dgm:cxn modelId="5" srcId="0" destId="1" srcOrd="0" destOrd="0"/>
+        <dgm:cxn modelId="6" srcId="0" destId="2" srcOrd="1" destOrd="0"/>
+        <dgm:cxn modelId="7" srcId="0" destId="3" srcOrd="2" destOrd="0"/>
+        <dgm:cxn modelId="8" srcId="0" destId="4" srcOrd="3" destOrd="0"/>
+      </dgm:cxnLst>
+      <dgm:bg/>
+      <dgm:whole/>
+    </dgm:dataModel>
+  </dgm:clrData>
+  <dgm:layoutNode name="arrowDiagram">
+    <dgm:varLst>
+      <dgm:chMax val="5"/>
+      <dgm:dir/>
+      <dgm:resizeHandles val="exact"/>
+    </dgm:varLst>
+    <dgm:alg type="composite">
+      <dgm:param type="ar" val="1.6"/>
+    </dgm:alg>
+    <dgm:shape xmlns:r="http://schemas.openxmlformats.org/officeDocument/2006/relationships" r:blip="">
+      <dgm:adjLst/>
+    </dgm:shape>
+    <dgm:presOf/>
+    <dgm:constrLst>
+      <dgm:constr type="l" for="ch" forName="arrow"/>
+      <dgm:constr type="t" for="ch" forName="arrow"/>
+      <dgm:constr type="w" for="ch" forName="arrow" refType="w"/>
+      <dgm:constr type="h" for="ch" forName="arrow" refType="h"/>
+      <dgm:constr type="ctrX" for="ch" forName="arrowDiagram1" refType="w" fact="0.5"/>
+      <dgm:constr type="ctrY" for="ch" forName="arrowDiagram1" refType="h" fact="0.5"/>
+      <dgm:constr type="w" for="ch" forName="arrowDiagram1" refType="w"/>
+      <dgm:constr type="h" for="ch" forName="arrowDiagram1" refType="h"/>
+      <dgm:constr type="ctrX" for="ch" forName="arrowDiagram2" refType="w" fact="0.5"/>
+      <dgm:constr type="ctrY" for="ch" forName="arrowDiagram2" refType="h" fact="0.5"/>
+      <dgm:constr type="w" for="ch" forName="arrowDiagram2" refType="w"/>
+      <dgm:constr type="h" for="ch" forName="arrowDiagram2" refType="h"/>
+      <dgm:constr type="ctrX" for="ch" forName="arrowDiagram3" refType="w" fact="0.5"/>
+      <dgm:constr type="ctrY" for="ch" forName="arrowDiagram3" refType="h" fact="0.5"/>
+      <dgm:constr type="w" for="ch" forName="arrowDiagram3" refType="w"/>
+      <dgm:constr type="h" for="ch" forName="arrowDiagram3" refType="h"/>
+      <dgm:constr type="ctrX" for="ch" forName="arrowDiagram4" refType="w" fact="0.5"/>
+      <dgm:constr type="ctrY" for="ch" forName="arrowDiagram4" refType="h" fact="0.5"/>
+      <dgm:constr type="w" for="ch" forName="arrowDiagram4" refType="w"/>
+      <dgm:constr type="h" for="ch" forName="arrowDiagram4" refType="h"/>
+      <dgm:constr type="ctrX" for="ch" forName="arrowDiagram5" refType="w" fact="0.5"/>
+      <dgm:constr type="ctrY" for="ch" forName="arrowDiagram5" refType="h" fact="0.5"/>
+      <dgm:constr type="w" for="ch" forName="arrowDiagram5" refType="w"/>
+      <dgm:constr type="h" for="ch" forName="arrowDiagram5" refType="h"/>
+    </dgm:constrLst>
+    <dgm:ruleLst/>
+    <dgm:choose name="Name0">
+      <dgm:if name="Name1" axis="ch" ptType="node" func="cnt" op="gte" val="1">
+        <dgm:layoutNode name="arrow" styleLbl="bgShp">
+          <dgm:alg type="sp"/>
+          <dgm:shape xmlns:r="http://schemas.openxmlformats.org/officeDocument/2006/relationships" type="swooshArrow" r:blip="">
+            <dgm:adjLst>
+              <dgm:adj idx="2" val="0.25"/>
+            </dgm:adjLst>
+          </dgm:shape>
+          <dgm:presOf/>
+          <dgm:constrLst/>
+          <dgm:ruleLst/>
+        </dgm:layoutNode>
+        <dgm:choose name="Name2">
+          <dgm:if name="Name3" axis="ch" ptType="node" func="cnt" op="lt" val="1"/>
+          <dgm:if name="Name4" axis="ch" ptType="node" func="cnt" op="equ" val="1">
+            <dgm:layoutNode name="arrowDiagram1">
+              <dgm:varLst>
+                <dgm:bulletEnabled val="1"/>
+              </dgm:varLst>
+              <dgm:alg type="composite">
+                <dgm:param type="vertAlign" val="none"/>
+                <dgm:param type="horzAlign" val="none"/>
+              </dgm:alg>
+              <dgm:shape xmlns:r="http://schemas.openxmlformats.org/officeDocument/2006/relationships" r:blip="">
+                <dgm:adjLst/>
+              </dgm:shape>
+              <dgm:presOf/>
+              <dgm:constrLst>
+                <dgm:constr type="ctrX" for="ch" forName="bullet1" refType="w" fact="0.8"/>
+                <dgm:constr type="ctrY" for="ch" forName="bullet1" refType="h" fact="0.262"/>
+                <dgm:constr type="w" for="ch" forName="bullet1" refType="w" fact="0.074"/>
+                <dgm:constr type="h" for="ch" forName="bullet1" refType="w" refFor="ch" refForName="bullet1"/>
+                <dgm:constr type="r" for="ch" forName="textBox1" refType="ctrX" refFor="ch" refForName="bullet1"/>
+                <dgm:constr type="t" for="ch" forName="textBox1" refType="ctrY" refFor="ch" refForName="bullet1"/>
+                <dgm:constr type="w" for="ch" forName="textBox1" refType="w" fact="0.4"/>
+                <dgm:constr type="h" for="ch" forName="textBox1" refType="h" fact="0.738"/>
+                <dgm:constr type="userA" refType="h" refFor="ch" refForName="bullet1" fact="0.53"/>
+                <dgm:constr type="rMarg" for="ch" forName="textBox1" refType="userA" fact="2.834"/>
+                <dgm:constr type="primFontSz" for="ch" ptType="node" op="equ" val="65"/>
+              </dgm:constrLst>
+              <dgm:ruleLst/>
+              <dgm:forEach name="Name5" axis="ch" ptType="node" cnt="1">
+                <dgm:layoutNode name="bullet1" styleLbl="node1">
+                  <dgm:alg type="sp"/>
+                  <dgm:shape xmlns:r="http://schemas.openxmlformats.org/officeDocument/2006/relationships" type="ellipse" r:blip="">
+                    <dgm:adjLst/>
+                  </dgm:shape>
+                  <dgm:presOf/>
+                  <dgm:constrLst/>
+                  <dgm:ruleLst/>
+                </dgm:layoutNode>
+                <dgm:layoutNode name="textBox1" styleLbl="revTx">
+                  <dgm:varLst>
+                    <dgm:bulletEnabled val="1"/>
+                  </dgm:varLst>
+                  <dgm:alg type="tx">
+                    <dgm:param type="txAnchorVert" val="t"/>
+                    <dgm:param type="parTxLTRAlign" val="r"/>
+                    <dgm:param type="parTxRTLAlign" val="r"/>
+                  </dgm:alg>
+                  <dgm:shape xmlns:r="http://schemas.openxmlformats.org/officeDocument/2006/relationships" type="round2DiagRect" r:blip="">
+                    <dgm:adjLst/>
+                  </dgm:shape>
+                  <dgm:presOf axis="desOrSelf" ptType="node"/>
+                  <dgm:constrLst>
+                    <dgm:constr type="lMarg"/>
+                    <dgm:constr type="tMarg"/>
+                    <dgm:constr type="bMarg"/>
+                  </dgm:constrLst>
+                  <dgm:ruleLst>
+                    <dgm:rule type="primFontSz" val="5" fact="NaN" max="NaN"/>
+                  </dgm:ruleLst>
+                </dgm:layoutNode>
+              </dgm:forEach>
+            </dgm:layoutNode>
+          </dgm:if>
+          <dgm:if name="Name6" axis="ch" ptType="node" func="cnt" op="equ" val="2">
+            <dgm:layoutNode name="arrowDiagram2">
+              <dgm:alg type="composite">
+                <dgm:param type="vertAlign" val="none"/>
+                <dgm:param type="horzAlign" val="none"/>
+              </dgm:alg>
+              <dgm:shape xmlns:r="http://schemas.openxmlformats.org/officeDocument/2006/relationships" r:blip="">
+                <dgm:adjLst/>
+              </dgm:shape>
+              <dgm:presOf/>
+              <dgm:choose name="Name7">
+                <dgm:if name="Name8" func="var" arg="dir" op="equ" val="norm">
+                  <dgm:constrLst>
+                    <dgm:constr type="ctrX" for="ch" forName="bullet2a" refType="w" fact="0.25"/>
+                    <dgm:constr type="ctrY" for="ch" forName="bullet2a" refType="h" fact="0.573"/>
+                    <dgm:constr type="w" for="ch" forName="bullet2a" refType="w" fact="0.035"/>
+                    <dgm:constr type="h" for="ch" forName="bullet2a" refType="w" refFor="ch" refForName="bullet2a"/>
+                    <dgm:constr type="l" for="ch" forName="textBox2a" refType="ctrX" refFor="ch" refForName="bullet2a"/>
+                    <dgm:constr type="t" for="ch" forName="textBox2a" refType="ctrY" refFor="ch" refForName="bullet2a"/>
+                    <dgm:constr type="w" for="ch" forName="textBox2a" refType="w" fact="0.325"/>
+                    <dgm:constr type="h" for="ch" forName="textBox2a" refType="h" fact="0.427"/>
+                    <dgm:constr type="userA" refType="h" refFor="ch" refForName="bullet2a" fact="0.53"/>
+                    <dgm:constr type="lMarg" for="ch" forName="textBox2a" refType="userA" fact="2.834"/>
+                    <dgm:constr type="ctrX" for="ch" forName="bullet2b" refType="w" fact="0.585"/>
+                    <dgm:constr type="ctrY" for="ch" forName="bullet2b" refType="h" fact="0.338"/>
+                    <dgm:constr type="w" for="ch" forName="bullet2b" refType="w" fact="0.06"/>
+                    <dgm:constr type="h" for="ch" forName="bullet2b" refType="w" refFor="ch" refForName="bullet2b"/>
+                    <dgm:constr type="l" for="ch" forName="textBox2b" refType="ctrX" refFor="ch" refForName="bullet2b"/>
+                    <dgm:constr type="t" for="ch" forName="textBox2b" refType="ctrY" refFor="ch" refForName="bullet2b"/>
+                    <dgm:constr type="w" for="ch" forName="textBox2b" refType="w" fact="0.325"/>
+                    <dgm:constr type="h" for="ch" forName="textBox2b" refType="h" fact="0.662"/>
+                    <dgm:constr type="userB" refType="h" refFor="ch" refForName="bullet2b" fact="0.53"/>
+                    <dgm:constr type="lMarg" for="ch" forName="textBox2b" refType="userB" fact="2.834"/>
+                    <dgm:constr type="primFontSz" for="ch" ptType="node" op="equ" val="65"/>
+                  </dgm:constrLst>
+                </dgm:if>
+                <dgm:else name="Name9">
+                  <dgm:constrLst>
+                    <dgm:constr type="ctrX" for="ch" forName="bullet2a" refType="w" fact="0.25"/>
+                    <dgm:constr type="ctrY" for="ch" forName="bullet2a" refType="h" fact="0.573"/>
+                    <dgm:constr type="w" for="ch" forName="bullet2a" refType="w" fact="0.035"/>
+                    <dgm:constr type="h" for="ch" forName="bullet2a" refType="w" refFor="ch" refForName="bullet2a"/>
+                    <dgm:constr type="r" for="ch" forName="textBox2a" refType="ctrX" refFor="ch" refForName="bullet2a"/>
+                    <dgm:constr type="b" for="ch" forName="textBox2a" refType="ctrY" refFor="ch" refForName="bullet2a"/>
+                    <dgm:constr type="w" for="ch" forName="textBox2a" refType="w" fact="0.25"/>
+                    <dgm:constr type="h" for="ch" forName="textBox2a" refType="h" fact="0.573"/>
+                    <dgm:constr type="userA" refType="h" refFor="ch" refForName="bullet2a" fact="0.53"/>
+                    <dgm:constr type="rMarg" for="ch" forName="textBox2a" refType="userA" fact="2.834"/>
+                    <dgm:constr type="ctrX" for="ch" forName="bullet2b" refType="w" fact="0.585"/>
+                    <dgm:constr type="ctrY" for="ch" forName="bullet2b" refType="h" fact="0.338"/>
+                    <dgm:constr type="w" for="ch" forName="bullet2b" refType="w" fact="0.06"/>
+                    <dgm:constr type="h" for="ch" forName="bullet2b" refType="w" refFor="ch" refForName="bullet2b"/>
+                    <dgm:constr type="r" for="ch" forName="textBox2b" refType="ctrX" refFor="ch" refForName="bullet2b"/>
+                    <dgm:constr type="b" for="ch" forName="textBox2b" refType="ctrY" refFor="ch" refForName="bullet2b"/>
+                    <dgm:constr type="w" for="ch" forName="textBox2b" refType="w" fact="0.28"/>
+                    <dgm:constr type="h" for="ch" forName="textBox2b" refType="h" fact="0.338"/>
+                    <dgm:constr type="userB" refType="h" refFor="ch" refForName="bullet2b" fact="0.53"/>
+                    <dgm:constr type="rMarg" for="ch" forName="textBox2b" refType="userB" fact="2.834"/>
+                    <dgm:constr type="primFontSz" for="ch" ptType="node" op="equ" val="65"/>
+                  </dgm:constrLst>
+                </dgm:else>
+              </dgm:choose>
+              <dgm:ruleLst/>
+              <dgm:forEach name="Name10" axis="ch" ptType="node" cnt="1">
+                <dgm:layoutNode name="bullet2a" styleLbl="node1">
+                  <dgm:alg type="sp"/>
+                  <dgm:shape xmlns:r="http://schemas.openxmlformats.org/officeDocument/2006/relationships" type="ellipse" r:blip="">
+                    <dgm:adjLst/>
+                  </dgm:shape>
+                  <dgm:presOf/>
+                  <dgm:constrLst/>
+                  <dgm:ruleLst/>
+                </dgm:layoutNode>
+                <dgm:layoutNode name="textBox2a" styleLbl="revTx">
+                  <dgm:varLst>
+                    <dgm:bulletEnabled val="1"/>
+                  </dgm:varLst>
+                  <dgm:choose name="Name11">
+                    <dgm:if name="Name12" func="var" arg="dir" op="equ" val="norm">
+                      <dgm:choose name="Name13">
+                        <dgm:if name="Name14" axis="root des" ptType="all node" func="maxDepth" op="gt" val="1">
+                          <dgm:alg type="tx">
+                            <dgm:param type="txAnchorVert" val="t"/>
+                            <dgm:param type="parTxLTRAlign" val="l"/>
+                            <dgm:param type="parTxRTLAlign" val="r"/>
+                          </dgm:alg>
+                        </dgm:if>
+                        <dgm:else name="Name15">
+                          <dgm:alg type="tx">
+                            <dgm:param type="txAnchorVert" val="t"/>
+                            <dgm:param type="parTxLTRAlign" val="l"/>
+                            <dgm:param type="parTxRTLAlign" val="l"/>
+                          </dgm:alg>
+                        </dgm:else>
+                      </dgm:choose>
+                    </dgm:if>
+                    <dgm:else name="Name16">
+                      <dgm:choose name="Name17">
+                        <dgm:if name="Name18" axis="root des" ptType="all node" func="maxDepth" op="gt" val="1">
+                          <dgm:alg type="tx">
+                            <dgm:param type="txAnchorVert" val="b"/>
+                            <dgm:param type="txAnchorVertCh" val="b"/>
+                            <dgm:param type="parTxLTRAlign" val="l"/>
+                            <dgm:param type="parTxRTLAlign" val="r"/>
+                          </dgm:alg>
+                        </dgm:if>
+                        <dgm:else name="Name19">
+                          <dgm:alg type="tx">
+                            <dgm:param type="txAnchorVert" val="b"/>
+                            <dgm:param type="parTxLTRAlign" val="r"/>
+                            <dgm:param type="parTxRTLAlign" val="r"/>
+                          </dgm:alg>
+                        </dgm:else>
+                      </dgm:choose>
+                    </dgm:else>
+                  </dgm:choose>
+                  <dgm:shape xmlns:r="http://schemas.openxmlformats.org/officeDocument/2006/relationships" type="rect" r:blip="">
+                    <dgm:adjLst/>
+                  </dgm:shape>
+                  <dgm:presOf axis="desOrSelf" ptType="node"/>
+                  <dgm:choose name="Name20">
+                    <dgm:if name="Name21" func="var" arg="dir" op="equ" val="norm">
+                      <dgm:constrLst>
+                        <dgm:constr type="rMarg"/>
+                        <dgm:constr type="tMarg"/>
+                        <dgm:constr type="bMarg"/>
+                      </dgm:constrLst>
+                    </dgm:if>
+                    <dgm:else name="Name22">
+                      <dgm:constrLst>
+                        <dgm:constr type="lMarg"/>
+                        <dgm:constr type="tMarg"/>
+                        <dgm:constr type="bMarg"/>
+                      </dgm:constrLst>
+                    </dgm:else>
+                  </dgm:choose>
+                  <dgm:ruleLst>
+                    <dgm:rule type="primFontSz" val="5" fact="NaN" max="NaN"/>
+                  </dgm:ruleLst>
+                </dgm:layoutNode>
+              </dgm:forEach>
+              <dgm:forEach name="Name23" axis="ch" ptType="node" st="2" cnt="1">
+                <dgm:layoutNode name="bullet2b" styleLbl="node1">
+                  <dgm:alg type="sp"/>
+                  <dgm:shape xmlns:r="http://schemas.openxmlformats.org/officeDocument/2006/relationships" type="ellipse" r:blip="">
+                    <dgm:adjLst/>
+                  </dgm:shape>
+                  <dgm:presOf/>
+                  <dgm:constrLst/>
+                  <dgm:ruleLst/>
+                </dgm:layoutNode>
+                <dgm:layoutNode name="textBox2b" styleLbl="revTx">
+                  <dgm:varLst>
+                    <dgm:bulletEnabled val="1"/>
+                  </dgm:varLst>
+                  <dgm:choose name="Name24">
+                    <dgm:if name="Name25" func="var" arg="dir" op="equ" val="norm">
+                      <dgm:choose name="Name26">
+                        <dgm:if name="Name27" axis="root des" ptType="all node" func="maxDepth" op="gt" val="1">
+                          <dgm:alg type="tx">
+                            <dgm:param type="txAnchorVert" val="t"/>
+                            <dgm:param type="parTxLTRAlign" val="l"/>
+                            <dgm:param type="parTxRTLAlign" val="r"/>
+                          </dgm:alg>
+                        </dgm:if>
+                        <dgm:else name="Name28">
+                          <dgm:alg type="tx">
+                            <dgm:param type="txAnchorVert" val="t"/>
+                            <dgm:param type="parTxLTRAlign" val="l"/>
+                            <dgm:param type="parTxRTLAlign" val="l"/>
+                          </dgm:alg>
+                        </dgm:else>
+                      </dgm:choose>
+                    </dgm:if>
+                    <dgm:else name="Name29">
+                      <dgm:choose name="Name30">
+                        <dgm:if name="Name31" axis="root des" ptType="all node" func="maxDepth" op="gt" val="1">
+                          <dgm:alg type="tx">
+                            <dgm:param type="txAnchorVert" val="b"/>
+                            <dgm:param type="txAnchorVertCh" val="b"/>
+                            <dgm:param type="parTxLTRAlign" val="l"/>
+                            <dgm:param type="parTxRTLAlign" val="r"/>
+                          </dgm:alg>
+                        </dgm:if>
+                        <dgm:else name="Name32">
+                          <dgm:alg type="tx">
+                            <dgm:param type="txAnchorVert" val="b"/>
+                            <dgm:param type="parTxLTRAlign" val="r"/>
+                            <dgm:param type="parTxRTLAlign" val="r"/>
+                          </dgm:alg>
+                        </dgm:else>
+                      </dgm:choose>
+                    </dgm:else>
+                  </dgm:choose>
+                  <dgm:shape xmlns:r="http://schemas.openxmlformats.org/officeDocument/2006/relationships" type="rect" r:blip="">
+                    <dgm:adjLst/>
+                  </dgm:shape>
+                  <dgm:presOf axis="desOrSelf" ptType="node"/>
+                  <dgm:choose name="Name33">
+                    <dgm:if name="Name34" func="var" arg="dir" op="equ" val="norm">
+                      <dgm:constrLst>
+                        <dgm:constr type="rMarg"/>
+                        <dgm:constr type="tMarg"/>
+                        <dgm:constr type="bMarg"/>
+                      </dgm:constrLst>
+                    </dgm:if>
+                    <dgm:else name="Name35">
+                      <dgm:constrLst>
+                        <dgm:constr type="lMarg"/>
+                        <dgm:constr type="tMarg"/>
+                        <dgm:constr type="bMarg"/>
+                      </dgm:constrLst>
+                    </dgm:else>
+                  </dgm:choose>
+                  <dgm:ruleLst>
+                    <dgm:rule type="primFontSz" val="5" fact="NaN" max="NaN"/>
+                  </dgm:ruleLst>
+                </dgm:layoutNode>
+              </dgm:forEach>
+            </dgm:layoutNode>
+          </dgm:if>
+          <dgm:if name="Name36" axis="ch" ptType="node" func="cnt" op="equ" val="3">
+            <dgm:layoutNode name="arrowDiagram3">
+              <dgm:alg type="composite">
+                <dgm:param type="vertAlign" val="none"/>
+                <dgm:param type="horzAlign" val="none"/>
+              </dgm:alg>
+              <dgm:shape xmlns:r="http://schemas.openxmlformats.org/officeDocument/2006/relationships" r:blip="">
+                <dgm:adjLst/>
+              </dgm:shape>
+              <dgm:presOf/>
+              <dgm:choose name="Name37">
+                <dgm:if name="Name38" func="var" arg="dir" op="equ" val="norm">
+                  <dgm:constrLst>
+                    <dgm:constr type="ctrX" for="ch" forName="bullet3a" refType="w" fact="0.14"/>
+                    <dgm:constr type="ctrY" for="ch" forName="bullet3a" refType="h" fact="0.711"/>
+                    <dgm:constr type="w" for="ch" forName="bullet3a" refType="w" fact="0.026"/>
+                    <dgm:constr type="h" for="ch" forName="bullet3a" refType="w" refFor="ch" refForName="bullet3a"/>
+                    <dgm:constr type="l" for="ch" forName="textBox3a" refType="ctrX" refFor="ch" refForName="bullet3a"/>
+                    <dgm:constr type="t" for="ch" forName="textBox3a" refType="ctrY" refFor="ch" refForName="bullet3a"/>
+                    <dgm:constr type="w" for="ch" forName="textBox3a" refType="w" fact="0.233"/>
+                    <dgm:constr type="h" for="ch" forName="textBox3a" refType="h" fact="0.289"/>
+                    <dgm:constr type="userA" refType="h" refFor="ch" refForName="bullet3a" fact="0.53"/>
+                    <dgm:constr type="lMarg" for="ch" forName="textBox3a" refType="userA" fact="2.834"/>
+                    <dgm:constr type="ctrX" for="ch" forName="bullet3b" refType="w" fact="0.38"/>
+                    <dgm:constr type="ctrY" for="ch" forName="bullet3b" refType="h" fact="0.456"/>
+                    <dgm:constr type="w" for="ch" forName="bullet3b" refType="w" fact="0.047"/>
+                    <dgm:constr type="h" for="ch" forName="bullet3b" refType="w" refFor="ch" refForName="bullet3b"/>
+                    <dgm:constr type="l" for="ch" forName="textBox3b" refType="ctrX" refFor="ch" refForName="bullet3b"/>
+                    <dgm:constr type="t" for="ch" forName="textBox3b" refType="ctrY" refFor="ch" refForName="bullet3b"/>
+                    <dgm:constr type="w" for="ch" forName="textBox3b" refType="w" fact="0.24"/>
+                    <dgm:constr type="h" for="ch" forName="textBox3b" refType="h" fact="0.544"/>
+                    <dgm:constr type="userB" refType="h" refFor="ch" refForName="bullet3b" fact="0.53"/>
+                    <dgm:constr type="lMarg" for="ch" forName="textBox3b" refType="userB" fact="2.834"/>
+                    <dgm:constr type="ctrX" for="ch" forName="bullet3c" refType="w" fact="0.665"/>
+                    <dgm:constr type="ctrY" for="ch" forName="bullet3c" refType="h" fact="0.305"/>
+                    <dgm:constr type="w" for="ch" forName="bullet3c" refType="w" fact="0.065"/>
+                    <dgm:constr type="h" for="ch" forName="bullet3c" refType="w" refFor="ch" refForName="bullet3c"/>
+                    <dgm:constr type="l" for="ch" forName="textBox3c" refType="ctrX" refFor="ch" refForName="bullet3c"/>
+                    <dgm:constr type="t" for="ch" forName="textBox3c" refType="ctrY" refFor="ch" refForName="bullet3c"/>
+                    <dgm:constr type="w" for="ch" forName="textBox3c" refType="w" fact="0.24"/>
+                    <dgm:constr type="h" for="ch" forName="textBox3c" refType="h" fact="0.695"/>
+                    <dgm:constr type="userC" refType="h" refFor="ch" refForName="bullet3c" fact="0.53"/>
+                    <dgm:constr type="lMarg" for="ch" forName="textBox3c" refType="userC" fact="2.834"/>
+                    <dgm:constr type="primFontSz" for="ch" ptType="node" op="equ" val="65"/>
+                  </dgm:constrLst>
+                </dgm:if>
+                <dgm:else name="Name39">
+                  <dgm:constrLst>
+                    <dgm:constr type="ctrX" for="ch" forName="bullet3a" refType="w" fact="0.14"/>
+                    <dgm:constr type="ctrY" for="ch" forName="bullet3a" refType="h" fact="0.711"/>
+                    <dgm:constr type="w" for="ch" forName="bullet3a" refType="w" fact="0.026"/>
+                    <dgm:constr type="h" for="ch" forName="bullet3a" refType="w" refFor="ch" refForName="bullet3a"/>
+                    <dgm:constr type="r" for="ch" forName="textBox3a" refType="ctrX" refFor="ch" refForName="bullet3a"/>
+                    <dgm:constr type="b" for="ch" forName="textBox3a" refType="ctrY" refFor="ch" refForName="bullet3a"/>
+                    <dgm:constr type="w" for="ch" forName="textBox3a" refType="w" fact="0.14"/>
+                    <dgm:constr type="h" for="ch" forName="textBox3a" refType="h" fact="0.711"/>
+                    <dgm:constr type="userA" refType="h" refFor="ch" refForName="bullet3a" fact="0.53"/>
+                    <dgm:constr type="rMarg" for="ch" forName="textBox3a" refType="userA" fact="2.834"/>
+                    <dgm:constr type="ctrX" for="ch" forName="bullet3b" refType="w" fact="0.38"/>
+                    <dgm:constr type="ctrY" for="ch" forName="bullet3b" refType="h" fact="0.456"/>
+                    <dgm:constr type="w" for="ch" forName="bullet3b" refType="w" fact="0.047"/>
+                    <dgm:constr type="h" for="ch" forName="bullet3b" refType="w" refFor="ch" refForName="bullet3b"/>
+                    <dgm:constr type="r" for="ch" forName="textBox3b" refType="ctrX" refFor="ch" refForName="bullet3b"/>
+                    <dgm:constr type="b" for="ch" forName="textBox3b" refType="ctrY" refFor="ch" refForName="bullet3b"/>
+                    <dgm:constr type="w" for="ch" forName="textBox3b" refType="w" fact="0.24"/>
+                    <dgm:constr type="h" for="ch" forName="textBox3b" refType="h" fact="0.456"/>
+                    <dgm:constr type="userB" refType="h" refFor="ch" refForName="bullet3b" fact="0.53"/>
+                    <dgm:constr type="rMarg" for="ch" forName="textBox3b" refType="userB" fact="2.834"/>
+                    <dgm:constr type="ctrX" for="ch" forName="bullet3c" refType="w" fact="0.665"/>
+                    <dgm:constr type="ctrY" for="ch" forName="bullet3c" refType="h" fact="0.305"/>
+                    <dgm:constr type="w" for="ch" forName="bullet3c" refType="w" fact="0.065"/>
+                    <dgm:constr type="h" for="ch" forName="bullet3c" refType="w" refFor="ch" refForName="bullet3c"/>
+                    <dgm:constr type="r" for="ch" forName="textBox3c" refType="ctrX" refFor="ch" refForName="bullet3c"/>
+                    <dgm:constr type="b" for="ch" forName="textBox3c" refType="ctrY" refFor="ch" refForName="bullet3c"/>
+                    <dgm:constr type="w" for="ch" forName="textBox3c" refType="w" fact="0.24"/>
+                    <dgm:constr type="h" for="ch" forName="textBox3c" refType="h" fact="0.305"/>
+                    <dgm:constr type="userC" refType="h" refFor="ch" refForName="bullet3c" fact="0.53"/>
+                    <dgm:constr type="rMarg" for="ch" forName="textBox3c" refType="userC" fact="2.834"/>
+                    <dgm:constr type="primFontSz" for="ch" ptType="node" op="equ" val="65"/>
+                  </dgm:constrLst>
+                </dgm:else>
+              </dgm:choose>
+              <dgm:ruleLst/>
+              <dgm:forEach name="Name40" axis="ch" ptType="node" cnt="1">
+                <dgm:layoutNode name="bullet3a" styleLbl="node1">
+                  <dgm:alg type="sp"/>
+                  <dgm:shape xmlns:r="http://schemas.openxmlformats.org/officeDocument/2006/relationships" type="ellipse" r:blip="">
+                    <dgm:adjLst/>
+                  </dgm:shape>
+                  <dgm:presOf/>
+                  <dgm:constrLst/>
+                  <dgm:ruleLst/>
+                </dgm:layoutNode>
+                <dgm:layoutNode name="textBox3a" styleLbl="revTx">
+                  <dgm:varLst>
+                    <dgm:bulletEnabled val="1"/>
+                  </dgm:varLst>
+                  <dgm:choose name="Name41">
+                    <dgm:if name="Name42" func="var" arg="dir" op="equ" val="norm">
+                      <dgm:choose name="Name43">
+                        <dgm:if name="Name44" axis="root des" ptType="all node" func="maxDepth" op="gt" val="1">
+                          <dgm:alg type="tx">
+                            <dgm:param type="txAnchorVert" val="t"/>
+                            <dgm:param type="parTxLTRAlign" val="l"/>
+                            <dgm:param type="parTxRTLAlign" val="r"/>
+                          </dgm:alg>
+                        </dgm:if>
+                        <dgm:else name="Name45">
+                          <dgm:alg type="tx">
+                            <dgm:param type="txAnchorVert" val="t"/>
+                            <dgm:param type="parTxLTRAlign" val="l"/>
+                            <dgm:param type="parTxRTLAlign" val="l"/>
+                          </dgm:alg>
+                        </dgm:else>
+                      </dgm:choose>
+                    </dgm:if>
+                    <dgm:else name="Name46">
+                      <dgm:choose name="Name47">
+                        <dgm:if name="Name48" axis="root des" ptType="all node" func="maxDepth" op="gt" val="1">
+                          <dgm:alg type="tx">
+                            <dgm:param type="txAnchorVert" val="b"/>
+                            <dgm:param type="txAnchorVertCh" val="b"/>
+                            <dgm:param type="parTxLTRAlign" val="l"/>
+                            <dgm:param type="parTxRTLAlign" val="r"/>
+                          </dgm:alg>
+                        </dgm:if>
+                        <dgm:else name="Name49">
+                          <dgm:alg type="tx">
+                            <dgm:param type="txAnchorVert" val="b"/>
+                            <dgm:param type="parTxLTRAlign" val="r"/>
+                            <dgm:param type="parTxRTLAlign" val="r"/>
+                          </dgm:alg>
+                        </dgm:else>
+                      </dgm:choose>
+                    </dgm:else>
+                  </dgm:choose>
+                  <dgm:shape xmlns:r="http://schemas.openxmlformats.org/officeDocument/2006/relationships" type="rect" r:blip="">
+                    <dgm:adjLst/>
+                  </dgm:shape>
+                  <dgm:presOf axis="desOrSelf" ptType="node"/>
+                  <dgm:choose name="Name50">
+                    <dgm:if name="Name51" func="var" arg="dir" op="equ" val="norm">
+                      <dgm:constrLst>
+                        <dgm:constr type="rMarg"/>
+                        <dgm:constr type="tMarg"/>
+                        <dgm:constr type="bMarg"/>
+                      </dgm:constrLst>
+                    </dgm:if>
+                    <dgm:else name="Name52">
+                      <dgm:constrLst>
+                        <dgm:constr type="lMarg"/>
+                        <dgm:constr type="tMarg"/>
+                        <dgm:constr type="bMarg"/>
+                      </dgm:constrLst>
+                    </dgm:else>
+                  </dgm:choose>
+                  <dgm:ruleLst>
+                    <dgm:rule type="primFontSz" val="5" fact="NaN" max="NaN"/>
+                  </dgm:ruleLst>
+                </dgm:layoutNode>
+              </dgm:forEach>
+              <dgm:forEach name="Name53" axis="ch" ptType="node" st="2" cnt="1">
+                <dgm:layoutNode name="bullet3b" styleLbl="node1">
+                  <dgm:alg type="sp"/>
+                  <dgm:shape xmlns:r="http://schemas.openxmlformats.org/officeDocument/2006/relationships" type="ellipse" r:blip="">
+                    <dgm:adjLst/>
+                  </dgm:shape>
+                  <dgm:presOf/>
+                  <dgm:constrLst/>
+                  <dgm:ruleLst/>
+                </dgm:layoutNode>
+                <dgm:layoutNode name="textBox3b" styleLbl="revTx">
+                  <dgm:varLst>
+                    <dgm:bulletEnabled val="1"/>
+                  </dgm:varLst>
+                  <dgm:choose name="Name54">
+                    <dgm:if name="Name55" func="var" arg="dir" op="equ" val="norm">
+                      <dgm:choose name="Name56">
+                        <dgm:if name="Name57" axis="root des" ptType="all node" func="maxDepth" op="gt" val="1">
+                          <dgm:alg type="tx">
+                            <dgm:param type="txAnchorVert" val="t"/>
+                            <dgm:param type="parTxLTRAlign" val="l"/>
+                            <dgm:param type="parTxRTLAlign" val="r"/>
+                          </dgm:alg>
+                        </dgm:if>
+                        <dgm:else name="Name58">
+                          <dgm:alg type="tx">
+                            <dgm:param type="txAnchorVert" val="t"/>
+                            <dgm:param type="parTxLTRAlign" val="l"/>
+                            <dgm:param type="parTxRTLAlign" val="l"/>
+                          </dgm:alg>
+                        </dgm:else>
+                      </dgm:choose>
+                    </dgm:if>
+                    <dgm:else name="Name59">
+                      <dgm:choose name="Name60">
+                        <dgm:if name="Name61" axis="root des" ptType="all node" func="maxDepth" op="gt" val="1">
+                          <dgm:alg type="tx">
+                            <dgm:param type="txAnchorVert" val="b"/>
+                            <dgm:param type="txAnchorVertCh" val="b"/>
+                            <dgm:param type="parTxLTRAlign" val="l"/>
+                            <dgm:param type="parTxRTLAlign" val="r"/>
+                          </dgm:alg>
+                        </dgm:if>
+                        <dgm:else name="Name62">
+                          <dgm:alg type="tx">
+                            <dgm:param type="txAnchorVert" val="b"/>
+                            <dgm:param type="parTxLTRAlign" val="r"/>
+                            <dgm:param type="parTxRTLAlign" val="r"/>
+                          </dgm:alg>
+                        </dgm:else>
+                      </dgm:choose>
+                    </dgm:else>
+                  </dgm:choose>
+                  <dgm:shape xmlns:r="http://schemas.openxmlformats.org/officeDocument/2006/relationships" type="rect" r:blip="">
+                    <dgm:adjLst/>
+                  </dgm:shape>
+                  <dgm:presOf axis="desOrSelf" ptType="node"/>
+                  <dgm:choose name="Name63">
+                    <dgm:if name="Name64" func="var" arg="dir" op="equ" val="norm">
+                      <dgm:constrLst>
+                        <dgm:constr type="rMarg"/>
+                        <dgm:constr type="tMarg"/>
+                        <dgm:constr type="bMarg"/>
+                      </dgm:constrLst>
+                    </dgm:if>
+                    <dgm:else name="Name65">
+                      <dgm:constrLst>
+                        <dgm:constr type="lMarg"/>
+                        <dgm:constr type="tMarg"/>
+                        <dgm:constr type="bMarg"/>
+                      </dgm:constrLst>
+                    </dgm:else>
+                  </dgm:choose>
+                  <dgm:ruleLst>
+                    <dgm:rule type="primFontSz" val="5" fact="NaN" max="NaN"/>
+                  </dgm:ruleLst>
+                </dgm:layoutNode>
+              </dgm:forEach>
+              <dgm:forEach name="Name66" axis="ch" ptType="node" st="3" cnt="1">
+                <dgm:layoutNode name="bullet3c" styleLbl="node1">
+                  <dgm:alg type="sp"/>
+                  <dgm:shape xmlns:r="http://schemas.openxmlformats.org/officeDocument/2006/relationships" type="ellipse" r:blip="">
+                    <dgm:adjLst/>
+                  </dgm:shape>
+                  <dgm:presOf/>
+                  <dgm:constrLst/>
+                  <dgm:ruleLst/>
+                </dgm:layoutNode>
+                <dgm:layoutNode name="textBox3c" styleLbl="revTx">
+                  <dgm:varLst>
+                    <dgm:bulletEnabled val="1"/>
+                  </dgm:varLst>
+                  <dgm:choose name="Name67">
+                    <dgm:if name="Name68" func="var" arg="dir" op="equ" val="norm">
+                      <dgm:choose name="Name69">
+                        <dgm:if name="Name70" axis="root des" ptType="all node" func="maxDepth" op="gt" val="1">
+                          <dgm:alg type="tx">
+                            <dgm:param type="txAnchorVert" val="t"/>
+                            <dgm:param type="parTxLTRAlign" val="l"/>
+                            <dgm:param type="parTxRTLAlign" val="r"/>
+                          </dgm:alg>
+                        </dgm:if>
+                        <dgm:else name="Name71">
+                          <dgm:alg type="tx">
+                            <dgm:param type="txAnchorVert" val="t"/>
+                            <dgm:param type="parTxLTRAlign" val="l"/>
+                            <dgm:param type="parTxRTLAlign" val="l"/>
+                          </dgm:alg>
+                        </dgm:else>
+                      </dgm:choose>
+                    </dgm:if>
+                    <dgm:else name="Name72">
+                      <dgm:choose name="Name73">
+                        <dgm:if name="Name74" axis="root des" ptType="all node" func="maxDepth" op="gt" val="1">
+                          <dgm:alg type="tx">
+                            <dgm:param type="txAnchorVert" val="b"/>
+                            <dgm:param type="txAnchorVertCh" val="b"/>
+                            <dgm:param type="parTxLTRAlign" val="l"/>
+                            <dgm:param type="parTxRTLAlign" val="r"/>
+                          </dgm:alg>
+                        </dgm:if>
+                        <dgm:else name="Name75">
+                          <dgm:alg type="tx">
+                            <dgm:param type="txAnchorVert" val="b"/>
+                            <dgm:param type="parTxLTRAlign" val="r"/>
+                            <dgm:param type="parTxRTLAlign" val="r"/>
+                          </dgm:alg>
+                        </dgm:else>
+                      </dgm:choose>
+                    </dgm:else>
+                  </dgm:choose>
+                  <dgm:shape xmlns:r="http://schemas.openxmlformats.org/officeDocument/2006/relationships" type="rect" r:blip="">
+                    <dgm:adjLst/>
+                  </dgm:shape>
+                  <dgm:presOf axis="desOrSelf" ptType="node"/>
+                  <dgm:choose name="Name76">
+                    <dgm:if name="Name77" func="var" arg="dir" op="equ" val="norm">
+                      <dgm:constrLst>
+                        <dgm:constr type="rMarg"/>
+                        <dgm:constr type="tMarg"/>
+                        <dgm:constr type="bMarg"/>
+                      </dgm:constrLst>
+                    </dgm:if>
+                    <dgm:else name="Name78">
+                      <dgm:constrLst>
+                        <dgm:constr type="lMarg"/>
+                        <dgm:constr type="tMarg"/>
+                        <dgm:constr type="bMarg"/>
+                      </dgm:constrLst>
+                    </dgm:else>
+                  </dgm:choose>
+                  <dgm:ruleLst>
+                    <dgm:rule type="primFontSz" val="5" fact="NaN" max="NaN"/>
+                  </dgm:ruleLst>
+                </dgm:layoutNode>
+              </dgm:forEach>
+            </dgm:layoutNode>
+          </dgm:if>
+          <dgm:if name="Name79" axis="ch" ptType="node" func="cnt" op="equ" val="4">
+            <dgm:layoutNode name="arrowDiagram4">
+              <dgm:alg type="composite">
+                <dgm:param type="vertAlign" val="none"/>
+                <dgm:param type="horzAlign" val="none"/>
+              </dgm:alg>
+              <dgm:shape xmlns:r="http://schemas.openxmlformats.org/officeDocument/2006/relationships" r:blip="">
+                <dgm:adjLst/>
+              </dgm:shape>
+              <dgm:presOf/>
+              <dgm:choose name="Name80">
+                <dgm:if name="Name81" func="var" arg="dir" op="equ" val="norm">
+                  <dgm:constrLst>
+                    <dgm:constr type="ctrX" for="ch" forName="bullet4a" refType="w" fact="0.11"/>
+                    <dgm:constr type="ctrY" for="ch" forName="bullet4a" refType="h" fact="0.762"/>
+                    <dgm:constr type="w" for="ch" forName="bullet4a" refType="w" fact="0.023"/>
+                    <dgm:constr type="h" for="ch" forName="bullet4a" refType="w" refFor="ch" refForName="bullet4a"/>
+                    <dgm:constr type="l" for="ch" forName="textBox4a" refType="ctrX" refFor="ch" refForName="bullet4a"/>
+                    <dgm:constr type="t" for="ch" forName="textBox4a" refType="ctrY" refFor="ch" refForName="bullet4a"/>
+                    <dgm:constr type="w" for="ch" forName="textBox4a" refType="w" fact="0.171"/>
+                    <dgm:constr type="h" for="ch" forName="textBox4a" refType="h" fact="0.238"/>
+                    <dgm:constr type="userA" refType="h" refFor="ch" refForName="bullet4a" fact="0.53"/>
+                    <dgm:constr type="lMarg" for="ch" forName="textBox4a" refType="userA" fact="2.834"/>
+                    <dgm:constr type="ctrX" for="ch" forName="bullet4b" refType="w" fact="0.281"/>
+                    <dgm:constr type="ctrY" for="ch" forName="bullet4b" refType="h" fact="0.543"/>
+                    <dgm:constr type="w" for="ch" forName="bullet4b" refType="w" fact="0.04"/>
+                    <dgm:constr type="h" for="ch" forName="bullet4b" refType="w" refFor="ch" refForName="bullet4b"/>
+                    <dgm:constr type="l" for="ch" forName="textBox4b" refType="ctrX" refFor="ch" refForName="bullet4b"/>
+                    <dgm:constr type="t" for="ch" forName="textBox4b" refType="ctrY" refFor="ch" refForName="bullet4b"/>
+                    <dgm:constr type="w" for="ch" forName="textBox4b" refType="w" fact="0.21"/>
+                    <dgm:constr type="h" for="ch" forName="textBox4b" refType="h" fact="0.457"/>
+                    <dgm:constr type="userB" refType="h" refFor="ch" refForName="bullet4b" fact="0.53"/>
+                    <dgm:constr type="lMarg" for="ch" forName="textBox4b" refType="userB" fact="2.834"/>
+                    <dgm:constr type="ctrX" for="ch" forName="bullet4c" refType="w" fact="0.495"/>
+                    <dgm:constr type="ctrY" for="ch" forName="bullet4c" refType="h" fact="0.382"/>
+                    <dgm:constr type="w" for="ch" forName="bullet4c" refType="w" fact="0.053"/>
+                    <dgm:constr type="h" for="ch" forName="bullet4c" refType="w" refFor="ch" refForName="bullet4c"/>
+                    <dgm:constr type="l" for="ch" forName="textBox4c" refType="ctrX" refFor="ch" refForName="bullet4c"/>
+                    <dgm:constr type="t" for="ch" forName="textBox4c" refType="ctrY" refFor="ch" refForName="bullet4c"/>
+                    <dgm:constr type="w" for="ch" forName="textBox4c" refType="w" fact="0.21"/>
+                    <dgm:constr type="h" for="ch" forName="textBox4c" refType="h" fact="0.618"/>
+                    <dgm:constr type="userC" refType="h" refFor="ch" refForName="bullet4c" fact="0.53"/>
+                    <dgm:constr type="lMarg" for="ch" forName="textBox4c" refType="userC" fact="2.834"/>
+                    <dgm:constr type="ctrX" for="ch" forName="bullet4d" refType="w" fact="0.73"/>
+                    <dgm:constr type="ctrY" for="ch" forName="bullet4d" refType="h" fact="0.283"/>
+                    <dgm:constr type="w" for="ch" forName="bullet4d" refType="w" fact="0.071"/>
+                    <dgm:constr type="h" for="ch" forName="bullet4d" refType="w" refFor="ch" refForName="bullet4d"/>
+                    <dgm:constr type="l" for="ch" forName="textBox4d" refType="ctrX" refFor="ch" refForName="bullet4d"/>
+                    <dgm:constr type="t" for="ch" forName="textBox4d" refType="ctrY" refFor="ch" refForName="bullet4d"/>
+                    <dgm:constr type="w" for="ch" forName="textBox4d" refType="w" fact="0.21"/>
+                    <dgm:constr type="h" for="ch" forName="textBox4d" refType="h" fact="0.717"/>
+                    <dgm:constr type="userD" refType="h" refFor="ch" refForName="bullet4d" fact="0.53"/>
+                    <dgm:constr type="lMarg" for="ch" forName="textBox4d" refType="userD" fact="2.834"/>
+                    <dgm:constr type="primFontSz" for="ch" ptType="node" op="equ" val="65"/>
+                  </dgm:constrLst>
+                </dgm:if>
+                <dgm:else name="Name82">
+                  <dgm:constrLst>
+                    <dgm:constr type="ctrX" for="ch" forName="bullet4a" refType="w" fact="0.11"/>
+                    <dgm:constr type="ctrY" for="ch" forName="bullet4a" refType="h" fact="0.762"/>
+                    <dgm:constr type="w" for="ch" forName="bullet4a" refType="w" fact="0.023"/>
+                    <dgm:constr type="h" for="ch" forName="bullet4a" refType="w" refFor="ch" refForName="bullet4a"/>
+                    <dgm:constr type="r" for="ch" forName="textBox4a" refType="ctrX" refFor="ch" refForName="bullet4a"/>
+                    <dgm:constr type="b" for="ch" forName="textBox4a" refType="ctrY" refFor="ch" refForName="bullet4a"/>
+                    <dgm:constr type="w" for="ch" forName="textBox4a" refType="w" fact="0.11"/>
+                    <dgm:constr type="h" for="ch" forName="textBox4a" refType="h" fact="0.762"/>
+                    <dgm:constr type="userA" refType="h" refFor="ch" refForName="bullet4a" fact="0.53"/>
+                    <dgm:constr type="rMarg" for="ch" forName="textBox4a" refType="userA" fact="2.834"/>
+                    <dgm:constr type="ctrX" for="ch" forName="bullet4b" refType="w" fact="0.281"/>
+                    <dgm:constr type="ctrY" for="ch" forName="bullet4b" refType="h" fact="0.543"/>
+                    <dgm:constr type="w" for="ch" forName="bullet4b" refType="w" fact="0.04"/>
+                    <dgm:constr type="h" for="ch" forName="bullet4b" refType="w" refFor="ch" refForName="bullet4b"/>
+                    <dgm:constr type="r" for="ch" forName="textBox4b" refType="ctrX" refFor="ch" refForName="bullet4b"/>
+                    <dgm:constr type="b" for="ch" forName="textBox4b" refType="ctrY" refFor="ch" refForName="bullet4b"/>
+                    <dgm:constr type="w" for="ch" forName="textBox4b" refType="w" fact="0.171"/>
+                    <dgm:constr type="h" for="ch" forName="textBox4b" refType="h" fact="0.543"/>
+                    <dgm:constr type="userB" refType="h" refFor="ch" refForName="bullet4b" fact="0.53"/>
+                    <dgm:constr type="rMarg" for="ch" forName="textBox4b" refType="userB" fact="2.834"/>
+                    <dgm:constr type="ctrX" for="ch" forName="bullet4c" refType="w" fact="0.495"/>
+                    <dgm:constr type="ctrY" for="ch" forName="bullet4c" refType="h" fact="0.382"/>
+                    <dgm:constr type="w" for="ch" forName="bullet4c" refType="w" fact="0.053"/>
+                    <dgm:constr type="h" for="ch" forName="bullet4c" refType="w" refFor="ch" refForName="bullet4c"/>
+                    <dgm:constr type="r" for="ch" forName="textBox4c" refType="ctrX" refFor="ch" refForName="bullet4c"/>
+                    <dgm:constr type="b" for="ch" forName="textBox4c" refType="ctrY" refFor="ch" refForName="bullet4c"/>
+                    <dgm:constr type="w" for="ch" forName="textBox4c" refType="w" fact="0.21"/>
+                    <dgm:constr type="h" for="ch" forName="textBox4c" refType="h" fact="0.382"/>
+                    <dgm:constr type="userC" refType="h" refFor="ch" refForName="bullet4c" fact="0.53"/>
+                    <dgm:constr type="rMarg" for="ch" forName="textBox4c" refType="userC" fact="2.834"/>
+                    <dgm:constr type="ctrX" for="ch" forName="bullet4d" refType="w" fact="0.73"/>
+                    <dgm:constr type="ctrY" for="ch" forName="bullet4d" refType="h" fact="0.283"/>
+                    <dgm:constr type="w" for="ch" forName="bullet4d" refType="w" fact="0.071"/>
+                    <dgm:constr type="h" for="ch" forName="bullet4d" refType="w" refFor="ch" refForName="bullet4d"/>
+                    <dgm:constr type="r" for="ch" forName="textBox4d" refType="ctrX" refFor="ch" refForName="bullet4d"/>
+                    <dgm:constr type="b" for="ch" forName="textBox4d" refType="ctrY" refFor="ch" refForName="bullet4d"/>
+                    <dgm:constr type="w" for="ch" forName="textBox4d" refType="w" fact="0.21"/>
+                    <dgm:constr type="h" for="ch" forName="textBox4d" refType="h" fact="0.283"/>
+                    <dgm:constr type="userD" refType="h" refFor="ch" refForName="bullet4d" fact="0.53"/>
+                    <dgm:constr type="rMarg" for="ch" forName="textBox4d" refType="userD" fact="2.834"/>
+                    <dgm:constr type="primFontSz" for="ch" ptType="node" op="equ" val="65"/>
+                  </dgm:constrLst>
+                </dgm:else>
+              </dgm:choose>
+              <dgm:ruleLst/>
+              <dgm:forEach name="Name83" axis="ch" ptType="node" cnt="1">
+                <dgm:layoutNode name="bullet4a" styleLbl="node1">
+                  <dgm:alg type="sp"/>
+                  <dgm:shape xmlns:r="http://schemas.openxmlformats.org/officeDocument/2006/relationships" type="ellipse" r:blip="">
+                    <dgm:adjLst/>
+                  </dgm:shape>
+                  <dgm:presOf/>
+                  <dgm:constrLst/>
+                  <dgm:ruleLst/>
+                </dgm:layoutNode>
+                <dgm:layoutNode name="textBox4a" styleLbl="revTx">
+                  <dgm:varLst>
+                    <dgm:bulletEnabled val="1"/>
+                  </dgm:varLst>
+                  <dgm:choose name="Name84">
+                    <dgm:if name="Name85" func="var" arg="dir" op="equ" val="norm">
+                      <dgm:choose name="Name86">
+                        <dgm:if name="Name87" axis="root des" ptType="all node" func="maxDepth" op="gt" val="1">
+                          <dgm:alg type="tx">
+                            <dgm:param type="txAnchorVert" val="t"/>
+                            <dgm:param type="parTxLTRAlign" val="l"/>
+                            <dgm:param type="parTxRTLAlign" val="r"/>
+                          </dgm:alg>
+                        </dgm:if>
+                        <dgm:else name="Name88">
+                          <dgm:alg type="tx">
+                            <dgm:param type="txAnchorVert" val="t"/>
+                            <dgm:param type="parTxLTRAlign" val="l"/>
+                            <dgm:param type="parTxRTLAlign" val="l"/>
+                          </dgm:alg>
+                        </dgm:else>
+                      </dgm:choose>
+                    </dgm:if>
+                    <dgm:else name="Name89">
+                      <dgm:choose name="Name90">
+                        <dgm:if name="Name91" axis="root des" ptType="all node" func="maxDepth" op="gt" val="1">
+                          <dgm:alg type="tx">
+                            <dgm:param type="txAnchorVert" val="b"/>
+                            <dgm:param type="txAnchorVertCh" val="b"/>
+                            <dgm:param type="parTxLTRAlign" val="l"/>
+                            <dgm:param type="parTxRTLAlign" val="r"/>
+                          </dgm:alg>
+                        </dgm:if>
+                        <dgm:else name="Name92">
+                          <dgm:alg type="tx">
+                            <dgm:param type="txAnchorVert" val="b"/>
+                            <dgm:param type="parTxLTRAlign" val="r"/>
+                            <dgm:param type="parTxRTLAlign" val="r"/>
+                          </dgm:alg>
+                        </dgm:else>
+                      </dgm:choose>
+                    </dgm:else>
+                  </dgm:choose>
+                  <dgm:shape xmlns:r="http://schemas.openxmlformats.org/officeDocument/2006/relationships" type="rect" r:blip="">
+                    <dgm:adjLst/>
+                  </dgm:shape>
+                  <dgm:presOf axis="desOrSelf" ptType="node"/>
+                  <dgm:choose name="Name93">
+                    <dgm:if name="Name94" func="var" arg="dir" op="equ" val="norm">
+                      <dgm:constrLst>
+                        <dgm:constr type="rMarg"/>
+                        <dgm:constr type="tMarg"/>
+                        <dgm:constr type="bMarg"/>
+                      </dgm:constrLst>
+                    </dgm:if>
+                    <dgm:else name="Name95">
+                      <dgm:constrLst>
+                        <dgm:constr type="lMarg"/>
+                        <dgm:constr type="tMarg"/>
+                        <dgm:constr type="bMarg"/>
+                      </dgm:constrLst>
+                    </dgm:else>
+                  </dgm:choose>
+                  <dgm:ruleLst>
+                    <dgm:rule type="primFontSz" val="5" fact="NaN" max="NaN"/>
+                  </dgm:ruleLst>
+                </dgm:layoutNode>
+              </dgm:forEach>
+              <dgm:forEach name="Name96" axis="ch" ptType="node" st="2" cnt="1">
+                <dgm:layoutNode name="bullet4b" styleLbl="node1">
+                  <dgm:alg type="sp"/>
+                  <dgm:shape xmlns:r="http://schemas.openxmlformats.org/officeDocument/2006/relationships" type="ellipse" r:blip="">
+                    <dgm:adjLst/>
+                  </dgm:shape>
+                  <dgm:presOf/>
+                  <dgm:constrLst/>
+                  <dgm:ruleLst/>
+                </dgm:layoutNode>
+                <dgm:layoutNode name="textBox4b" styleLbl="revTx">
+                  <dgm:varLst>
+                    <dgm:bulletEnabled val="1"/>
+                  </dgm:varLst>
+                  <dgm:choose name="Name97">
+                    <dgm:if name="Name98" func="var" arg="dir" op="equ" val="norm">
+                      <dgm:choose name="Name99">
+                        <dgm:if name="Name100" axis="root des" ptType="all node" func="maxDepth" op="gt" val="1">
+                          <dgm:alg type="tx">
+                            <dgm:param type="txAnchorVert" val="t"/>
+                            <dgm:param type="parTxLTRAlign" val="l"/>
+                            <dgm:param type="parTxRTLAlign" val="r"/>
+                          </dgm:alg>
+                        </dgm:if>
+                        <dgm:else name="Name101">
+                          <dgm:alg type="tx">
+                            <dgm:param type="txAnchorVert" val="t"/>
+                            <dgm:param type="parTxLTRAlign" val="l"/>
+                            <dgm:param type="parTxRTLAlign" val="l"/>
+                          </dgm:alg>
+                        </dgm:else>
+                      </dgm:choose>
+                    </dgm:if>
+                    <dgm:else name="Name102">
+                      <dgm:choose name="Name103">
+                        <dgm:if name="Name104" axis="root des" ptType="all node" func="maxDepth" op="gt" val="1">
+                          <dgm:alg type="tx">
+                            <dgm:param type="txAnchorVert" val="b"/>
+                            <dgm:param type="txAnchorVertCh" val="b"/>
+                            <dgm:param type="parTxLTRAlign" val="l"/>
+                            <dgm:param type="parTxRTLAlign" val="r"/>
+                          </dgm:alg>
+                        </dgm:if>
+                        <dgm:else name="Name105">
+                          <dgm:alg type="tx">
+                            <dgm:param type="txAnchorVert" val="b"/>
+                            <dgm:param type="parTxLTRAlign" val="r"/>
+                            <dgm:param type="parTxRTLAlign" val="r"/>
+                          </dgm:alg>
+                        </dgm:else>
+                      </dgm:choose>
+                    </dgm:else>
+                  </dgm:choose>
+                  <dgm:shape xmlns:r="http://schemas.openxmlformats.org/officeDocument/2006/relationships" type="rect" r:blip="">
+                    <dgm:adjLst/>
+                  </dgm:shape>
+                  <dgm:presOf axis="desOrSelf" ptType="node"/>
+                  <dgm:choose name="Name106">
+                    <dgm:if name="Name107" func="var" arg="dir" op="equ" val="norm">
+                      <dgm:constrLst>
+                        <dgm:constr type="rMarg"/>
+                        <dgm:constr type="tMarg"/>
+                        <dgm:constr type="bMarg"/>
+                      </dgm:constrLst>
+                    </dgm:if>
+                    <dgm:else name="Name108">
+                      <dgm:constrLst>
+                        <dgm:constr type="lMarg"/>
+                        <dgm:constr type="tMarg"/>
+                        <dgm:constr type="bMarg"/>
+                      </dgm:constrLst>
+                    </dgm:else>
+                  </dgm:choose>
+                  <dgm:ruleLst>
+                    <dgm:rule type="primFontSz" val="5" fact="NaN" max="NaN"/>
+                  </dgm:ruleLst>
+                </dgm:layoutNode>
+              </dgm:forEach>
+              <dgm:forEach name="Name109" axis="ch" ptType="node" st="3" cnt="1">
+                <dgm:layoutNode name="bullet4c" styleLbl="node1">
+                  <dgm:alg type="sp"/>
+                  <dgm:shape xmlns:r="http://schemas.openxmlformats.org/officeDocument/2006/relationships" type="ellipse" r:blip="">
+                    <dgm:adjLst/>
+                  </dgm:shape>
+                  <dgm:presOf/>
+                  <dgm:constrLst/>
+                  <dgm:ruleLst/>
+                </dgm:layoutNode>
+                <dgm:layoutNode name="textBox4c" styleLbl="revTx">
+                  <dgm:varLst>
+                    <dgm:bulletEnabled val="1"/>
+                  </dgm:varLst>
+                  <dgm:choose name="Name110">
+                    <dgm:if name="Name111" func="var" arg="dir" op="equ" val="norm">
+                      <dgm:choose name="Name112">
+                        <dgm:if name="Name113" axis="root des" ptType="all node" func="maxDepth" op="gt" val="1">
+                          <dgm:alg type="tx">
+                            <dgm:param type="txAnchorVert" val="t"/>
+                            <dgm:param type="parTxLTRAlign" val="l"/>
+                            <dgm:param type="parTxRTLAlign" val="r"/>
+                          </dgm:alg>
+                        </dgm:if>
+                        <dgm:else name="Name114">
+                          <dgm:alg type="tx">
+                            <dgm:param type="txAnchorVert" val="t"/>
+                            <dgm:param type="parTxLTRAlign" val="l"/>
+                            <dgm:param type="parTxRTLAlign" val="l"/>
+                          </dgm:alg>
+                        </dgm:else>
+                      </dgm:choose>
+                    </dgm:if>
+                    <dgm:else name="Name115">
+                      <dgm:choose name="Name116">
+                        <dgm:if name="Name117" axis="root des" ptType="all node" func="maxDepth" op="gt" val="1">
+                          <dgm:alg type="tx">
+                            <dgm:param type="txAnchorVert" val="b"/>
+                            <dgm:param type="txAnchorVertCh" val="b"/>
+                            <dgm:param type="parTxLTRAlign" val="l"/>
+                            <dgm:param type="parTxRTLAlign" val="r"/>
+                          </dgm:alg>
+                        </dgm:if>
+                        <dgm:else name="Name118">
+                          <dgm:alg type="tx">
+                            <dgm:param type="txAnchorVert" val="b"/>
+                            <dgm:param type="parTxLTRAlign" val="r"/>
+                            <dgm:param type="parTxRTLAlign" val="r"/>
+                          </dgm:alg>
+                        </dgm:else>
+                      </dgm:choose>
+                    </dgm:else>
+                  </dgm:choose>
+                  <dgm:shape xmlns:r="http://schemas.openxmlformats.org/officeDocument/2006/relationships" type="rect" r:blip="">
+                    <dgm:adjLst/>
+                  </dgm:shape>
+                  <dgm:presOf axis="desOrSelf" ptType="node"/>
+                  <dgm:choose name="Name119">
+                    <dgm:if name="Name120" func="var" arg="dir" op="equ" val="norm">
+                      <dgm:constrLst>
+                        <dgm:constr type="rMarg"/>
+                        <dgm:constr type="tMarg"/>
+                        <dgm:constr type="bMarg"/>
+                      </dgm:constrLst>
+                    </dgm:if>
+                    <dgm:else name="Name121">
+                      <dgm:constrLst>
+                        <dgm:constr type="lMarg"/>
+                        <dgm:constr type="tMarg"/>
+                        <dgm:constr type="bMarg"/>
+                      </dgm:constrLst>
+                    </dgm:else>
+                  </dgm:choose>
+                  <dgm:ruleLst>
+                    <dgm:rule type="primFontSz" val="5" fact="NaN" max="NaN"/>
+                  </dgm:ruleLst>
+                </dgm:layoutNode>
+              </dgm:forEach>
+              <dgm:forEach name="Name122" axis="ch" ptType="node" st="4" cnt="1">
+                <dgm:layoutNode name="bullet4d" styleLbl="node1">
+                  <dgm:alg type="sp"/>
+                  <dgm:shape xmlns:r="http://schemas.openxmlformats.org/officeDocument/2006/relationships" type="ellipse" r:blip="">
+                    <dgm:adjLst/>
+                  </dgm:shape>
+                  <dgm:presOf/>
+                  <dgm:constrLst/>
+                  <dgm:ruleLst/>
+                </dgm:layoutNode>
+                <dgm:layoutNode name="textBox4d" styleLbl="revTx">
+                  <dgm:varLst>
+                    <dgm:bulletEnabled val="1"/>
+                  </dgm:varLst>
+                  <dgm:choose name="Name123">
+                    <dgm:if name="Name124" func="var" arg="dir" op="equ" val="norm">
+                      <dgm:choose name="Name125">
+                        <dgm:if name="Name126" axis="root des" ptType="all node" func="maxDepth" op="gt" val="1">
+                          <dgm:alg type="tx">
+                            <dgm:param type="txAnchorVert" val="t"/>
+                            <dgm:param type="parTxLTRAlign" val="l"/>
+                            <dgm:param type="parTxRTLAlign" val="r"/>
+                          </dgm:alg>
+                        </dgm:if>
+                        <dgm:else name="Name127">
+                          <dgm:alg type="tx">
+                            <dgm:param type="txAnchorVert" val="t"/>
+                            <dgm:param type="parTxLTRAlign" val="l"/>
+                            <dgm:param type="parTxRTLAlign" val="l"/>
+                          </dgm:alg>
+                        </dgm:else>
+                      </dgm:choose>
+                    </dgm:if>
+                    <dgm:else name="Name128">
+                      <dgm:choose name="Name129">
+                        <dgm:if name="Name130" axis="root des" ptType="all node" func="maxDepth" op="gt" val="1">
+                          <dgm:alg type="tx">
+                            <dgm:param type="txAnchorVert" val="b"/>
+                            <dgm:param type="txAnchorVertCh" val="b"/>
+                            <dgm:param type="parTxLTRAlign" val="l"/>
+                            <dgm:param type="parTxRTLAlign" val="r"/>
+                          </dgm:alg>
+                        </dgm:if>
+                        <dgm:else name="Name131">
+                          <dgm:alg type="tx">
+                            <dgm:param type="txAnchorVert" val="b"/>
+                            <dgm:param type="parTxLTRAlign" val="r"/>
+                            <dgm:param type="parTxRTLAlign" val="r"/>
+                          </dgm:alg>
+                        </dgm:else>
+                      </dgm:choose>
+                    </dgm:else>
+                  </dgm:choose>
+                  <dgm:shape xmlns:r="http://schemas.openxmlformats.org/officeDocument/2006/relationships" type="rect" r:blip="">
+                    <dgm:adjLst/>
+                  </dgm:shape>
+                  <dgm:presOf axis="desOrSelf" ptType="node"/>
+                  <dgm:choose name="Name132">
+                    <dgm:if name="Name133" func="var" arg="dir" op="equ" val="norm">
+                      <dgm:constrLst>
+                        <dgm:constr type="rMarg"/>
+                        <dgm:constr type="tMarg"/>
+                        <dgm:constr type="bMarg"/>
+                      </dgm:constrLst>
+                    </dgm:if>
+                    <dgm:else name="Name134">
+                      <dgm:constrLst>
+                        <dgm:constr type="lMarg"/>
+                        <dgm:constr type="tMarg"/>
+                        <dgm:constr type="bMarg"/>
+                      </dgm:constrLst>
+                    </dgm:else>
+                  </dgm:choose>
+                  <dgm:ruleLst>
+                    <dgm:rule type="primFontSz" val="5" fact="NaN" max="NaN"/>
+                  </dgm:ruleLst>
+                </dgm:layoutNode>
+              </dgm:forEach>
+            </dgm:layoutNode>
+          </dgm:if>
+          <dgm:else name="Name135">
+            <dgm:layoutNode name="arrowDiagram5">
+              <dgm:alg type="composite">
+                <dgm:param type="vertAlign" val="none"/>
+                <dgm:param type="horzAlign" val="none"/>
+              </dgm:alg>
+              <dgm:shape xmlns:r="http://schemas.openxmlformats.org/officeDocument/2006/relationships" r:blip="">
+                <dgm:adjLst/>
+              </dgm:shape>
+              <dgm:presOf/>
+              <dgm:choose name="Name136">
+                <dgm:if name="Name137" func="var" arg="dir" op="equ" val="norm">
+                  <dgm:constrLst>
+                    <dgm:constr type="ctrX" for="ch" forName="bullet5a" refType="w" fact="0.11"/>
+                    <dgm:constr type="ctrY" for="ch" forName="bullet5a" refType="h" fact="0.762"/>
+                    <dgm:constr type="w" for="ch" forName="bullet5a" refType="w" fact="0.023"/>
+                    <dgm:constr type="h" for="ch" forName="bullet5a" refType="w" refFor="ch" refForName="bullet5a"/>
+                    <dgm:constr type="l" for="ch" forName="textBox5a" refType="ctrX" refFor="ch" refForName="bullet5a"/>
+                    <dgm:constr type="t" for="ch" forName="textBox5a" refType="ctrY" refFor="ch" refForName="bullet5a"/>
+                    <dgm:constr type="w" for="ch" forName="textBox5a" refType="w" fact="0.131"/>
+                    <dgm:constr type="h" for="ch" forName="textBox5a" refType="h" fact="0.238"/>
+                    <dgm:constr type="userA" refType="h" refFor="ch" refForName="bullet5a" fact="0.53"/>
+                    <dgm:constr type="lMarg" for="ch" forName="textBox5a" refType="userA" fact="2.834"/>
+                    <dgm:constr type="ctrX" for="ch" forName="bullet5b" refType="w" fact="0.241"/>
+                    <dgm:constr type="ctrY" for="ch" forName="bullet5b" refType="h" fact="0.581"/>
+                    <dgm:constr type="w" for="ch" forName="bullet5b" refType="w" fact="0.036"/>
+                    <dgm:constr type="h" for="ch" forName="bullet5b" refType="w" refFor="ch" refForName="bullet5b"/>
+                    <dgm:constr type="l" for="ch" forName="textBox5b" refType="ctrX" refFor="ch" refForName="bullet5b"/>
+                    <dgm:constr type="t" for="ch" forName="textBox5b" refType="ctrY" refFor="ch" refForName="bullet5b"/>
+                    <dgm:constr type="w" for="ch" forName="textBox5b" refType="w" fact="0.166"/>
+                    <dgm:constr type="h" for="ch" forName="textBox5b" refType="h" fact="0.419"/>
+                    <dgm:constr type="userB" refType="h" refFor="ch" refForName="bullet5b" fact="0.53"/>
+                    <dgm:constr type="lMarg" for="ch" forName="textBox5b" refType="userB" fact="2.834"/>
+                    <dgm:constr type="ctrX" for="ch" forName="bullet5c" refType="w" fact="0.407"/>
+                    <dgm:constr type="ctrY" for="ch" forName="bullet5c" refType="h" fact="0.438"/>
+                    <dgm:constr type="w" for="ch" forName="bullet5c" refType="w" fact="0.048"/>
+                    <dgm:constr type="h" for="ch" forName="bullet5c" refType="w" refFor="ch" refForName="bullet5c"/>
+                    <dgm:constr type="l" for="ch" forName="textBox5c" refType="ctrX" refFor="ch" refForName="bullet5c"/>
+                    <dgm:constr type="t" for="ch" forName="textBox5c" refType="ctrY" refFor="ch" refForName="bullet5c"/>
+                    <dgm:constr type="w" for="ch" forName="textBox5c" refType="w" fact="0.193"/>
+                    <dgm:constr type="h" for="ch" forName="textBox5c" refType="h" fact="0.562"/>
+                    <dgm:constr type="userC" refType="h" refFor="ch" refForName="bullet5c" fact="0.53"/>
+                    <dgm:constr type="lMarg" for="ch" forName="textBox5c" refType="userC" fact="2.834"/>
+                    <dgm:constr type="ctrX" for="ch" forName="bullet5d" refType="w" fact="0.6"/>
+                    <dgm:constr type="ctrY" for="ch" forName="bullet5d" refType="h" fact="0.33"/>
+                    <dgm:constr type="w" for="ch" forName="bullet5d" refType="w" fact="0.062"/>
+                    <dgm:constr type="h" for="ch" forName="bullet5d" refType="w" refFor="ch" refForName="bullet5d"/>
+                    <dgm:constr type="l" for="ch" forName="textBox5d" refType="ctrX" refFor="ch" refForName="bullet5d"/>
+                    <dgm:constr type="t" for="ch" forName="textBox5d" refType="ctrY" refFor="ch" refForName="bullet5d"/>
+                    <dgm:constr type="w" for="ch" forName="textBox5d" refType="w" fact="0.2"/>
+                    <dgm:constr type="h" for="ch" forName="textBox5d" refType="h" fact="0.67"/>
+                    <dgm:constr type="userD" refType="h" refFor="ch" refForName="bullet5d" fact="0.53"/>
+                    <dgm:constr type="lMarg" for="ch" forName="textBox5d" refType="userD" fact="2.834"/>
+                    <dgm:constr type="ctrX" for="ch" forName="bullet5e" refType="w" fact="0.8"/>
+                    <dgm:constr type="ctrY" for="ch" forName="bullet5e" refType="h" fact="0.264"/>
+                    <dgm:constr type="w" for="ch" forName="bullet5e" refType="w" fact="0.079"/>
+                    <dgm:constr type="h" for="ch" forName="bullet5e" refType="w" refFor="ch" refForName="bullet5e"/>
+                    <dgm:constr type="l" for="ch" forName="textBox5e" refType="ctrX" refFor="ch" refForName="bullet5e"/>
+                    <dgm:constr type="t" for="ch" forName="textBox5e" refType="ctrY" refFor="ch" refForName="bullet5e"/>
+                    <dgm:constr type="w" for="ch" forName="textBox5e" refType="w" fact="0.2"/>
+                    <dgm:constr type="h" for="ch" forName="textBox5e" refType="h" fact="0.736"/>
+                    <dgm:constr type="userE" refType="h" refFor="ch" refForName="bullet5e" fact="0.53"/>
+                    <dgm:constr type="lMarg" for="ch" forName="textBox5e" refType="userE" fact="2.834"/>
+                    <dgm:constr type="primFontSz" for="ch" ptType="node" op="equ" val="65"/>
+                  </dgm:constrLst>
+                </dgm:if>
+                <dgm:else name="Name138">
+                  <dgm:constrLst>
+                    <dgm:constr type="ctrX" for="ch" forName="bullet5a" refType="w" fact="0.11"/>
+                    <dgm:constr type="ctrY" for="ch" forName="bullet5a" refType="h" fact="0.762"/>
+                    <dgm:constr type="w" for="ch" forName="bullet5a" refType="w" fact="0.023"/>
+                    <dgm:constr type="h" for="ch" forName="bullet5a" refType="w" refFor="ch" refForName="bullet5a"/>
+                    <dgm:constr type="r" for="ch" forName="textBox5a" refType="ctrX" refFor="ch" refForName="bullet5a"/>
+                    <dgm:constr type="b" for="ch" forName="textBox5a" refType="ctrY" refFor="ch" refForName="bullet5a"/>
+                    <dgm:constr type="w" for="ch" forName="textBox5a" refType="w" fact="0.11"/>
+                    <dgm:constr type="h" for="ch" forName="textBox5a" refType="h" fact="0.762"/>
+                    <dgm:constr type="userA" refType="h" refFor="ch" refForName="bullet5a" fact="0.53"/>
+                    <dgm:constr type="rMarg" for="ch" forName="textBox5a" refType="userA" fact="2.834"/>
+                    <dgm:constr type="ctrX" for="ch" forName="bullet5b" refType="w" fact="0.241"/>
+                    <dgm:constr type="ctrY" for="ch" forName="bullet5b" refType="h" fact="0.581"/>
+                    <dgm:constr type="w" for="ch" forName="bullet5b" refType="w" fact="0.036"/>
+                    <dgm:constr type="h" for="ch" forName="bullet5b" refType="w" refFor="ch" refForName="bullet5b"/>
+                    <dgm:constr type="r" for="ch" forName="textBox5b" refType="ctrX" refFor="ch" refForName="bullet5b"/>
+                    <dgm:constr type="b" for="ch" forName="textBox5b" refType="ctrY" refFor="ch" refForName="bullet5b"/>
+                    <dgm:constr type="w" for="ch" forName="textBox5b" refType="w" fact="0.131"/>
+                    <dgm:constr type="h" for="ch" forName="textBox5b" refType="h" fact="0.581"/>
+                    <dgm:constr type="userB" refType="h" refFor="ch" refForName="bullet5b" fact="0.53"/>
+                    <dgm:constr type="rMarg" for="ch" forName="textBox5b" refType="userB" fact="2.834"/>
+                    <dgm:constr type="ctrX" for="ch" forName="bullet5c" refType="w" fact="0.407"/>
+                    <dgm:constr type="ctrY" for="ch" forName="bullet5c" refType="h" fact="0.438"/>
+                    <dgm:constr type="w" for="ch" forName="bullet5c" refType="w" fact="0.048"/>
+                    <dgm:constr type="h" for="ch" forName="bullet5c" refType="w" refFor="ch" refForName="bullet5c"/>
+                    <dgm:constr type="r" for="ch" forName="textBox5c" refType="ctrX" refFor="ch" refForName="bullet5c"/>
+                    <dgm:constr type="b" for="ch" forName="textBox5c" refType="ctrY" refFor="ch" refForName="bullet5c"/>
+                    <dgm:constr type="w" for="ch" forName="textBox5c" refType="w" fact="0.166"/>
+                    <dgm:constr type="h" for="ch" forName="textBox5c" refType="h" fact="0.438"/>
+                    <dgm:constr type="userC" refType="h" refFor="ch" refForName="bullet5c" fact="0.53"/>
+                    <dgm:constr type="rMarg" for="ch" forName="textBox5c" refType="userC" fact="2.834"/>
+                    <dgm:constr type="ctrX" for="ch" forName="bullet5d" refType="w" fact="0.6"/>
+                    <dgm:constr type="ctrY" for="ch" forName="bullet5d" refType="h" fact="0.33"/>
+                    <dgm:constr type="w" for="ch" forName="bullet5d" refType="w" fact="0.062"/>
+                    <dgm:constr type="h" for="ch" forName="bullet5d" refType="w" refFor="ch" refForName="bullet5d"/>
+                    <dgm:constr type="r" for="ch" forName="textBox5d" refType="ctrX" refFor="ch" refForName="bullet5d"/>
+                    <dgm:constr type="b" for="ch" forName="textBox5d" refType="ctrY" refFor="ch" refForName="bullet5d"/>
+                    <dgm:constr type="w" for="ch" forName="textBox5d" refType="w" fact="0.193"/>
+                    <dgm:constr type="h" for="ch" forName="textBox5d" refType="h" fact="0.33"/>
+                    <dgm:constr type="userD" refType="h" refFor="ch" refForName="bullet5d" fact="0.53"/>
+                    <dgm:constr type="rMarg" for="ch" forName="textBox5d" refType="userD" fact="2.834"/>
+                    <dgm:constr type="ctrX" for="ch" forName="bullet5e" refType="w" fact="0.8"/>
+                    <dgm:constr type="ctrY" for="ch" forName="bullet5e" refType="h" fact="0.264"/>
+                    <dgm:constr type="w" for="ch" forName="bullet5e" refType="w" fact="0.079"/>
+                    <dgm:constr type="h" for="ch" forName="bullet5e" refType="w" refFor="ch" refForName="bullet5e"/>
+                    <dgm:constr type="r" for="ch" forName="textBox5e" refType="ctrX" refFor="ch" refForName="bullet5e"/>
+                    <dgm:constr type="b" for="ch" forName="textBox5e" refType="ctrY" refFor="ch" refForName="bullet5e"/>
+                    <dgm:constr type="w" for="ch" forName="textBox5e" refType="w" fact="0.2"/>
+                    <dgm:constr type="h" for="ch" forName="textBox5e" refType="h" fact="0.264"/>
+                    <dgm:constr type="userE" refType="h" refFor="ch" refForName="bullet5e" fact="0.53"/>
+                    <dgm:constr type="rMarg" for="ch" forName="textBox5e" refType="userE" fact="2.834"/>
+                    <dgm:constr type="primFontSz" for="ch" ptType="node" op="equ" val="65"/>
+                  </dgm:constrLst>
+                </dgm:else>
+              </dgm:choose>
+              <dgm:ruleLst/>
+              <dgm:forEach name="Name139" axis="ch" ptType="node" cnt="1">
+                <dgm:layoutNode name="bullet5a" styleLbl="node1">
+                  <dgm:alg type="sp"/>
+                  <dgm:shape xmlns:r="http://schemas.openxmlformats.org/officeDocument/2006/relationships" type="ellipse" r:blip="">
+                    <dgm:adjLst/>
+                  </dgm:shape>
+                  <dgm:presOf/>
+                  <dgm:constrLst/>
+                  <dgm:ruleLst/>
+                </dgm:layoutNode>
+                <dgm:layoutNode name="textBox5a" styleLbl="revTx">
+                  <dgm:varLst>
+                    <dgm:bulletEnabled val="1"/>
+                  </dgm:varLst>
+                  <dgm:choose name="Name140">
+                    <dgm:if name="Name141" func="var" arg="dir" op="equ" val="norm">
+                      <dgm:choose name="Name142">
+                        <dgm:if name="Name143" axis="root des" ptType="all node" func="maxDepth" op="gt" val="1">
+                          <dgm:alg type="tx">
+                            <dgm:param type="txAnchorVert" val="t"/>
+                            <dgm:param type="parTxLTRAlign" val="l"/>
+                            <dgm:param type="parTxRTLAlign" val="r"/>
+                          </dgm:alg>
+                        </dgm:if>
+                        <dgm:else name="Name144">
+                          <dgm:alg type="tx">
+                            <dgm:param type="txAnchorVert" val="t"/>
+                            <dgm:param type="parTxLTRAlign" val="l"/>
+                            <dgm:param type="parTxRTLAlign" val="l"/>
+                          </dgm:alg>
+                        </dgm:else>
+                      </dgm:choose>
+                    </dgm:if>
+                    <dgm:else name="Name145">
+                      <dgm:choose name="Name146">
+                        <dgm:if name="Name147" axis="root des" ptType="all node" func="maxDepth" op="gt" val="1">
+                          <dgm:alg type="tx">
+                            <dgm:param type="txAnchorVert" val="b"/>
+                            <dgm:param type="txAnchorVertCh" val="b"/>
+                            <dgm:param type="parTxLTRAlign" val="l"/>
+                            <dgm:param type="parTxRTLAlign" val="r"/>
+                          </dgm:alg>
+                        </dgm:if>
+                        <dgm:else name="Name148">
+                          <dgm:alg type="tx">
+                            <dgm:param type="txAnchorVert" val="b"/>
+                            <dgm:param type="parTxLTRAlign" val="r"/>
+                            <dgm:param type="parTxRTLAlign" val="r"/>
+                          </dgm:alg>
+                        </dgm:else>
+                      </dgm:choose>
+                    </dgm:else>
+                  </dgm:choose>
+                  <dgm:shape xmlns:r="http://schemas.openxmlformats.org/officeDocument/2006/relationships" type="rect" r:blip="">
+                    <dgm:adjLst/>
+                  </dgm:shape>
+                  <dgm:presOf axis="desOrSelf" ptType="node"/>
+                  <dgm:choose name="Name149">
+                    <dgm:if name="Name150" func="var" arg="dir" op="equ" val="norm">
+                      <dgm:constrLst>
+                        <dgm:constr type="rMarg"/>
+                        <dgm:constr type="tMarg"/>
+                        <dgm:constr type="bMarg"/>
+                      </dgm:constrLst>
+                    </dgm:if>
+                    <dgm:else name="Name151">
+                      <dgm:constrLst>
+                        <dgm:constr type="lMarg"/>
+                        <dgm:constr type="tMarg"/>
+                        <dgm:constr type="bMarg"/>
+                      </dgm:constrLst>
+                    </dgm:else>
+                  </dgm:choose>
+                  <dgm:ruleLst>
+                    <dgm:rule type="primFontSz" val="5" fact="NaN" max="NaN"/>
+                  </dgm:ruleLst>
+                </dgm:layoutNode>
+              </dgm:forEach>
+              <dgm:forEach name="Name152" axis="ch" ptType="node" st="2" cnt="1">
+                <dgm:layoutNode name="bullet5b" styleLbl="node1">
+                  <dgm:alg type="sp"/>
+                  <dgm:shape xmlns:r="http://schemas.openxmlformats.org/officeDocument/2006/relationships" type="ellipse" r:blip="">
+                    <dgm:adjLst/>
+                  </dgm:shape>
+                  <dgm:presOf/>
+                  <dgm:constrLst/>
+                  <dgm:ruleLst/>
+                </dgm:layoutNode>
+                <dgm:layoutNode name="textBox5b" styleLbl="revTx">
+                  <dgm:varLst>
+                    <dgm:bulletEnabled val="1"/>
+                  </dgm:varLst>
+                  <dgm:choose name="Name153">
+                    <dgm:if name="Name154" func="var" arg="dir" op="equ" val="norm">
+                      <dgm:choose name="Name155">
+                        <dgm:if name="Name156" axis="root des" ptType="all node" func="maxDepth" op="gt" val="1">
+                          <dgm:alg type="tx">
+                            <dgm:param type="txAnchorVert" val="t"/>
+                            <dgm:param type="parTxLTRAlign" val="l"/>
+                            <dgm:param type="parTxRTLAlign" val="r"/>
+                          </dgm:alg>
+                        </dgm:if>
+                        <dgm:else name="Name157">
+                          <dgm:alg type="tx">
+                            <dgm:param type="txAnchorVert" val="t"/>
+                            <dgm:param type="parTxLTRAlign" val="l"/>
+                            <dgm:param type="parTxRTLAlign" val="l"/>
+                          </dgm:alg>
+                        </dgm:else>
+                      </dgm:choose>
+                    </dgm:if>
+                    <dgm:else name="Name158">
+                      <dgm:choose name="Name159">
+                        <dgm:if name="Name160" axis="root des" ptType="all node" func="maxDepth" op="gt" val="1">
+                          <dgm:alg type="tx">
+                            <dgm:param type="txAnchorVert" val="b"/>
+                            <dgm:param type="txAnchorVertCh" val="b"/>
+                            <dgm:param type="parTxLTRAlign" val="l"/>
+                            <dgm:param type="parTxRTLAlign" val="r"/>
+                          </dgm:alg>
+                        </dgm:if>
+                        <dgm:else name="Name161">
+                          <dgm:alg type="tx">
+                            <dgm:param type="txAnchorVert" val="b"/>
+                            <dgm:param type="parTxLTRAlign" val="r"/>
+                            <dgm:param type="parTxRTLAlign" val="r"/>
+                          </dgm:alg>
+                        </dgm:else>
+                      </dgm:choose>
+                    </dgm:else>
+                  </dgm:choose>
+                  <dgm:shape xmlns:r="http://schemas.openxmlformats.org/officeDocument/2006/relationships" type="rect" r:blip="">
+                    <dgm:adjLst/>
+                  </dgm:shape>
+                  <dgm:presOf axis="desOrSelf" ptType="node"/>
+                  <dgm:choose name="Name162">
+                    <dgm:if name="Name163" func="var" arg="dir" op="equ" val="norm">
+                      <dgm:constrLst>
+                        <dgm:constr type="rMarg"/>
+                        <dgm:constr type="tMarg"/>
+                        <dgm:constr type="bMarg"/>
+                      </dgm:constrLst>
+                    </dgm:if>
+                    <dgm:else name="Name164">
+                      <dgm:constrLst>
+                        <dgm:constr type="lMarg"/>
+                        <dgm:constr type="tMarg"/>
+                        <dgm:constr type="bMarg"/>
+                      </dgm:constrLst>
+                    </dgm:else>
+                  </dgm:choose>
+                  <dgm:ruleLst>
+                    <dgm:rule type="primFontSz" val="5" fact="NaN" max="NaN"/>
+                  </dgm:ruleLst>
+                </dgm:layoutNode>
+              </dgm:forEach>
+              <dgm:forEach name="Name165" axis="ch" ptType="node" st="3" cnt="1">
+                <dgm:layoutNode name="bullet5c" styleLbl="node1">
+                  <dgm:alg type="sp"/>
+                  <dgm:shape xmlns:r="http://schemas.openxmlformats.org/officeDocument/2006/relationships" type="ellipse" r:blip="">
+                    <dgm:adjLst/>
+                  </dgm:shape>
+                  <dgm:presOf/>
+                  <dgm:constrLst/>
+                  <dgm:ruleLst/>
+                </dgm:layoutNode>
+                <dgm:layoutNode name="textBox5c" styleLbl="revTx">
+                  <dgm:varLst>
+                    <dgm:bulletEnabled val="1"/>
+                  </dgm:varLst>
+                  <dgm:choose name="Name166">
+                    <dgm:if name="Name167" func="var" arg="dir" op="equ" val="norm">
+                      <dgm:choose name="Name168">
+                        <dgm:if name="Name169" axis="root des" ptType="all node" func="maxDepth" op="gt" val="1">
+                          <dgm:alg type="tx">
+                            <dgm:param type="txAnchorVert" val="t"/>
+                            <dgm:param type="parTxLTRAlign" val="l"/>
+                            <dgm:param type="parTxRTLAlign" val="r"/>
+                          </dgm:alg>
+                        </dgm:if>
+                        <dgm:else name="Name170">
+                          <dgm:alg type="tx">
+                            <dgm:param type="txAnchorVert" val="t"/>
+                            <dgm:param type="parTxLTRAlign" val="l"/>
+                            <dgm:param type="parTxRTLAlign" val="l"/>
+                          </dgm:alg>
+                        </dgm:else>
+                      </dgm:choose>
+                    </dgm:if>
+                    <dgm:else name="Name171">
+                      <dgm:choose name="Name172">
+                        <dgm:if name="Name173" axis="root des" ptType="all node" func="maxDepth" op="gt" val="1">
+                          <dgm:alg type="tx">
+                            <dgm:param type="txAnchorVert" val="b"/>
+                            <dgm:param type="txAnchorVertCh" val="b"/>
+                            <dgm:param type="parTxLTRAlign" val="l"/>
+                            <dgm:param type="parTxRTLAlign" val="r"/>
+                          </dgm:alg>
+                        </dgm:if>
+                        <dgm:else name="Name174">
+                          <dgm:alg type="tx">
+                            <dgm:param type="txAnchorVert" val="b"/>
+                            <dgm:param type="parTxLTRAlign" val="r"/>
+                            <dgm:param type="parTxRTLAlign" val="r"/>
+                          </dgm:alg>
+                        </dgm:else>
+                      </dgm:choose>
+                    </dgm:else>
+                  </dgm:choose>
+                  <dgm:shape xmlns:r="http://schemas.openxmlformats.org/officeDocument/2006/relationships" type="rect" r:blip="">
+                    <dgm:adjLst/>
+                  </dgm:shape>
+                  <dgm:presOf axis="desOrSelf" ptType="node"/>
+                  <dgm:choose name="Name175">
+                    <dgm:if name="Name176" func="var" arg="dir" op="equ" val="norm">
+                      <dgm:constrLst>
+                        <dgm:constr type="rMarg"/>
+                        <dgm:constr type="tMarg"/>
+                        <dgm:constr type="bMarg"/>
+                      </dgm:constrLst>
+                    </dgm:if>
+                    <dgm:else name="Name177">
+                      <dgm:constrLst>
+                        <dgm:constr type="lMarg"/>
+                        <dgm:constr type="tMarg"/>
+                        <dgm:constr type="bMarg"/>
+                      </dgm:constrLst>
+                    </dgm:else>
+                  </dgm:choose>
+                  <dgm:ruleLst>
+                    <dgm:rule type="primFontSz" val="5" fact="NaN" max="NaN"/>
+                  </dgm:ruleLst>
+                </dgm:layoutNode>
+              </dgm:forEach>
+              <dgm:forEach name="Name178" axis="ch" ptType="node" st="4" cnt="1">
+                <dgm:layoutNode name="bullet5d" styleLbl="node1">
+                  <dgm:alg type="sp"/>
+                  <dgm:shape xmlns:r="http://schemas.openxmlformats.org/officeDocument/2006/relationships" type="ellipse" r:blip="">
+                    <dgm:adjLst/>
+                  </dgm:shape>
+                  <dgm:presOf/>
+                  <dgm:constrLst/>
+                  <dgm:ruleLst/>
+                </dgm:layoutNode>
+                <dgm:layoutNode name="textBox5d" styleLbl="revTx">
+                  <dgm:varLst>
+                    <dgm:bulletEnabled val="1"/>
+                  </dgm:varLst>
+                  <dgm:choose name="Name179">
+                    <dgm:if name="Name180" func="var" arg="dir" op="equ" val="norm">
+                      <dgm:choose name="Name181">
+                        <dgm:if name="Name182" axis="root des" ptType="all node" func="maxDepth" op="gt" val="1">
+                          <dgm:alg type="tx">
+                            <dgm:param type="txAnchorVert" val="t"/>
+                            <dgm:param type="parTxLTRAlign" val="l"/>
+                            <dgm:param type="parTxRTLAlign" val="r"/>
+                          </dgm:alg>
+                        </dgm:if>
+                        <dgm:else name="Name183">
+                          <dgm:alg type="tx">
+                            <dgm:param type="txAnchorVert" val="t"/>
+                            <dgm:param type="parTxLTRAlign" val="l"/>
+                            <dgm:param type="parTxRTLAlign" val="l"/>
+                          </dgm:alg>
+                        </dgm:else>
+                      </dgm:choose>
+                    </dgm:if>
+                    <dgm:else name="Name184">
+                      <dgm:choose name="Name185">
+                        <dgm:if name="Name186" axis="root des" ptType="all node" func="maxDepth" op="gt" val="1">
+                          <dgm:alg type="tx">
+                            <dgm:param type="txAnchorVert" val="b"/>
+                            <dgm:param type="txAnchorVertCh" val="b"/>
+                            <dgm:param type="parTxLTRAlign" val="l"/>
+                            <dgm:param type="parTxRTLAlign" val="r"/>
+                          </dgm:alg>
+                        </dgm:if>
+                        <dgm:else name="Name187">
+                          <dgm:alg type="tx">
+                            <dgm:param type="txAnchorVert" val="b"/>
+                            <dgm:param type="parTxLTRAlign" val="r"/>
+                            <dgm:param type="parTxRTLAlign" val="r"/>
+                          </dgm:alg>
+                        </dgm:else>
+                      </dgm:choose>
+                    </dgm:else>
+                  </dgm:choose>
+                  <dgm:shape xmlns:r="http://schemas.openxmlformats.org/officeDocument/2006/relationships" type="rect" r:blip="">
+                    <dgm:adjLst/>
+                  </dgm:shape>
+                  <dgm:presOf axis="desOrSelf" ptType="node"/>
+                  <dgm:choose name="Name188">
+                    <dgm:if name="Name189" func="var" arg="dir" op="equ" val="norm">
+                      <dgm:constrLst>
+                        <dgm:constr type="rMarg"/>
+                        <dgm:constr type="tMarg"/>
+                        <dgm:constr type="bMarg"/>
+                      </dgm:constrLst>
+                    </dgm:if>
+                    <dgm:else name="Name190">
+                      <dgm:constrLst>
+                        <dgm:constr type="lMarg"/>
+                        <dgm:constr type="tMarg"/>
+                        <dgm:constr type="bMarg"/>
+                      </dgm:constrLst>
+                    </dgm:else>
+                  </dgm:choose>
+                  <dgm:ruleLst>
+                    <dgm:rule type="primFontSz" val="5" fact="NaN" max="NaN"/>
+                  </dgm:ruleLst>
+                </dgm:layoutNode>
+              </dgm:forEach>
+              <dgm:forEach name="Name191" axis="ch" ptType="node" st="5" cnt="1">
+                <dgm:layoutNode name="bullet5e" styleLbl="node1">
+                  <dgm:alg type="sp"/>
+                  <dgm:shape xmlns:r="http://schemas.openxmlformats.org/officeDocument/2006/relationships" type="ellipse" r:blip="">
+                    <dgm:adjLst/>
+                  </dgm:shape>
+                  <dgm:presOf/>
+                  <dgm:constrLst/>
+                  <dgm:ruleLst/>
+                </dgm:layoutNode>
+                <dgm:layoutNode name="textBox5e" styleLbl="revTx">
+                  <dgm:varLst>
+                    <dgm:bulletEnabled val="1"/>
+                  </dgm:varLst>
+                  <dgm:choose name="Name192">
+                    <dgm:if name="Name193" func="var" arg="dir" op="equ" val="norm">
+                      <dgm:choose name="Name194">
+                        <dgm:if name="Name195" axis="root des" ptType="all node" func="maxDepth" op="gt" val="1">
+                          <dgm:alg type="tx">
+                            <dgm:param type="txAnchorVert" val="t"/>
+                            <dgm:param type="parTxLTRAlign" val="l"/>
+                            <dgm:param type="parTxRTLAlign" val="r"/>
+                          </dgm:alg>
+                        </dgm:if>
+                        <dgm:else name="Name196">
+                          <dgm:alg type="tx">
+                            <dgm:param type="txAnchorVert" val="t"/>
+                            <dgm:param type="parTxLTRAlign" val="l"/>
+                            <dgm:param type="parTxRTLAlign" val="l"/>
+                          </dgm:alg>
+                        </dgm:else>
+                      </dgm:choose>
+                    </dgm:if>
+                    <dgm:else name="Name197">
+                      <dgm:choose name="Name198">
+                        <dgm:if name="Name199" axis="root des" ptType="all node" func="maxDepth" op="gt" val="1">
+                          <dgm:alg type="tx">
+                            <dgm:param type="txAnchorVert" val="b"/>
+                            <dgm:param type="txAnchorVertCh" val="b"/>
+                            <dgm:param type="parTxLTRAlign" val="l"/>
+                            <dgm:param type="parTxRTLAlign" val="r"/>
+                          </dgm:alg>
+                        </dgm:if>
+                        <dgm:else name="Name200">
+                          <dgm:alg type="tx">
+                            <dgm:param type="txAnchorVert" val="b"/>
+                            <dgm:param type="parTxLTRAlign" val="r"/>
+                            <dgm:param type="parTxRTLAlign" val="r"/>
+                          </dgm:alg>
+                        </dgm:else>
+                      </dgm:choose>
+                    </dgm:else>
+                  </dgm:choose>
+                  <dgm:shape xmlns:r="http://schemas.openxmlformats.org/officeDocument/2006/relationships" type="rect" r:blip="">
+                    <dgm:adjLst/>
+                  </dgm:shape>
+                  <dgm:presOf axis="desOrSelf" ptType="node"/>
+                  <dgm:choose name="Name201">
+                    <dgm:if name="Name202" func="var" arg="dir" op="equ" val="norm">
+                      <dgm:constrLst>
+                        <dgm:constr type="rMarg"/>
+                        <dgm:constr type="tMarg"/>
+                        <dgm:constr type="bMarg"/>
+                      </dgm:constrLst>
+                    </dgm:if>
+                    <dgm:else name="Name203">
+                      <dgm:constrLst>
+                        <dgm:constr type="lMarg"/>
+                        <dgm:constr type="tMarg"/>
+                        <dgm:constr type="bMarg"/>
+                      </dgm:constrLst>
+                    </dgm:else>
+                  </dgm:choose>
+                  <dgm:ruleLst>
+                    <dgm:rule type="primFontSz" val="5" fact="NaN" max="NaN"/>
+                  </dgm:ruleLst>
+                </dgm:layoutNode>
+              </dgm:forEach>
+            </dgm:layoutNode>
+          </dgm:else>
+        </dgm:choose>
+      </dgm:if>
+      <dgm:else name="Name204"/>
+    </dgm:choose>
+  </dgm:layoutNode>
+</dgm:layoutDef>
+</file>
+
 <file path=ppt/diagrams/quickStyle1.xml><?xml version="1.0" encoding="utf-8"?>
+<dgm:styleDef xmlns:dgm="http://schemas.openxmlformats.org/drawingml/2006/diagram" xmlns:a="http://schemas.openxmlformats.org/drawingml/2006/main" uniqueId="urn:microsoft.com/office/officeart/2005/8/quickstyle/simple1">
+  <dgm:title val=""/>
+  <dgm:desc val=""/>
+  <dgm:catLst>
+    <dgm:cat type="simple" pri="10100"/>
+  </dgm:catLst>
+  <dgm:scene3d>
+    <a:camera prst="orthographicFront"/>
+    <a:lightRig rig="threePt" dir="t"/>
+  </dgm:scene3d>
+  <dgm:styleLbl name="node0">
+    <dgm:scene3d>
+      <a:camera prst="orthographicFront"/>
+      <a:lightRig rig="threePt" dir="t"/>
+    </dgm:scene3d>
+    <dgm:sp3d/>
+    <dgm:txPr/>
+    <dgm:style>
+      <a:lnRef idx="2">
+        <a:scrgbClr r="0" g="0" b="0"/>
+      </a:lnRef>
+      <a:fillRef idx="1">
+        <a:scrgbClr r="0" g="0" b="0"/>
+      </a:fillRef>
+      <a:effectRef idx="0">
+        <a:scrgbClr r="0" g="0" b="0"/>
+      </a:effectRef>
+      <a:fontRef idx="minor">
+        <a:schemeClr val="lt1"/>
+      </a:fontRef>
+    </dgm:style>
+  </dgm:styleLbl>
+  <dgm:styleLbl name="lnNode1">
+    <dgm:scene3d>
+      <a:camera prst="orthographicFront"/>
+      <a:lightRig rig="threePt" dir="t"/>
+    </dgm:scene3d>
+    <dgm:sp3d/>
+    <dgm:txPr/>
+    <dgm:style>
+      <a:lnRef idx="2">
+        <a:scrgbClr r="0" g="0" b="0"/>
+      </a:lnRef>
+      <a:fillRef idx="1">
+        <a:scrgbClr r="0" g="0" b="0"/>
+      </a:fillRef>
+      <a:effectRef idx="0">
+        <a:scrgbClr r="0" g="0" b="0"/>
+      </a:effectRef>
+      <a:fontRef idx="minor">
+        <a:schemeClr val="lt1"/>
+      </a:fontRef>
+    </dgm:style>
+  </dgm:styleLbl>
+  <dgm:styleLbl name="vennNode1">
+    <dgm:scene3d>
+      <a:camera prst="orthographicFront"/>
+      <a:lightRig rig="threePt" dir="t"/>
+    </dgm:scene3d>
+    <dgm:sp3d/>
+    <dgm:txPr/>
+    <dgm:style>
+      <a:lnRef idx="2">
+        <a:scrgbClr r="0" g="0" b="0"/>
+      </a:lnRef>
+      <a:fillRef idx="1">
+        <a:scrgbClr r="0" g="0" b="0"/>
+      </a:fillRef>
+      <a:effectRef idx="0">
+        <a:scrgbClr r="0" g="0" b="0"/>
+      </a:effectRef>
+      <a:fontRef idx="minor">
+        <a:schemeClr val="tx1"/>
+      </a:fontRef>
+    </dgm:style>
+  </dgm:styleLbl>
+  <dgm:styleLbl name="alignNode1">
+    <dgm:scene3d>
+      <a:camera prst="orthographicFront"/>
+      <a:lightRig rig="threePt" dir="t"/>
+    </dgm:scene3d>
+    <dgm:sp3d/>
+    <dgm:txPr/>
+    <dgm:style>
+      <a:lnRef idx="2">
+        <a:scrgbClr r="0" g="0" b="0"/>
+      </a:lnRef>
+      <a:fillRef idx="1">
+        <a:scrgbClr r="0" g="0" b="0"/>
+      </a:fillRef>
+      <a:effectRef idx="0">
+        <a:scrgbClr r="0" g="0" b="0"/>
+      </a:effectRef>
+      <a:fontRef idx="minor">
+        <a:schemeClr val="lt1"/>
+      </a:fontRef>
+    </dgm:style>
+  </dgm:styleLbl>
+  <dgm:styleLbl name="node1">
+    <dgm:scene3d>
+      <a:camera prst="orthographicFront"/>
+      <a:lightRig rig="threePt" dir="t"/>
+    </dgm:scene3d>
+    <dgm:sp3d/>
+    <dgm:txPr/>
+    <dgm:style>
+      <a:lnRef idx="2">
+        <a:scrgbClr r="0" g="0" b="0"/>
+      </a:lnRef>
+      <a:fillRef idx="1">
+        <a:scrgbClr r="0" g="0" b="0"/>
+      </a:fillRef>
+      <a:effectRef idx="0">
+        <a:scrgbClr r="0" g="0" b="0"/>
+      </a:effectRef>
+      <a:fontRef idx="minor">
+        <a:schemeClr val="lt1"/>
+      </a:fontRef>
+    </dgm:style>
+  </dgm:styleLbl>
+  <dgm:styleLbl name="node2">
+    <dgm:scene3d>
+      <a:camera prst="orthographicFront"/>
+      <a:lightRig rig="threePt" dir="t"/>
+    </dgm:scene3d>
+    <dgm:sp3d/>
+    <dgm:txPr/>
+    <dgm:style>
+      <a:lnRef idx="2">
+        <a:scrgbClr r="0" g="0" b="0"/>
+      </a:lnRef>
+      <a:fillRef idx="1">
+        <a:scrgbClr r="0" g="0" b="0"/>
+      </a:fillRef>
+      <a:effectRef idx="0">
+        <a:scrgbClr r="0" g="0" b="0"/>
+      </a:effectRef>
+      <a:fontRef idx="minor">
+        <a:schemeClr val="lt1"/>
+      </a:fontRef>
+    </dgm:style>
+  </dgm:styleLbl>
+  <dgm:styleLbl name="node3">
+    <dgm:scene3d>
+      <a:camera prst="orthographicFront"/>
+      <a:lightRig rig="threePt" dir="t"/>
+    </dgm:scene3d>
+    <dgm:sp3d/>
+    <dgm:txPr/>
+    <dgm:style>
+      <a:lnRef idx="2">
+        <a:scrgbClr r="0" g="0" b="0"/>
+      </a:lnRef>
+      <a:fillRef idx="1">
+        <a:scrgbClr r="0" g="0" b="0"/>
+      </a:fillRef>
+      <a:effectRef idx="0">
+        <a:scrgbClr r="0" g="0" b="0"/>
+      </a:effectRef>
+      <a:fontRef idx="minor">
+        <a:schemeClr val="lt1"/>
+      </a:fontRef>
+    </dgm:style>
+  </dgm:styleLbl>
+  <dgm:styleLbl name="node4">
+    <dgm:scene3d>
+      <a:camera prst="orthographicFront"/>
+      <a:lightRig rig="threePt" dir="t"/>
+    </dgm:scene3d>
+    <dgm:sp3d/>
+    <dgm:txPr/>
+    <dgm:style>
+      <a:lnRef idx="2">
+        <a:scrgbClr r="0" g="0" b="0"/>
+      </a:lnRef>
+      <a:fillRef idx="1">
+        <a:scrgbClr r="0" g="0" b="0"/>
+      </a:fillRef>
+      <a:effectRef idx="0">
+        <a:scrgbClr r="0" g="0" b="0"/>
+      </a:effectRef>
+      <a:fontRef idx="minor">
+        <a:schemeClr val="lt1"/>
+      </a:fontRef>
+    </dgm:style>
+  </dgm:styleLbl>
+  <dgm:styleLbl name="fgImgPlace1">
+    <dgm:scene3d>
+      <a:camera prst="orthographicFront"/>
+      <a:lightRig rig="threePt" dir="t"/>
+    </dgm:scene3d>
+    <dgm:sp3d/>
+    <dgm:txPr/>
+    <dgm:style>
+      <a:lnRef idx="2">
+        <a:scrgbClr r="0" g="0" b="0"/>
+      </a:lnRef>
+      <a:fillRef idx="1">
+        <a:scrgbClr r="0" g="0" b="0"/>
+      </a:fillRef>
+      <a:effectRef idx="0">
+        <a:scrgbClr r="0" g="0" b="0"/>
+      </a:effectRef>
+      <a:fontRef idx="minor"/>
+    </dgm:style>
+  </dgm:styleLbl>
+  <dgm:styleLbl name="alignImgPlace1">
+    <dgm:scene3d>
+      <a:camera prst="orthographicFront"/>
+      <a:lightRig rig="threePt" dir="t"/>
+    </dgm:scene3d>
+    <dgm:sp3d/>
+    <dgm:txPr/>
+    <dgm:style>
+      <a:lnRef idx="2">
+        <a:scrgbClr r="0" g="0" b="0"/>
+      </a:lnRef>
+      <a:fillRef idx="1">
+        <a:scrgbClr r="0" g="0" b="0"/>
+      </a:fillRef>
+      <a:effectRef idx="0">
+        <a:scrgbClr r="0" g="0" b="0"/>
+      </a:effectRef>
+      <a:fontRef idx="minor"/>
+    </dgm:style>
+  </dgm:styleLbl>
+  <dgm:styleLbl name="bgImgPlace1">
+    <dgm:scene3d>
+      <a:camera prst="orthographicFront"/>
+      <a:lightRig rig="threePt" dir="t"/>
+    </dgm:scene3d>
+    <dgm:sp3d/>
+    <dgm:txPr/>
+    <dgm:style>
+      <a:lnRef idx="2">
+        <a:scrgbClr r="0" g="0" b="0"/>
+      </a:lnRef>
+      <a:fillRef idx="1">
+        <a:scrgbClr r="0" g="0" b="0"/>
+      </a:fillRef>
+      <a:effectRef idx="0">
+        <a:scrgbClr r="0" g="0" b="0"/>
+      </a:effectRef>
+      <a:fontRef idx="minor"/>
+    </dgm:style>
+  </dgm:styleLbl>
+  <dgm:styleLbl name="sibTrans2D1">
+    <dgm:scene3d>
+      <a:camera prst="orthographicFront"/>
+      <a:lightRig rig="threePt" dir="t"/>
+    </dgm:scene3d>
+    <dgm:sp3d/>
+    <dgm:txPr/>
+    <dgm:style>
+      <a:lnRef idx="0">
+        <a:scrgbClr r="0" g="0" b="0"/>
+      </a:lnRef>
+      <a:fillRef idx="1">
+        <a:scrgbClr r="0" g="0" b="0"/>
+      </a:fillRef>
+      <a:effectRef idx="0">
+        <a:scrgbClr r="0" g="0" b="0"/>
+      </a:effectRef>
+      <a:fontRef idx="minor">
+        <a:schemeClr val="lt1"/>
+      </a:fontRef>
+    </dgm:style>
+  </dgm:styleLbl>
+  <dgm:styleLbl name="fgSibTrans2D1">
+    <dgm:scene3d>
+      <a:camera prst="orthographicFront"/>
+      <a:lightRig rig="threePt" dir="t"/>
+    </dgm:scene3d>
+    <dgm:sp3d/>
+    <dgm:txPr/>
+    <dgm:style>
+      <a:lnRef idx="0">
+        <a:scrgbClr r="0" g="0" b="0"/>
+      </a:lnRef>
+      <a:fillRef idx="1">
+        <a:scrgbClr r="0" g="0" b="0"/>
+      </a:fillRef>
+      <a:effectRef idx="0">
+        <a:scrgbClr r="0" g="0" b="0"/>
+      </a:effectRef>
+      <a:fontRef idx="minor">
+        <a:schemeClr val="lt1"/>
+      </a:fontRef>
+    </dgm:style>
+  </dgm:styleLbl>
+  <dgm:styleLbl name="bgSibTrans2D1">
+    <dgm:scene3d>
+      <a:camera prst="orthographicFront"/>
+      <a:lightRig rig="threePt" dir="t"/>
+    </dgm:scene3d>
+    <dgm:sp3d/>
+    <dgm:txPr/>
+    <dgm:style>
+      <a:lnRef idx="0">
+        <a:scrgbClr r="0" g="0" b="0"/>
+      </a:lnRef>
+      <a:fillRef idx="1">
+        <a:scrgbClr r="0" g="0" b="0"/>
+      </a:fillRef>
+      <a:effectRef idx="0">
+        <a:scrgbClr r="0" g="0" b="0"/>
+      </a:effectRef>
+      <a:fontRef idx="minor">
+        <a:schemeClr val="lt1"/>
+      </a:fontRef>
+    </dgm:style>
+  </dgm:styleLbl>
+  <dgm:styleLbl name="sibTrans1D1">
+    <dgm:scene3d>
+      <a:camera prst="orthographicFront"/>
+      <a:lightRig rig="threePt" dir="t"/>
+    </dgm:scene3d>
+    <dgm:sp3d/>
+    <dgm:txPr/>
+    <dgm:style>
+      <a:lnRef idx="1">
+        <a:scrgbClr r="0" g="0" b="0"/>
+      </a:lnRef>
+      <a:fillRef idx="0">
+        <a:scrgbClr r="0" g="0" b="0"/>
+      </a:fillRef>
+      <a:effectRef idx="0">
+        <a:scrgbClr r="0" g="0" b="0"/>
+      </a:effectRef>
+      <a:fontRef idx="minor"/>
+    </dgm:style>
+  </dgm:styleLbl>
+  <dgm:styleLbl name="callout">
+    <dgm:scene3d>
+      <a:camera prst="orthographicFront"/>
+      <a:lightRig rig="threePt" dir="t"/>
+    </dgm:scene3d>
+    <dgm:sp3d/>
+    <dgm:txPr/>
+    <dgm:style>
+      <a:lnRef idx="2">
+        <a:scrgbClr r="0" g="0" b="0"/>
+      </a:lnRef>
+      <a:fillRef idx="1">
+        <a:scrgbClr r="0" g="0" b="0"/>
+      </a:fillRef>
+      <a:effectRef idx="0">
+        <a:scrgbClr r="0" g="0" b="0"/>
+      </a:effectRef>
+      <a:fontRef idx="minor"/>
+    </dgm:style>
+  </dgm:styleLbl>
+  <dgm:styleLbl name="asst0">
+    <dgm:scene3d>
+      <a:camera prst="orthographicFront"/>
+      <a:lightRig rig="threePt" dir="t"/>
+    </dgm:scene3d>
+    <dgm:sp3d/>
+    <dgm:txPr/>
+    <dgm:style>
+      <a:lnRef idx="2">
+        <a:scrgbClr r="0" g="0" b="0"/>
+      </a:lnRef>
+      <a:fillRef idx="1">
+        <a:scrgbClr r="0" g="0" b="0"/>
+      </a:fillRef>
+      <a:effectRef idx="0">
+        <a:scrgbClr r="0" g="0" b="0"/>
+      </a:effectRef>
+      <a:fontRef idx="minor">
+        <a:schemeClr val="lt1"/>
+      </a:fontRef>
+    </dgm:style>
+  </dgm:styleLbl>
+  <dgm:styleLbl name="asst1">
+    <dgm:scene3d>
+      <a:camera prst="orthographicFront"/>
+      <a:lightRig rig="threePt" dir="t"/>
+    </dgm:scene3d>
+    <dgm:sp3d/>
+    <dgm:txPr/>
+    <dgm:style>
+      <a:lnRef idx="2">
+        <a:scrgbClr r="0" g="0" b="0"/>
+      </a:lnRef>
+      <a:fillRef idx="1">
+        <a:scrgbClr r="0" g="0" b="0"/>
+      </a:fillRef>
+      <a:effectRef idx="0">
+        <a:scrgbClr r="0" g="0" b="0"/>
+      </a:effectRef>
+      <a:fontRef idx="minor">
+        <a:schemeClr val="lt1"/>
+      </a:fontRef>
+    </dgm:style>
+  </dgm:styleLbl>
+  <dgm:styleLbl name="asst2">
+    <dgm:scene3d>
+      <a:camera prst="orthographicFront"/>
+      <a:lightRig rig="threePt" dir="t"/>
+    </dgm:scene3d>
+    <dgm:sp3d/>
+    <dgm:txPr/>
+    <dgm:style>
+      <a:lnRef idx="2">
+        <a:scrgbClr r="0" g="0" b="0"/>
+      </a:lnRef>
+      <a:fillRef idx="1">
+        <a:scrgbClr r="0" g="0" b="0"/>
+      </a:fillRef>
+      <a:effectRef idx="0">
+        <a:scrgbClr r="0" g="0" b="0"/>
+      </a:effectRef>
+      <a:fontRef idx="minor">
+        <a:schemeClr val="lt1"/>
+      </a:fontRef>
+    </dgm:style>
+  </dgm:styleLbl>
+  <dgm:styleLbl name="asst3">
+    <dgm:scene3d>
+      <a:camera prst="orthographicFront"/>
+      <a:lightRig rig="threePt" dir="t"/>
+    </dgm:scene3d>
+    <dgm:sp3d/>
+    <dgm:txPr/>
+    <dgm:style>
+      <a:lnRef idx="2">
+        <a:scrgbClr r="0" g="0" b="0"/>
+      </a:lnRef>
+      <a:fillRef idx="1">
+        <a:scrgbClr r="0" g="0" b="0"/>
+      </a:fillRef>
+      <a:effectRef idx="0">
+        <a:scrgbClr r="0" g="0" b="0"/>
+      </a:effectRef>
+      <a:fontRef idx="minor">
+        <a:schemeClr val="lt1"/>
+      </a:fontRef>
+    </dgm:style>
+  </dgm:styleLbl>
+  <dgm:styleLbl name="asst4">
+    <dgm:scene3d>
+      <a:camera prst="orthographicFront"/>
+      <a:lightRig rig="threePt" dir="t"/>
+    </dgm:scene3d>
+    <dgm:sp3d/>
+    <dgm:txPr/>
+    <dgm:style>
+      <a:lnRef idx="2">
+        <a:scrgbClr r="0" g="0" b="0"/>
+      </a:lnRef>
+      <a:fillRef idx="1">
+        <a:scrgbClr r="0" g="0" b="0"/>
+      </a:fillRef>
+      <a:effectRef idx="0">
+        <a:scrgbClr r="0" g="0" b="0"/>
+      </a:effectRef>
+      <a:fontRef idx="minor">
+        <a:schemeClr val="lt1"/>
+      </a:fontRef>
+    </dgm:style>
+  </dgm:styleLbl>
+  <dgm:styleLbl name="parChTrans2D1">
+    <dgm:scene3d>
+      <a:camera prst="orthographicFront"/>
+      <a:lightRig rig="threePt" dir="t"/>
+    </dgm:scene3d>
+    <dgm:sp3d/>
+    <dgm:txPr/>
+    <dgm:style>
+      <a:lnRef idx="2">
+        <a:scrgbClr r="0" g="0" b="0"/>
+      </a:lnRef>
+      <a:fillRef idx="1">
+        <a:scrgbClr r="0" g="0" b="0"/>
+      </a:fillRef>
+      <a:effectRef idx="0">
+        <a:scrgbClr r="0" g="0" b="0"/>
+      </a:effectRef>
+      <a:fontRef idx="minor">
+        <a:schemeClr val="lt1"/>
+      </a:fontRef>
+    </dgm:style>
+  </dgm:styleLbl>
+  <dgm:styleLbl name="parChTrans2D2">
+    <dgm:scene3d>
+      <a:camera prst="orthographicFront"/>
+      <a:lightRig rig="threePt" dir="t"/>
+    </dgm:scene3d>
+    <dgm:sp3d/>
+    <dgm:txPr/>
+    <dgm:style>
+      <a:lnRef idx="2">
+        <a:scrgbClr r="0" g="0" b="0"/>
+      </a:lnRef>
+      <a:fillRef idx="1">
+        <a:scrgbClr r="0" g="0" b="0"/>
+      </a:fillRef>
+      <a:effectRef idx="0">
+        <a:scrgbClr r="0" g="0" b="0"/>
+      </a:effectRef>
+      <a:fontRef idx="minor">
+        <a:schemeClr val="lt1"/>
+      </a:fontRef>
+    </dgm:style>
+  </dgm:styleLbl>
+  <dgm:styleLbl name="parChTrans2D3">
+    <dgm:scene3d>
+      <a:camera prst="orthographicFront"/>
+      <a:lightRig rig="threePt" dir="t"/>
+    </dgm:scene3d>
+    <dgm:sp3d/>
+    <dgm:txPr/>
+    <dgm:style>
+      <a:lnRef idx="2">
+        <a:scrgbClr r="0" g="0" b="0"/>
+      </a:lnRef>
+      <a:fillRef idx="1">
+        <a:scrgbClr r="0" g="0" b="0"/>
+      </a:fillRef>
+      <a:effectRef idx="0">
+        <a:scrgbClr r="0" g="0" b="0"/>
+      </a:effectRef>
+      <a:fontRef idx="minor">
+        <a:schemeClr val="lt1"/>
+      </a:fontRef>
+    </dgm:style>
+  </dgm:styleLbl>
+  <dgm:styleLbl name="parChTrans2D4">
+    <dgm:scene3d>
+      <a:camera prst="orthographicFront"/>
+      <a:lightRig rig="threePt" dir="t"/>
+    </dgm:scene3d>
+    <dgm:sp3d/>
+    <dgm:txPr/>
+    <dgm:style>
+      <a:lnRef idx="2">
+        <a:scrgbClr r="0" g="0" b="0"/>
+      </a:lnRef>
+      <a:fillRef idx="1">
+        <a:scrgbClr r="0" g="0" b="0"/>
+      </a:fillRef>
+      <a:effectRef idx="0">
+        <a:scrgbClr r="0" g="0" b="0"/>
+      </a:effectRef>
+      <a:fontRef idx="minor">
+        <a:schemeClr val="lt1"/>
+      </a:fontRef>
+    </dgm:style>
+  </dgm:styleLbl>
+  <dgm:styleLbl name="parChTrans1D1">
+    <dgm:scene3d>
+      <a:camera prst="orthographicFront"/>
+      <a:lightRig rig="threePt" dir="t"/>
+    </dgm:scene3d>
+    <dgm:sp3d/>
+    <dgm:txPr/>
+    <dgm:style>
+      <a:lnRef idx="2">
+        <a:scrgbClr r="0" g="0" b="0"/>
+      </a:lnRef>
+      <a:fillRef idx="0">
+        <a:scrgbClr r="0" g="0" b="0"/>
+      </a:fillRef>
+      <a:effectRef idx="0">
+        <a:scrgbClr r="0" g="0" b="0"/>
+      </a:effectRef>
+      <a:fontRef idx="minor"/>
+    </dgm:style>
+  </dgm:styleLbl>
+  <dgm:styleLbl name="parChTrans1D2">
+    <dgm:scene3d>
+      <a:camera prst="orthographicFront"/>
+      <a:lightRig rig="threePt" dir="t"/>
+    </dgm:scene3d>
+    <dgm:sp3d/>
+    <dgm:txPr/>
+    <dgm:style>
+      <a:lnRef idx="2">
+        <a:scrgbClr r="0" g="0" b="0"/>
+      </a:lnRef>
+      <a:fillRef idx="0">
+        <a:scrgbClr r="0" g="0" b="0"/>
+      </a:fillRef>
+      <a:effectRef idx="0">
+        <a:scrgbClr r="0" g="0" b="0"/>
+      </a:effectRef>
+      <a:fontRef idx="minor"/>
+    </dgm:style>
+  </dgm:styleLbl>
+  <dgm:styleLbl name="parChTrans1D3">
+    <dgm:scene3d>
+      <a:camera prst="orthographicFront"/>
+      <a:lightRig rig="threePt" dir="t"/>
+    </dgm:scene3d>
+    <dgm:sp3d/>
+    <dgm:txPr/>
+    <dgm:style>
+      <a:lnRef idx="2">
+        <a:scrgbClr r="0" g="0" b="0"/>
+      </a:lnRef>
+      <a:fillRef idx="0">
+        <a:scrgbClr r="0" g="0" b="0"/>
+      </a:fillRef>
+      <a:effectRef idx="0">
+        <a:scrgbClr r="0" g="0" b="0"/>
+      </a:effectRef>
+      <a:fontRef idx="minor"/>
+    </dgm:style>
+  </dgm:styleLbl>
+  <dgm:styleLbl name="parChTrans1D4">
+    <dgm:scene3d>
+      <a:camera prst="orthographicFront"/>
+      <a:lightRig rig="threePt" dir="t"/>
+    </dgm:scene3d>
+    <dgm:sp3d/>
+    <dgm:txPr/>
+    <dgm:style>
+      <a:lnRef idx="2">
+        <a:scrgbClr r="0" g="0" b="0"/>
+      </a:lnRef>
+      <a:fillRef idx="0">
+        <a:scrgbClr r="0" g="0" b="0"/>
+      </a:fillRef>
+      <a:effectRef idx="0">
+        <a:scrgbClr r="0" g="0" b="0"/>
+      </a:effectRef>
+      <a:fontRef idx="minor"/>
+    </dgm:style>
+  </dgm:styleLbl>
+  <dgm:styleLbl name="fgAcc1">
+    <dgm:scene3d>
+      <a:camera prst="orthographicFront"/>
+      <a:lightRig rig="threePt" dir="t"/>
+    </dgm:scene3d>
+    <dgm:sp3d/>
+    <dgm:txPr/>
+    <dgm:style>
+      <a:lnRef idx="2">
+        <a:scrgbClr r="0" g="0" b="0"/>
+      </a:lnRef>
+      <a:fillRef idx="1">
+        <a:scrgbClr r="0" g="0" b="0"/>
+      </a:fillRef>
+      <a:effectRef idx="0">
+        <a:scrgbClr r="0" g="0" b="0"/>
+      </a:effectRef>
+      <a:fontRef idx="minor"/>
+    </dgm:style>
+  </dgm:styleLbl>
+  <dgm:styleLbl name="conFgAcc1">
+    <dgm:scene3d>
+      <a:camera prst="orthographicFront"/>
+      <a:lightRig rig="threePt" dir="t"/>
+    </dgm:scene3d>
+    <dgm:sp3d/>
+    <dgm:txPr/>
+    <dgm:style>
+      <a:lnRef idx="2">
+        <a:scrgbClr r="0" g="0" b="0"/>
+      </a:lnRef>
+      <a:fillRef idx="1">
+        <a:scrgbClr r="0" g="0" b="0"/>
+      </a:fillRef>
+      <a:effectRef idx="0">
+        <a:scrgbClr r="0" g="0" b="0"/>
+      </a:effectRef>
+      <a:fontRef idx="minor"/>
+    </dgm:style>
+  </dgm:styleLbl>
+  <dgm:styleLbl name="alignAcc1">
+    <dgm:scene3d>
+      <a:camera prst="orthographicFront"/>
+      <a:lightRig rig="threePt" dir="t"/>
+    </dgm:scene3d>
+    <dgm:sp3d/>
+    <dgm:txPr/>
+    <dgm:style>
+      <a:lnRef idx="2">
+        <a:scrgbClr r="0" g="0" b="0"/>
+      </a:lnRef>
+      <a:fillRef idx="1">
+        <a:scrgbClr r="0" g="0" b="0"/>
+      </a:fillRef>
+      <a:effectRef idx="0">
+        <a:scrgbClr r="0" g="0" b="0"/>
+      </a:effectRef>
+      <a:fontRef idx="minor"/>
+    </dgm:style>
+  </dgm:styleLbl>
+  <dgm:styleLbl name="trAlignAcc1">
+    <dgm:scene3d>
+      <a:camera prst="orthographicFront"/>
+      <a:lightRig rig="threePt" dir="t"/>
+    </dgm:scene3d>
+    <dgm:sp3d/>
+    <dgm:txPr/>
+    <dgm:style>
+      <a:lnRef idx="1">
+        <a:scrgbClr r="0" g="0" b="0"/>
+      </a:lnRef>
+      <a:fillRef idx="1">
+        <a:scrgbClr r="0" g="0" b="0"/>
+      </a:fillRef>
+      <a:effectRef idx="0">
+        <a:scrgbClr r="0" g="0" b="0"/>
+      </a:effectRef>
+      <a:fontRef idx="minor"/>
+    </dgm:style>
+  </dgm:styleLbl>
+  <dgm:styleLbl name="bgAcc1">
+    <dgm:scene3d>
+      <a:camera prst="orthographicFront"/>
+      <a:lightRig rig="threePt" dir="t"/>
+    </dgm:scene3d>
+    <dgm:sp3d/>
+    <dgm:txPr/>
+    <dgm:style>
+      <a:lnRef idx="2">
+        <a:scrgbClr r="0" g="0" b="0"/>
+      </a:lnRef>
+      <a:fillRef idx="1">
+        <a:scrgbClr r="0" g="0" b="0"/>
+      </a:fillRef>
+      <a:effectRef idx="0">
+        <a:scrgbClr r="0" g="0" b="0"/>
+      </a:effectRef>
+      <a:fontRef idx="minor"/>
+    </dgm:style>
+  </dgm:styleLbl>
+  <dgm:styleLbl name="solidFgAcc1">
+    <dgm:scene3d>
+      <a:camera prst="orthographicFront"/>
+      <a:lightRig rig="threePt" dir="t"/>
+    </dgm:scene3d>
+    <dgm:sp3d/>
+    <dgm:txPr/>
+    <dgm:style>
+      <a:lnRef idx="2">
+        <a:scrgbClr r="0" g="0" b="0"/>
+      </a:lnRef>
+      <a:fillRef idx="1">
+        <a:scrgbClr r="0" g="0" b="0"/>
+      </a:fillRef>
+      <a:effectRef idx="0">
+        <a:scrgbClr r="0" g="0" b="0"/>
+      </a:effectRef>
+      <a:fontRef idx="minor"/>
+    </dgm:style>
+  </dgm:styleLbl>
+  <dgm:styleLbl name="solidAlignAcc1">
+    <dgm:scene3d>
+      <a:camera prst="orthographicFront"/>
+      <a:lightRig rig="threePt" dir="t"/>
+    </dgm:scene3d>
+    <dgm:sp3d/>
+    <dgm:txPr/>
+    <dgm:style>
+      <a:lnRef idx="2">
+        <a:scrgbClr r="0" g="0" b="0"/>
+      </a:lnRef>
+      <a:fillRef idx="1">
+        <a:scrgbClr r="0" g="0" b="0"/>
+      </a:fillRef>
+      <a:effectRef idx="0">
+        <a:scrgbClr r="0" g="0" b="0"/>
+      </a:effectRef>
+      <a:fontRef idx="minor"/>
+    </dgm:style>
+  </dgm:styleLbl>
+  <dgm:styleLbl name="solidBgAcc1">
+    <dgm:scene3d>
+      <a:camera prst="orthographicFront"/>
+      <a:lightRig rig="threePt" dir="t"/>
+    </dgm:scene3d>
+    <dgm:sp3d/>
+    <dgm:txPr/>
+    <dgm:style>
+      <a:lnRef idx="2">
+        <a:scrgbClr r="0" g="0" b="0"/>
+      </a:lnRef>
+      <a:fillRef idx="1">
+        <a:scrgbClr r="0" g="0" b="0"/>
+      </a:fillRef>
+      <a:effectRef idx="0">
+        <a:scrgbClr r="0" g="0" b="0"/>
+      </a:effectRef>
+      <a:fontRef idx="minor"/>
+    </dgm:style>
+  </dgm:styleLbl>
+  <dgm:styleLbl name="fgAccFollowNode1">
+    <dgm:scene3d>
+      <a:camera prst="orthographicFront"/>
+      <a:lightRig rig="threePt" dir="t"/>
+    </dgm:scene3d>
+    <dgm:sp3d/>
+    <dgm:txPr/>
+    <dgm:style>
+      <a:lnRef idx="2">
+        <a:scrgbClr r="0" g="0" b="0"/>
+      </a:lnRef>
+      <a:fillRef idx="1">
+        <a:scrgbClr r="0" g="0" b="0"/>
+      </a:fillRef>
+      <a:effectRef idx="0">
+        <a:scrgbClr r="0" g="0" b="0"/>
+      </a:effectRef>
+      <a:fontRef idx="minor"/>
+    </dgm:style>
+  </dgm:styleLbl>
+  <dgm:styleLbl name="alignAccFollowNode1">
+    <dgm:scene3d>
+      <a:camera prst="orthographicFront"/>
+      <a:lightRig rig="threePt" dir="t"/>
+    </dgm:scene3d>
+    <dgm:sp3d/>
+    <dgm:txPr/>
+    <dgm:style>
+      <a:lnRef idx="2">
+        <a:scrgbClr r="0" g="0" b="0"/>
+      </a:lnRef>
+      <a:fillRef idx="1">
+        <a:scrgbClr r="0" g="0" b="0"/>
+      </a:fillRef>
+      <a:effectRef idx="0">
+        <a:scrgbClr r="0" g="0" b="0"/>
+      </a:effectRef>
+      <a:fontRef idx="minor"/>
+    </dgm:style>
+  </dgm:styleLbl>
+  <dgm:styleLbl name="bgAccFollowNode1">
+    <dgm:scene3d>
+      <a:camera prst="orthographicFront"/>
+      <a:lightRig rig="threePt" dir="t"/>
+    </dgm:scene3d>
+    <dgm:sp3d/>
+    <dgm:txPr/>
+    <dgm:style>
+      <a:lnRef idx="2">
+        <a:scrgbClr r="0" g="0" b="0"/>
+      </a:lnRef>
+      <a:fillRef idx="1">
+        <a:scrgbClr r="0" g="0" b="0"/>
+      </a:fillRef>
+      <a:effectRef idx="0">
+        <a:scrgbClr r="0" g="0" b="0"/>
+      </a:effectRef>
+      <a:fontRef idx="minor"/>
+    </dgm:style>
+  </dgm:styleLbl>
+  <dgm:styleLbl name="fgAcc0">
+    <dgm:scene3d>
+      <a:camera prst="orthographicFront"/>
+      <a:lightRig rig="threePt" dir="t"/>
+    </dgm:scene3d>
+    <dgm:sp3d/>
+    <dgm:txPr/>
+    <dgm:style>
+      <a:lnRef idx="2">
+        <a:scrgbClr r="0" g="0" b="0"/>
+      </a:lnRef>
+      <a:fillRef idx="1">
+        <a:scrgbClr r="0" g="0" b="0"/>
+      </a:fillRef>
+      <a:effectRef idx="0">
+        <a:scrgbClr r="0" g="0" b="0"/>
+      </a:effectRef>
+      <a:fontRef idx="minor"/>
+    </dgm:style>
+  </dgm:styleLbl>
+  <dgm:styleLbl name="fgAcc2">
+    <dgm:scene3d>
+      <a:camera prst="orthographicFront"/>
+      <a:lightRig rig="threePt" dir="t"/>
+    </dgm:scene3d>
+    <dgm:sp3d/>
+    <dgm:txPr/>
+    <dgm:style>
+      <a:lnRef idx="2">
+        <a:scrgbClr r="0" g="0" b="0"/>
+      </a:lnRef>
+      <a:fillRef idx="1">
+        <a:scrgbClr r="0" g="0" b="0"/>
+      </a:fillRef>
+      <a:effectRef idx="0">
+        <a:scrgbClr r="0" g="0" b="0"/>
+      </a:effectRef>
+      <a:fontRef idx="minor"/>
+    </dgm:style>
+  </dgm:styleLbl>
+  <dgm:styleLbl name="fgAcc3">
+    <dgm:scene3d>
+      <a:camera prst="orthographicFront"/>
+      <a:lightRig rig="threePt" dir="t"/>
+    </dgm:scene3d>
+    <dgm:sp3d/>
+    <dgm:txPr/>
+    <dgm:style>
+      <a:lnRef idx="2">
+        <a:scrgbClr r="0" g="0" b="0"/>
+      </a:lnRef>
+      <a:fillRef idx="1">
+        <a:scrgbClr r="0" g="0" b="0"/>
+      </a:fillRef>
+      <a:effectRef idx="0">
+        <a:scrgbClr r="0" g="0" b="0"/>
+      </a:effectRef>
+      <a:fontRef idx="minor"/>
+    </dgm:style>
+  </dgm:styleLbl>
+  <dgm:styleLbl name="fgAcc4">
+    <dgm:scene3d>
+      <a:camera prst="orthographicFront"/>
+      <a:lightRig rig="threePt" dir="t"/>
+    </dgm:scene3d>
+    <dgm:sp3d/>
+    <dgm:txPr/>
+    <dgm:style>
+      <a:lnRef idx="2">
+        <a:scrgbClr r="0" g="0" b="0"/>
+      </a:lnRef>
+      <a:fillRef idx="1">
+        <a:scrgbClr r="0" g="0" b="0"/>
+      </a:fillRef>
+      <a:effectRef idx="0">
+        <a:scrgbClr r="0" g="0" b="0"/>
+      </a:effectRef>
+      <a:fontRef idx="minor"/>
+    </dgm:style>
+  </dgm:styleLbl>
+  <dgm:styleLbl name="bgShp">
+    <dgm:scene3d>
+      <a:camera prst="orthographicFront"/>
+      <a:lightRig rig="threePt" dir="t"/>
+    </dgm:scene3d>
+    <dgm:sp3d/>
+    <dgm:txPr/>
+    <dgm:style>
+      <a:lnRef idx="0">
+        <a:scrgbClr r="0" g="0" b="0"/>
+      </a:lnRef>
+      <a:fillRef idx="1">
+        <a:scrgbClr r="0" g="0" b="0"/>
+      </a:fillRef>
+      <a:effectRef idx="0">
+        <a:scrgbClr r="0" g="0" b="0"/>
+      </a:effectRef>
+      <a:fontRef idx="minor"/>
+    </dgm:style>
+  </dgm:styleLbl>
+  <dgm:styleLbl name="dkBgShp">
+    <dgm:scene3d>
+      <a:camera prst="orthographicFront"/>
+      <a:lightRig rig="threePt" dir="t"/>
+    </dgm:scene3d>
+    <dgm:sp3d/>
+    <dgm:txPr/>
+    <dgm:style>
+      <a:lnRef idx="0">
+        <a:scrgbClr r="0" g="0" b="0"/>
+      </a:lnRef>
+      <a:fillRef idx="1">
+        <a:scrgbClr r="0" g="0" b="0"/>
+      </a:fillRef>
+      <a:effectRef idx="0">
+        <a:scrgbClr r="0" g="0" b="0"/>
+      </a:effectRef>
+      <a:fontRef idx="minor"/>
+    </dgm:style>
+  </dgm:styleLbl>
+  <dgm:styleLbl name="trBgShp">
+    <dgm:scene3d>
+      <a:camera prst="orthographicFront"/>
+      <a:lightRig rig="threePt" dir="t"/>
+    </dgm:scene3d>
+    <dgm:sp3d/>
+    <dgm:txPr/>
+    <dgm:style>
+      <a:lnRef idx="0">
+        <a:scrgbClr r="0" g="0" b="0"/>
+      </a:lnRef>
+      <a:fillRef idx="1">
+        <a:scrgbClr r="0" g="0" b="0"/>
+      </a:fillRef>
+      <a:effectRef idx="0">
+        <a:scrgbClr r="0" g="0" b="0"/>
+      </a:effectRef>
+      <a:fontRef idx="minor"/>
+    </dgm:style>
+  </dgm:styleLbl>
+  <dgm:styleLbl name="fgShp">
+    <dgm:scene3d>
+      <a:camera prst="orthographicFront"/>
+      <a:lightRig rig="threePt" dir="t"/>
+    </dgm:scene3d>
+    <dgm:sp3d/>
+    <dgm:txPr/>
+    <dgm:style>
+      <a:lnRef idx="2">
+        <a:scrgbClr r="0" g="0" b="0"/>
+      </a:lnRef>
+      <a:fillRef idx="1">
+        <a:scrgbClr r="0" g="0" b="0"/>
+      </a:fillRef>
+      <a:effectRef idx="0">
+        <a:scrgbClr r="0" g="0" b="0"/>
+      </a:effectRef>
+      <a:fontRef idx="minor"/>
+    </dgm:style>
+  </dgm:styleLbl>
+  <dgm:styleLbl name="revTx">
+    <dgm:scene3d>
+      <a:camera prst="orthographicFront"/>
+      <a:lightRig rig="threePt" dir="t"/>
+    </dgm:scene3d>
+    <dgm:sp3d/>
+    <dgm:txPr/>
+    <dgm:style>
+      <a:lnRef idx="0">
+        <a:scrgbClr r="0" g="0" b="0"/>
+      </a:lnRef>
+      <a:fillRef idx="0">
+        <a:scrgbClr r="0" g="0" b="0"/>
+      </a:fillRef>
+      <a:effectRef idx="0">
+        <a:scrgbClr r="0" g="0" b="0"/>
+      </a:effectRef>
+      <a:fontRef idx="minor"/>
+    </dgm:style>
+  </dgm:styleLbl>
+</dgm:styleDef>
+</file>
+
+<file path=ppt/diagrams/quickStyle2.xml><?xml version="1.0" encoding="utf-8"?>
 <dgm:styleDef xmlns:dgm="http://schemas.openxmlformats.org/drawingml/2006/diagram" xmlns:a="http://schemas.openxmlformats.org/drawingml/2006/main" uniqueId="urn:microsoft.com/office/officeart/2005/8/quickstyle/simple1">
   <dgm:title val=""/>
   <dgm:desc val=""/>
@@ -14485,7 +18551,7 @@
             <a:pPr algn="l"/>
             <a:r>
               <a:rPr lang="en-US" altLang="zh-CN" sz="3600" dirty="0"/>
-              <a:t>Chapter 03: Choose Power BI</a:t>
+              <a:t>Chapter 03: Choices of Power BI – (1)</a:t>
             </a:r>
             <a:endParaRPr lang="en-US" sz="3600" dirty="0"/>
           </a:p>
@@ -14770,6 +18836,2387 @@
 </file>
 
 <file path=ppt/slides/slide12.xml><?xml version="1.0" encoding="utf-8"?>
+<p:sld xmlns:a="http://schemas.openxmlformats.org/drawingml/2006/main" xmlns:r="http://schemas.openxmlformats.org/officeDocument/2006/relationships" xmlns:p="http://schemas.openxmlformats.org/presentationml/2006/main">
+  <p:cSld>
+    <p:spTree>
+      <p:nvGrpSpPr>
+        <p:cNvPr id="1" name="">
+          <a:extLst>
+            <a:ext uri="{FF2B5EF4-FFF2-40B4-BE49-F238E27FC236}">
+              <a16:creationId xmlns:a16="http://schemas.microsoft.com/office/drawing/2014/main" id="{118CE7C6-F73C-CCC3-71F0-C98AC02BF226}"/>
+            </a:ext>
+          </a:extLst>
+        </p:cNvPr>
+        <p:cNvGrpSpPr/>
+        <p:nvPr/>
+      </p:nvGrpSpPr>
+      <p:grpSpPr>
+        <a:xfrm>
+          <a:off x="0" y="0"/>
+          <a:ext cx="0" cy="0"/>
+          <a:chOff x="0" y="0"/>
+          <a:chExt cx="0" cy="0"/>
+        </a:xfrm>
+      </p:grpSpPr>
+      <p:sp>
+        <p:nvSpPr>
+          <p:cNvPr id="2" name="Title 1">
+            <a:extLst>
+              <a:ext uri="{FF2B5EF4-FFF2-40B4-BE49-F238E27FC236}">
+                <a16:creationId xmlns:a16="http://schemas.microsoft.com/office/drawing/2014/main" id="{4836F33F-60EF-327A-620B-DEB51E6AF4B8}"/>
+              </a:ext>
+            </a:extLst>
+          </p:cNvPr>
+          <p:cNvSpPr>
+            <a:spLocks noGrp="1"/>
+          </p:cNvSpPr>
+          <p:nvPr>
+            <p:ph type="title"/>
+          </p:nvPr>
+        </p:nvSpPr>
+        <p:spPr>
+          <a:xfrm>
+            <a:off x="1409826" y="131063"/>
+            <a:ext cx="6772881" cy="793260"/>
+          </a:xfrm>
+        </p:spPr>
+        <p:txBody>
+          <a:bodyPr anchor="ctr"/>
+          <a:lstStyle/>
+          <a:p>
+            <a:pPr algn="l"/>
+            <a:r>
+              <a:rPr lang="en-US" dirty="0"/>
+              <a:t>Power BI Tutorial</a:t>
+            </a:r>
+          </a:p>
+        </p:txBody>
+      </p:sp>
+      <p:sp>
+        <p:nvSpPr>
+          <p:cNvPr id="4" name="Text Placeholder 3">
+            <a:extLst>
+              <a:ext uri="{FF2B5EF4-FFF2-40B4-BE49-F238E27FC236}">
+                <a16:creationId xmlns:a16="http://schemas.microsoft.com/office/drawing/2014/main" id="{E89550DA-F468-B7C6-0B9F-FF6D027474B6}"/>
+              </a:ext>
+            </a:extLst>
+          </p:cNvPr>
+          <p:cNvSpPr>
+            <a:spLocks noGrp="1"/>
+          </p:cNvSpPr>
+          <p:nvPr>
+            <p:ph type="body" sz="quarter" idx="13"/>
+          </p:nvPr>
+        </p:nvSpPr>
+        <p:spPr>
+          <a:xfrm>
+            <a:off x="2079148" y="915490"/>
+            <a:ext cx="9314437" cy="1097280"/>
+          </a:xfrm>
+        </p:spPr>
+        <p:txBody>
+          <a:bodyPr anchor="ctr">
+            <a:normAutofit lnSpcReduction="10000"/>
+          </a:bodyPr>
+          <a:lstStyle/>
+          <a:p>
+            <a:pPr algn="l"/>
+            <a:r>
+              <a:rPr lang="en-US" sz="3600" dirty="0"/>
+              <a:t>Part 1. Put Your BI Thinking Caps On</a:t>
+            </a:r>
+          </a:p>
+          <a:p>
+            <a:pPr algn="l"/>
+            <a:r>
+              <a:rPr lang="en-US" altLang="zh-CN" sz="3600" dirty="0"/>
+              <a:t>Chapter 03: Choices of Power BI – (2)</a:t>
+            </a:r>
+            <a:endParaRPr lang="en-US" sz="3600" dirty="0"/>
+          </a:p>
+        </p:txBody>
+      </p:sp>
+      <p:sp>
+        <p:nvSpPr>
+          <p:cNvPr id="5" name="TextBox 4">
+            <a:extLst>
+              <a:ext uri="{FF2B5EF4-FFF2-40B4-BE49-F238E27FC236}">
+                <a16:creationId xmlns:a16="http://schemas.microsoft.com/office/drawing/2014/main" id="{81C55352-E4CF-1FB9-DB2A-1FE755314D73}"/>
+              </a:ext>
+            </a:extLst>
+          </p:cNvPr>
+          <p:cNvSpPr txBox="1"/>
+          <p:nvPr/>
+        </p:nvSpPr>
+        <p:spPr>
+          <a:xfrm>
+            <a:off x="9487400" y="11040"/>
+            <a:ext cx="2704600" cy="1200329"/>
+          </a:xfrm>
+          <a:prstGeom prst="rect">
+            <a:avLst/>
+          </a:prstGeom>
+          <a:noFill/>
+        </p:spPr>
+        <p:txBody>
+          <a:bodyPr wrap="square" rtlCol="0" anchor="ctr">
+            <a:spAutoFit/>
+          </a:bodyPr>
+          <a:lstStyle/>
+          <a:p>
+            <a:pPr algn="ctr"/>
+            <a:r>
+              <a:rPr lang="en-US" sz="7200" b="1" dirty="0">
+                <a:ln w="9525">
+                  <a:solidFill>
+                    <a:schemeClr val="bg1"/>
+                  </a:solidFill>
+                  <a:prstDash val="solid"/>
+                </a:ln>
+                <a:solidFill>
+                  <a:schemeClr val="accent3">
+                    <a:lumMod val="20000"/>
+                    <a:lumOff val="80000"/>
+                  </a:schemeClr>
+                </a:solidFill>
+                <a:effectLst>
+                  <a:outerShdw blurRad="12700" dist="38100" dir="2700000" algn="tl" rotWithShape="0">
+                    <a:schemeClr val="bg1">
+                      <a:lumMod val="50000"/>
+                    </a:schemeClr>
+                  </a:outerShdw>
+                </a:effectLst>
+                <a:latin typeface="Goudy Stout" panose="0202090407030B020401" pitchFamily="18" charset="0"/>
+              </a:rPr>
+              <a:t>008</a:t>
+            </a:r>
+          </a:p>
+        </p:txBody>
+      </p:sp>
+      <p:pic>
+        <p:nvPicPr>
+          <p:cNvPr id="8" name="Picture 7">
+            <a:extLst>
+              <a:ext uri="{FF2B5EF4-FFF2-40B4-BE49-F238E27FC236}">
+                <a16:creationId xmlns:a16="http://schemas.microsoft.com/office/drawing/2014/main" id="{87388808-FB87-2335-8CF4-A1CC9B7AFF24}"/>
+              </a:ext>
+            </a:extLst>
+          </p:cNvPr>
+          <p:cNvPicPr>
+            <a:picLocks noChangeAspect="1"/>
+          </p:cNvPicPr>
+          <p:nvPr/>
+        </p:nvPicPr>
+        <p:blipFill>
+          <a:blip r:embed="rId2"/>
+          <a:stretch>
+            <a:fillRect/>
+          </a:stretch>
+        </p:blipFill>
+        <p:spPr>
+          <a:xfrm>
+            <a:off x="23412" y="30114"/>
+            <a:ext cx="1386414" cy="1380564"/>
+          </a:xfrm>
+          <a:prstGeom prst="rect">
+            <a:avLst/>
+          </a:prstGeom>
+          <a:ln>
+            <a:noFill/>
+          </a:ln>
+          <a:effectLst>
+            <a:softEdge rad="112500"/>
+          </a:effectLst>
+        </p:spPr>
+      </p:pic>
+      <p:sp>
+        <p:nvSpPr>
+          <p:cNvPr id="12" name="TextBox 11">
+            <a:extLst>
+              <a:ext uri="{FF2B5EF4-FFF2-40B4-BE49-F238E27FC236}">
+                <a16:creationId xmlns:a16="http://schemas.microsoft.com/office/drawing/2014/main" id="{E18DF251-9F56-FD6A-1C82-766E6BE0447C}"/>
+              </a:ext>
+            </a:extLst>
+          </p:cNvPr>
+          <p:cNvSpPr txBox="1"/>
+          <p:nvPr/>
+        </p:nvSpPr>
+        <p:spPr>
+          <a:xfrm>
+            <a:off x="23412" y="6458554"/>
+            <a:ext cx="7163844" cy="369332"/>
+          </a:xfrm>
+          <a:prstGeom prst="rect">
+            <a:avLst/>
+          </a:prstGeom>
+          <a:noFill/>
+        </p:spPr>
+        <p:txBody>
+          <a:bodyPr wrap="square">
+            <a:spAutoFit/>
+          </a:bodyPr>
+          <a:lstStyle/>
+          <a:p>
+            <a:r>
+              <a:rPr lang="en-US" b="1" dirty="0"/>
+              <a:t>Repository: </a:t>
+            </a:r>
+            <a:r>
+              <a:rPr lang="en-US" b="1" dirty="0">
+                <a:hlinkClick r:id="rId3"/>
+              </a:rPr>
+              <a:t>https://github.com/yasenstar/PowerBI_Tutorial</a:t>
+            </a:r>
+            <a:endParaRPr lang="en-US" b="1" dirty="0"/>
+          </a:p>
+        </p:txBody>
+      </p:sp>
+      <p:pic>
+        <p:nvPicPr>
+          <p:cNvPr id="13" name="Picture 12">
+            <a:extLst>
+              <a:ext uri="{FF2B5EF4-FFF2-40B4-BE49-F238E27FC236}">
+                <a16:creationId xmlns:a16="http://schemas.microsoft.com/office/drawing/2014/main" id="{287B186B-F8F6-577C-9CE9-45D1AF461ADB}"/>
+              </a:ext>
+            </a:extLst>
+          </p:cNvPr>
+          <p:cNvPicPr>
+            <a:picLocks noChangeAspect="1"/>
+          </p:cNvPicPr>
+          <p:nvPr/>
+        </p:nvPicPr>
+        <p:blipFill>
+          <a:blip r:embed="rId4"/>
+          <a:stretch>
+            <a:fillRect/>
+          </a:stretch>
+        </p:blipFill>
+        <p:spPr>
+          <a:xfrm>
+            <a:off x="97030" y="1487212"/>
+            <a:ext cx="1850713" cy="2315544"/>
+          </a:xfrm>
+          <a:prstGeom prst="rect">
+            <a:avLst/>
+          </a:prstGeom>
+          <a:ln>
+            <a:noFill/>
+          </a:ln>
+          <a:effectLst>
+            <a:outerShdw blurRad="190500" algn="tl" rotWithShape="0">
+              <a:srgbClr val="000000">
+                <a:alpha val="70000"/>
+              </a:srgbClr>
+            </a:outerShdw>
+          </a:effectLst>
+        </p:spPr>
+      </p:pic>
+      <p:pic>
+        <p:nvPicPr>
+          <p:cNvPr id="6" name="Picture 5">
+            <a:extLst>
+              <a:ext uri="{FF2B5EF4-FFF2-40B4-BE49-F238E27FC236}">
+                <a16:creationId xmlns:a16="http://schemas.microsoft.com/office/drawing/2014/main" id="{FD0DDC73-FEED-0B3A-D7AD-579C81C8F8C1}"/>
+              </a:ext>
+            </a:extLst>
+          </p:cNvPr>
+          <p:cNvPicPr>
+            <a:picLocks noChangeAspect="1"/>
+          </p:cNvPicPr>
+          <p:nvPr/>
+        </p:nvPicPr>
+        <p:blipFill>
+          <a:blip r:embed="rId5"/>
+          <a:stretch>
+            <a:fillRect/>
+          </a:stretch>
+        </p:blipFill>
+        <p:spPr>
+          <a:xfrm>
+            <a:off x="1664998" y="1536268"/>
+            <a:ext cx="8288561" cy="4884433"/>
+          </a:xfrm>
+          <a:prstGeom prst="roundRect">
+            <a:avLst>
+              <a:gd name="adj" fmla="val 16667"/>
+            </a:avLst>
+          </a:prstGeom>
+          <a:ln>
+            <a:noFill/>
+          </a:ln>
+          <a:effectLst>
+            <a:outerShdw blurRad="152400" dist="12000" dir="900000" sy="98000" kx="110000" ky="200000" algn="tl" rotWithShape="0">
+              <a:srgbClr val="000000">
+                <a:alpha val="30000"/>
+              </a:srgbClr>
+            </a:outerShdw>
+          </a:effectLst>
+          <a:scene3d>
+            <a:camera prst="perspectiveRelaxed">
+              <a:rot lat="19800000" lon="1200000" rev="20820000"/>
+            </a:camera>
+            <a:lightRig rig="threePt" dir="t"/>
+          </a:scene3d>
+          <a:sp3d contourW="6350" prstMaterial="matte">
+            <a:bevelT w="101600" h="101600"/>
+            <a:contourClr>
+              <a:srgbClr val="969696"/>
+            </a:contourClr>
+          </a:sp3d>
+        </p:spPr>
+      </p:pic>
+      <p:pic>
+        <p:nvPicPr>
+          <p:cNvPr id="10" name="Picture 9">
+            <a:extLst>
+              <a:ext uri="{FF2B5EF4-FFF2-40B4-BE49-F238E27FC236}">
+                <a16:creationId xmlns:a16="http://schemas.microsoft.com/office/drawing/2014/main" id="{375F5F15-3701-75E0-01B0-883C32531DDC}"/>
+              </a:ext>
+            </a:extLst>
+          </p:cNvPr>
+          <p:cNvPicPr>
+            <a:picLocks noChangeAspect="1"/>
+          </p:cNvPicPr>
+          <p:nvPr/>
+        </p:nvPicPr>
+        <p:blipFill>
+          <a:blip r:embed="rId6"/>
+          <a:stretch>
+            <a:fillRect/>
+          </a:stretch>
+        </p:blipFill>
+        <p:spPr>
+          <a:xfrm>
+            <a:off x="7286665" y="4271893"/>
+            <a:ext cx="2318582" cy="2038313"/>
+          </a:xfrm>
+          <a:prstGeom prst="rect">
+            <a:avLst/>
+          </a:prstGeom>
+          <a:ln>
+            <a:noFill/>
+          </a:ln>
+          <a:effectLst>
+            <a:softEdge rad="112500"/>
+          </a:effectLst>
+        </p:spPr>
+      </p:pic>
+      <p:pic>
+        <p:nvPicPr>
+          <p:cNvPr id="14" name="Picture 13">
+            <a:extLst>
+              <a:ext uri="{FF2B5EF4-FFF2-40B4-BE49-F238E27FC236}">
+                <a16:creationId xmlns:a16="http://schemas.microsoft.com/office/drawing/2014/main" id="{33BD86BB-ED2C-B63B-9D35-BD489C1F41A6}"/>
+              </a:ext>
+            </a:extLst>
+          </p:cNvPr>
+          <p:cNvPicPr>
+            <a:picLocks noChangeAspect="1"/>
+          </p:cNvPicPr>
+          <p:nvPr/>
+        </p:nvPicPr>
+        <p:blipFill>
+          <a:blip r:embed="rId2"/>
+          <a:stretch>
+            <a:fillRect/>
+          </a:stretch>
+        </p:blipFill>
+        <p:spPr>
+          <a:xfrm>
+            <a:off x="7825208" y="4665057"/>
+            <a:ext cx="826143" cy="822657"/>
+          </a:xfrm>
+          <a:prstGeom prst="rect">
+            <a:avLst/>
+          </a:prstGeom>
+          <a:ln>
+            <a:noFill/>
+          </a:ln>
+          <a:effectLst>
+            <a:softEdge rad="112500"/>
+          </a:effectLst>
+        </p:spPr>
+      </p:pic>
+    </p:spTree>
+    <p:extLst>
+      <p:ext uri="{BB962C8B-B14F-4D97-AF65-F5344CB8AC3E}">
+        <p14:creationId xmlns:p14="http://schemas.microsoft.com/office/powerpoint/2010/main" val="2020253595"/>
+      </p:ext>
+    </p:extLst>
+  </p:cSld>
+  <p:clrMapOvr>
+    <a:masterClrMapping/>
+  </p:clrMapOvr>
+</p:sld>
+</file>
+
+<file path=ppt/slides/slide13.xml><?xml version="1.0" encoding="utf-8"?>
+<p:sld xmlns:a="http://schemas.openxmlformats.org/drawingml/2006/main" xmlns:r="http://schemas.openxmlformats.org/officeDocument/2006/relationships" xmlns:p="http://schemas.openxmlformats.org/presentationml/2006/main">
+  <p:cSld>
+    <p:spTree>
+      <p:nvGrpSpPr>
+        <p:cNvPr id="1" name="">
+          <a:extLst>
+            <a:ext uri="{FF2B5EF4-FFF2-40B4-BE49-F238E27FC236}">
+              <a16:creationId xmlns:a16="http://schemas.microsoft.com/office/drawing/2014/main" id="{AEBD68C3-0684-B933-7F34-F5AE70E2728B}"/>
+            </a:ext>
+          </a:extLst>
+        </p:cNvPr>
+        <p:cNvGrpSpPr/>
+        <p:nvPr/>
+      </p:nvGrpSpPr>
+      <p:grpSpPr>
+        <a:xfrm>
+          <a:off x="0" y="0"/>
+          <a:ext cx="0" cy="0"/>
+          <a:chOff x="0" y="0"/>
+          <a:chExt cx="0" cy="0"/>
+        </a:xfrm>
+      </p:grpSpPr>
+      <p:sp>
+        <p:nvSpPr>
+          <p:cNvPr id="2" name="Title 1">
+            <a:extLst>
+              <a:ext uri="{FF2B5EF4-FFF2-40B4-BE49-F238E27FC236}">
+                <a16:creationId xmlns:a16="http://schemas.microsoft.com/office/drawing/2014/main" id="{B8B51BD1-1254-8B1F-B20B-7AC666A417D6}"/>
+              </a:ext>
+            </a:extLst>
+          </p:cNvPr>
+          <p:cNvSpPr>
+            <a:spLocks noGrp="1"/>
+          </p:cNvSpPr>
+          <p:nvPr>
+            <p:ph type="title"/>
+          </p:nvPr>
+        </p:nvSpPr>
+        <p:spPr>
+          <a:xfrm>
+            <a:off x="1409826" y="131063"/>
+            <a:ext cx="6772881" cy="793260"/>
+          </a:xfrm>
+        </p:spPr>
+        <p:txBody>
+          <a:bodyPr anchor="ctr"/>
+          <a:lstStyle/>
+          <a:p>
+            <a:pPr algn="l"/>
+            <a:r>
+              <a:rPr lang="en-US" dirty="0"/>
+              <a:t>Power BI Tutorial</a:t>
+            </a:r>
+          </a:p>
+        </p:txBody>
+      </p:sp>
+      <p:sp>
+        <p:nvSpPr>
+          <p:cNvPr id="4" name="Text Placeholder 3">
+            <a:extLst>
+              <a:ext uri="{FF2B5EF4-FFF2-40B4-BE49-F238E27FC236}">
+                <a16:creationId xmlns:a16="http://schemas.microsoft.com/office/drawing/2014/main" id="{5F11BA8D-E3CA-EC81-7D15-92108AC10418}"/>
+              </a:ext>
+            </a:extLst>
+          </p:cNvPr>
+          <p:cNvSpPr>
+            <a:spLocks noGrp="1"/>
+          </p:cNvSpPr>
+          <p:nvPr>
+            <p:ph type="body" sz="quarter" idx="13"/>
+          </p:nvPr>
+        </p:nvSpPr>
+        <p:spPr>
+          <a:xfrm>
+            <a:off x="2079148" y="915490"/>
+            <a:ext cx="9314437" cy="1097280"/>
+          </a:xfrm>
+        </p:spPr>
+        <p:txBody>
+          <a:bodyPr anchor="ctr">
+            <a:normAutofit lnSpcReduction="10000"/>
+          </a:bodyPr>
+          <a:lstStyle/>
+          <a:p>
+            <a:pPr algn="l"/>
+            <a:r>
+              <a:rPr lang="en-US" sz="3600" dirty="0"/>
+              <a:t>Part 1. Put Your BI Thinking Caps On</a:t>
+            </a:r>
+          </a:p>
+          <a:p>
+            <a:pPr algn="l"/>
+            <a:r>
+              <a:rPr lang="en-US" altLang="zh-CN" sz="3600" dirty="0"/>
+              <a:t>Chapter 03: Choices of Power BI – (3)</a:t>
+            </a:r>
+            <a:endParaRPr lang="en-US" sz="3600" dirty="0"/>
+          </a:p>
+        </p:txBody>
+      </p:sp>
+      <p:sp>
+        <p:nvSpPr>
+          <p:cNvPr id="5" name="TextBox 4">
+            <a:extLst>
+              <a:ext uri="{FF2B5EF4-FFF2-40B4-BE49-F238E27FC236}">
+                <a16:creationId xmlns:a16="http://schemas.microsoft.com/office/drawing/2014/main" id="{55C48AC2-18D9-F461-6EF4-22D2ED51F3D3}"/>
+              </a:ext>
+            </a:extLst>
+          </p:cNvPr>
+          <p:cNvSpPr txBox="1"/>
+          <p:nvPr/>
+        </p:nvSpPr>
+        <p:spPr>
+          <a:xfrm>
+            <a:off x="9487400" y="11040"/>
+            <a:ext cx="2704600" cy="1200329"/>
+          </a:xfrm>
+          <a:prstGeom prst="rect">
+            <a:avLst/>
+          </a:prstGeom>
+          <a:noFill/>
+        </p:spPr>
+        <p:txBody>
+          <a:bodyPr wrap="square" rtlCol="0" anchor="ctr">
+            <a:spAutoFit/>
+          </a:bodyPr>
+          <a:lstStyle/>
+          <a:p>
+            <a:pPr algn="ctr"/>
+            <a:r>
+              <a:rPr lang="en-US" sz="7200" b="1" dirty="0">
+                <a:ln w="9525">
+                  <a:solidFill>
+                    <a:schemeClr val="bg1"/>
+                  </a:solidFill>
+                  <a:prstDash val="solid"/>
+                </a:ln>
+                <a:solidFill>
+                  <a:schemeClr val="accent3">
+                    <a:lumMod val="20000"/>
+                    <a:lumOff val="80000"/>
+                  </a:schemeClr>
+                </a:solidFill>
+                <a:effectLst>
+                  <a:outerShdw blurRad="12700" dist="38100" dir="2700000" algn="tl" rotWithShape="0">
+                    <a:schemeClr val="bg1">
+                      <a:lumMod val="50000"/>
+                    </a:schemeClr>
+                  </a:outerShdw>
+                </a:effectLst>
+                <a:latin typeface="Goudy Stout" panose="0202090407030B020401" pitchFamily="18" charset="0"/>
+              </a:rPr>
+              <a:t>009</a:t>
+            </a:r>
+          </a:p>
+        </p:txBody>
+      </p:sp>
+      <p:pic>
+        <p:nvPicPr>
+          <p:cNvPr id="8" name="Picture 7">
+            <a:extLst>
+              <a:ext uri="{FF2B5EF4-FFF2-40B4-BE49-F238E27FC236}">
+                <a16:creationId xmlns:a16="http://schemas.microsoft.com/office/drawing/2014/main" id="{0841194B-DDED-0D0B-D2B5-22AF9AC04CE9}"/>
+              </a:ext>
+            </a:extLst>
+          </p:cNvPr>
+          <p:cNvPicPr>
+            <a:picLocks noChangeAspect="1"/>
+          </p:cNvPicPr>
+          <p:nvPr/>
+        </p:nvPicPr>
+        <p:blipFill>
+          <a:blip r:embed="rId2"/>
+          <a:stretch>
+            <a:fillRect/>
+          </a:stretch>
+        </p:blipFill>
+        <p:spPr>
+          <a:xfrm>
+            <a:off x="23412" y="30114"/>
+            <a:ext cx="1386414" cy="1380564"/>
+          </a:xfrm>
+          <a:prstGeom prst="rect">
+            <a:avLst/>
+          </a:prstGeom>
+          <a:ln>
+            <a:noFill/>
+          </a:ln>
+          <a:effectLst>
+            <a:softEdge rad="112500"/>
+          </a:effectLst>
+        </p:spPr>
+      </p:pic>
+      <p:sp>
+        <p:nvSpPr>
+          <p:cNvPr id="12" name="TextBox 11">
+            <a:extLst>
+              <a:ext uri="{FF2B5EF4-FFF2-40B4-BE49-F238E27FC236}">
+                <a16:creationId xmlns:a16="http://schemas.microsoft.com/office/drawing/2014/main" id="{F5F793B9-1A23-E188-4063-11D385DBA087}"/>
+              </a:ext>
+            </a:extLst>
+          </p:cNvPr>
+          <p:cNvSpPr txBox="1"/>
+          <p:nvPr/>
+        </p:nvSpPr>
+        <p:spPr>
+          <a:xfrm>
+            <a:off x="23412" y="6458554"/>
+            <a:ext cx="7163844" cy="369332"/>
+          </a:xfrm>
+          <a:prstGeom prst="rect">
+            <a:avLst/>
+          </a:prstGeom>
+          <a:noFill/>
+        </p:spPr>
+        <p:txBody>
+          <a:bodyPr wrap="square">
+            <a:spAutoFit/>
+          </a:bodyPr>
+          <a:lstStyle/>
+          <a:p>
+            <a:r>
+              <a:rPr lang="en-US" b="1" dirty="0"/>
+              <a:t>Repository: </a:t>
+            </a:r>
+            <a:r>
+              <a:rPr lang="en-US" b="1" dirty="0">
+                <a:hlinkClick r:id="rId3"/>
+              </a:rPr>
+              <a:t>https://github.com/yasenstar/PowerBI_Tutorial</a:t>
+            </a:r>
+            <a:endParaRPr lang="en-US" b="1" dirty="0"/>
+          </a:p>
+        </p:txBody>
+      </p:sp>
+      <p:pic>
+        <p:nvPicPr>
+          <p:cNvPr id="13" name="Picture 12">
+            <a:extLst>
+              <a:ext uri="{FF2B5EF4-FFF2-40B4-BE49-F238E27FC236}">
+                <a16:creationId xmlns:a16="http://schemas.microsoft.com/office/drawing/2014/main" id="{CDE2AAC1-9536-0C8F-8983-DA4D05B4D921}"/>
+              </a:ext>
+            </a:extLst>
+          </p:cNvPr>
+          <p:cNvPicPr>
+            <a:picLocks noChangeAspect="1"/>
+          </p:cNvPicPr>
+          <p:nvPr/>
+        </p:nvPicPr>
+        <p:blipFill>
+          <a:blip r:embed="rId4"/>
+          <a:stretch>
+            <a:fillRect/>
+          </a:stretch>
+        </p:blipFill>
+        <p:spPr>
+          <a:xfrm>
+            <a:off x="97030" y="1487212"/>
+            <a:ext cx="1850713" cy="2315544"/>
+          </a:xfrm>
+          <a:prstGeom prst="rect">
+            <a:avLst/>
+          </a:prstGeom>
+          <a:ln>
+            <a:noFill/>
+          </a:ln>
+          <a:effectLst>
+            <a:outerShdw blurRad="190500" algn="tl" rotWithShape="0">
+              <a:srgbClr val="000000">
+                <a:alpha val="70000"/>
+              </a:srgbClr>
+            </a:outerShdw>
+          </a:effectLst>
+        </p:spPr>
+      </p:pic>
+      <p:pic>
+        <p:nvPicPr>
+          <p:cNvPr id="7" name="Picture 6">
+            <a:extLst>
+              <a:ext uri="{FF2B5EF4-FFF2-40B4-BE49-F238E27FC236}">
+                <a16:creationId xmlns:a16="http://schemas.microsoft.com/office/drawing/2014/main" id="{A5BCE0B2-0FAD-2801-D44F-883604DF93B5}"/>
+              </a:ext>
+            </a:extLst>
+          </p:cNvPr>
+          <p:cNvPicPr>
+            <a:picLocks noChangeAspect="1"/>
+          </p:cNvPicPr>
+          <p:nvPr/>
+        </p:nvPicPr>
+        <p:blipFill>
+          <a:blip r:embed="rId5"/>
+          <a:stretch>
+            <a:fillRect/>
+          </a:stretch>
+        </p:blipFill>
+        <p:spPr>
+          <a:xfrm>
+            <a:off x="1311881" y="1511627"/>
+            <a:ext cx="7512484" cy="4884686"/>
+          </a:xfrm>
+          <a:prstGeom prst="roundRect">
+            <a:avLst>
+              <a:gd name="adj" fmla="val 16667"/>
+            </a:avLst>
+          </a:prstGeom>
+          <a:ln>
+            <a:noFill/>
+          </a:ln>
+          <a:effectLst>
+            <a:outerShdw blurRad="152400" dist="12000" dir="900000" sy="98000" kx="110000" ky="200000" algn="tl" rotWithShape="0">
+              <a:srgbClr val="000000">
+                <a:alpha val="30000"/>
+              </a:srgbClr>
+            </a:outerShdw>
+          </a:effectLst>
+          <a:scene3d>
+            <a:camera prst="perspectiveRelaxed">
+              <a:rot lat="19800000" lon="1200000" rev="20820000"/>
+            </a:camera>
+            <a:lightRig rig="threePt" dir="t"/>
+          </a:scene3d>
+          <a:sp3d contourW="6350" prstMaterial="matte">
+            <a:bevelT w="101600" h="101600"/>
+            <a:contourClr>
+              <a:srgbClr val="969696"/>
+            </a:contourClr>
+          </a:sp3d>
+        </p:spPr>
+      </p:pic>
+      <p:pic>
+        <p:nvPicPr>
+          <p:cNvPr id="11" name="Picture 10">
+            <a:extLst>
+              <a:ext uri="{FF2B5EF4-FFF2-40B4-BE49-F238E27FC236}">
+                <a16:creationId xmlns:a16="http://schemas.microsoft.com/office/drawing/2014/main" id="{A8E4D4A5-DCE6-BD4D-00A3-018FC184D124}"/>
+              </a:ext>
+            </a:extLst>
+          </p:cNvPr>
+          <p:cNvPicPr>
+            <a:picLocks noChangeAspect="1"/>
+          </p:cNvPicPr>
+          <p:nvPr/>
+        </p:nvPicPr>
+        <p:blipFill>
+          <a:blip r:embed="rId6"/>
+          <a:stretch>
+            <a:fillRect/>
+          </a:stretch>
+        </p:blipFill>
+        <p:spPr>
+          <a:xfrm>
+            <a:off x="6128764" y="4266719"/>
+            <a:ext cx="1574853" cy="1403335"/>
+          </a:xfrm>
+          <a:prstGeom prst="rect">
+            <a:avLst/>
+          </a:prstGeom>
+          <a:ln>
+            <a:noFill/>
+          </a:ln>
+          <a:effectLst>
+            <a:softEdge rad="112500"/>
+          </a:effectLst>
+        </p:spPr>
+      </p:pic>
+      <p:graphicFrame>
+        <p:nvGraphicFramePr>
+          <p:cNvPr id="15" name="Diagram 14">
+            <a:extLst>
+              <a:ext uri="{FF2B5EF4-FFF2-40B4-BE49-F238E27FC236}">
+                <a16:creationId xmlns:a16="http://schemas.microsoft.com/office/drawing/2014/main" id="{3E826128-41BA-05EB-9F1A-B5CFD4630297}"/>
+              </a:ext>
+            </a:extLst>
+          </p:cNvPr>
+          <p:cNvGraphicFramePr/>
+          <p:nvPr>
+            <p:extLst>
+              <p:ext uri="{D42A27DB-BD31-4B8C-83A1-F6EECF244321}">
+                <p14:modId xmlns:p14="http://schemas.microsoft.com/office/powerpoint/2010/main" val="687253323"/>
+              </p:ext>
+            </p:extLst>
+          </p:nvPr>
+        </p:nvGraphicFramePr>
+        <p:xfrm>
+          <a:off x="6096000" y="3867167"/>
+          <a:ext cx="6025869" cy="2683335"/>
+        </p:xfrm>
+        <a:graphic>
+          <a:graphicData uri="http://schemas.openxmlformats.org/drawingml/2006/diagram">
+            <dgm:relIds xmlns:dgm="http://schemas.openxmlformats.org/drawingml/2006/diagram" xmlns:r="http://schemas.openxmlformats.org/officeDocument/2006/relationships" r:dm="rId7" r:lo="rId8" r:qs="rId9" r:cs="rId10"/>
+          </a:graphicData>
+        </a:graphic>
+      </p:graphicFrame>
+    </p:spTree>
+    <p:extLst>
+      <p:ext uri="{BB962C8B-B14F-4D97-AF65-F5344CB8AC3E}">
+        <p14:creationId xmlns:p14="http://schemas.microsoft.com/office/powerpoint/2010/main" val="511493758"/>
+      </p:ext>
+    </p:extLst>
+  </p:cSld>
+  <p:clrMapOvr>
+    <a:masterClrMapping/>
+  </p:clrMapOvr>
+</p:sld>
+</file>
+
+<file path=ppt/slides/slide14.xml><?xml version="1.0" encoding="utf-8"?>
+<p:sld xmlns:a="http://schemas.openxmlformats.org/drawingml/2006/main" xmlns:r="http://schemas.openxmlformats.org/officeDocument/2006/relationships" xmlns:p="http://schemas.openxmlformats.org/presentationml/2006/main">
+  <p:cSld>
+    <p:spTree>
+      <p:nvGrpSpPr>
+        <p:cNvPr id="1" name="">
+          <a:extLst>
+            <a:ext uri="{FF2B5EF4-FFF2-40B4-BE49-F238E27FC236}">
+              <a16:creationId xmlns:a16="http://schemas.microsoft.com/office/drawing/2014/main" id="{BDC469B0-FC4B-C84C-6408-1EE639727180}"/>
+            </a:ext>
+          </a:extLst>
+        </p:cNvPr>
+        <p:cNvGrpSpPr/>
+        <p:nvPr/>
+      </p:nvGrpSpPr>
+      <p:grpSpPr>
+        <a:xfrm>
+          <a:off x="0" y="0"/>
+          <a:ext cx="0" cy="0"/>
+          <a:chOff x="0" y="0"/>
+          <a:chExt cx="0" cy="0"/>
+        </a:xfrm>
+      </p:grpSpPr>
+      <p:sp>
+        <p:nvSpPr>
+          <p:cNvPr id="2" name="Title 1">
+            <a:extLst>
+              <a:ext uri="{FF2B5EF4-FFF2-40B4-BE49-F238E27FC236}">
+                <a16:creationId xmlns:a16="http://schemas.microsoft.com/office/drawing/2014/main" id="{A3744895-92E8-F404-D915-2DCAFC97EEED}"/>
+              </a:ext>
+            </a:extLst>
+          </p:cNvPr>
+          <p:cNvSpPr>
+            <a:spLocks noGrp="1"/>
+          </p:cNvSpPr>
+          <p:nvPr>
+            <p:ph type="title"/>
+          </p:nvPr>
+        </p:nvSpPr>
+        <p:spPr>
+          <a:xfrm>
+            <a:off x="1409826" y="131063"/>
+            <a:ext cx="6772881" cy="793260"/>
+          </a:xfrm>
+        </p:spPr>
+        <p:txBody>
+          <a:bodyPr anchor="ctr"/>
+          <a:lstStyle/>
+          <a:p>
+            <a:pPr algn="l"/>
+            <a:r>
+              <a:rPr lang="en-US" dirty="0"/>
+              <a:t>Power BI Tutorial</a:t>
+            </a:r>
+          </a:p>
+        </p:txBody>
+      </p:sp>
+      <p:sp>
+        <p:nvSpPr>
+          <p:cNvPr id="4" name="Text Placeholder 3">
+            <a:extLst>
+              <a:ext uri="{FF2B5EF4-FFF2-40B4-BE49-F238E27FC236}">
+                <a16:creationId xmlns:a16="http://schemas.microsoft.com/office/drawing/2014/main" id="{BEBDD229-A35A-C5BB-89D2-EE242F25CD0A}"/>
+              </a:ext>
+            </a:extLst>
+          </p:cNvPr>
+          <p:cNvSpPr>
+            <a:spLocks noGrp="1"/>
+          </p:cNvSpPr>
+          <p:nvPr>
+            <p:ph type="body" sz="quarter" idx="13"/>
+          </p:nvPr>
+        </p:nvSpPr>
+        <p:spPr>
+          <a:xfrm>
+            <a:off x="2079148" y="915490"/>
+            <a:ext cx="9314437" cy="1097280"/>
+          </a:xfrm>
+        </p:spPr>
+        <p:txBody>
+          <a:bodyPr anchor="ctr">
+            <a:normAutofit lnSpcReduction="10000"/>
+          </a:bodyPr>
+          <a:lstStyle/>
+          <a:p>
+            <a:pPr algn="l"/>
+            <a:r>
+              <a:rPr lang="en-US" sz="3600" dirty="0"/>
+              <a:t>Part 1. Put Your BI Thinking Caps On</a:t>
+            </a:r>
+          </a:p>
+          <a:p>
+            <a:pPr algn="l"/>
+            <a:r>
+              <a:rPr lang="en-US" altLang="zh-CN" sz="3600" dirty="0"/>
+              <a:t>Chapter 03: Choices of Power BI – (4)</a:t>
+            </a:r>
+            <a:endParaRPr lang="en-US" sz="3600" dirty="0"/>
+          </a:p>
+        </p:txBody>
+      </p:sp>
+      <p:sp>
+        <p:nvSpPr>
+          <p:cNvPr id="5" name="TextBox 4">
+            <a:extLst>
+              <a:ext uri="{FF2B5EF4-FFF2-40B4-BE49-F238E27FC236}">
+                <a16:creationId xmlns:a16="http://schemas.microsoft.com/office/drawing/2014/main" id="{E691FA7C-A486-0B42-955E-5ED422276478}"/>
+              </a:ext>
+            </a:extLst>
+          </p:cNvPr>
+          <p:cNvSpPr txBox="1"/>
+          <p:nvPr/>
+        </p:nvSpPr>
+        <p:spPr>
+          <a:xfrm>
+            <a:off x="9487400" y="11040"/>
+            <a:ext cx="2704600" cy="1200329"/>
+          </a:xfrm>
+          <a:prstGeom prst="rect">
+            <a:avLst/>
+          </a:prstGeom>
+          <a:noFill/>
+        </p:spPr>
+        <p:txBody>
+          <a:bodyPr wrap="square" rtlCol="0" anchor="ctr">
+            <a:spAutoFit/>
+          </a:bodyPr>
+          <a:lstStyle/>
+          <a:p>
+            <a:pPr algn="ctr"/>
+            <a:r>
+              <a:rPr lang="en-US" sz="7200" b="1" dirty="0">
+                <a:ln w="9525">
+                  <a:solidFill>
+                    <a:schemeClr val="bg1"/>
+                  </a:solidFill>
+                  <a:prstDash val="solid"/>
+                </a:ln>
+                <a:solidFill>
+                  <a:schemeClr val="accent3">
+                    <a:lumMod val="20000"/>
+                    <a:lumOff val="80000"/>
+                  </a:schemeClr>
+                </a:solidFill>
+                <a:effectLst>
+                  <a:outerShdw blurRad="12700" dist="38100" dir="2700000" algn="tl" rotWithShape="0">
+                    <a:schemeClr val="bg1">
+                      <a:lumMod val="50000"/>
+                    </a:schemeClr>
+                  </a:outerShdw>
+                </a:effectLst>
+                <a:latin typeface="Goudy Stout" panose="0202090407030B020401" pitchFamily="18" charset="0"/>
+              </a:rPr>
+              <a:t>010</a:t>
+            </a:r>
+          </a:p>
+        </p:txBody>
+      </p:sp>
+      <p:pic>
+        <p:nvPicPr>
+          <p:cNvPr id="8" name="Picture 7">
+            <a:extLst>
+              <a:ext uri="{FF2B5EF4-FFF2-40B4-BE49-F238E27FC236}">
+                <a16:creationId xmlns:a16="http://schemas.microsoft.com/office/drawing/2014/main" id="{B0A8C366-5EED-9283-A294-23D399F258F7}"/>
+              </a:ext>
+            </a:extLst>
+          </p:cNvPr>
+          <p:cNvPicPr>
+            <a:picLocks noChangeAspect="1"/>
+          </p:cNvPicPr>
+          <p:nvPr/>
+        </p:nvPicPr>
+        <p:blipFill>
+          <a:blip r:embed="rId2"/>
+          <a:stretch>
+            <a:fillRect/>
+          </a:stretch>
+        </p:blipFill>
+        <p:spPr>
+          <a:xfrm>
+            <a:off x="23412" y="30114"/>
+            <a:ext cx="1386414" cy="1380564"/>
+          </a:xfrm>
+          <a:prstGeom prst="rect">
+            <a:avLst/>
+          </a:prstGeom>
+          <a:ln>
+            <a:noFill/>
+          </a:ln>
+          <a:effectLst>
+            <a:softEdge rad="112500"/>
+          </a:effectLst>
+        </p:spPr>
+      </p:pic>
+      <p:sp>
+        <p:nvSpPr>
+          <p:cNvPr id="12" name="TextBox 11">
+            <a:extLst>
+              <a:ext uri="{FF2B5EF4-FFF2-40B4-BE49-F238E27FC236}">
+                <a16:creationId xmlns:a16="http://schemas.microsoft.com/office/drawing/2014/main" id="{7ECB144C-8564-3549-3A49-8C99C53B6E69}"/>
+              </a:ext>
+            </a:extLst>
+          </p:cNvPr>
+          <p:cNvSpPr txBox="1"/>
+          <p:nvPr/>
+        </p:nvSpPr>
+        <p:spPr>
+          <a:xfrm>
+            <a:off x="23412" y="6458554"/>
+            <a:ext cx="7163844" cy="369332"/>
+          </a:xfrm>
+          <a:prstGeom prst="rect">
+            <a:avLst/>
+          </a:prstGeom>
+          <a:noFill/>
+        </p:spPr>
+        <p:txBody>
+          <a:bodyPr wrap="square">
+            <a:spAutoFit/>
+          </a:bodyPr>
+          <a:lstStyle/>
+          <a:p>
+            <a:r>
+              <a:rPr lang="en-US" b="1" dirty="0"/>
+              <a:t>Repository: </a:t>
+            </a:r>
+            <a:r>
+              <a:rPr lang="en-US" b="1" dirty="0">
+                <a:hlinkClick r:id="rId3"/>
+              </a:rPr>
+              <a:t>https://github.com/yasenstar/PowerBI_Tutorial</a:t>
+            </a:r>
+            <a:endParaRPr lang="en-US" b="1" dirty="0"/>
+          </a:p>
+        </p:txBody>
+      </p:sp>
+      <p:pic>
+        <p:nvPicPr>
+          <p:cNvPr id="13" name="Picture 12">
+            <a:extLst>
+              <a:ext uri="{FF2B5EF4-FFF2-40B4-BE49-F238E27FC236}">
+                <a16:creationId xmlns:a16="http://schemas.microsoft.com/office/drawing/2014/main" id="{51043E59-7B29-23CD-E49C-52DBB1479F03}"/>
+              </a:ext>
+            </a:extLst>
+          </p:cNvPr>
+          <p:cNvPicPr>
+            <a:picLocks noChangeAspect="1"/>
+          </p:cNvPicPr>
+          <p:nvPr/>
+        </p:nvPicPr>
+        <p:blipFill>
+          <a:blip r:embed="rId4"/>
+          <a:stretch>
+            <a:fillRect/>
+          </a:stretch>
+        </p:blipFill>
+        <p:spPr>
+          <a:xfrm>
+            <a:off x="97030" y="1487212"/>
+            <a:ext cx="1850713" cy="2315544"/>
+          </a:xfrm>
+          <a:prstGeom prst="rect">
+            <a:avLst/>
+          </a:prstGeom>
+          <a:ln>
+            <a:noFill/>
+          </a:ln>
+          <a:effectLst>
+            <a:outerShdw blurRad="190500" algn="tl" rotWithShape="0">
+              <a:srgbClr val="000000">
+                <a:alpha val="70000"/>
+              </a:srgbClr>
+            </a:outerShdw>
+          </a:effectLst>
+        </p:spPr>
+      </p:pic>
+      <p:pic>
+        <p:nvPicPr>
+          <p:cNvPr id="6" name="Picture 5">
+            <a:extLst>
+              <a:ext uri="{FF2B5EF4-FFF2-40B4-BE49-F238E27FC236}">
+                <a16:creationId xmlns:a16="http://schemas.microsoft.com/office/drawing/2014/main" id="{7A729083-A23E-5B36-B32E-680A56BA6B4D}"/>
+              </a:ext>
+            </a:extLst>
+          </p:cNvPr>
+          <p:cNvPicPr>
+            <a:picLocks noChangeAspect="1"/>
+          </p:cNvPicPr>
+          <p:nvPr/>
+        </p:nvPicPr>
+        <p:blipFill>
+          <a:blip r:embed="rId5"/>
+          <a:stretch>
+            <a:fillRect/>
+          </a:stretch>
+        </p:blipFill>
+        <p:spPr>
+          <a:xfrm>
+            <a:off x="1468002" y="1487212"/>
+            <a:ext cx="7314917" cy="4679351"/>
+          </a:xfrm>
+          <a:prstGeom prst="roundRect">
+            <a:avLst>
+              <a:gd name="adj" fmla="val 16667"/>
+            </a:avLst>
+          </a:prstGeom>
+          <a:ln>
+            <a:noFill/>
+          </a:ln>
+          <a:effectLst>
+            <a:outerShdw blurRad="152400" dist="12000" dir="900000" sy="98000" kx="110000" ky="200000" algn="tl" rotWithShape="0">
+              <a:srgbClr val="000000">
+                <a:alpha val="30000"/>
+              </a:srgbClr>
+            </a:outerShdw>
+          </a:effectLst>
+          <a:scene3d>
+            <a:camera prst="perspectiveRelaxed">
+              <a:rot lat="19800000" lon="1200000" rev="20820000"/>
+            </a:camera>
+            <a:lightRig rig="threePt" dir="t"/>
+          </a:scene3d>
+          <a:sp3d contourW="6350" prstMaterial="matte">
+            <a:bevelT w="101600" h="101600"/>
+            <a:contourClr>
+              <a:srgbClr val="969696"/>
+            </a:contourClr>
+          </a:sp3d>
+        </p:spPr>
+      </p:pic>
+      <p:pic>
+        <p:nvPicPr>
+          <p:cNvPr id="10" name="Picture 9">
+            <a:extLst>
+              <a:ext uri="{FF2B5EF4-FFF2-40B4-BE49-F238E27FC236}">
+                <a16:creationId xmlns:a16="http://schemas.microsoft.com/office/drawing/2014/main" id="{21D9FD30-E67A-6223-8018-4F72A60A8341}"/>
+              </a:ext>
+            </a:extLst>
+          </p:cNvPr>
+          <p:cNvPicPr>
+            <a:picLocks noChangeAspect="1"/>
+          </p:cNvPicPr>
+          <p:nvPr/>
+        </p:nvPicPr>
+        <p:blipFill>
+          <a:blip r:embed="rId6"/>
+          <a:stretch>
+            <a:fillRect/>
+          </a:stretch>
+        </p:blipFill>
+        <p:spPr>
+          <a:xfrm>
+            <a:off x="4787393" y="4418666"/>
+            <a:ext cx="1308607" cy="1104137"/>
+          </a:xfrm>
+          <a:prstGeom prst="roundRect">
+            <a:avLst>
+              <a:gd name="adj" fmla="val 8594"/>
+            </a:avLst>
+          </a:prstGeom>
+          <a:solidFill>
+            <a:srgbClr val="FFFFFF">
+              <a:shade val="85000"/>
+            </a:srgbClr>
+          </a:solidFill>
+          <a:ln>
+            <a:noFill/>
+          </a:ln>
+          <a:effectLst>
+            <a:reflection blurRad="12700" stA="38000" endPos="28000" dist="5000" dir="5400000" sy="-100000" algn="bl" rotWithShape="0"/>
+          </a:effectLst>
+        </p:spPr>
+      </p:pic>
+      <p:pic>
+        <p:nvPicPr>
+          <p:cNvPr id="16" name="Picture 15">
+            <a:extLst>
+              <a:ext uri="{FF2B5EF4-FFF2-40B4-BE49-F238E27FC236}">
+                <a16:creationId xmlns:a16="http://schemas.microsoft.com/office/drawing/2014/main" id="{040AD9ED-765A-7006-D416-FC28509DD8B2}"/>
+              </a:ext>
+            </a:extLst>
+          </p:cNvPr>
+          <p:cNvPicPr>
+            <a:picLocks noChangeAspect="1"/>
+          </p:cNvPicPr>
+          <p:nvPr/>
+        </p:nvPicPr>
+        <p:blipFill>
+          <a:blip r:embed="rId7"/>
+          <a:stretch>
+            <a:fillRect/>
+          </a:stretch>
+        </p:blipFill>
+        <p:spPr>
+          <a:xfrm>
+            <a:off x="6339655" y="4418666"/>
+            <a:ext cx="1442737" cy="1104137"/>
+          </a:xfrm>
+          <a:prstGeom prst="roundRect">
+            <a:avLst>
+              <a:gd name="adj" fmla="val 8594"/>
+            </a:avLst>
+          </a:prstGeom>
+          <a:solidFill>
+            <a:srgbClr val="FFFFFF">
+              <a:shade val="85000"/>
+            </a:srgbClr>
+          </a:solidFill>
+          <a:ln>
+            <a:noFill/>
+          </a:ln>
+          <a:effectLst>
+            <a:reflection blurRad="12700" stA="38000" endPos="28000" dist="5000" dir="5400000" sy="-100000" algn="bl" rotWithShape="0"/>
+          </a:effectLst>
+        </p:spPr>
+      </p:pic>
+      <p:pic>
+        <p:nvPicPr>
+          <p:cNvPr id="18" name="Picture 17">
+            <a:extLst>
+              <a:ext uri="{FF2B5EF4-FFF2-40B4-BE49-F238E27FC236}">
+                <a16:creationId xmlns:a16="http://schemas.microsoft.com/office/drawing/2014/main" id="{D4DDFC14-30C8-3537-FDBD-20B3C47BF623}"/>
+              </a:ext>
+            </a:extLst>
+          </p:cNvPr>
+          <p:cNvPicPr>
+            <a:picLocks noChangeAspect="1"/>
+          </p:cNvPicPr>
+          <p:nvPr/>
+        </p:nvPicPr>
+        <p:blipFill>
+          <a:blip r:embed="rId8"/>
+          <a:stretch>
+            <a:fillRect/>
+          </a:stretch>
+        </p:blipFill>
+        <p:spPr>
+          <a:xfrm>
+            <a:off x="8026047" y="4418667"/>
+            <a:ext cx="1267710" cy="1104136"/>
+          </a:xfrm>
+          <a:prstGeom prst="roundRect">
+            <a:avLst>
+              <a:gd name="adj" fmla="val 8594"/>
+            </a:avLst>
+          </a:prstGeom>
+          <a:solidFill>
+            <a:srgbClr val="FFFFFF">
+              <a:shade val="85000"/>
+            </a:srgbClr>
+          </a:solidFill>
+          <a:ln>
+            <a:noFill/>
+          </a:ln>
+          <a:effectLst>
+            <a:reflection blurRad="12700" stA="38000" endPos="28000" dist="5000" dir="5400000" sy="-100000" algn="bl" rotWithShape="0"/>
+          </a:effectLst>
+        </p:spPr>
+      </p:pic>
+    </p:spTree>
+    <p:extLst>
+      <p:ext uri="{BB962C8B-B14F-4D97-AF65-F5344CB8AC3E}">
+        <p14:creationId xmlns:p14="http://schemas.microsoft.com/office/powerpoint/2010/main" val="2707500995"/>
+      </p:ext>
+    </p:extLst>
+  </p:cSld>
+  <p:clrMapOvr>
+    <a:masterClrMapping/>
+  </p:clrMapOvr>
+</p:sld>
+</file>
+
+<file path=ppt/slides/slide15.xml><?xml version="1.0" encoding="utf-8"?>
+<p:sld xmlns:a="http://schemas.openxmlformats.org/drawingml/2006/main" xmlns:r="http://schemas.openxmlformats.org/officeDocument/2006/relationships" xmlns:p="http://schemas.openxmlformats.org/presentationml/2006/main">
+  <p:cSld>
+    <p:spTree>
+      <p:nvGrpSpPr>
+        <p:cNvPr id="1" name="">
+          <a:extLst>
+            <a:ext uri="{FF2B5EF4-FFF2-40B4-BE49-F238E27FC236}">
+              <a16:creationId xmlns:a16="http://schemas.microsoft.com/office/drawing/2014/main" id="{FADE6ED7-DBE6-56FC-0C3B-92BC7BCA74ED}"/>
+            </a:ext>
+          </a:extLst>
+        </p:cNvPr>
+        <p:cNvGrpSpPr/>
+        <p:nvPr/>
+      </p:nvGrpSpPr>
+      <p:grpSpPr>
+        <a:xfrm>
+          <a:off x="0" y="0"/>
+          <a:ext cx="0" cy="0"/>
+          <a:chOff x="0" y="0"/>
+          <a:chExt cx="0" cy="0"/>
+        </a:xfrm>
+      </p:grpSpPr>
+      <p:sp>
+        <p:nvSpPr>
+          <p:cNvPr id="2" name="Title 1">
+            <a:extLst>
+              <a:ext uri="{FF2B5EF4-FFF2-40B4-BE49-F238E27FC236}">
+                <a16:creationId xmlns:a16="http://schemas.microsoft.com/office/drawing/2014/main" id="{22E74AB7-F738-E937-62E9-99AD03D99AD9}"/>
+              </a:ext>
+            </a:extLst>
+          </p:cNvPr>
+          <p:cNvSpPr>
+            <a:spLocks noGrp="1"/>
+          </p:cNvSpPr>
+          <p:nvPr>
+            <p:ph type="title"/>
+          </p:nvPr>
+        </p:nvSpPr>
+        <p:spPr>
+          <a:xfrm>
+            <a:off x="1409826" y="131063"/>
+            <a:ext cx="6772881" cy="793260"/>
+          </a:xfrm>
+        </p:spPr>
+        <p:txBody>
+          <a:bodyPr anchor="ctr"/>
+          <a:lstStyle/>
+          <a:p>
+            <a:pPr algn="l"/>
+            <a:r>
+              <a:rPr lang="en-US" dirty="0"/>
+              <a:t>Power BI Tutorial</a:t>
+            </a:r>
+          </a:p>
+        </p:txBody>
+      </p:sp>
+      <p:sp>
+        <p:nvSpPr>
+          <p:cNvPr id="4" name="Text Placeholder 3">
+            <a:extLst>
+              <a:ext uri="{FF2B5EF4-FFF2-40B4-BE49-F238E27FC236}">
+                <a16:creationId xmlns:a16="http://schemas.microsoft.com/office/drawing/2014/main" id="{27E8EB3B-FE44-9040-D1C9-06AE6948B6C7}"/>
+              </a:ext>
+            </a:extLst>
+          </p:cNvPr>
+          <p:cNvSpPr>
+            <a:spLocks noGrp="1"/>
+          </p:cNvSpPr>
+          <p:nvPr>
+            <p:ph type="body" sz="quarter" idx="13"/>
+          </p:nvPr>
+        </p:nvSpPr>
+        <p:spPr>
+          <a:xfrm>
+            <a:off x="2079148" y="915490"/>
+            <a:ext cx="9314437" cy="1097280"/>
+          </a:xfrm>
+        </p:spPr>
+        <p:txBody>
+          <a:bodyPr anchor="ctr">
+            <a:normAutofit lnSpcReduction="10000"/>
+          </a:bodyPr>
+          <a:lstStyle/>
+          <a:p>
+            <a:pPr algn="l"/>
+            <a:r>
+              <a:rPr lang="en-US" sz="3600" dirty="0"/>
+              <a:t>Part 1. Put Your BI Thinking Caps On</a:t>
+            </a:r>
+          </a:p>
+          <a:p>
+            <a:pPr algn="l"/>
+            <a:r>
+              <a:rPr lang="en-US" altLang="zh-CN" sz="3600" dirty="0"/>
+              <a:t>Chapter 04: Power BI Highlights – (1)</a:t>
+            </a:r>
+            <a:endParaRPr lang="en-US" sz="3600" dirty="0"/>
+          </a:p>
+        </p:txBody>
+      </p:sp>
+      <p:sp>
+        <p:nvSpPr>
+          <p:cNvPr id="5" name="TextBox 4">
+            <a:extLst>
+              <a:ext uri="{FF2B5EF4-FFF2-40B4-BE49-F238E27FC236}">
+                <a16:creationId xmlns:a16="http://schemas.microsoft.com/office/drawing/2014/main" id="{CCCCF089-4D12-0A4B-A356-FF88170BF9A2}"/>
+              </a:ext>
+            </a:extLst>
+          </p:cNvPr>
+          <p:cNvSpPr txBox="1"/>
+          <p:nvPr/>
+        </p:nvSpPr>
+        <p:spPr>
+          <a:xfrm>
+            <a:off x="9487400" y="11040"/>
+            <a:ext cx="2704600" cy="1200329"/>
+          </a:xfrm>
+          <a:prstGeom prst="rect">
+            <a:avLst/>
+          </a:prstGeom>
+          <a:noFill/>
+        </p:spPr>
+        <p:txBody>
+          <a:bodyPr wrap="square" rtlCol="0" anchor="ctr">
+            <a:spAutoFit/>
+          </a:bodyPr>
+          <a:lstStyle/>
+          <a:p>
+            <a:pPr algn="ctr"/>
+            <a:r>
+              <a:rPr lang="en-US" sz="7200" b="1" dirty="0">
+                <a:ln w="9525">
+                  <a:solidFill>
+                    <a:schemeClr val="bg1"/>
+                  </a:solidFill>
+                  <a:prstDash val="solid"/>
+                </a:ln>
+                <a:solidFill>
+                  <a:schemeClr val="accent3">
+                    <a:lumMod val="20000"/>
+                    <a:lumOff val="80000"/>
+                  </a:schemeClr>
+                </a:solidFill>
+                <a:effectLst>
+                  <a:outerShdw blurRad="12700" dist="38100" dir="2700000" algn="tl" rotWithShape="0">
+                    <a:schemeClr val="bg1">
+                      <a:lumMod val="50000"/>
+                    </a:schemeClr>
+                  </a:outerShdw>
+                </a:effectLst>
+                <a:latin typeface="Goudy Stout" panose="0202090407030B020401" pitchFamily="18" charset="0"/>
+              </a:rPr>
+              <a:t>011</a:t>
+            </a:r>
+          </a:p>
+        </p:txBody>
+      </p:sp>
+      <p:pic>
+        <p:nvPicPr>
+          <p:cNvPr id="8" name="Picture 7">
+            <a:extLst>
+              <a:ext uri="{FF2B5EF4-FFF2-40B4-BE49-F238E27FC236}">
+                <a16:creationId xmlns:a16="http://schemas.microsoft.com/office/drawing/2014/main" id="{67622F7A-000B-171A-A768-A31404ACF7B9}"/>
+              </a:ext>
+            </a:extLst>
+          </p:cNvPr>
+          <p:cNvPicPr>
+            <a:picLocks noChangeAspect="1"/>
+          </p:cNvPicPr>
+          <p:nvPr/>
+        </p:nvPicPr>
+        <p:blipFill>
+          <a:blip r:embed="rId2"/>
+          <a:stretch>
+            <a:fillRect/>
+          </a:stretch>
+        </p:blipFill>
+        <p:spPr>
+          <a:xfrm>
+            <a:off x="23412" y="30114"/>
+            <a:ext cx="1386414" cy="1380564"/>
+          </a:xfrm>
+          <a:prstGeom prst="rect">
+            <a:avLst/>
+          </a:prstGeom>
+          <a:ln>
+            <a:noFill/>
+          </a:ln>
+          <a:effectLst>
+            <a:softEdge rad="112500"/>
+          </a:effectLst>
+        </p:spPr>
+      </p:pic>
+      <p:sp>
+        <p:nvSpPr>
+          <p:cNvPr id="12" name="TextBox 11">
+            <a:extLst>
+              <a:ext uri="{FF2B5EF4-FFF2-40B4-BE49-F238E27FC236}">
+                <a16:creationId xmlns:a16="http://schemas.microsoft.com/office/drawing/2014/main" id="{2FFD2210-7278-7B11-D310-6A5EA8BC28ED}"/>
+              </a:ext>
+            </a:extLst>
+          </p:cNvPr>
+          <p:cNvSpPr txBox="1"/>
+          <p:nvPr/>
+        </p:nvSpPr>
+        <p:spPr>
+          <a:xfrm>
+            <a:off x="23412" y="6458554"/>
+            <a:ext cx="7163844" cy="369332"/>
+          </a:xfrm>
+          <a:prstGeom prst="rect">
+            <a:avLst/>
+          </a:prstGeom>
+          <a:noFill/>
+        </p:spPr>
+        <p:txBody>
+          <a:bodyPr wrap="square">
+            <a:spAutoFit/>
+          </a:bodyPr>
+          <a:lstStyle/>
+          <a:p>
+            <a:r>
+              <a:rPr lang="en-US" b="1" dirty="0"/>
+              <a:t>Repository: </a:t>
+            </a:r>
+            <a:r>
+              <a:rPr lang="en-US" b="1" dirty="0">
+                <a:hlinkClick r:id="rId3"/>
+              </a:rPr>
+              <a:t>https://github.com/yasenstar/PowerBI_Tutorial</a:t>
+            </a:r>
+            <a:endParaRPr lang="en-US" b="1" dirty="0"/>
+          </a:p>
+        </p:txBody>
+      </p:sp>
+      <p:pic>
+        <p:nvPicPr>
+          <p:cNvPr id="13" name="Picture 12">
+            <a:extLst>
+              <a:ext uri="{FF2B5EF4-FFF2-40B4-BE49-F238E27FC236}">
+                <a16:creationId xmlns:a16="http://schemas.microsoft.com/office/drawing/2014/main" id="{AC8EB9F9-D13C-1E81-2185-B8553C9D2A58}"/>
+              </a:ext>
+            </a:extLst>
+          </p:cNvPr>
+          <p:cNvPicPr>
+            <a:picLocks noChangeAspect="1"/>
+          </p:cNvPicPr>
+          <p:nvPr/>
+        </p:nvPicPr>
+        <p:blipFill>
+          <a:blip r:embed="rId4"/>
+          <a:stretch>
+            <a:fillRect/>
+          </a:stretch>
+        </p:blipFill>
+        <p:spPr>
+          <a:xfrm>
+            <a:off x="97030" y="1487212"/>
+            <a:ext cx="1850713" cy="2315544"/>
+          </a:xfrm>
+          <a:prstGeom prst="rect">
+            <a:avLst/>
+          </a:prstGeom>
+          <a:ln>
+            <a:noFill/>
+          </a:ln>
+          <a:effectLst>
+            <a:outerShdw blurRad="190500" algn="tl" rotWithShape="0">
+              <a:srgbClr val="000000">
+                <a:alpha val="70000"/>
+              </a:srgbClr>
+            </a:outerShdw>
+          </a:effectLst>
+        </p:spPr>
+      </p:pic>
+      <p:pic>
+        <p:nvPicPr>
+          <p:cNvPr id="7" name="Picture 6">
+            <a:extLst>
+              <a:ext uri="{FF2B5EF4-FFF2-40B4-BE49-F238E27FC236}">
+                <a16:creationId xmlns:a16="http://schemas.microsoft.com/office/drawing/2014/main" id="{D828D18B-B94A-D889-9BCD-760C3FB1339B}"/>
+              </a:ext>
+            </a:extLst>
+          </p:cNvPr>
+          <p:cNvPicPr>
+            <a:picLocks noChangeAspect="1"/>
+          </p:cNvPicPr>
+          <p:nvPr/>
+        </p:nvPicPr>
+        <p:blipFill>
+          <a:blip r:embed="rId5"/>
+          <a:stretch>
+            <a:fillRect/>
+          </a:stretch>
+        </p:blipFill>
+        <p:spPr>
+          <a:xfrm>
+            <a:off x="1136925" y="1521298"/>
+            <a:ext cx="8421300" cy="4818812"/>
+          </a:xfrm>
+          <a:prstGeom prst="roundRect">
+            <a:avLst>
+              <a:gd name="adj" fmla="val 16667"/>
+            </a:avLst>
+          </a:prstGeom>
+          <a:ln>
+            <a:noFill/>
+          </a:ln>
+          <a:effectLst>
+            <a:outerShdw blurRad="152400" dist="12000" dir="900000" sy="98000" kx="110000" ky="200000" algn="tl" rotWithShape="0">
+              <a:srgbClr val="000000">
+                <a:alpha val="30000"/>
+              </a:srgbClr>
+            </a:outerShdw>
+          </a:effectLst>
+          <a:scene3d>
+            <a:camera prst="perspectiveRelaxed">
+              <a:rot lat="19800000" lon="1200000" rev="20820000"/>
+            </a:camera>
+            <a:lightRig rig="threePt" dir="t"/>
+          </a:scene3d>
+          <a:sp3d contourW="6350" prstMaterial="matte">
+            <a:bevelT w="101600" h="101600"/>
+            <a:contourClr>
+              <a:srgbClr val="969696"/>
+            </a:contourClr>
+          </a:sp3d>
+        </p:spPr>
+      </p:pic>
+      <p:pic>
+        <p:nvPicPr>
+          <p:cNvPr id="11" name="Picture 10">
+            <a:extLst>
+              <a:ext uri="{FF2B5EF4-FFF2-40B4-BE49-F238E27FC236}">
+                <a16:creationId xmlns:a16="http://schemas.microsoft.com/office/drawing/2014/main" id="{F5C1A043-48E5-5150-C566-5AA03E5D1197}"/>
+              </a:ext>
+            </a:extLst>
+          </p:cNvPr>
+          <p:cNvPicPr>
+            <a:picLocks noChangeAspect="1"/>
+          </p:cNvPicPr>
+          <p:nvPr/>
+        </p:nvPicPr>
+        <p:blipFill>
+          <a:blip r:embed="rId6"/>
+          <a:stretch>
+            <a:fillRect/>
+          </a:stretch>
+        </p:blipFill>
+        <p:spPr>
+          <a:xfrm>
+            <a:off x="6558243" y="4073233"/>
+            <a:ext cx="2029108" cy="2114845"/>
+          </a:xfrm>
+          <a:prstGeom prst="roundRect">
+            <a:avLst>
+              <a:gd name="adj" fmla="val 16667"/>
+            </a:avLst>
+          </a:prstGeom>
+          <a:ln>
+            <a:noFill/>
+          </a:ln>
+          <a:effectLst>
+            <a:outerShdw blurRad="76200" dist="38100" dir="7800000" algn="tl" rotWithShape="0">
+              <a:srgbClr val="000000">
+                <a:alpha val="40000"/>
+              </a:srgbClr>
+            </a:outerShdw>
+          </a:effectLst>
+          <a:scene3d>
+            <a:camera prst="orthographicFront"/>
+            <a:lightRig rig="contrasting" dir="t">
+              <a:rot lat="0" lon="0" rev="4200000"/>
+            </a:lightRig>
+          </a:scene3d>
+          <a:sp3d prstMaterial="plastic">
+            <a:bevelT w="381000" h="114300" prst="relaxedInset"/>
+            <a:contourClr>
+              <a:srgbClr val="969696"/>
+            </a:contourClr>
+          </a:sp3d>
+        </p:spPr>
+      </p:pic>
+    </p:spTree>
+    <p:extLst>
+      <p:ext uri="{BB962C8B-B14F-4D97-AF65-F5344CB8AC3E}">
+        <p14:creationId xmlns:p14="http://schemas.microsoft.com/office/powerpoint/2010/main" val="2763488685"/>
+      </p:ext>
+    </p:extLst>
+  </p:cSld>
+  <p:clrMapOvr>
+    <a:masterClrMapping/>
+  </p:clrMapOvr>
+</p:sld>
+</file>
+
+<file path=ppt/slides/slide16.xml><?xml version="1.0" encoding="utf-8"?>
+<p:sld xmlns:a="http://schemas.openxmlformats.org/drawingml/2006/main" xmlns:r="http://schemas.openxmlformats.org/officeDocument/2006/relationships" xmlns:p="http://schemas.openxmlformats.org/presentationml/2006/main">
+  <p:cSld>
+    <p:spTree>
+      <p:nvGrpSpPr>
+        <p:cNvPr id="1" name="">
+          <a:extLst>
+            <a:ext uri="{FF2B5EF4-FFF2-40B4-BE49-F238E27FC236}">
+              <a16:creationId xmlns:a16="http://schemas.microsoft.com/office/drawing/2014/main" id="{85B3BE10-B0F2-F679-ECA9-A7C672A1B364}"/>
+            </a:ext>
+          </a:extLst>
+        </p:cNvPr>
+        <p:cNvGrpSpPr/>
+        <p:nvPr/>
+      </p:nvGrpSpPr>
+      <p:grpSpPr>
+        <a:xfrm>
+          <a:off x="0" y="0"/>
+          <a:ext cx="0" cy="0"/>
+          <a:chOff x="0" y="0"/>
+          <a:chExt cx="0" cy="0"/>
+        </a:xfrm>
+      </p:grpSpPr>
+      <p:sp>
+        <p:nvSpPr>
+          <p:cNvPr id="2" name="Title 1">
+            <a:extLst>
+              <a:ext uri="{FF2B5EF4-FFF2-40B4-BE49-F238E27FC236}">
+                <a16:creationId xmlns:a16="http://schemas.microsoft.com/office/drawing/2014/main" id="{82328D39-3B8B-1D49-3208-0D8251A306D4}"/>
+              </a:ext>
+            </a:extLst>
+          </p:cNvPr>
+          <p:cNvSpPr>
+            <a:spLocks noGrp="1"/>
+          </p:cNvSpPr>
+          <p:nvPr>
+            <p:ph type="title"/>
+          </p:nvPr>
+        </p:nvSpPr>
+        <p:spPr>
+          <a:xfrm>
+            <a:off x="1409826" y="131063"/>
+            <a:ext cx="6772881" cy="793260"/>
+          </a:xfrm>
+        </p:spPr>
+        <p:txBody>
+          <a:bodyPr anchor="ctr"/>
+          <a:lstStyle/>
+          <a:p>
+            <a:pPr algn="l"/>
+            <a:r>
+              <a:rPr lang="en-US" dirty="0"/>
+              <a:t>Power BI Tutorial</a:t>
+            </a:r>
+          </a:p>
+        </p:txBody>
+      </p:sp>
+      <p:sp>
+        <p:nvSpPr>
+          <p:cNvPr id="4" name="Text Placeholder 3">
+            <a:extLst>
+              <a:ext uri="{FF2B5EF4-FFF2-40B4-BE49-F238E27FC236}">
+                <a16:creationId xmlns:a16="http://schemas.microsoft.com/office/drawing/2014/main" id="{3AB060FB-58B1-49B8-7152-03D1C0DC3FA8}"/>
+              </a:ext>
+            </a:extLst>
+          </p:cNvPr>
+          <p:cNvSpPr>
+            <a:spLocks noGrp="1"/>
+          </p:cNvSpPr>
+          <p:nvPr>
+            <p:ph type="body" sz="quarter" idx="13"/>
+          </p:nvPr>
+        </p:nvSpPr>
+        <p:spPr>
+          <a:xfrm>
+            <a:off x="2079148" y="915490"/>
+            <a:ext cx="9314437" cy="1097280"/>
+          </a:xfrm>
+        </p:spPr>
+        <p:txBody>
+          <a:bodyPr anchor="ctr">
+            <a:normAutofit lnSpcReduction="10000"/>
+          </a:bodyPr>
+          <a:lstStyle/>
+          <a:p>
+            <a:pPr algn="l"/>
+            <a:r>
+              <a:rPr lang="en-US" sz="3600" dirty="0"/>
+              <a:t>Part 1. Put Your BI Thinking Caps On</a:t>
+            </a:r>
+          </a:p>
+          <a:p>
+            <a:pPr algn="l"/>
+            <a:r>
+              <a:rPr lang="en-US" altLang="zh-CN" sz="3600" dirty="0"/>
+              <a:t>Chapter 04: Power BI Highlights – (1)</a:t>
+            </a:r>
+            <a:endParaRPr lang="en-US" sz="3600" dirty="0"/>
+          </a:p>
+        </p:txBody>
+      </p:sp>
+      <p:sp>
+        <p:nvSpPr>
+          <p:cNvPr id="5" name="TextBox 4">
+            <a:extLst>
+              <a:ext uri="{FF2B5EF4-FFF2-40B4-BE49-F238E27FC236}">
+                <a16:creationId xmlns:a16="http://schemas.microsoft.com/office/drawing/2014/main" id="{2053DF39-8F94-B129-3194-4BADF7D42245}"/>
+              </a:ext>
+            </a:extLst>
+          </p:cNvPr>
+          <p:cNvSpPr txBox="1"/>
+          <p:nvPr/>
+        </p:nvSpPr>
+        <p:spPr>
+          <a:xfrm>
+            <a:off x="9487400" y="11040"/>
+            <a:ext cx="2704600" cy="1200329"/>
+          </a:xfrm>
+          <a:prstGeom prst="rect">
+            <a:avLst/>
+          </a:prstGeom>
+          <a:noFill/>
+        </p:spPr>
+        <p:txBody>
+          <a:bodyPr wrap="square" rtlCol="0" anchor="ctr">
+            <a:spAutoFit/>
+          </a:bodyPr>
+          <a:lstStyle/>
+          <a:p>
+            <a:pPr algn="ctr"/>
+            <a:r>
+              <a:rPr lang="en-US" sz="7200" b="1" dirty="0">
+                <a:ln w="9525">
+                  <a:solidFill>
+                    <a:schemeClr val="bg1"/>
+                  </a:solidFill>
+                  <a:prstDash val="solid"/>
+                </a:ln>
+                <a:solidFill>
+                  <a:schemeClr val="accent3">
+                    <a:lumMod val="20000"/>
+                    <a:lumOff val="80000"/>
+                  </a:schemeClr>
+                </a:solidFill>
+                <a:effectLst>
+                  <a:outerShdw blurRad="12700" dist="38100" dir="2700000" algn="tl" rotWithShape="0">
+                    <a:schemeClr val="bg1">
+                      <a:lumMod val="50000"/>
+                    </a:schemeClr>
+                  </a:outerShdw>
+                </a:effectLst>
+                <a:latin typeface="Goudy Stout" panose="0202090407030B020401" pitchFamily="18" charset="0"/>
+              </a:rPr>
+              <a:t>012</a:t>
+            </a:r>
+          </a:p>
+        </p:txBody>
+      </p:sp>
+      <p:pic>
+        <p:nvPicPr>
+          <p:cNvPr id="8" name="Picture 7">
+            <a:extLst>
+              <a:ext uri="{FF2B5EF4-FFF2-40B4-BE49-F238E27FC236}">
+                <a16:creationId xmlns:a16="http://schemas.microsoft.com/office/drawing/2014/main" id="{67C19FA0-1CC5-7B57-FBE4-615C3C9D514B}"/>
+              </a:ext>
+            </a:extLst>
+          </p:cNvPr>
+          <p:cNvPicPr>
+            <a:picLocks noChangeAspect="1"/>
+          </p:cNvPicPr>
+          <p:nvPr/>
+        </p:nvPicPr>
+        <p:blipFill>
+          <a:blip r:embed="rId2"/>
+          <a:stretch>
+            <a:fillRect/>
+          </a:stretch>
+        </p:blipFill>
+        <p:spPr>
+          <a:xfrm>
+            <a:off x="23412" y="30114"/>
+            <a:ext cx="1386414" cy="1380564"/>
+          </a:xfrm>
+          <a:prstGeom prst="rect">
+            <a:avLst/>
+          </a:prstGeom>
+          <a:ln>
+            <a:noFill/>
+          </a:ln>
+          <a:effectLst>
+            <a:softEdge rad="112500"/>
+          </a:effectLst>
+        </p:spPr>
+      </p:pic>
+      <p:sp>
+        <p:nvSpPr>
+          <p:cNvPr id="12" name="TextBox 11">
+            <a:extLst>
+              <a:ext uri="{FF2B5EF4-FFF2-40B4-BE49-F238E27FC236}">
+                <a16:creationId xmlns:a16="http://schemas.microsoft.com/office/drawing/2014/main" id="{963F9FED-FF10-1846-90DA-82325091A10B}"/>
+              </a:ext>
+            </a:extLst>
+          </p:cNvPr>
+          <p:cNvSpPr txBox="1"/>
+          <p:nvPr/>
+        </p:nvSpPr>
+        <p:spPr>
+          <a:xfrm>
+            <a:off x="23412" y="6458554"/>
+            <a:ext cx="7163844" cy="369332"/>
+          </a:xfrm>
+          <a:prstGeom prst="rect">
+            <a:avLst/>
+          </a:prstGeom>
+          <a:noFill/>
+        </p:spPr>
+        <p:txBody>
+          <a:bodyPr wrap="square">
+            <a:spAutoFit/>
+          </a:bodyPr>
+          <a:lstStyle/>
+          <a:p>
+            <a:r>
+              <a:rPr lang="en-US" b="1" dirty="0"/>
+              <a:t>Repository: </a:t>
+            </a:r>
+            <a:r>
+              <a:rPr lang="en-US" b="1" dirty="0">
+                <a:hlinkClick r:id="rId3"/>
+              </a:rPr>
+              <a:t>https://github.com/yasenstar/PowerBI_Tutorial</a:t>
+            </a:r>
+            <a:endParaRPr lang="en-US" b="1" dirty="0"/>
+          </a:p>
+        </p:txBody>
+      </p:sp>
+      <p:pic>
+        <p:nvPicPr>
+          <p:cNvPr id="13" name="Picture 12">
+            <a:extLst>
+              <a:ext uri="{FF2B5EF4-FFF2-40B4-BE49-F238E27FC236}">
+                <a16:creationId xmlns:a16="http://schemas.microsoft.com/office/drawing/2014/main" id="{0E3F905E-11A8-3B88-89A1-7DD5B85A05D0}"/>
+              </a:ext>
+            </a:extLst>
+          </p:cNvPr>
+          <p:cNvPicPr>
+            <a:picLocks noChangeAspect="1"/>
+          </p:cNvPicPr>
+          <p:nvPr/>
+        </p:nvPicPr>
+        <p:blipFill>
+          <a:blip r:embed="rId4"/>
+          <a:stretch>
+            <a:fillRect/>
+          </a:stretch>
+        </p:blipFill>
+        <p:spPr>
+          <a:xfrm>
+            <a:off x="97030" y="1487212"/>
+            <a:ext cx="1850713" cy="2315544"/>
+          </a:xfrm>
+          <a:prstGeom prst="rect">
+            <a:avLst/>
+          </a:prstGeom>
+          <a:ln>
+            <a:noFill/>
+          </a:ln>
+          <a:effectLst>
+            <a:outerShdw blurRad="190500" algn="tl" rotWithShape="0">
+              <a:srgbClr val="000000">
+                <a:alpha val="70000"/>
+              </a:srgbClr>
+            </a:outerShdw>
+          </a:effectLst>
+        </p:spPr>
+      </p:pic>
+      <p:pic>
+        <p:nvPicPr>
+          <p:cNvPr id="10" name="Picture 9">
+            <a:extLst>
+              <a:ext uri="{FF2B5EF4-FFF2-40B4-BE49-F238E27FC236}">
+                <a16:creationId xmlns:a16="http://schemas.microsoft.com/office/drawing/2014/main" id="{4B52B2F5-CAAC-7F24-F66E-150A65E03F8E}"/>
+              </a:ext>
+            </a:extLst>
+          </p:cNvPr>
+          <p:cNvPicPr>
+            <a:picLocks noChangeAspect="1"/>
+          </p:cNvPicPr>
+          <p:nvPr/>
+        </p:nvPicPr>
+        <p:blipFill>
+          <a:blip r:embed="rId5"/>
+          <a:stretch>
+            <a:fillRect/>
+          </a:stretch>
+        </p:blipFill>
+        <p:spPr>
+          <a:xfrm>
+            <a:off x="932138" y="1487212"/>
+            <a:ext cx="8796509" cy="4951086"/>
+          </a:xfrm>
+          <a:prstGeom prst="roundRect">
+            <a:avLst>
+              <a:gd name="adj" fmla="val 16667"/>
+            </a:avLst>
+          </a:prstGeom>
+          <a:ln>
+            <a:noFill/>
+          </a:ln>
+          <a:effectLst>
+            <a:outerShdw blurRad="152400" dist="12000" dir="900000" sy="98000" kx="110000" ky="200000" algn="tl" rotWithShape="0">
+              <a:srgbClr val="000000">
+                <a:alpha val="30000"/>
+              </a:srgbClr>
+            </a:outerShdw>
+          </a:effectLst>
+          <a:scene3d>
+            <a:camera prst="perspectiveRelaxed">
+              <a:rot lat="19800000" lon="1200000" rev="20820000"/>
+            </a:camera>
+            <a:lightRig rig="threePt" dir="t"/>
+          </a:scene3d>
+          <a:sp3d contourW="6350" prstMaterial="matte">
+            <a:bevelT w="101600" h="101600"/>
+            <a:contourClr>
+              <a:srgbClr val="969696"/>
+            </a:contourClr>
+          </a:sp3d>
+        </p:spPr>
+      </p:pic>
+      <p:pic>
+        <p:nvPicPr>
+          <p:cNvPr id="6" name="Picture 5">
+            <a:extLst>
+              <a:ext uri="{FF2B5EF4-FFF2-40B4-BE49-F238E27FC236}">
+                <a16:creationId xmlns:a16="http://schemas.microsoft.com/office/drawing/2014/main" id="{E6C8048F-D94B-3BED-81DA-22D85FADE011}"/>
+              </a:ext>
+            </a:extLst>
+          </p:cNvPr>
+          <p:cNvPicPr>
+            <a:picLocks noChangeAspect="1"/>
+          </p:cNvPicPr>
+          <p:nvPr/>
+        </p:nvPicPr>
+        <p:blipFill>
+          <a:blip r:embed="rId6"/>
+          <a:stretch>
+            <a:fillRect/>
+          </a:stretch>
+        </p:blipFill>
+        <p:spPr>
+          <a:xfrm>
+            <a:off x="6593950" y="4064515"/>
+            <a:ext cx="2177816" cy="2177816"/>
+          </a:xfrm>
+          <a:prstGeom prst="roundRect">
+            <a:avLst>
+              <a:gd name="adj" fmla="val 16667"/>
+            </a:avLst>
+          </a:prstGeom>
+          <a:ln>
+            <a:noFill/>
+          </a:ln>
+          <a:effectLst>
+            <a:outerShdw blurRad="76200" dist="38100" dir="7800000" algn="tl" rotWithShape="0">
+              <a:srgbClr val="000000">
+                <a:alpha val="40000"/>
+              </a:srgbClr>
+            </a:outerShdw>
+          </a:effectLst>
+          <a:scene3d>
+            <a:camera prst="orthographicFront"/>
+            <a:lightRig rig="contrasting" dir="t">
+              <a:rot lat="0" lon="0" rev="4200000"/>
+            </a:lightRig>
+          </a:scene3d>
+          <a:sp3d prstMaterial="plastic">
+            <a:bevelT w="381000" h="114300" prst="relaxedInset"/>
+            <a:contourClr>
+              <a:srgbClr val="969696"/>
+            </a:contourClr>
+          </a:sp3d>
+        </p:spPr>
+      </p:pic>
+    </p:spTree>
+    <p:extLst>
+      <p:ext uri="{BB962C8B-B14F-4D97-AF65-F5344CB8AC3E}">
+        <p14:creationId xmlns:p14="http://schemas.microsoft.com/office/powerpoint/2010/main" val="2832240652"/>
+      </p:ext>
+    </p:extLst>
+  </p:cSld>
+  <p:clrMapOvr>
+    <a:masterClrMapping/>
+  </p:clrMapOvr>
+</p:sld>
+</file>
+
+<file path=ppt/slides/slide17.xml><?xml version="1.0" encoding="utf-8"?>
+<p:sld xmlns:a="http://schemas.openxmlformats.org/drawingml/2006/main" xmlns:r="http://schemas.openxmlformats.org/officeDocument/2006/relationships" xmlns:p="http://schemas.openxmlformats.org/presentationml/2006/main">
+  <p:cSld>
+    <p:spTree>
+      <p:nvGrpSpPr>
+        <p:cNvPr id="1" name="">
+          <a:extLst>
+            <a:ext uri="{FF2B5EF4-FFF2-40B4-BE49-F238E27FC236}">
+              <a16:creationId xmlns:a16="http://schemas.microsoft.com/office/drawing/2014/main" id="{C1B11C00-7B80-9832-409B-0F74DECD1510}"/>
+            </a:ext>
+          </a:extLst>
+        </p:cNvPr>
+        <p:cNvGrpSpPr/>
+        <p:nvPr/>
+      </p:nvGrpSpPr>
+      <p:grpSpPr>
+        <a:xfrm>
+          <a:off x="0" y="0"/>
+          <a:ext cx="0" cy="0"/>
+          <a:chOff x="0" y="0"/>
+          <a:chExt cx="0" cy="0"/>
+        </a:xfrm>
+      </p:grpSpPr>
+      <p:sp>
+        <p:nvSpPr>
+          <p:cNvPr id="2" name="Title 1">
+            <a:extLst>
+              <a:ext uri="{FF2B5EF4-FFF2-40B4-BE49-F238E27FC236}">
+                <a16:creationId xmlns:a16="http://schemas.microsoft.com/office/drawing/2014/main" id="{99509A1D-9059-C5F3-5836-F501EB6E2653}"/>
+              </a:ext>
+            </a:extLst>
+          </p:cNvPr>
+          <p:cNvSpPr>
+            <a:spLocks noGrp="1"/>
+          </p:cNvSpPr>
+          <p:nvPr>
+            <p:ph type="title"/>
+          </p:nvPr>
+        </p:nvSpPr>
+        <p:spPr>
+          <a:xfrm>
+            <a:off x="1409826" y="131063"/>
+            <a:ext cx="6772881" cy="793260"/>
+          </a:xfrm>
+        </p:spPr>
+        <p:txBody>
+          <a:bodyPr anchor="ctr"/>
+          <a:lstStyle/>
+          <a:p>
+            <a:pPr algn="l"/>
+            <a:r>
+              <a:rPr lang="en-US" dirty="0"/>
+              <a:t>Power BI Tutorial</a:t>
+            </a:r>
+          </a:p>
+        </p:txBody>
+      </p:sp>
+      <p:sp>
+        <p:nvSpPr>
+          <p:cNvPr id="4" name="Text Placeholder 3">
+            <a:extLst>
+              <a:ext uri="{FF2B5EF4-FFF2-40B4-BE49-F238E27FC236}">
+                <a16:creationId xmlns:a16="http://schemas.microsoft.com/office/drawing/2014/main" id="{B3291069-3306-D151-3413-2824BC1FD119}"/>
+              </a:ext>
+            </a:extLst>
+          </p:cNvPr>
+          <p:cNvSpPr>
+            <a:spLocks noGrp="1"/>
+          </p:cNvSpPr>
+          <p:nvPr>
+            <p:ph type="body" sz="quarter" idx="13"/>
+          </p:nvPr>
+        </p:nvSpPr>
+        <p:spPr>
+          <a:xfrm>
+            <a:off x="2079148" y="915490"/>
+            <a:ext cx="9314437" cy="1097280"/>
+          </a:xfrm>
+        </p:spPr>
+        <p:txBody>
+          <a:bodyPr anchor="ctr">
+            <a:normAutofit lnSpcReduction="10000"/>
+          </a:bodyPr>
+          <a:lstStyle/>
+          <a:p>
+            <a:pPr algn="l"/>
+            <a:r>
+              <a:rPr lang="en-US" sz="3600" b="1" dirty="0"/>
+              <a:t>Part 2. Time to a Data Party</a:t>
+            </a:r>
+          </a:p>
+          <a:p>
+            <a:pPr algn="l"/>
+            <a:r>
+              <a:rPr lang="en-US" altLang="zh-CN" sz="3600" dirty="0"/>
+              <a:t>Chapter 05</a:t>
+            </a:r>
+            <a:r>
+              <a:rPr lang="en-US" altLang="zh-CN" sz="3600"/>
+              <a:t>: Preparing Data Sources</a:t>
+            </a:r>
+            <a:endParaRPr lang="en-US" sz="3600" dirty="0"/>
+          </a:p>
+        </p:txBody>
+      </p:sp>
+      <p:sp>
+        <p:nvSpPr>
+          <p:cNvPr id="5" name="TextBox 4">
+            <a:extLst>
+              <a:ext uri="{FF2B5EF4-FFF2-40B4-BE49-F238E27FC236}">
+                <a16:creationId xmlns:a16="http://schemas.microsoft.com/office/drawing/2014/main" id="{528FA8A2-11A6-A569-2BBD-8E502FA214AB}"/>
+              </a:ext>
+            </a:extLst>
+          </p:cNvPr>
+          <p:cNvSpPr txBox="1"/>
+          <p:nvPr/>
+        </p:nvSpPr>
+        <p:spPr>
+          <a:xfrm>
+            <a:off x="9487400" y="11040"/>
+            <a:ext cx="2704600" cy="1200329"/>
+          </a:xfrm>
+          <a:prstGeom prst="rect">
+            <a:avLst/>
+          </a:prstGeom>
+          <a:noFill/>
+        </p:spPr>
+        <p:txBody>
+          <a:bodyPr wrap="square" rtlCol="0" anchor="ctr">
+            <a:spAutoFit/>
+          </a:bodyPr>
+          <a:lstStyle/>
+          <a:p>
+            <a:pPr algn="ctr"/>
+            <a:r>
+              <a:rPr lang="en-US" sz="7200" b="1" dirty="0">
+                <a:ln w="9525">
+                  <a:solidFill>
+                    <a:schemeClr val="bg1"/>
+                  </a:solidFill>
+                  <a:prstDash val="solid"/>
+                </a:ln>
+                <a:solidFill>
+                  <a:schemeClr val="accent3">
+                    <a:lumMod val="20000"/>
+                    <a:lumOff val="80000"/>
+                  </a:schemeClr>
+                </a:solidFill>
+                <a:effectLst>
+                  <a:outerShdw blurRad="12700" dist="38100" dir="2700000" algn="tl" rotWithShape="0">
+                    <a:schemeClr val="bg1">
+                      <a:lumMod val="50000"/>
+                    </a:schemeClr>
+                  </a:outerShdw>
+                </a:effectLst>
+                <a:latin typeface="Goudy Stout" panose="0202090407030B020401" pitchFamily="18" charset="0"/>
+              </a:rPr>
+              <a:t>013</a:t>
+            </a:r>
+          </a:p>
+        </p:txBody>
+      </p:sp>
+      <p:pic>
+        <p:nvPicPr>
+          <p:cNvPr id="8" name="Picture 7">
+            <a:extLst>
+              <a:ext uri="{FF2B5EF4-FFF2-40B4-BE49-F238E27FC236}">
+                <a16:creationId xmlns:a16="http://schemas.microsoft.com/office/drawing/2014/main" id="{C167050B-C6BB-D8AA-4BC5-8A0D72A3288C}"/>
+              </a:ext>
+            </a:extLst>
+          </p:cNvPr>
+          <p:cNvPicPr>
+            <a:picLocks noChangeAspect="1"/>
+          </p:cNvPicPr>
+          <p:nvPr/>
+        </p:nvPicPr>
+        <p:blipFill>
+          <a:blip r:embed="rId2"/>
+          <a:stretch>
+            <a:fillRect/>
+          </a:stretch>
+        </p:blipFill>
+        <p:spPr>
+          <a:xfrm>
+            <a:off x="23412" y="30114"/>
+            <a:ext cx="1386414" cy="1380564"/>
+          </a:xfrm>
+          <a:prstGeom prst="rect">
+            <a:avLst/>
+          </a:prstGeom>
+          <a:ln>
+            <a:noFill/>
+          </a:ln>
+          <a:effectLst>
+            <a:softEdge rad="112500"/>
+          </a:effectLst>
+        </p:spPr>
+      </p:pic>
+      <p:sp>
+        <p:nvSpPr>
+          <p:cNvPr id="12" name="TextBox 11">
+            <a:extLst>
+              <a:ext uri="{FF2B5EF4-FFF2-40B4-BE49-F238E27FC236}">
+                <a16:creationId xmlns:a16="http://schemas.microsoft.com/office/drawing/2014/main" id="{77E5A924-7FF8-942C-C7F5-3039AFF2E800}"/>
+              </a:ext>
+            </a:extLst>
+          </p:cNvPr>
+          <p:cNvSpPr txBox="1"/>
+          <p:nvPr/>
+        </p:nvSpPr>
+        <p:spPr>
+          <a:xfrm>
+            <a:off x="23412" y="6458554"/>
+            <a:ext cx="7163844" cy="369332"/>
+          </a:xfrm>
+          <a:prstGeom prst="rect">
+            <a:avLst/>
+          </a:prstGeom>
+          <a:noFill/>
+        </p:spPr>
+        <p:txBody>
+          <a:bodyPr wrap="square">
+            <a:spAutoFit/>
+          </a:bodyPr>
+          <a:lstStyle/>
+          <a:p>
+            <a:r>
+              <a:rPr lang="en-US" b="1" dirty="0"/>
+              <a:t>Repository: </a:t>
+            </a:r>
+            <a:r>
+              <a:rPr lang="en-US" b="1" dirty="0">
+                <a:hlinkClick r:id="rId3"/>
+              </a:rPr>
+              <a:t>https://github.com/yasenstar/PowerBI_Tutorial</a:t>
+            </a:r>
+            <a:endParaRPr lang="en-US" b="1" dirty="0"/>
+          </a:p>
+        </p:txBody>
+      </p:sp>
+      <p:pic>
+        <p:nvPicPr>
+          <p:cNvPr id="13" name="Picture 12">
+            <a:extLst>
+              <a:ext uri="{FF2B5EF4-FFF2-40B4-BE49-F238E27FC236}">
+                <a16:creationId xmlns:a16="http://schemas.microsoft.com/office/drawing/2014/main" id="{62A3525D-DFE6-1FBD-68FC-E739E0224150}"/>
+              </a:ext>
+            </a:extLst>
+          </p:cNvPr>
+          <p:cNvPicPr>
+            <a:picLocks noChangeAspect="1"/>
+          </p:cNvPicPr>
+          <p:nvPr/>
+        </p:nvPicPr>
+        <p:blipFill>
+          <a:blip r:embed="rId4"/>
+          <a:stretch>
+            <a:fillRect/>
+          </a:stretch>
+        </p:blipFill>
+        <p:spPr>
+          <a:xfrm>
+            <a:off x="97030" y="1487212"/>
+            <a:ext cx="1850713" cy="2315544"/>
+          </a:xfrm>
+          <a:prstGeom prst="rect">
+            <a:avLst/>
+          </a:prstGeom>
+          <a:ln>
+            <a:noFill/>
+          </a:ln>
+          <a:effectLst>
+            <a:outerShdw blurRad="190500" algn="tl" rotWithShape="0">
+              <a:srgbClr val="000000">
+                <a:alpha val="70000"/>
+              </a:srgbClr>
+            </a:outerShdw>
+          </a:effectLst>
+        </p:spPr>
+      </p:pic>
+    </p:spTree>
+    <p:extLst>
+      <p:ext uri="{BB962C8B-B14F-4D97-AF65-F5344CB8AC3E}">
+        <p14:creationId xmlns:p14="http://schemas.microsoft.com/office/powerpoint/2010/main" val="3921264301"/>
+      </p:ext>
+    </p:extLst>
+  </p:cSld>
+  <p:clrMapOvr>
+    <a:masterClrMapping/>
+  </p:clrMapOvr>
+</p:sld>
+</file>
+
+<file path=ppt/slides/slide18.xml><?xml version="1.0" encoding="utf-8"?>
 <p:sld xmlns:a="http://schemas.openxmlformats.org/drawingml/2006/main" xmlns:r="http://schemas.openxmlformats.org/officeDocument/2006/relationships" xmlns:p="http://schemas.openxmlformats.org/presentationml/2006/main">
   <p:cSld>
     <p:spTree>
@@ -18236,35 +24683,6 @@
 </file>
 
 <file path=customXml/item1.xml><?xml version="1.0" encoding="utf-8"?>
-<?mso-contentType ?>
-<FormTemplates xmlns="http://schemas.microsoft.com/sharepoint/v3/contenttype/forms">
-  <Display>DocumentLibraryForm</Display>
-  <Edit>DocumentLibraryForm</Edit>
-  <New>DocumentLibraryForm</New>
-</FormTemplates>
-</file>
-
-<file path=customXml/item2.xml><?xml version="1.0" encoding="utf-8"?>
-<p:properties xmlns:p="http://schemas.microsoft.com/office/2006/metadata/properties" xmlns:xsi="http://www.w3.org/2001/XMLSchema-instance" xmlns:pc="http://schemas.microsoft.com/office/infopath/2007/PartnerControls">
-  <documentManagement>
-    <_ip_UnifiedCompliancePolicyUIAction xmlns="http://schemas.microsoft.com/sharepoint/v3" xsi:nil="true"/>
-    <Image xmlns="71af3243-3dd4-4a8d-8c0d-dd76da1f02a5">
-      <Url xsi:nil="true"/>
-      <Description xsi:nil="true"/>
-    </Image>
-    <Status xmlns="71af3243-3dd4-4a8d-8c0d-dd76da1f02a5">Not started</Status>
-    <Background xmlns="71af3243-3dd4-4a8d-8c0d-dd76da1f02a5">false</Background>
-    <_ip_UnifiedCompliancePolicyProperties xmlns="http://schemas.microsoft.com/sharepoint/v3" xsi:nil="true"/>
-    <ImageTagsTaxHTField xmlns="71af3243-3dd4-4a8d-8c0d-dd76da1f02a5">
-      <Terms xmlns="http://schemas.microsoft.com/office/infopath/2007/PartnerControls"/>
-    </ImageTagsTaxHTField>
-    <TaxCatchAll xmlns="230e9df3-be65-4c73-a93b-d1236ebd677e" xsi:nil="true"/>
-    <MediaServiceKeyPoints xmlns="71af3243-3dd4-4a8d-8c0d-dd76da1f02a5" xsi:nil="true"/>
-  </documentManagement>
-</p:properties>
-</file>
-
-<file path=customXml/item3.xml><?xml version="1.0" encoding="utf-8"?>
 <ct:contentTypeSchema xmlns:ct="http://schemas.microsoft.com/office/2006/metadata/contentType" xmlns:ma="http://schemas.microsoft.com/office/2006/metadata/properties/metaAttributes" ct:_="" ma:_="" ma:contentTypeName="Document" ma:contentTypeID="0x01010079F111ED35F8CC479449609E8A0923A6" ma:contentTypeVersion="28" ma:contentTypeDescription="Create a new document." ma:contentTypeScope="" ma:versionID="60f5a4f2d2b0abadcf532d48ebf9cb71">
   <xsd:schema xmlns:xsd="http://www.w3.org/2001/XMLSchema" xmlns:xs="http://www.w3.org/2001/XMLSchema" xmlns:p="http://schemas.microsoft.com/office/2006/metadata/properties" xmlns:ns1="http://schemas.microsoft.com/sharepoint/v3" xmlns:ns2="71af3243-3dd4-4a8d-8c0d-dd76da1f02a5" xmlns:ns3="16c05727-aa75-4e4a-9b5f-8a80a1165891" xmlns:ns4="230e9df3-be65-4c73-a93b-d1236ebd677e" targetNamespace="http://schemas.microsoft.com/office/2006/metadata/properties" ma:root="true" ma:fieldsID="7dd78129e6a1811f84807ad11c651531" ns1:_="" ns2:_="" ns3:_="" ns4:_="">
     <xsd:import namespace="http://schemas.microsoft.com/sharepoint/v3"/>
@@ -18576,27 +24994,36 @@
 </ct:contentTypeSchema>
 </file>
 
-<file path=customXml/itemProps1.xml><?xml version="1.0" encoding="utf-8"?>
-<ds:datastoreItem xmlns:ds="http://schemas.openxmlformats.org/officeDocument/2006/customXml" ds:itemID="{FABD9919-8F5A-4B99-83E1-E90FE1DCF2E1}">
-  <ds:schemaRefs>
-    <ds:schemaRef ds:uri="http://schemas.microsoft.com/sharepoint/v3/contenttype/forms"/>
-  </ds:schemaRefs>
-</ds:datastoreItem>
+<file path=customXml/item2.xml><?xml version="1.0" encoding="utf-8"?>
+<p:properties xmlns:p="http://schemas.microsoft.com/office/2006/metadata/properties" xmlns:xsi="http://www.w3.org/2001/XMLSchema-instance" xmlns:pc="http://schemas.microsoft.com/office/infopath/2007/PartnerControls">
+  <documentManagement>
+    <_ip_UnifiedCompliancePolicyUIAction xmlns="http://schemas.microsoft.com/sharepoint/v3" xsi:nil="true"/>
+    <Image xmlns="71af3243-3dd4-4a8d-8c0d-dd76da1f02a5">
+      <Url xsi:nil="true"/>
+      <Description xsi:nil="true"/>
+    </Image>
+    <Status xmlns="71af3243-3dd4-4a8d-8c0d-dd76da1f02a5">Not started</Status>
+    <Background xmlns="71af3243-3dd4-4a8d-8c0d-dd76da1f02a5">false</Background>
+    <_ip_UnifiedCompliancePolicyProperties xmlns="http://schemas.microsoft.com/sharepoint/v3" xsi:nil="true"/>
+    <ImageTagsTaxHTField xmlns="71af3243-3dd4-4a8d-8c0d-dd76da1f02a5">
+      <Terms xmlns="http://schemas.microsoft.com/office/infopath/2007/PartnerControls"/>
+    </ImageTagsTaxHTField>
+    <TaxCatchAll xmlns="230e9df3-be65-4c73-a93b-d1236ebd677e" xsi:nil="true"/>
+    <MediaServiceKeyPoints xmlns="71af3243-3dd4-4a8d-8c0d-dd76da1f02a5" xsi:nil="true"/>
+  </documentManagement>
+</p:properties>
 </file>
 
-<file path=customXml/itemProps2.xml><?xml version="1.0" encoding="utf-8"?>
-<ds:datastoreItem xmlns:ds="http://schemas.openxmlformats.org/officeDocument/2006/customXml" ds:itemID="{80E87F72-70BF-43BC-A0D4-53665DC12672}">
-  <ds:schemaRefs>
-    <ds:schemaRef ds:uri="http://schemas.microsoft.com/office/2006/metadata/properties"/>
-    <ds:schemaRef ds:uri="http://schemas.microsoft.com/office/infopath/2007/PartnerControls"/>
-    <ds:schemaRef ds:uri="http://schemas.microsoft.com/sharepoint/v3"/>
-    <ds:schemaRef ds:uri="71af3243-3dd4-4a8d-8c0d-dd76da1f02a5"/>
-    <ds:schemaRef ds:uri="230e9df3-be65-4c73-a93b-d1236ebd677e"/>
-  </ds:schemaRefs>
-</ds:datastoreItem>
+<file path=customXml/item3.xml><?xml version="1.0" encoding="utf-8"?>
+<?mso-contentType ?>
+<FormTemplates xmlns="http://schemas.microsoft.com/sharepoint/v3/contenttype/forms">
+  <Display>DocumentLibraryForm</Display>
+  <Edit>DocumentLibraryForm</Edit>
+  <New>DocumentLibraryForm</New>
+</FormTemplates>
 </file>
 
-<file path=customXml/itemProps3.xml><?xml version="1.0" encoding="utf-8"?>
+<file path=customXml/itemProps1.xml><?xml version="1.0" encoding="utf-8"?>
 <ds:datastoreItem xmlns:ds="http://schemas.openxmlformats.org/officeDocument/2006/customXml" ds:itemID="{52D646E0-DCC8-4209-B539-AA58186B682C}">
   <ds:schemaRefs>
     <ds:schemaRef ds:uri="http://schemas.microsoft.com/office/2006/metadata/contentType"/>
@@ -18617,6 +25044,26 @@
 </ds:datastoreItem>
 </file>
 
+<file path=customXml/itemProps2.xml><?xml version="1.0" encoding="utf-8"?>
+<ds:datastoreItem xmlns:ds="http://schemas.openxmlformats.org/officeDocument/2006/customXml" ds:itemID="{80E87F72-70BF-43BC-A0D4-53665DC12672}">
+  <ds:schemaRefs>
+    <ds:schemaRef ds:uri="http://schemas.microsoft.com/office/2006/metadata/properties"/>
+    <ds:schemaRef ds:uri="http://schemas.microsoft.com/office/infopath/2007/PartnerControls"/>
+    <ds:schemaRef ds:uri="http://schemas.microsoft.com/sharepoint/v3"/>
+    <ds:schemaRef ds:uri="71af3243-3dd4-4a8d-8c0d-dd76da1f02a5"/>
+    <ds:schemaRef ds:uri="230e9df3-be65-4c73-a93b-d1236ebd677e"/>
+  </ds:schemaRefs>
+</ds:datastoreItem>
+</file>
+
+<file path=customXml/itemProps3.xml><?xml version="1.0" encoding="utf-8"?>
+<ds:datastoreItem xmlns:ds="http://schemas.openxmlformats.org/officeDocument/2006/customXml" ds:itemID="{FABD9919-8F5A-4B99-83E1-E90FE1DCF2E1}">
+  <ds:schemaRefs>
+    <ds:schemaRef ds:uri="http://schemas.microsoft.com/sharepoint/v3/contenttype/forms"/>
+  </ds:schemaRefs>
+</ds:datastoreItem>
+</file>
+
 <file path=docMetadata/LabelInfo.xml><?xml version="1.0" encoding="utf-8"?>
 <clbl:labelList xmlns:clbl="http://schemas.microsoft.com/office/2020/mipLabelMetadata"/>
 </file>
--- a/PowerBI_Tutorial.pptx
+++ b/PowerBI_Tutorial.pptx
@@ -21018,11 +21018,7 @@
             <a:pPr algn="l"/>
             <a:r>
               <a:rPr lang="en-US" altLang="zh-CN" sz="3600" dirty="0"/>
-              <a:t>Chapter 05</a:t>
-            </a:r>
-            <a:r>
-              <a:rPr lang="en-US" altLang="zh-CN" sz="3600"/>
-              <a:t>: Preparing Data Sources</a:t>
+              <a:t>Chapter 05: Preparing Data Sources</a:t>
             </a:r>
             <a:endParaRPr lang="en-US" sz="3600" dirty="0"/>
           </a:p>

--- a/PowerBI_Tutorial.pptx
+++ b/PowerBI_Tutorial.pptx
@@ -5,10 +5,10 @@
     <p:sldMasterId id="2147483696" r:id="rId4"/>
   </p:sldMasterIdLst>
   <p:notesMasterIdLst>
-    <p:notesMasterId r:id="rId23"/>
+    <p:notesMasterId r:id="rId24"/>
   </p:notesMasterIdLst>
   <p:handoutMasterIdLst>
-    <p:handoutMasterId r:id="rId24"/>
+    <p:handoutMasterId r:id="rId25"/>
   </p:handoutMasterIdLst>
   <p:sldIdLst>
     <p:sldId id="334" r:id="rId5"/>
@@ -29,6 +29,7 @@
     <p:sldId id="350" r:id="rId20"/>
     <p:sldId id="351" r:id="rId21"/>
     <p:sldId id="337" r:id="rId22"/>
+    <p:sldId id="352" r:id="rId23"/>
   </p:sldIdLst>
   <p:sldSz cx="12192000" cy="6858000"/>
   <p:notesSz cx="6858000" cy="9144000"/>
@@ -169,6 +170,7 @@
         <p14:section name="add-on" id="{0C1F4F65-72A3-42DD-AC1F-D9167B17FD18}">
           <p14:sldIdLst>
             <p14:sldId id="337"/>
+            <p14:sldId id="352"/>
           </p14:sldIdLst>
         </p14:section>
       </p14:sectionLst>
@@ -21344,6 +21346,157 @@
 </p:sld>
 </file>
 
+<file path=ppt/slides/slide19.xml><?xml version="1.0" encoding="utf-8"?>
+<p:sld xmlns:a="http://schemas.openxmlformats.org/drawingml/2006/main" xmlns:r="http://schemas.openxmlformats.org/officeDocument/2006/relationships" xmlns:p="http://schemas.openxmlformats.org/presentationml/2006/main">
+  <p:cSld>
+    <p:spTree>
+      <p:nvGrpSpPr>
+        <p:cNvPr id="1" name="">
+          <a:extLst>
+            <a:ext uri="{FF2B5EF4-FFF2-40B4-BE49-F238E27FC236}">
+              <a16:creationId xmlns:a16="http://schemas.microsoft.com/office/drawing/2014/main" id="{C09D01E6-BCB2-F5B8-E00C-021D6F852432}"/>
+            </a:ext>
+          </a:extLst>
+        </p:cNvPr>
+        <p:cNvGrpSpPr/>
+        <p:nvPr/>
+      </p:nvGrpSpPr>
+      <p:grpSpPr>
+        <a:xfrm>
+          <a:off x="0" y="0"/>
+          <a:ext cx="0" cy="0"/>
+          <a:chOff x="0" y="0"/>
+          <a:chExt cx="0" cy="0"/>
+        </a:xfrm>
+      </p:grpSpPr>
+      <p:pic>
+        <p:nvPicPr>
+          <p:cNvPr id="4" name="Picture 3">
+            <a:extLst>
+              <a:ext uri="{FF2B5EF4-FFF2-40B4-BE49-F238E27FC236}">
+                <a16:creationId xmlns:a16="http://schemas.microsoft.com/office/drawing/2014/main" id="{F54E6BC2-A75D-1B1E-8780-2839D10444B3}"/>
+              </a:ext>
+            </a:extLst>
+          </p:cNvPr>
+          <p:cNvPicPr>
+            <a:picLocks noChangeAspect="1"/>
+          </p:cNvPicPr>
+          <p:nvPr/>
+        </p:nvPicPr>
+        <p:blipFill>
+          <a:blip r:embed="rId2"/>
+          <a:stretch>
+            <a:fillRect/>
+          </a:stretch>
+        </p:blipFill>
+        <p:spPr>
+          <a:xfrm>
+            <a:off x="909053" y="575864"/>
+            <a:ext cx="6668431" cy="5706271"/>
+          </a:xfrm>
+          <a:prstGeom prst="roundRect">
+            <a:avLst>
+              <a:gd name="adj" fmla="val 8594"/>
+            </a:avLst>
+          </a:prstGeom>
+          <a:solidFill>
+            <a:srgbClr val="FFFFFF">
+              <a:shade val="85000"/>
+            </a:srgbClr>
+          </a:solidFill>
+          <a:ln>
+            <a:noFill/>
+          </a:ln>
+          <a:effectLst>
+            <a:reflection blurRad="12700" stA="38000" endPos="28000" dist="5000" dir="5400000" sy="-100000" algn="bl" rotWithShape="0"/>
+          </a:effectLst>
+        </p:spPr>
+      </p:pic>
+      <p:pic>
+        <p:nvPicPr>
+          <p:cNvPr id="9" name="Picture 8">
+            <a:extLst>
+              <a:ext uri="{FF2B5EF4-FFF2-40B4-BE49-F238E27FC236}">
+                <a16:creationId xmlns:a16="http://schemas.microsoft.com/office/drawing/2014/main" id="{9BD8E0F6-53A4-1572-B3BB-B93EA23BC7E9}"/>
+              </a:ext>
+            </a:extLst>
+          </p:cNvPr>
+          <p:cNvPicPr>
+            <a:picLocks noChangeAspect="1"/>
+          </p:cNvPicPr>
+          <p:nvPr/>
+        </p:nvPicPr>
+        <p:blipFill>
+          <a:blip r:embed="rId3"/>
+          <a:stretch>
+            <a:fillRect/>
+          </a:stretch>
+        </p:blipFill>
+        <p:spPr>
+          <a:xfrm>
+            <a:off x="6606172" y="3500232"/>
+            <a:ext cx="4676775" cy="2990850"/>
+          </a:xfrm>
+          <a:prstGeom prst="rect">
+            <a:avLst/>
+          </a:prstGeom>
+          <a:ln>
+            <a:noFill/>
+          </a:ln>
+          <a:effectLst>
+            <a:softEdge rad="112500"/>
+          </a:effectLst>
+        </p:spPr>
+      </p:pic>
+      <p:pic>
+        <p:nvPicPr>
+          <p:cNvPr id="7" name="Picture 6">
+            <a:extLst>
+              <a:ext uri="{FF2B5EF4-FFF2-40B4-BE49-F238E27FC236}">
+                <a16:creationId xmlns:a16="http://schemas.microsoft.com/office/drawing/2014/main" id="{1FBC51B1-D710-AD0C-DF62-4987CDA97DD9}"/>
+              </a:ext>
+            </a:extLst>
+          </p:cNvPr>
+          <p:cNvPicPr>
+            <a:picLocks noChangeAspect="1"/>
+          </p:cNvPicPr>
+          <p:nvPr/>
+        </p:nvPicPr>
+        <p:blipFill>
+          <a:blip r:embed="rId4"/>
+          <a:stretch>
+            <a:fillRect/>
+          </a:stretch>
+        </p:blipFill>
+        <p:spPr>
+          <a:xfrm>
+            <a:off x="6055176" y="2174178"/>
+            <a:ext cx="3334065" cy="3319997"/>
+          </a:xfrm>
+          <a:prstGeom prst="rect">
+            <a:avLst/>
+          </a:prstGeom>
+          <a:ln>
+            <a:noFill/>
+          </a:ln>
+          <a:effectLst>
+            <a:softEdge rad="112500"/>
+          </a:effectLst>
+        </p:spPr>
+      </p:pic>
+    </p:spTree>
+    <p:extLst>
+      <p:ext uri="{BB962C8B-B14F-4D97-AF65-F5344CB8AC3E}">
+        <p14:creationId xmlns:p14="http://schemas.microsoft.com/office/powerpoint/2010/main" val="4201739286"/>
+      </p:ext>
+    </p:extLst>
+  </p:cSld>
+  <p:clrMapOvr>
+    <a:masterClrMapping/>
+  </p:clrMapOvr>
+</p:sld>
+</file>
+
 <file path=ppt/slides/slide2.xml><?xml version="1.0" encoding="utf-8"?>
 <p:sld xmlns:a="http://schemas.openxmlformats.org/drawingml/2006/main" xmlns:r="http://schemas.openxmlformats.org/officeDocument/2006/relationships" xmlns:p="http://schemas.openxmlformats.org/presentationml/2006/main">
   <p:cSld>
